--- a/labs/lab04/presentation/simulation-modeling-lab04-presentation.pptx
+++ b/labs/lab04/presentation/simulation-modeling-lab04-presentation.pptx
@@ -2,27 +2,33 @@
 <file path=ppt/presentation.xml><?xml version="1.0" encoding="utf-8"?>
 <p:presentation xmlns:p="http://schemas.openxmlformats.org/presentationml/2006/main">
   <p:sldMasterIdLst>
-    <p:sldMasterId xmlns:r="http://schemas.openxmlformats.org/officeDocument/2006/relationships" id="2147483648" r:id="R4eea86e1494c4165"/>
+    <p:sldMasterId xmlns:r="http://schemas.openxmlformats.org/officeDocument/2006/relationships" id="2147483648" r:id="Rbb7b8947912a4d4f"/>
   </p:sldMasterIdLst>
   <p:notesMasterIdLst>
-    <p:notesMasterId xmlns:r="http://schemas.openxmlformats.org/officeDocument/2006/relationships" r:id="R7f1b08271ece4ebf"/>
+    <p:notesMasterId xmlns:r="http://schemas.openxmlformats.org/officeDocument/2006/relationships" r:id="R29cf7c8f5d6c4824"/>
   </p:notesMasterIdLst>
   <p:sldIdLst>
-    <p:sldId xmlns:r="http://schemas.openxmlformats.org/officeDocument/2006/relationships" id="256" r:id="R89aa1aa9d7aa4c89"/>
-    <p:sldId xmlns:r="http://schemas.openxmlformats.org/officeDocument/2006/relationships" id="257" r:id="Rc165af42ecda44da"/>
-    <p:sldId xmlns:r="http://schemas.openxmlformats.org/officeDocument/2006/relationships" id="258" r:id="R57b8dae1f978442e"/>
-    <p:sldId xmlns:r="http://schemas.openxmlformats.org/officeDocument/2006/relationships" id="259" r:id="Rb2510442dd894e15"/>
-    <p:sldId xmlns:r="http://schemas.openxmlformats.org/officeDocument/2006/relationships" id="260" r:id="R248f73c1761a4669"/>
-    <p:sldId xmlns:r="http://schemas.openxmlformats.org/officeDocument/2006/relationships" id="261" r:id="Rb4f904387c534d43"/>
-    <p:sldId xmlns:r="http://schemas.openxmlformats.org/officeDocument/2006/relationships" id="262" r:id="R056a28e1e0ed43e9"/>
-    <p:sldId xmlns:r="http://schemas.openxmlformats.org/officeDocument/2006/relationships" id="263" r:id="R0935111a117a487b"/>
-    <p:sldId xmlns:r="http://schemas.openxmlformats.org/officeDocument/2006/relationships" id="264" r:id="Rf5984c8fc82d4293"/>
-    <p:sldId xmlns:r="http://schemas.openxmlformats.org/officeDocument/2006/relationships" id="265" r:id="R21829cb751254d2e"/>
-    <p:sldId xmlns:r="http://schemas.openxmlformats.org/officeDocument/2006/relationships" id="266" r:id="Rd87aeb5180bc4691"/>
-    <p:sldId xmlns:r="http://schemas.openxmlformats.org/officeDocument/2006/relationships" id="267" r:id="R37c2260675364259"/>
-    <p:sldId xmlns:r="http://schemas.openxmlformats.org/officeDocument/2006/relationships" id="268" r:id="R8471b7eb2ceb482b"/>
-    <p:sldId xmlns:r="http://schemas.openxmlformats.org/officeDocument/2006/relationships" id="269" r:id="Re7ad23bbdf064357"/>
-    <p:sldId xmlns:r="http://schemas.openxmlformats.org/officeDocument/2006/relationships" id="270" r:id="Rf6d4ef7cc0f945c5"/>
+    <p:sldId xmlns:r="http://schemas.openxmlformats.org/officeDocument/2006/relationships" id="256" r:id="R5824d9e45f354161"/>
+    <p:sldId xmlns:r="http://schemas.openxmlformats.org/officeDocument/2006/relationships" id="257" r:id="R5931c426f7c14df6"/>
+    <p:sldId xmlns:r="http://schemas.openxmlformats.org/officeDocument/2006/relationships" id="258" r:id="R6d71f2dfba8d4104"/>
+    <p:sldId xmlns:r="http://schemas.openxmlformats.org/officeDocument/2006/relationships" id="259" r:id="Ra7d5c352cffb475c"/>
+    <p:sldId xmlns:r="http://schemas.openxmlformats.org/officeDocument/2006/relationships" id="260" r:id="R0b9e200e488e4a70"/>
+    <p:sldId xmlns:r="http://schemas.openxmlformats.org/officeDocument/2006/relationships" id="261" r:id="R8663b9d161be4d17"/>
+    <p:sldId xmlns:r="http://schemas.openxmlformats.org/officeDocument/2006/relationships" id="262" r:id="R4c3e34383d6e4c01"/>
+    <p:sldId xmlns:r="http://schemas.openxmlformats.org/officeDocument/2006/relationships" id="263" r:id="R2122eacda0894a9e"/>
+    <p:sldId xmlns:r="http://schemas.openxmlformats.org/officeDocument/2006/relationships" id="264" r:id="R71e2c90d73964f89"/>
+    <p:sldId xmlns:r="http://schemas.openxmlformats.org/officeDocument/2006/relationships" id="265" r:id="Ra24edf18fd0e4a63"/>
+    <p:sldId xmlns:r="http://schemas.openxmlformats.org/officeDocument/2006/relationships" id="266" r:id="Rbd7d00e748a34ddc"/>
+    <p:sldId xmlns:r="http://schemas.openxmlformats.org/officeDocument/2006/relationships" id="267" r:id="R50dd563b5bc747f3"/>
+    <p:sldId xmlns:r="http://schemas.openxmlformats.org/officeDocument/2006/relationships" id="268" r:id="R345ca598150b4030"/>
+    <p:sldId xmlns:r="http://schemas.openxmlformats.org/officeDocument/2006/relationships" id="269" r:id="Rce177a3f67554a40"/>
+    <p:sldId xmlns:r="http://schemas.openxmlformats.org/officeDocument/2006/relationships" id="270" r:id="R02848782f9d44acf"/>
+    <p:sldId xmlns:r="http://schemas.openxmlformats.org/officeDocument/2006/relationships" id="271" r:id="Rc959fb2cc710449b"/>
+    <p:sldId xmlns:r="http://schemas.openxmlformats.org/officeDocument/2006/relationships" id="272" r:id="R685407860113468e"/>
+    <p:sldId xmlns:r="http://schemas.openxmlformats.org/officeDocument/2006/relationships" id="273" r:id="Rfc96e7415c874015"/>
+    <p:sldId xmlns:r="http://schemas.openxmlformats.org/officeDocument/2006/relationships" id="274" r:id="R5145e9fa5ca04340"/>
+    <p:sldId xmlns:r="http://schemas.openxmlformats.org/officeDocument/2006/relationships" id="275" r:id="Rdc9883c0628b45f8"/>
+    <p:sldId xmlns:r="http://schemas.openxmlformats.org/officeDocument/2006/relationships" id="276" r:id="R4bba454b890b48e7"/>
   </p:sldIdLst>
   <p:sldSz cx="12192000" cy="6858000"/>
   <p:notesSz cx="6858000" cy="9144000"/>
@@ -461,7 +467,12 @@
           </a:p>
           <a:p xmlns:a="http://schemas.openxmlformats.org/drawingml/2006/main">
             <a:r>
-              <a:t>Локальные исходники: labs/lab04/project/src, scripts, data и test/runtests.jl.</a:t>
+              <a:t>Королькова А. В., Кулябов Д. С. Имитационное моделирование. Практикум. Глава 4, стр. 137–164.</a:t>
+            </a:r>
+          </a:p>
+          <a:p xmlns:a="http://schemas.openxmlformats.org/drawingml/2006/main">
+            <a:r>
+              <a:t>Локальные исходники и измерения: labs/lab04/project/src, scripts, data и test/runtests.jl.</a:t>
             </a:r>
           </a:p>
           <a:p xmlns:a="http://schemas.openxmlformats.org/drawingml/2006/main">
@@ -476,7 +487,7 @@
           </a:p>
           <a:p xmlns:a="http://schemas.openxmlformats.org/drawingml/2006/main">
             <a:r>
-              <a:t>Агрегированная модель, а не полный TCP-стек. Средние при t ≥ 10 с; сигналы потери за весь прогон. Классический RED: Floyd, Jacobson (1993), https://www.icir.org/floyd/papers/early.pdf</a:t>
+              <a:t>Три города, Ns=[1000,1000,1000], Is=[0,0,1], seed 42. Пик — максимум I/живые; смертность — умершие/N₀. Сканирования: seed 42–44. BorgMOEA: β∈[0.1,1], выявление 3–14 дней, смертность 0.01–0.1; пять seed 43–47 и отдельно 143–147, MaxTime=120 с. Ограниченный поиск: пик&lt;30% на обучающих seed, независимая проверка 1001–1020. Это учебная агентная модель без медицинской калибровки.</a:t>
             </a:r>
           </a:p>
           <a:p xmlns:a="http://schemas.openxmlformats.org/drawingml/2006/main">
@@ -556,12 +567,17 @@
           </a:p>
           <a:p xmlns:a="http://schemas.openxmlformats.org/drawingml/2006/main">
             <a:r>
-              <a:t>Локальные исходники: labs/lab04/project/src, scripts, data и test/runtests.jl.</a:t>
-            </a:r>
-          </a:p>
-          <a:p xmlns:a="http://schemas.openxmlformats.org/drawingml/2006/main">
-            <a:r>
-              <a:t>Иллюстрации: labs/lab04/image/05-plot.png, 06-plot.png.</a:t>
+              <a:t>Королькова А. В., Кулябов Д. С. Имитационное моделирование. Практикум. Глава 4, стр. 137–164.</a:t>
+            </a:r>
+          </a:p>
+          <a:p xmlns:a="http://schemas.openxmlformats.org/drawingml/2006/main">
+            <a:r>
+              <a:t>Локальные исходники и измерения: labs/lab04/project/src, scripts, data и test/runtests.jl.</a:t>
+            </a:r>
+          </a:p>
+          <a:p xmlns:a="http://schemas.openxmlformats.org/drawingml/2006/main">
+            <a:r>
+              <a:t>Иллюстрации: labs/lab04/image/06-plot.png, 07-plot.png.</a:t>
             </a:r>
           </a:p>
           <a:p xmlns:a="http://schemas.openxmlformats.org/drawingml/2006/main">
@@ -571,7 +587,7 @@
           </a:p>
           <a:p xmlns:a="http://schemas.openxmlformats.org/drawingml/2006/main">
             <a:r>
-              <a:t>Агрегированная модель, а не полный TCP-стек. Средние при t ≥ 10 с; сигналы потери за весь прогон. Классический RED: Floyd, Jacobson (1993), https://www.icir.org/floyd/papers/early.pdf</a:t>
+              <a:t>Три города, Ns=[1000,1000,1000], Is=[0,0,1], seed 42. Пик — максимум I/живые; смертность — умершие/N₀. Сканирования: seed 42–44. BorgMOEA: β∈[0.1,1], выявление 3–14 дней, смертность 0.01–0.1; пять seed 43–47 и отдельно 143–147, MaxTime=120 с. Ограниченный поиск: пик&lt;30% на обучающих seed, независимая проверка 1001–1020. Это учебная агентная модель без медицинской калибровки.</a:t>
             </a:r>
           </a:p>
           <a:p xmlns:a="http://schemas.openxmlformats.org/drawingml/2006/main">
@@ -651,12 +667,17 @@
           </a:p>
           <a:p xmlns:a="http://schemas.openxmlformats.org/drawingml/2006/main">
             <a:r>
-              <a:t>Локальные исходники: labs/lab04/project/src, scripts, data и test/runtests.jl.</a:t>
-            </a:r>
-          </a:p>
-          <a:p xmlns:a="http://schemas.openxmlformats.org/drawingml/2006/main">
-            <a:r>
-              <a:t>Иллюстрации: labs/lab04/image/03-plot.png.</a:t>
+              <a:t>Королькова А. В., Кулябов Д. С. Имитационное моделирование. Практикум. Глава 4, стр. 137–164.</a:t>
+            </a:r>
+          </a:p>
+          <a:p xmlns:a="http://schemas.openxmlformats.org/drawingml/2006/main">
+            <a:r>
+              <a:t>Локальные исходники и измерения: labs/lab04/project/src, scripts, data и test/runtests.jl.</a:t>
+            </a:r>
+          </a:p>
+          <a:p xmlns:a="http://schemas.openxmlformats.org/drawingml/2006/main">
+            <a:r>
+              <a:t>Иллюстрации: labs/lab04/image/08-plot.png.</a:t>
             </a:r>
           </a:p>
           <a:p xmlns:a="http://schemas.openxmlformats.org/drawingml/2006/main">
@@ -666,7 +687,7 @@
           </a:p>
           <a:p xmlns:a="http://schemas.openxmlformats.org/drawingml/2006/main">
             <a:r>
-              <a:t>Агрегированная модель, а не полный TCP-стек. Средние при t ≥ 10 с; сигналы потери за весь прогон. Классический RED: Floyd, Jacobson (1993), https://www.icir.org/floyd/papers/early.pdf</a:t>
+              <a:t>Три города, Ns=[1000,1000,1000], Is=[0,0,1], seed 42. Пик — максимум I/живые; смертность — умершие/N₀. Сканирования: seed 42–44. BorgMOEA: β∈[0.1,1], выявление 3–14 дней, смертность 0.01–0.1; пять seed 43–47 и отдельно 143–147, MaxTime=120 с. Ограниченный поиск: пик&lt;30% на обучающих seed, независимая проверка 1001–1020. Это учебная агентная модель без медицинской калибровки.</a:t>
             </a:r>
           </a:p>
           <a:p xmlns:a="http://schemas.openxmlformats.org/drawingml/2006/main">
@@ -746,12 +767,17 @@
           </a:p>
           <a:p xmlns:a="http://schemas.openxmlformats.org/drawingml/2006/main">
             <a:r>
-              <a:t>Локальные исходники: labs/lab04/project/src, scripts, data и test/runtests.jl.</a:t>
-            </a:r>
-          </a:p>
-          <a:p xmlns:a="http://schemas.openxmlformats.org/drawingml/2006/main">
-            <a:r>
-              <a:t>Иллюстрации: labs/lab04/image/01-jupyter.png, 02-jupyter.png.</a:t>
+              <a:t>Королькова А. В., Кулябов Д. С. Имитационное моделирование. Практикум. Глава 4, стр. 137–164.</a:t>
+            </a:r>
+          </a:p>
+          <a:p xmlns:a="http://schemas.openxmlformats.org/drawingml/2006/main">
+            <a:r>
+              <a:t>Локальные исходники и измерения: labs/lab04/project/src, scripts, data и test/runtests.jl.</a:t>
+            </a:r>
+          </a:p>
+          <a:p xmlns:a="http://schemas.openxmlformats.org/drawingml/2006/main">
+            <a:r>
+              <a:t>Иллюстрации: labs/lab04/image/04-plot.png, 09-plot.png.</a:t>
             </a:r>
           </a:p>
           <a:p xmlns:a="http://schemas.openxmlformats.org/drawingml/2006/main">
@@ -761,7 +787,7 @@
           </a:p>
           <a:p xmlns:a="http://schemas.openxmlformats.org/drawingml/2006/main">
             <a:r>
-              <a:t>Агрегированная модель, а не полный TCP-стек. Средние при t ≥ 10 с; сигналы потери за весь прогон. Классический RED: Floyd, Jacobson (1993), https://www.icir.org/floyd/papers/early.pdf</a:t>
+              <a:t>Три города, Ns=[1000,1000,1000], Is=[0,0,1], seed 42. Пик — максимум I/живые; смертность — умершие/N₀. Сканирования: seed 42–44. BorgMOEA: β∈[0.1,1], выявление 3–14 дней, смертность 0.01–0.1; пять seed 43–47 и отдельно 143–147, MaxTime=120 с. Ограниченный поиск: пик&lt;30% на обучающих seed, независимая проверка 1001–1020. Это учебная агентная модель без медицинской калибровки.</a:t>
             </a:r>
           </a:p>
           <a:p xmlns:a="http://schemas.openxmlformats.org/drawingml/2006/main">
@@ -841,12 +867,17 @@
           </a:p>
           <a:p xmlns:a="http://schemas.openxmlformats.org/drawingml/2006/main">
             <a:r>
-              <a:t>Локальные исходники: labs/lab04/project/src, scripts, data и test/runtests.jl.</a:t>
-            </a:r>
-          </a:p>
-          <a:p xmlns:a="http://schemas.openxmlformats.org/drawingml/2006/main">
-            <a:r>
-              <a:t>Иллюстрации: labs/lab04/image/03-terminal.png.</a:t>
+              <a:t>Королькова А. В., Кулябов Д. С. Имитационное моделирование. Практикум. Глава 4, стр. 137–164.</a:t>
+            </a:r>
+          </a:p>
+          <a:p xmlns:a="http://schemas.openxmlformats.org/drawingml/2006/main">
+            <a:r>
+              <a:t>Локальные исходники и измерения: labs/lab04/project/src, scripts, data и test/runtests.jl.</a:t>
+            </a:r>
+          </a:p>
+          <a:p xmlns:a="http://schemas.openxmlformats.org/drawingml/2006/main">
+            <a:r>
+              <a:t>Иллюстрации: labs/lab04/image/05-plot.png.</a:t>
             </a:r>
           </a:p>
           <a:p xmlns:a="http://schemas.openxmlformats.org/drawingml/2006/main">
@@ -856,7 +887,7 @@
           </a:p>
           <a:p xmlns:a="http://schemas.openxmlformats.org/drawingml/2006/main">
             <a:r>
-              <a:t>Агрегированная модель, а не полный TCP-стек. Средние при t ≥ 10 с; сигналы потери за весь прогон. Классический RED: Floyd, Jacobson (1993), https://www.icir.org/floyd/papers/early.pdf</a:t>
+              <a:t>Три города, Ns=[1000,1000,1000], Is=[0,0,1], seed 42. Пик — максимум I/живые; смертность — умершие/N₀. Сканирования: seed 42–44. BorgMOEA: β∈[0.1,1], выявление 3–14 дней, смертность 0.01–0.1; пять seed 43–47 и отдельно 143–147, MaxTime=120 с. Ограниченный поиск: пик&lt;30% на обучающих seed, независимая проверка 1001–1020. Это учебная агентная модель без медицинской калибровки.</a:t>
             </a:r>
           </a:p>
           <a:p xmlns:a="http://schemas.openxmlformats.org/drawingml/2006/main">
@@ -936,12 +967,17 @@
           </a:p>
           <a:p xmlns:a="http://schemas.openxmlformats.org/drawingml/2006/main">
             <a:r>
-              <a:t>Локальные исходники: labs/lab04/project/src, scripts, data и test/runtests.jl.</a:t>
-            </a:r>
-          </a:p>
-          <a:p xmlns:a="http://schemas.openxmlformats.org/drawingml/2006/main">
-            <a:r>
-              <a:t>Иллюстрации: labs/lab04/image/.</a:t>
+              <a:t>Королькова А. В., Кулябов Д. С. Имитационное моделирование. Практикум. Глава 4, стр. 137–164.</a:t>
+            </a:r>
+          </a:p>
+          <a:p xmlns:a="http://schemas.openxmlformats.org/drawingml/2006/main">
+            <a:r>
+              <a:t>Локальные исходники и измерения: labs/lab04/project/src, scripts, data и test/runtests.jl.</a:t>
+            </a:r>
+          </a:p>
+          <a:p xmlns:a="http://schemas.openxmlformats.org/drawingml/2006/main">
+            <a:r>
+              <a:t>Иллюстрации: labs/lab04/image/10-plot.png.</a:t>
             </a:r>
           </a:p>
           <a:p xmlns:a="http://schemas.openxmlformats.org/drawingml/2006/main">
@@ -951,7 +987,7 @@
           </a:p>
           <a:p xmlns:a="http://schemas.openxmlformats.org/drawingml/2006/main">
             <a:r>
-              <a:t>Агрегированная модель, а не полный TCP-стек. Средние при t ≥ 10 с; сигналы потери за весь прогон. Классический RED: Floyd, Jacobson (1993), https://www.icir.org/floyd/papers/early.pdf</a:t>
+              <a:t>Три города, Ns=[1000,1000,1000], Is=[0,0,1], seed 42. Пик — максимум I/живые; смертность — умершие/N₀. Сканирования: seed 42–44. BorgMOEA: β∈[0.1,1], выявление 3–14 дней, смертность 0.01–0.1; пять seed 43–47 и отдельно 143–147, MaxTime=120 с. Ограниченный поиск: пик&lt;30% на обучающих seed, независимая проверка 1001–1020. Это учебная агентная модель без медицинской калибровки.</a:t>
             </a:r>
           </a:p>
           <a:p xmlns:a="http://schemas.openxmlformats.org/drawingml/2006/main">
@@ -1031,7 +1067,312 @@
           </a:p>
           <a:p xmlns:a="http://schemas.openxmlformats.org/drawingml/2006/main">
             <a:r>
-              <a:t>Локальные исходники: labs/lab04/project/src, scripts, data и test/runtests.jl.</a:t>
+              <a:t>Королькова А. В., Кулябов Д. С. Имитационное моделирование. Практикум. Глава 4, стр. 137–164.</a:t>
+            </a:r>
+          </a:p>
+          <a:p xmlns:a="http://schemas.openxmlformats.org/drawingml/2006/main">
+            <a:r>
+              <a:t>Локальные исходники и измерения: labs/lab04/project/src, scripts, data и test/runtests.jl.</a:t>
+            </a:r>
+          </a:p>
+          <a:p xmlns:a="http://schemas.openxmlformats.org/drawingml/2006/main">
+            <a:r>
+              <a:t>Иллюстрации: labs/lab04/image/11-plot.png, 12-plot.png.</a:t>
+            </a:r>
+          </a:p>
+          <a:p xmlns:a="http://schemas.openxmlformats.org/drawingml/2006/main">
+            <a:r>
+              <a:t>Оформление и логотип: принятая презентация лабораторной № 2.</a:t>
+            </a:r>
+          </a:p>
+          <a:p xmlns:a="http://schemas.openxmlformats.org/drawingml/2006/main">
+            <a:r>
+              <a:t>Три города, Ns=[1000,1000,1000], Is=[0,0,1], seed 42. Пик — максимум I/живые; смертность — умершие/N₀. Сканирования: seed 42–44. BorgMOEA: β∈[0.1,1], выявление 3–14 дней, смертность 0.01–0.1; пять seed 43–47 и отдельно 143–147, MaxTime=120 с. Ограниченный поиск: пик&lt;30% на обучающих seed, независимая проверка 1001–1020. Это учебная агентная модель без медицинской калибровки.</a:t>
+            </a:r>
+          </a:p>
+          <a:p xmlns:a="http://schemas.openxmlformats.org/drawingml/2006/main">
+            <a:r>
+              <a:t>[/Sources]</a:t>
+            </a:r>
+          </a:p>
+        </p:txBody>
+      </p:sp>
+      <p:sp>
+        <p:nvSpPr>
+          <p:cNvPr id="4" name="Slide Number Placeholder 3"/>
+          <p:cNvSpPr>
+            <a:spLocks xmlns:a="http://schemas.openxmlformats.org/drawingml/2006/main" noGrp="1"/>
+          </p:cNvSpPr>
+          <p:nvPr>
+            <p:ph type="sldNum" idx="5"/>
+          </p:nvPr>
+        </p:nvSpPr>
+        <p:spPr/>
+        <p:txBody>
+          <a:bodyPr xmlns:a="http://schemas.openxmlformats.org/drawingml/2006/main"/>
+          <a:lstStyle xmlns:a="http://schemas.openxmlformats.org/drawingml/2006/main"/>
+          <a:p xmlns:a="http://schemas.openxmlformats.org/drawingml/2006/main"/>
+        </p:txBody>
+      </p:sp>
+    </p:spTree>
+  </p:cSld>
+  <p:clrMapOvr>
+    <a:masterClrMapping xmlns:a="http://schemas.openxmlformats.org/drawingml/2006/main"/>
+  </p:clrMapOvr>
+</p:notes>
+</file>
+
+<file path=ppt/notesSlides/notesSlide16.xml><?xml version="1.0" encoding="utf-8"?>
+<p:notes xmlns:p="http://schemas.openxmlformats.org/presentationml/2006/main">
+  <p:cSld>
+    <p:spTree>
+      <p:nvGrpSpPr>
+        <p:cNvPr id="1" name=""/>
+        <p:cNvGrpSpPr/>
+        <p:nvPr/>
+      </p:nvGrpSpPr>
+      <p:grpSpPr>
+        <a:xfrm xmlns:a="http://schemas.openxmlformats.org/drawingml/2006/main"/>
+      </p:grpSpPr>
+      <p:sp>
+        <p:nvSpPr>
+          <p:cNvPr id="2" name="Slide Image Placeholder 1"/>
+          <p:cNvSpPr>
+            <a:spLocks xmlns:a="http://schemas.openxmlformats.org/drawingml/2006/main" noGrp="1"/>
+          </p:cNvSpPr>
+          <p:nvPr>
+            <p:ph type="sldImg" idx="0"/>
+          </p:nvPr>
+        </p:nvSpPr>
+        <p:spPr/>
+      </p:sp>
+      <p:sp>
+        <p:nvSpPr>
+          <p:cNvPr id="3" name="Notes Placeholder 2"/>
+          <p:cNvSpPr>
+            <a:spLocks xmlns:a="http://schemas.openxmlformats.org/drawingml/2006/main" noGrp="1"/>
+          </p:cNvSpPr>
+          <p:nvPr>
+            <p:ph type="body" idx="1"/>
+          </p:nvPr>
+        </p:nvSpPr>
+        <p:spPr/>
+        <p:txBody>
+          <a:bodyPr xmlns:a="http://schemas.openxmlformats.org/drawingml/2006/main"/>
+          <a:lstStyle xmlns:a="http://schemas.openxmlformats.org/drawingml/2006/main"/>
+          <a:p xmlns:a="http://schemas.openxmlformats.org/drawingml/2006/main">
+            <a:r>
+              <a:t>[Sources]</a:t>
+            </a:r>
+          </a:p>
+          <a:p xmlns:a="http://schemas.openxmlformats.org/drawingml/2006/main">
+            <a:r>
+              <a:t>Королькова А. В., Кулябов Д. С. Имитационное моделирование. Практикум. Глава 4, стр. 137–164.</a:t>
+            </a:r>
+          </a:p>
+          <a:p xmlns:a="http://schemas.openxmlformats.org/drawingml/2006/main">
+            <a:r>
+              <a:t>Локальные исходники и измерения: labs/lab04/project/src, scripts, data и test/runtests.jl.</a:t>
+            </a:r>
+          </a:p>
+          <a:p xmlns:a="http://schemas.openxmlformats.org/drawingml/2006/main">
+            <a:r>
+              <a:t>Иллюстрации: labs/lab04/image/13-plot.png.</a:t>
+            </a:r>
+          </a:p>
+          <a:p xmlns:a="http://schemas.openxmlformats.org/drawingml/2006/main">
+            <a:r>
+              <a:t>Оформление и логотип: принятая презентация лабораторной № 2.</a:t>
+            </a:r>
+          </a:p>
+          <a:p xmlns:a="http://schemas.openxmlformats.org/drawingml/2006/main">
+            <a:r>
+              <a:t>Три города, Ns=[1000,1000,1000], Is=[0,0,1], seed 42. Пик — максимум I/живые; смертность — умершие/N₀. Сканирования: seed 42–44. BorgMOEA: β∈[0.1,1], выявление 3–14 дней, смертность 0.01–0.1; пять seed 43–47 и отдельно 143–147, MaxTime=120 с. Ограниченный поиск: пик&lt;30% на обучающих seed, независимая проверка 1001–1020. Это учебная агентная модель без медицинской калибровки.</a:t>
+            </a:r>
+          </a:p>
+          <a:p xmlns:a="http://schemas.openxmlformats.org/drawingml/2006/main">
+            <a:r>
+              <a:t>[/Sources]</a:t>
+            </a:r>
+          </a:p>
+        </p:txBody>
+      </p:sp>
+      <p:sp>
+        <p:nvSpPr>
+          <p:cNvPr id="4" name="Slide Number Placeholder 3"/>
+          <p:cNvSpPr>
+            <a:spLocks xmlns:a="http://schemas.openxmlformats.org/drawingml/2006/main" noGrp="1"/>
+          </p:cNvSpPr>
+          <p:nvPr>
+            <p:ph type="sldNum" idx="5"/>
+          </p:nvPr>
+        </p:nvSpPr>
+        <p:spPr/>
+        <p:txBody>
+          <a:bodyPr xmlns:a="http://schemas.openxmlformats.org/drawingml/2006/main"/>
+          <a:lstStyle xmlns:a="http://schemas.openxmlformats.org/drawingml/2006/main"/>
+          <a:p xmlns:a="http://schemas.openxmlformats.org/drawingml/2006/main"/>
+        </p:txBody>
+      </p:sp>
+    </p:spTree>
+  </p:cSld>
+  <p:clrMapOvr>
+    <a:masterClrMapping xmlns:a="http://schemas.openxmlformats.org/drawingml/2006/main"/>
+  </p:clrMapOvr>
+</p:notes>
+</file>
+
+<file path=ppt/notesSlides/notesSlide17.xml><?xml version="1.0" encoding="utf-8"?>
+<p:notes xmlns:p="http://schemas.openxmlformats.org/presentationml/2006/main">
+  <p:cSld>
+    <p:spTree>
+      <p:nvGrpSpPr>
+        <p:cNvPr id="1" name=""/>
+        <p:cNvGrpSpPr/>
+        <p:nvPr/>
+      </p:nvGrpSpPr>
+      <p:grpSpPr>
+        <a:xfrm xmlns:a="http://schemas.openxmlformats.org/drawingml/2006/main"/>
+      </p:grpSpPr>
+      <p:sp>
+        <p:nvSpPr>
+          <p:cNvPr id="2" name="Slide Image Placeholder 1"/>
+          <p:cNvSpPr>
+            <a:spLocks xmlns:a="http://schemas.openxmlformats.org/drawingml/2006/main" noGrp="1"/>
+          </p:cNvSpPr>
+          <p:nvPr>
+            <p:ph type="sldImg" idx="0"/>
+          </p:nvPr>
+        </p:nvSpPr>
+        <p:spPr/>
+      </p:sp>
+      <p:sp>
+        <p:nvSpPr>
+          <p:cNvPr id="3" name="Notes Placeholder 2"/>
+          <p:cNvSpPr>
+            <a:spLocks xmlns:a="http://schemas.openxmlformats.org/drawingml/2006/main" noGrp="1"/>
+          </p:cNvSpPr>
+          <p:nvPr>
+            <p:ph type="body" idx="1"/>
+          </p:nvPr>
+        </p:nvSpPr>
+        <p:spPr/>
+        <p:txBody>
+          <a:bodyPr xmlns:a="http://schemas.openxmlformats.org/drawingml/2006/main"/>
+          <a:lstStyle xmlns:a="http://schemas.openxmlformats.org/drawingml/2006/main"/>
+          <a:p xmlns:a="http://schemas.openxmlformats.org/drawingml/2006/main">
+            <a:r>
+              <a:t>[Sources]</a:t>
+            </a:r>
+          </a:p>
+          <a:p xmlns:a="http://schemas.openxmlformats.org/drawingml/2006/main">
+            <a:r>
+              <a:t>Королькова А. В., Кулябов Д. С. Имитационное моделирование. Практикум. Глава 4, стр. 137–164.</a:t>
+            </a:r>
+          </a:p>
+          <a:p xmlns:a="http://schemas.openxmlformats.org/drawingml/2006/main">
+            <a:r>
+              <a:t>Локальные исходники и измерения: labs/lab04/project/src, scripts, data и test/runtests.jl.</a:t>
+            </a:r>
+          </a:p>
+          <a:p xmlns:a="http://schemas.openxmlformats.org/drawingml/2006/main">
+            <a:r>
+              <a:t>Иллюстрации: labs/lab04/image/14-plot.png.</a:t>
+            </a:r>
+          </a:p>
+          <a:p xmlns:a="http://schemas.openxmlformats.org/drawingml/2006/main">
+            <a:r>
+              <a:t>Оформление и логотип: принятая презентация лабораторной № 2.</a:t>
+            </a:r>
+          </a:p>
+          <a:p xmlns:a="http://schemas.openxmlformats.org/drawingml/2006/main">
+            <a:r>
+              <a:t>Три города, Ns=[1000,1000,1000], Is=[0,0,1], seed 42. Пик — максимум I/живые; смертность — умершие/N₀. Сканирования: seed 42–44. BorgMOEA: β∈[0.1,1], выявление 3–14 дней, смертность 0.01–0.1; пять seed 43–47 и отдельно 143–147, MaxTime=120 с. Ограниченный поиск: пик&lt;30% на обучающих seed, независимая проверка 1001–1020. Это учебная агентная модель без медицинской калибровки.</a:t>
+            </a:r>
+          </a:p>
+          <a:p xmlns:a="http://schemas.openxmlformats.org/drawingml/2006/main">
+            <a:r>
+              <a:t>[/Sources]</a:t>
+            </a:r>
+          </a:p>
+        </p:txBody>
+      </p:sp>
+      <p:sp>
+        <p:nvSpPr>
+          <p:cNvPr id="4" name="Slide Number Placeholder 3"/>
+          <p:cNvSpPr>
+            <a:spLocks xmlns:a="http://schemas.openxmlformats.org/drawingml/2006/main" noGrp="1"/>
+          </p:cNvSpPr>
+          <p:nvPr>
+            <p:ph type="sldNum" idx="5"/>
+          </p:nvPr>
+        </p:nvSpPr>
+        <p:spPr/>
+        <p:txBody>
+          <a:bodyPr xmlns:a="http://schemas.openxmlformats.org/drawingml/2006/main"/>
+          <a:lstStyle xmlns:a="http://schemas.openxmlformats.org/drawingml/2006/main"/>
+          <a:p xmlns:a="http://schemas.openxmlformats.org/drawingml/2006/main"/>
+        </p:txBody>
+      </p:sp>
+    </p:spTree>
+  </p:cSld>
+  <p:clrMapOvr>
+    <a:masterClrMapping xmlns:a="http://schemas.openxmlformats.org/drawingml/2006/main"/>
+  </p:clrMapOvr>
+</p:notes>
+</file>
+
+<file path=ppt/notesSlides/notesSlide18.xml><?xml version="1.0" encoding="utf-8"?>
+<p:notes xmlns:p="http://schemas.openxmlformats.org/presentationml/2006/main">
+  <p:cSld>
+    <p:spTree>
+      <p:nvGrpSpPr>
+        <p:cNvPr id="1" name=""/>
+        <p:cNvGrpSpPr/>
+        <p:nvPr/>
+      </p:nvGrpSpPr>
+      <p:grpSpPr>
+        <a:xfrm xmlns:a="http://schemas.openxmlformats.org/drawingml/2006/main"/>
+      </p:grpSpPr>
+      <p:sp>
+        <p:nvSpPr>
+          <p:cNvPr id="2" name="Slide Image Placeholder 1"/>
+          <p:cNvSpPr>
+            <a:spLocks xmlns:a="http://schemas.openxmlformats.org/drawingml/2006/main" noGrp="1"/>
+          </p:cNvSpPr>
+          <p:nvPr>
+            <p:ph type="sldImg" idx="0"/>
+          </p:nvPr>
+        </p:nvSpPr>
+        <p:spPr/>
+      </p:sp>
+      <p:sp>
+        <p:nvSpPr>
+          <p:cNvPr id="3" name="Notes Placeholder 2"/>
+          <p:cNvSpPr>
+            <a:spLocks xmlns:a="http://schemas.openxmlformats.org/drawingml/2006/main" noGrp="1"/>
+          </p:cNvSpPr>
+          <p:nvPr>
+            <p:ph type="body" idx="1"/>
+          </p:nvPr>
+        </p:nvSpPr>
+        <p:spPr/>
+        <p:txBody>
+          <a:bodyPr xmlns:a="http://schemas.openxmlformats.org/drawingml/2006/main"/>
+          <a:lstStyle xmlns:a="http://schemas.openxmlformats.org/drawingml/2006/main"/>
+          <a:p xmlns:a="http://schemas.openxmlformats.org/drawingml/2006/main">
+            <a:r>
+              <a:t>[Sources]</a:t>
+            </a:r>
+          </a:p>
+          <a:p xmlns:a="http://schemas.openxmlformats.org/drawingml/2006/main">
+            <a:r>
+              <a:t>Королькова А. В., Кулябов Д. С. Имитационное моделирование. Практикум. Глава 4, стр. 137–164.</a:t>
+            </a:r>
+          </a:p>
+          <a:p xmlns:a="http://schemas.openxmlformats.org/drawingml/2006/main">
+            <a:r>
+              <a:t>Локальные исходники и измерения: labs/lab04/project/src, scripts, data и test/runtests.jl.</a:t>
             </a:r>
           </a:p>
           <a:p xmlns:a="http://schemas.openxmlformats.org/drawingml/2006/main">
@@ -1046,7 +1387,107 @@
           </a:p>
           <a:p xmlns:a="http://schemas.openxmlformats.org/drawingml/2006/main">
             <a:r>
-              <a:t>Агрегированная модель, а не полный TCP-стек. Средние при t ≥ 10 с; сигналы потери за весь прогон. Классический RED: Floyd, Jacobson (1993), https://www.icir.org/floyd/papers/early.pdf</a:t>
+              <a:t>Три города, Ns=[1000,1000,1000], Is=[0,0,1], seed 42. Пик — максимум I/живые; смертность — умершие/N₀. Сканирования: seed 42–44. BorgMOEA: β∈[0.1,1], выявление 3–14 дней, смертность 0.01–0.1; пять seed 43–47 и отдельно 143–147, MaxTime=120 с. Ограниченный поиск: пик&lt;30% на обучающих seed, независимая проверка 1001–1020. Это учебная агентная модель без медицинской калибровки.</a:t>
+            </a:r>
+          </a:p>
+          <a:p xmlns:a="http://schemas.openxmlformats.org/drawingml/2006/main">
+            <a:r>
+              <a:t>[/Sources]</a:t>
+            </a:r>
+          </a:p>
+        </p:txBody>
+      </p:sp>
+      <p:sp>
+        <p:nvSpPr>
+          <p:cNvPr id="4" name="Slide Number Placeholder 3"/>
+          <p:cNvSpPr>
+            <a:spLocks xmlns:a="http://schemas.openxmlformats.org/drawingml/2006/main" noGrp="1"/>
+          </p:cNvSpPr>
+          <p:nvPr>
+            <p:ph type="sldNum" idx="5"/>
+          </p:nvPr>
+        </p:nvSpPr>
+        <p:spPr/>
+        <p:txBody>
+          <a:bodyPr xmlns:a="http://schemas.openxmlformats.org/drawingml/2006/main"/>
+          <a:lstStyle xmlns:a="http://schemas.openxmlformats.org/drawingml/2006/main"/>
+          <a:p xmlns:a="http://schemas.openxmlformats.org/drawingml/2006/main"/>
+        </p:txBody>
+      </p:sp>
+    </p:spTree>
+  </p:cSld>
+  <p:clrMapOvr>
+    <a:masterClrMapping xmlns:a="http://schemas.openxmlformats.org/drawingml/2006/main"/>
+  </p:clrMapOvr>
+</p:notes>
+</file>
+
+<file path=ppt/notesSlides/notesSlide19.xml><?xml version="1.0" encoding="utf-8"?>
+<p:notes xmlns:p="http://schemas.openxmlformats.org/presentationml/2006/main">
+  <p:cSld>
+    <p:spTree>
+      <p:nvGrpSpPr>
+        <p:cNvPr id="1" name=""/>
+        <p:cNvGrpSpPr/>
+        <p:nvPr/>
+      </p:nvGrpSpPr>
+      <p:grpSpPr>
+        <a:xfrm xmlns:a="http://schemas.openxmlformats.org/drawingml/2006/main"/>
+      </p:grpSpPr>
+      <p:sp>
+        <p:nvSpPr>
+          <p:cNvPr id="2" name="Slide Image Placeholder 1"/>
+          <p:cNvSpPr>
+            <a:spLocks xmlns:a="http://schemas.openxmlformats.org/drawingml/2006/main" noGrp="1"/>
+          </p:cNvSpPr>
+          <p:nvPr>
+            <p:ph type="sldImg" idx="0"/>
+          </p:nvPr>
+        </p:nvSpPr>
+        <p:spPr/>
+      </p:sp>
+      <p:sp>
+        <p:nvSpPr>
+          <p:cNvPr id="3" name="Notes Placeholder 2"/>
+          <p:cNvSpPr>
+            <a:spLocks xmlns:a="http://schemas.openxmlformats.org/drawingml/2006/main" noGrp="1"/>
+          </p:cNvSpPr>
+          <p:nvPr>
+            <p:ph type="body" idx="1"/>
+          </p:nvPr>
+        </p:nvSpPr>
+        <p:spPr/>
+        <p:txBody>
+          <a:bodyPr xmlns:a="http://schemas.openxmlformats.org/drawingml/2006/main"/>
+          <a:lstStyle xmlns:a="http://schemas.openxmlformats.org/drawingml/2006/main"/>
+          <a:p xmlns:a="http://schemas.openxmlformats.org/drawingml/2006/main">
+            <a:r>
+              <a:t>[Sources]</a:t>
+            </a:r>
+          </a:p>
+          <a:p xmlns:a="http://schemas.openxmlformats.org/drawingml/2006/main">
+            <a:r>
+              <a:t>Королькова А. В., Кулябов Д. С. Имитационное моделирование. Практикум. Глава 4, стр. 137–164.</a:t>
+            </a:r>
+          </a:p>
+          <a:p xmlns:a="http://schemas.openxmlformats.org/drawingml/2006/main">
+            <a:r>
+              <a:t>Локальные исходники и измерения: labs/lab04/project/src, scripts, data и test/runtests.jl.</a:t>
+            </a:r>
+          </a:p>
+          <a:p xmlns:a="http://schemas.openxmlformats.org/drawingml/2006/main">
+            <a:r>
+              <a:t>Иллюстрации: labs/lab04/image/03-terminal.png.</a:t>
+            </a:r>
+          </a:p>
+          <a:p xmlns:a="http://schemas.openxmlformats.org/drawingml/2006/main">
+            <a:r>
+              <a:t>Оформление и логотип: принятая презентация лабораторной № 2.</a:t>
+            </a:r>
+          </a:p>
+          <a:p xmlns:a="http://schemas.openxmlformats.org/drawingml/2006/main">
+            <a:r>
+              <a:t>Три города, Ns=[1000,1000,1000], Is=[0,0,1], seed 42. Пик — максимум I/живые; смертность — умершие/N₀. Сканирования: seed 42–44. BorgMOEA: β∈[0.1,1], выявление 3–14 дней, смертность 0.01–0.1; пять seed 43–47 и отдельно 143–147, MaxTime=120 с. Ограниченный поиск: пик&lt;30% на обучающих seed, независимая проверка 1001–1020. Это учебная агентная модель без медицинской калибровки.</a:t>
             </a:r>
           </a:p>
           <a:p xmlns:a="http://schemas.openxmlformats.org/drawingml/2006/main">
@@ -1126,7 +1567,12 @@
           </a:p>
           <a:p xmlns:a="http://schemas.openxmlformats.org/drawingml/2006/main">
             <a:r>
-              <a:t>Локальные исходники: labs/lab04/project/src, scripts, data и test/runtests.jl.</a:t>
+              <a:t>Королькова А. В., Кулябов Д. С. Имитационное моделирование. Практикум. Глава 4, стр. 137–164.</a:t>
+            </a:r>
+          </a:p>
+          <a:p xmlns:a="http://schemas.openxmlformats.org/drawingml/2006/main">
+            <a:r>
+              <a:t>Локальные исходники и измерения: labs/lab04/project/src, scripts, data и test/runtests.jl.</a:t>
             </a:r>
           </a:p>
           <a:p xmlns:a="http://schemas.openxmlformats.org/drawingml/2006/main">
@@ -1141,7 +1587,207 @@
           </a:p>
           <a:p xmlns:a="http://schemas.openxmlformats.org/drawingml/2006/main">
             <a:r>
-              <a:t>Агрегированная модель, а не полный TCP-стек. Средние при t ≥ 10 с; сигналы потери за весь прогон. Классический RED: Floyd, Jacobson (1993), https://www.icir.org/floyd/papers/early.pdf</a:t>
+              <a:t>Три города, Ns=[1000,1000,1000], Is=[0,0,1], seed 42. Пик — максимум I/живые; смертность — умершие/N₀. Сканирования: seed 42–44. BorgMOEA: β∈[0.1,1], выявление 3–14 дней, смертность 0.01–0.1; пять seed 43–47 и отдельно 143–147, MaxTime=120 с. Ограниченный поиск: пик&lt;30% на обучающих seed, независимая проверка 1001–1020. Это учебная агентная модель без медицинской калибровки.</a:t>
+            </a:r>
+          </a:p>
+          <a:p xmlns:a="http://schemas.openxmlformats.org/drawingml/2006/main">
+            <a:r>
+              <a:t>[/Sources]</a:t>
+            </a:r>
+          </a:p>
+        </p:txBody>
+      </p:sp>
+      <p:sp>
+        <p:nvSpPr>
+          <p:cNvPr id="4" name="Slide Number Placeholder 3"/>
+          <p:cNvSpPr>
+            <a:spLocks xmlns:a="http://schemas.openxmlformats.org/drawingml/2006/main" noGrp="1"/>
+          </p:cNvSpPr>
+          <p:nvPr>
+            <p:ph type="sldNum" idx="5"/>
+          </p:nvPr>
+        </p:nvSpPr>
+        <p:spPr/>
+        <p:txBody>
+          <a:bodyPr xmlns:a="http://schemas.openxmlformats.org/drawingml/2006/main"/>
+          <a:lstStyle xmlns:a="http://schemas.openxmlformats.org/drawingml/2006/main"/>
+          <a:p xmlns:a="http://schemas.openxmlformats.org/drawingml/2006/main"/>
+        </p:txBody>
+      </p:sp>
+    </p:spTree>
+  </p:cSld>
+  <p:clrMapOvr>
+    <a:masterClrMapping xmlns:a="http://schemas.openxmlformats.org/drawingml/2006/main"/>
+  </p:clrMapOvr>
+</p:notes>
+</file>
+
+<file path=ppt/notesSlides/notesSlide20.xml><?xml version="1.0" encoding="utf-8"?>
+<p:notes xmlns:p="http://schemas.openxmlformats.org/presentationml/2006/main">
+  <p:cSld>
+    <p:spTree>
+      <p:nvGrpSpPr>
+        <p:cNvPr id="1" name=""/>
+        <p:cNvGrpSpPr/>
+        <p:nvPr/>
+      </p:nvGrpSpPr>
+      <p:grpSpPr>
+        <a:xfrm xmlns:a="http://schemas.openxmlformats.org/drawingml/2006/main"/>
+      </p:grpSpPr>
+      <p:sp>
+        <p:nvSpPr>
+          <p:cNvPr id="2" name="Slide Image Placeholder 1"/>
+          <p:cNvSpPr>
+            <a:spLocks xmlns:a="http://schemas.openxmlformats.org/drawingml/2006/main" noGrp="1"/>
+          </p:cNvSpPr>
+          <p:nvPr>
+            <p:ph type="sldImg" idx="0"/>
+          </p:nvPr>
+        </p:nvSpPr>
+        <p:spPr/>
+      </p:sp>
+      <p:sp>
+        <p:nvSpPr>
+          <p:cNvPr id="3" name="Notes Placeholder 2"/>
+          <p:cNvSpPr>
+            <a:spLocks xmlns:a="http://schemas.openxmlformats.org/drawingml/2006/main" noGrp="1"/>
+          </p:cNvSpPr>
+          <p:nvPr>
+            <p:ph type="body" idx="1"/>
+          </p:nvPr>
+        </p:nvSpPr>
+        <p:spPr/>
+        <p:txBody>
+          <a:bodyPr xmlns:a="http://schemas.openxmlformats.org/drawingml/2006/main"/>
+          <a:lstStyle xmlns:a="http://schemas.openxmlformats.org/drawingml/2006/main"/>
+          <a:p xmlns:a="http://schemas.openxmlformats.org/drawingml/2006/main">
+            <a:r>
+              <a:t>[Sources]</a:t>
+            </a:r>
+          </a:p>
+          <a:p xmlns:a="http://schemas.openxmlformats.org/drawingml/2006/main">
+            <a:r>
+              <a:t>Королькова А. В., Кулябов Д. С. Имитационное моделирование. Практикум. Глава 4, стр. 137–164.</a:t>
+            </a:r>
+          </a:p>
+          <a:p xmlns:a="http://schemas.openxmlformats.org/drawingml/2006/main">
+            <a:r>
+              <a:t>Локальные исходники и измерения: labs/lab04/project/src, scripts, data и test/runtests.jl.</a:t>
+            </a:r>
+          </a:p>
+          <a:p xmlns:a="http://schemas.openxmlformats.org/drawingml/2006/main">
+            <a:r>
+              <a:t>Иллюстрации: labs/lab04/image/.</a:t>
+            </a:r>
+          </a:p>
+          <a:p xmlns:a="http://schemas.openxmlformats.org/drawingml/2006/main">
+            <a:r>
+              <a:t>Оформление и логотип: принятая презентация лабораторной № 2.</a:t>
+            </a:r>
+          </a:p>
+          <a:p xmlns:a="http://schemas.openxmlformats.org/drawingml/2006/main">
+            <a:r>
+              <a:t>Три города, Ns=[1000,1000,1000], Is=[0,0,1], seed 42. Пик — максимум I/живые; смертность — умершие/N₀. Сканирования: seed 42–44. BorgMOEA: β∈[0.1,1], выявление 3–14 дней, смертность 0.01–0.1; пять seed 43–47 и отдельно 143–147, MaxTime=120 с. Ограниченный поиск: пик&lt;30% на обучающих seed, независимая проверка 1001–1020. Это учебная агентная модель без медицинской калибровки.</a:t>
+            </a:r>
+          </a:p>
+          <a:p xmlns:a="http://schemas.openxmlformats.org/drawingml/2006/main">
+            <a:r>
+              <a:t>[/Sources]</a:t>
+            </a:r>
+          </a:p>
+        </p:txBody>
+      </p:sp>
+      <p:sp>
+        <p:nvSpPr>
+          <p:cNvPr id="4" name="Slide Number Placeholder 3"/>
+          <p:cNvSpPr>
+            <a:spLocks xmlns:a="http://schemas.openxmlformats.org/drawingml/2006/main" noGrp="1"/>
+          </p:cNvSpPr>
+          <p:nvPr>
+            <p:ph type="sldNum" idx="5"/>
+          </p:nvPr>
+        </p:nvSpPr>
+        <p:spPr/>
+        <p:txBody>
+          <a:bodyPr xmlns:a="http://schemas.openxmlformats.org/drawingml/2006/main"/>
+          <a:lstStyle xmlns:a="http://schemas.openxmlformats.org/drawingml/2006/main"/>
+          <a:p xmlns:a="http://schemas.openxmlformats.org/drawingml/2006/main"/>
+        </p:txBody>
+      </p:sp>
+    </p:spTree>
+  </p:cSld>
+  <p:clrMapOvr>
+    <a:masterClrMapping xmlns:a="http://schemas.openxmlformats.org/drawingml/2006/main"/>
+  </p:clrMapOvr>
+</p:notes>
+</file>
+
+<file path=ppt/notesSlides/notesSlide21.xml><?xml version="1.0" encoding="utf-8"?>
+<p:notes xmlns:p="http://schemas.openxmlformats.org/presentationml/2006/main">
+  <p:cSld>
+    <p:spTree>
+      <p:nvGrpSpPr>
+        <p:cNvPr id="1" name=""/>
+        <p:cNvGrpSpPr/>
+        <p:nvPr/>
+      </p:nvGrpSpPr>
+      <p:grpSpPr>
+        <a:xfrm xmlns:a="http://schemas.openxmlformats.org/drawingml/2006/main"/>
+      </p:grpSpPr>
+      <p:sp>
+        <p:nvSpPr>
+          <p:cNvPr id="2" name="Slide Image Placeholder 1"/>
+          <p:cNvSpPr>
+            <a:spLocks xmlns:a="http://schemas.openxmlformats.org/drawingml/2006/main" noGrp="1"/>
+          </p:cNvSpPr>
+          <p:nvPr>
+            <p:ph type="sldImg" idx="0"/>
+          </p:nvPr>
+        </p:nvSpPr>
+        <p:spPr/>
+      </p:sp>
+      <p:sp>
+        <p:nvSpPr>
+          <p:cNvPr id="3" name="Notes Placeholder 2"/>
+          <p:cNvSpPr>
+            <a:spLocks xmlns:a="http://schemas.openxmlformats.org/drawingml/2006/main" noGrp="1"/>
+          </p:cNvSpPr>
+          <p:nvPr>
+            <p:ph type="body" idx="1"/>
+          </p:nvPr>
+        </p:nvSpPr>
+        <p:spPr/>
+        <p:txBody>
+          <a:bodyPr xmlns:a="http://schemas.openxmlformats.org/drawingml/2006/main"/>
+          <a:lstStyle xmlns:a="http://schemas.openxmlformats.org/drawingml/2006/main"/>
+          <a:p xmlns:a="http://schemas.openxmlformats.org/drawingml/2006/main">
+            <a:r>
+              <a:t>[Sources]</a:t>
+            </a:r>
+          </a:p>
+          <a:p xmlns:a="http://schemas.openxmlformats.org/drawingml/2006/main">
+            <a:r>
+              <a:t>Королькова А. В., Кулябов Д. С. Имитационное моделирование. Практикум. Глава 4, стр. 137–164.</a:t>
+            </a:r>
+          </a:p>
+          <a:p xmlns:a="http://schemas.openxmlformats.org/drawingml/2006/main">
+            <a:r>
+              <a:t>Локальные исходники и измерения: labs/lab04/project/src, scripts, data и test/runtests.jl.</a:t>
+            </a:r>
+          </a:p>
+          <a:p xmlns:a="http://schemas.openxmlformats.org/drawingml/2006/main">
+            <a:r>
+              <a:t>Иллюстрации: labs/lab04/image/.</a:t>
+            </a:r>
+          </a:p>
+          <a:p xmlns:a="http://schemas.openxmlformats.org/drawingml/2006/main">
+            <a:r>
+              <a:t>Оформление и логотип: принятая презентация лабораторной № 2.</a:t>
+            </a:r>
+          </a:p>
+          <a:p xmlns:a="http://schemas.openxmlformats.org/drawingml/2006/main">
+            <a:r>
+              <a:t>Три города, Ns=[1000,1000,1000], Is=[0,0,1], seed 42. Пик — максимум I/живые; смертность — умершие/N₀. Сканирования: seed 42–44. BorgMOEA: β∈[0.1,1], выявление 3–14 дней, смертность 0.01–0.1; пять seed 43–47 и отдельно 143–147, MaxTime=120 с. Ограниченный поиск: пик&lt;30% на обучающих seed, независимая проверка 1001–1020. Это учебная агентная модель без медицинской калибровки.</a:t>
             </a:r>
           </a:p>
           <a:p xmlns:a="http://schemas.openxmlformats.org/drawingml/2006/main">
@@ -1221,7 +1867,12 @@
           </a:p>
           <a:p xmlns:a="http://schemas.openxmlformats.org/drawingml/2006/main">
             <a:r>
-              <a:t>Локальные исходники: labs/lab04/project/src, scripts, data и test/runtests.jl.</a:t>
+              <a:t>Королькова А. В., Кулябов Д. С. Имитационное моделирование. Практикум. Глава 4, стр. 137–164.</a:t>
+            </a:r>
+          </a:p>
+          <a:p xmlns:a="http://schemas.openxmlformats.org/drawingml/2006/main">
+            <a:r>
+              <a:t>Локальные исходники и измерения: labs/lab04/project/src, scripts, data и test/runtests.jl.</a:t>
             </a:r>
           </a:p>
           <a:p xmlns:a="http://schemas.openxmlformats.org/drawingml/2006/main">
@@ -1236,7 +1887,7 @@
           </a:p>
           <a:p xmlns:a="http://schemas.openxmlformats.org/drawingml/2006/main">
             <a:r>
-              <a:t>Агрегированная модель, а не полный TCP-стек. Средние при t ≥ 10 с; сигналы потери за весь прогон. Классический RED: Floyd, Jacobson (1993), https://www.icir.org/floyd/papers/early.pdf</a:t>
+              <a:t>Три города, Ns=[1000,1000,1000], Is=[0,0,1], seed 42. Пик — максимум I/живые; смертность — умершие/N₀. Сканирования: seed 42–44. BorgMOEA: β∈[0.1,1], выявление 3–14 дней, смертность 0.01–0.1; пять seed 43–47 и отдельно 143–147, MaxTime=120 с. Ограниченный поиск: пик&lt;30% на обучающих seed, независимая проверка 1001–1020. Это учебная агентная модель без медицинской калибровки.</a:t>
             </a:r>
           </a:p>
           <a:p xmlns:a="http://schemas.openxmlformats.org/drawingml/2006/main">
@@ -1316,7 +1967,12 @@
           </a:p>
           <a:p xmlns:a="http://schemas.openxmlformats.org/drawingml/2006/main">
             <a:r>
-              <a:t>Локальные исходники: labs/lab04/project/src, scripts, data и test/runtests.jl.</a:t>
+              <a:t>Королькова А. В., Кулябов Д. С. Имитационное моделирование. Практикум. Глава 4, стр. 137–164.</a:t>
+            </a:r>
+          </a:p>
+          <a:p xmlns:a="http://schemas.openxmlformats.org/drawingml/2006/main">
+            <a:r>
+              <a:t>Локальные исходники и измерения: labs/lab04/project/src, scripts, data и test/runtests.jl.</a:t>
             </a:r>
           </a:p>
           <a:p xmlns:a="http://schemas.openxmlformats.org/drawingml/2006/main">
@@ -1331,7 +1987,7 @@
           </a:p>
           <a:p xmlns:a="http://schemas.openxmlformats.org/drawingml/2006/main">
             <a:r>
-              <a:t>Агрегированная модель, а не полный TCP-стек. Средние при t ≥ 10 с; сигналы потери за весь прогон. Классический RED: Floyd, Jacobson (1993), https://www.icir.org/floyd/papers/early.pdf</a:t>
+              <a:t>Три города, Ns=[1000,1000,1000], Is=[0,0,1], seed 42. Пик — максимум I/живые; смертность — умершие/N₀. Сканирования: seed 42–44. BorgMOEA: β∈[0.1,1], выявление 3–14 дней, смертность 0.01–0.1; пять seed 43–47 и отдельно 143–147, MaxTime=120 с. Ограниченный поиск: пик&lt;30% на обучающих seed, независимая проверка 1001–1020. Это учебная агентная модель без медицинской калибровки.</a:t>
             </a:r>
           </a:p>
           <a:p xmlns:a="http://schemas.openxmlformats.org/drawingml/2006/main">
@@ -1411,7 +2067,12 @@
           </a:p>
           <a:p xmlns:a="http://schemas.openxmlformats.org/drawingml/2006/main">
             <a:r>
-              <a:t>Локальные исходники: labs/lab04/project/src, scripts, data и test/runtests.jl.</a:t>
+              <a:t>Королькова А. В., Кулябов Д. С. Имитационное моделирование. Практикум. Глава 4, стр. 137–164.</a:t>
+            </a:r>
+          </a:p>
+          <a:p xmlns:a="http://schemas.openxmlformats.org/drawingml/2006/main">
+            <a:r>
+              <a:t>Локальные исходники и измерения: labs/lab04/project/src, scripts, data и test/runtests.jl.</a:t>
             </a:r>
           </a:p>
           <a:p xmlns:a="http://schemas.openxmlformats.org/drawingml/2006/main">
@@ -1426,7 +2087,7 @@
           </a:p>
           <a:p xmlns:a="http://schemas.openxmlformats.org/drawingml/2006/main">
             <a:r>
-              <a:t>Агрегированная модель, а не полный TCP-стек. Средние при t ≥ 10 с; сигналы потери за весь прогон. Классический RED: Floyd, Jacobson (1993), https://www.icir.org/floyd/papers/early.pdf</a:t>
+              <a:t>Три города, Ns=[1000,1000,1000], Is=[0,0,1], seed 42. Пик — максимум I/живые; смертность — умершие/N₀. Сканирования: seed 42–44. BorgMOEA: β∈[0.1,1], выявление 3–14 дней, смертность 0.01–0.1; пять seed 43–47 и отдельно 143–147, MaxTime=120 с. Ограниченный поиск: пик&lt;30% на обучающих seed, независимая проверка 1001–1020. Это учебная агентная модель без медицинской калибровки.</a:t>
             </a:r>
           </a:p>
           <a:p xmlns:a="http://schemas.openxmlformats.org/drawingml/2006/main">
@@ -1506,7 +2167,12 @@
           </a:p>
           <a:p xmlns:a="http://schemas.openxmlformats.org/drawingml/2006/main">
             <a:r>
-              <a:t>Локальные исходники: labs/lab04/project/src, scripts, data и test/runtests.jl.</a:t>
+              <a:t>Королькова А. В., Кулябов Д. С. Имитационное моделирование. Практикум. Глава 4, стр. 137–164.</a:t>
+            </a:r>
+          </a:p>
+          <a:p xmlns:a="http://schemas.openxmlformats.org/drawingml/2006/main">
+            <a:r>
+              <a:t>Локальные исходники и измерения: labs/lab04/project/src, scripts, data и test/runtests.jl.</a:t>
             </a:r>
           </a:p>
           <a:p xmlns:a="http://schemas.openxmlformats.org/drawingml/2006/main">
@@ -1521,7 +2187,7 @@
           </a:p>
           <a:p xmlns:a="http://schemas.openxmlformats.org/drawingml/2006/main">
             <a:r>
-              <a:t>Агрегированная модель, а не полный TCP-стек. Средние при t ≥ 10 с; сигналы потери за весь прогон. Классический RED: Floyd, Jacobson (1993), https://www.icir.org/floyd/papers/early.pdf</a:t>
+              <a:t>Три города, Ns=[1000,1000,1000], Is=[0,0,1], seed 42. Пик — максимум I/живые; смертность — умершие/N₀. Сканирования: seed 42–44. BorgMOEA: β∈[0.1,1], выявление 3–14 дней, смертность 0.01–0.1; пять seed 43–47 и отдельно 143–147, MaxTime=120 с. Ограниченный поиск: пик&lt;30% на обучающих seed, независимая проверка 1001–1020. Это учебная агентная модель без медицинской калибровки.</a:t>
             </a:r>
           </a:p>
           <a:p xmlns:a="http://schemas.openxmlformats.org/drawingml/2006/main">
@@ -1601,7 +2267,12 @@
           </a:p>
           <a:p xmlns:a="http://schemas.openxmlformats.org/drawingml/2006/main">
             <a:r>
-              <a:t>Локальные исходники: labs/lab04/project/src, scripts, data и test/runtests.jl.</a:t>
+              <a:t>Королькова А. В., Кулябов Д. С. Имитационное моделирование. Практикум. Глава 4, стр. 137–164.</a:t>
+            </a:r>
+          </a:p>
+          <a:p xmlns:a="http://schemas.openxmlformats.org/drawingml/2006/main">
+            <a:r>
+              <a:t>Локальные исходники и измерения: labs/lab04/project/src, scripts, data и test/runtests.jl.</a:t>
             </a:r>
           </a:p>
           <a:p xmlns:a="http://schemas.openxmlformats.org/drawingml/2006/main">
@@ -1616,7 +2287,7 @@
           </a:p>
           <a:p xmlns:a="http://schemas.openxmlformats.org/drawingml/2006/main">
             <a:r>
-              <a:t>Агрегированная модель, а не полный TCP-стек. Средние при t ≥ 10 с; сигналы потери за весь прогон. Классический RED: Floyd, Jacobson (1993), https://www.icir.org/floyd/papers/early.pdf</a:t>
+              <a:t>Три города, Ns=[1000,1000,1000], Is=[0,0,1], seed 42. Пик — максимум I/живые; смертность — умершие/N₀. Сканирования: seed 42–44. BorgMOEA: β∈[0.1,1], выявление 3–14 дней, смертность 0.01–0.1; пять seed 43–47 и отдельно 143–147, MaxTime=120 с. Ограниченный поиск: пик&lt;30% на обучающих seed, независимая проверка 1001–1020. Это учебная агентная модель без медицинской калибровки.</a:t>
             </a:r>
           </a:p>
           <a:p xmlns:a="http://schemas.openxmlformats.org/drawingml/2006/main">
@@ -1696,7 +2367,12 @@
           </a:p>
           <a:p xmlns:a="http://schemas.openxmlformats.org/drawingml/2006/main">
             <a:r>
-              <a:t>Локальные исходники: labs/lab04/project/src, scripts, data и test/runtests.jl.</a:t>
+              <a:t>Королькова А. В., Кулябов Д. С. Имитационное моделирование. Практикум. Глава 4, стр. 137–164.</a:t>
+            </a:r>
+          </a:p>
+          <a:p xmlns:a="http://schemas.openxmlformats.org/drawingml/2006/main">
+            <a:r>
+              <a:t>Локальные исходники и измерения: labs/lab04/project/src, scripts, data и test/runtests.jl.</a:t>
             </a:r>
           </a:p>
           <a:p xmlns:a="http://schemas.openxmlformats.org/drawingml/2006/main">
@@ -1711,7 +2387,7 @@
           </a:p>
           <a:p xmlns:a="http://schemas.openxmlformats.org/drawingml/2006/main">
             <a:r>
-              <a:t>Агрегированная модель, а не полный TCP-стек. Средние при t ≥ 10 с; сигналы потери за весь прогон. Классический RED: Floyd, Jacobson (1993), https://www.icir.org/floyd/papers/early.pdf</a:t>
+              <a:t>Три города, Ns=[1000,1000,1000], Is=[0,0,1], seed 42. Пик — максимум I/живые; смертность — умершие/N₀. Сканирования: seed 42–44. BorgMOEA: β∈[0.1,1], выявление 3–14 дней, смертность 0.01–0.1; пять seed 43–47 и отдельно 143–147, MaxTime=120 с. Ограниченный поиск: пик&lt;30% на обучающих seed, независимая проверка 1001–1020. Это учебная агентная модель без медицинской калибровки.</a:t>
             </a:r>
           </a:p>
           <a:p xmlns:a="http://schemas.openxmlformats.org/drawingml/2006/main">
@@ -1791,12 +2467,17 @@
           </a:p>
           <a:p xmlns:a="http://schemas.openxmlformats.org/drawingml/2006/main">
             <a:r>
-              <a:t>Локальные исходники: labs/lab04/project/src, scripts, data и test/runtests.jl.</a:t>
-            </a:r>
-          </a:p>
-          <a:p xmlns:a="http://schemas.openxmlformats.org/drawingml/2006/main">
-            <a:r>
-              <a:t>Иллюстрации: labs/lab04/image/04-plot.png.</a:t>
+              <a:t>Королькова А. В., Кулябов Д. С. Имитационное моделирование. Практикум. Глава 4, стр. 137–164.</a:t>
+            </a:r>
+          </a:p>
+          <a:p xmlns:a="http://schemas.openxmlformats.org/drawingml/2006/main">
+            <a:r>
+              <a:t>Локальные исходники и измерения: labs/lab04/project/src, scripts, data и test/runtests.jl.</a:t>
+            </a:r>
+          </a:p>
+          <a:p xmlns:a="http://schemas.openxmlformats.org/drawingml/2006/main">
+            <a:r>
+              <a:t>Иллюстрации: labs/lab04/image/03-plot.png.</a:t>
             </a:r>
           </a:p>
           <a:p xmlns:a="http://schemas.openxmlformats.org/drawingml/2006/main">
@@ -1806,7 +2487,7 @@
           </a:p>
           <a:p xmlns:a="http://schemas.openxmlformats.org/drawingml/2006/main">
             <a:r>
-              <a:t>Агрегированная модель, а не полный TCP-стек. Средние при t ≥ 10 с; сигналы потери за весь прогон. Классический RED: Floyd, Jacobson (1993), https://www.icir.org/floyd/papers/early.pdf</a:t>
+              <a:t>Три города, Ns=[1000,1000,1000], Is=[0,0,1], seed 42. Пик — максимум I/живые; смертность — умершие/N₀. Сканирования: seed 42–44. BorgMOEA: β∈[0.1,1], выявление 3–14 дней, смертность 0.01–0.1; пять seed 43–47 и отдельно 143–147, MaxTime=120 с. Ограниченный поиск: пик&lt;30% на обучающих seed, независимая проверка 1001–1020. Это учебная агентная модель без медицинской калибровки.</a:t>
             </a:r>
           </a:p>
           <a:p xmlns:a="http://schemas.openxmlformats.org/drawingml/2006/main">
@@ -1879,7 +2560,7 @@
   </p:cSld>
   <p:clrMap bg1="lt1" tx1="dk1" bg2="lt2" tx2="dk2" accent1="accent1" accent2="accent2" accent3="accent3" accent4="accent4" accent5="accent5" accent6="accent6" hlink="hlink" folHlink="folHlink"/>
   <p:sldLayoutIdLst>
-    <p:sldLayoutId xmlns:r="http://schemas.openxmlformats.org/officeDocument/2006/relationships" id="2147483649" r:id="R53a06fe857724b46"/>
+    <p:sldLayoutId xmlns:r="http://schemas.openxmlformats.org/officeDocument/2006/relationships" id="2147483649" r:id="R5d6c9c4a891d4f2d"/>
   </p:sldLayoutIdLst>
   <p:txStyles>
     <p:titleStyle>
@@ -2496,7 +3177,7 @@
           <p:nvPr/>
         </p:nvPicPr>
         <p:blipFill>
-          <a:blip xmlns:r="http://schemas.openxmlformats.org/officeDocument/2006/relationships" xmlns:a="http://schemas.openxmlformats.org/drawingml/2006/main" r:embed="R01c7ac56b1024fdf"/>
+          <a:blip xmlns:r="http://schemas.openxmlformats.org/officeDocument/2006/relationships" xmlns:a="http://schemas.openxmlformats.org/drawingml/2006/main" r:embed="R96499022a7a44b62"/>
           <a:stretch xmlns:a="http://schemas.openxmlformats.org/drawingml/2006/main"/>
         </p:blipFill>
         <p:spPr>
@@ -2669,7 +3350,7 @@
                 <a:ea typeface="Calibri"/>
                 <a:cs typeface="Calibri"/>
               </a:rPr>
-              <a:t>Агрегированная модель TCP/Reno и RED</a:t>
+              <a:t>Агентная SIR: города, миграция и оптимизация</a:t>
             </a:r>
           </a:p>
         </p:txBody>
@@ -2986,7 +3667,7 @@
                 <a:ea typeface="Calibri"/>
                 <a:cs typeface="Calibri"/>
               </a:rPr>
-              <a:t>Число потоков меняет окна и состояние очереди</a:t>
+              <a:t>Период болезни и выявление исследованы отдельно</a:t>
             </a:r>
           </a:p>
         </p:txBody>
@@ -3031,7 +3712,7 @@
           <p:nvPr/>
         </p:nvPicPr>
         <p:blipFill>
-          <a:blip xmlns:r="http://schemas.openxmlformats.org/officeDocument/2006/relationships" xmlns:a="http://schemas.openxmlformats.org/drawingml/2006/main" r:embed="Rdca23627a62e452d"/>
+          <a:blip xmlns:r="http://schemas.openxmlformats.org/officeDocument/2006/relationships" xmlns:a="http://schemas.openxmlformats.org/drawingml/2006/main" r:embed="R7c0a4e9e0aeb4d7a"/>
           <a:stretch xmlns:a="http://schemas.openxmlformats.org/drawingml/2006/main"/>
         </p:blipFill>
         <p:spPr>
@@ -3130,7 +3811,7 @@
           </a:ln>
         </p:spPr>
         <p:txBody>
-          <a:bodyPr xmlns:a="http://schemas.openxmlformats.org/drawingml/2006/main" anchor="ctr"/>
+          <a:bodyPr xmlns:a="http://schemas.openxmlformats.org/drawingml/2006/main" lIns="91440" tIns="45720" rIns="91440" bIns="45720" anchor="ctr"/>
           <a:lstStyle xmlns:a="http://schemas.openxmlformats.org/drawingml/2006/main"/>
           <a:p xmlns:a="http://schemas.openxmlformats.org/drawingml/2006/main">
             <a:pPr algn="ctr">
@@ -3139,6 +3820,9 @@
                 <a:solidFill>
                   <a:srgbClr val="0B4778"/>
                 </a:solidFill>
+                <a:latin typeface="Calibri"/>
+                <a:ea typeface="Calibri"/>
+                <a:cs typeface="Calibri"/>
               </a:defRPr>
             </a:pPr>
             <a:r>
@@ -3146,6 +3830,9 @@
                 <a:solidFill>
                   <a:srgbClr val="0B4778"/>
                 </a:solidFill>
+                <a:latin typeface="Calibri"/>
+                <a:ea typeface="Calibri"/>
+                <a:cs typeface="Calibri"/>
               </a:rPr>
               <a:t>10</a:t>
             </a:r>
@@ -3154,20 +3841,20 @@
       </p:sp>
       <p:pic>
         <p:nvPicPr>
-          <p:cNvPr id="23" name=""/>
+          <p:cNvPr id="23" name="06-plot.png" descr="06-plot.png"/>
           <p:cNvPicPr>
             <a:picLocks xmlns:a="http://schemas.openxmlformats.org/drawingml/2006/main" noChangeAspect="1"/>
           </p:cNvPicPr>
           <p:nvPr/>
         </p:nvPicPr>
         <p:blipFill>
-          <a:blip xmlns:r="http://schemas.openxmlformats.org/officeDocument/2006/relationships" xmlns:a="http://schemas.openxmlformats.org/drawingml/2006/main" r:embed="Rbdf25032f317435e"/>
+          <a:blip xmlns:r="http://schemas.openxmlformats.org/officeDocument/2006/relationships" xmlns:a="http://schemas.openxmlformats.org/drawingml/2006/main" r:embed="Lab4Slide10Picture1"/>
           <a:stretch xmlns:a="http://schemas.openxmlformats.org/drawingml/2006/main"/>
         </p:blipFill>
         <p:spPr>
           <a:xfrm xmlns:a="http://schemas.openxmlformats.org/drawingml/2006/main">
-            <a:off x="495300" y="1548194"/>
-            <a:ext cx="5391150" cy="3342513"/>
+            <a:off x="1034415" y="1062990"/>
+            <a:ext cx="4312920" cy="4312920"/>
           </a:xfrm>
           <a:prstGeom xmlns:a="http://schemas.openxmlformats.org/drawingml/2006/main" prst="rect">
             <a:avLst/>
@@ -3176,20 +3863,20 @@
       </p:pic>
       <p:pic>
         <p:nvPicPr>
-          <p:cNvPr id="24" name=""/>
+          <p:cNvPr id="24" name="07-plot.png" descr="07-plot.png"/>
           <p:cNvPicPr>
             <a:picLocks xmlns:a="http://schemas.openxmlformats.org/drawingml/2006/main" noChangeAspect="1"/>
           </p:cNvPicPr>
           <p:nvPr/>
         </p:nvPicPr>
         <p:blipFill>
-          <a:blip xmlns:r="http://schemas.openxmlformats.org/officeDocument/2006/relationships" xmlns:a="http://schemas.openxmlformats.org/drawingml/2006/main" r:embed="R4018c3c660b64206"/>
+          <a:blip xmlns:r="http://schemas.openxmlformats.org/officeDocument/2006/relationships" xmlns:a="http://schemas.openxmlformats.org/drawingml/2006/main" r:embed="Lab4Slide10Picture2"/>
           <a:stretch xmlns:a="http://schemas.openxmlformats.org/drawingml/2006/main"/>
         </p:blipFill>
         <p:spPr>
           <a:xfrm xmlns:a="http://schemas.openxmlformats.org/drawingml/2006/main">
-            <a:off x="6286500" y="1548194"/>
-            <a:ext cx="5391150" cy="3342513"/>
+            <a:off x="6410911" y="1548194"/>
+            <a:ext cx="5142328" cy="3342513"/>
           </a:xfrm>
           <a:prstGeom xmlns:a="http://schemas.openxmlformats.org/drawingml/2006/main" prst="rect">
             <a:avLst/>
@@ -3248,7 +3935,7 @@
                 <a:ea typeface="Calibri"/>
                 <a:cs typeface="Calibri"/>
               </a:rPr>
-              <a:t>Throughput при 5–40 потоках</a:t>
+              <a:t>Период инфекции: 10 и 14 дней</a:t>
             </a:r>
           </a:p>
         </p:txBody>
@@ -3305,7 +3992,7 @@
                 <a:ea typeface="Calibri"/>
                 <a:cs typeface="Calibri"/>
               </a:rPr>
-              <a:t>Средняя очередь по числу потоков</a:t>
+              <a:t>Выявление: на 3-й и 7-й день</a:t>
             </a:r>
           </a:p>
         </p:txBody>
@@ -3453,7 +4140,7 @@
                 <a:ea typeface="Calibri"/>
                 <a:cs typeface="Calibri"/>
               </a:rPr>
-              <a:t>Сигнал потери не равен числу потерянных пакетов</a:t>
+              <a:t>Размеры городов меняют результат миграции</a:t>
             </a:r>
           </a:p>
         </p:txBody>
@@ -3498,7 +4185,7 @@
           <p:nvPr/>
         </p:nvPicPr>
         <p:blipFill>
-          <a:blip xmlns:r="http://schemas.openxmlformats.org/officeDocument/2006/relationships" xmlns:a="http://schemas.openxmlformats.org/drawingml/2006/main" r:embed="Re42c556861144ed9"/>
+          <a:blip xmlns:r="http://schemas.openxmlformats.org/officeDocument/2006/relationships" xmlns:a="http://schemas.openxmlformats.org/drawingml/2006/main" r:embed="R5760f2ec7ee64bda"/>
           <a:stretch xmlns:a="http://schemas.openxmlformats.org/drawingml/2006/main"/>
         </p:blipFill>
         <p:spPr>
@@ -3597,7 +4284,7 @@
           </a:ln>
         </p:spPr>
         <p:txBody>
-          <a:bodyPr xmlns:a="http://schemas.openxmlformats.org/drawingml/2006/main" anchor="ctr"/>
+          <a:bodyPr xmlns:a="http://schemas.openxmlformats.org/drawingml/2006/main" lIns="91440" tIns="45720" rIns="91440" bIns="45720" anchor="ctr"/>
           <a:lstStyle xmlns:a="http://schemas.openxmlformats.org/drawingml/2006/main"/>
           <a:p xmlns:a="http://schemas.openxmlformats.org/drawingml/2006/main">
             <a:pPr algn="ctr">
@@ -3606,6 +4293,9 @@
                 <a:solidFill>
                   <a:srgbClr val="0B4778"/>
                 </a:solidFill>
+                <a:latin typeface="Calibri"/>
+                <a:ea typeface="Calibri"/>
+                <a:cs typeface="Calibri"/>
               </a:defRPr>
             </a:pPr>
             <a:r>
@@ -3613,6 +4303,9 @@
                 <a:solidFill>
                   <a:srgbClr val="0B4778"/>
                 </a:solidFill>
+                <a:latin typeface="Calibri"/>
+                <a:ea typeface="Calibri"/>
+                <a:cs typeface="Calibri"/>
               </a:rPr>
               <a:t>11</a:t>
             </a:r>
@@ -3621,20 +4314,20 @@
       </p:sp>
       <p:pic>
         <p:nvPicPr>
-          <p:cNvPr id="20" name=""/>
+          <p:cNvPr id="20" name="08-plot.png" descr="08-plot.png"/>
           <p:cNvPicPr>
             <a:picLocks xmlns:a="http://schemas.openxmlformats.org/drawingml/2006/main" noChangeAspect="1"/>
           </p:cNvPicPr>
           <p:nvPr/>
         </p:nvPicPr>
         <p:blipFill>
-          <a:blip xmlns:r="http://schemas.openxmlformats.org/officeDocument/2006/relationships" xmlns:a="http://schemas.openxmlformats.org/drawingml/2006/main" r:embed="R70ff7f0c90cf4cea"/>
+          <a:blip xmlns:r="http://schemas.openxmlformats.org/officeDocument/2006/relationships" xmlns:a="http://schemas.openxmlformats.org/drawingml/2006/main" r:embed="Lab4Slide11Picture1"/>
           <a:stretch xmlns:a="http://schemas.openxmlformats.org/drawingml/2006/main"/>
         </p:blipFill>
         <p:spPr>
           <a:xfrm xmlns:a="http://schemas.openxmlformats.org/drawingml/2006/main">
-            <a:off x="1196578" y="1468636"/>
-            <a:ext cx="6369844" cy="3949303"/>
+            <a:off x="1196578" y="1373088"/>
+            <a:ext cx="6369844" cy="4140399"/>
           </a:xfrm>
           <a:prstGeom xmlns:a="http://schemas.openxmlformats.org/drawingml/2006/main" prst="rect">
             <a:avLst/>
@@ -3693,7 +4386,7 @@
                 <a:ea typeface="Calibri"/>
                 <a:cs typeface="Calibri"/>
               </a:rPr>
-              <a:t>Важные ограничения:</a:t>
+              <a:t>Два набора населения:</a:t>
             </a:r>
           </a:p>
           <a:p xmlns:a="http://schemas.openxmlformats.org/drawingml/2006/main">
@@ -3722,7 +4415,7 @@
                 <a:ea typeface="Calibri"/>
                 <a:cs typeface="Calibri"/>
               </a:rPr>
-              <a:t>• трафик агрегирован;</a:t>
+              <a:t>1000 / 1000 / 1000</a:t>
             </a:r>
           </a:p>
           <a:p xmlns:a="http://schemas.openxmlformats.org/drawingml/2006/main">
@@ -3732,9 +4425,6 @@
                 <a:solidFill>
                   <a:srgbClr val="17232D"/>
                 </a:solidFill>
-                <a:latin typeface="Calibri"/>
-                <a:ea typeface="Calibri"/>
-                <a:cs typeface="Calibri"/>
               </a:defRPr>
             </a:pPr>
             <a:r>
@@ -3742,11 +4432,8 @@
                 <a:solidFill>
                   <a:srgbClr val="17232D"/>
                 </a:solidFill>
-                <a:latin typeface="Calibri"/>
-                <a:ea typeface="Calibri"/>
-                <a:cs typeface="Calibri"/>
-              </a:rPr>
-              <a:t>• шаг фиксирован;</a:t>
+              </a:rPr>
+              <a:t/>
             </a:r>
           </a:p>
           <a:p xmlns:a="http://schemas.openxmlformats.org/drawingml/2006/main">
@@ -3770,7 +4457,7 @@
                 <a:ea typeface="Calibri"/>
                 <a:cs typeface="Calibri"/>
               </a:rPr>
-              <a:t>• полный TCP не задан;</a:t>
+              <a:t>500 / 1000 / 1500</a:t>
             </a:r>
           </a:p>
           <a:p xmlns:a="http://schemas.openxmlformats.org/drawingml/2006/main">
@@ -3780,9 +4467,6 @@
                 <a:solidFill>
                   <a:srgbClr val="17232D"/>
                 </a:solidFill>
-                <a:latin typeface="Calibri"/>
-                <a:ea typeface="Calibri"/>
-                <a:cs typeface="Calibri"/>
               </a:defRPr>
             </a:pPr>
             <a:r>
@@ -3790,20 +4474,35 @@
                 <a:solidFill>
                   <a:srgbClr val="17232D"/>
                 </a:solidFill>
-                <a:latin typeface="Calibri"/>
-                <a:ea typeface="Calibri"/>
-                <a:cs typeface="Calibri"/>
-              </a:rPr>
-              <a:t>• p ≤ pmax.</a:t>
-            </a:r>
-          </a:p>
-          <a:p xmlns:a="http://schemas.openxmlformats.org/drawingml/2006/main">
-            <a:r>
+              </a:rPr>
               <a:t/>
             </a:r>
           </a:p>
           <a:p xmlns:a="http://schemas.openxmlformats.org/drawingml/2006/main">
             <a:pPr algn="l">
+              <a:defRPr sz="1650">
+                <a:solidFill>
+                  <a:srgbClr val="17232D"/>
+                </a:solidFill>
+                <a:latin typeface="Calibri"/>
+                <a:ea typeface="Calibri"/>
+                <a:cs typeface="Calibri"/>
+              </a:defRPr>
+            </a:pPr>
+            <a:r>
+              <a:rPr sz="1650">
+                <a:solidFill>
+                  <a:srgbClr val="17232D"/>
+                </a:solidFill>
+                <a:latin typeface="Calibri"/>
+                <a:ea typeface="Calibri"/>
+                <a:cs typeface="Calibri"/>
+              </a:rPr>
+              <a:t>6 интенсивностей</a:t>
+            </a:r>
+          </a:p>
+          <a:p xmlns:a="http://schemas.openxmlformats.org/drawingml/2006/main">
+            <a:pPr algn="l">
               <a:buNone/>
               <a:defRPr sz="1650" b="0">
                 <a:solidFill>
@@ -3823,7 +4522,49 @@
                 <a:ea typeface="Calibri"/>
                 <a:cs typeface="Calibri"/>
               </a:rPr>
-              <a:t>Счётчик фиксирует сигналы потокам за весь прогон.</a:t>
+              <a:t>3 seed на точку</a:t>
+            </a:r>
+          </a:p>
+          <a:p xmlns:a="http://schemas.openxmlformats.org/drawingml/2006/main">
+            <a:pPr algn="l">
+              <a:buNone/>
+              <a:defRPr sz="1650" b="0">
+                <a:solidFill>
+                  <a:srgbClr val="17232D"/>
+                </a:solidFill>
+              </a:defRPr>
+            </a:pPr>
+            <a:r>
+              <a:rPr sz="1650" b="0">
+                <a:solidFill>
+                  <a:srgbClr val="17232D"/>
+                </a:solidFill>
+              </a:rPr>
+              <a:t/>
+            </a:r>
+          </a:p>
+          <a:p xmlns:a="http://schemas.openxmlformats.org/drawingml/2006/main">
+            <a:pPr algn="l">
+              <a:buNone/>
+              <a:defRPr sz="1650" b="0">
+                <a:solidFill>
+                  <a:srgbClr val="17232D"/>
+                </a:solidFill>
+                <a:latin typeface="Calibri"/>
+                <a:ea typeface="Calibri"/>
+                <a:cs typeface="Calibri"/>
+              </a:defRPr>
+            </a:pPr>
+            <a:r>
+              <a:rPr sz="1650" b="0">
+                <a:solidFill>
+                  <a:srgbClr val="17232D"/>
+                </a:solidFill>
+                <a:latin typeface="Calibri"/>
+                <a:ea typeface="Calibri"/>
+                <a:cs typeface="Calibri"/>
+              </a:rPr>
+              <a:t>Всего 36 прогонов.</a:t>
             </a:r>
           </a:p>
         </p:txBody>
@@ -3862,7 +4603,7 @@
           <p:cNvPr id="12" name="top-band">
             <a:extLst xmlns:a="http://schemas.openxmlformats.org/drawingml/2006/main">
               <a:ext uri="{FF2B5EF4-FFF2-40B4-BE49-F238E27FC236}">
-                <a16:creationId xmlns:a16="http://schemas.microsoft.com/office/drawing/2014/main" id="{AF2585DF-AC5B-4323-9E8D-F5DD6ADEA7E0}"/>
+                <a16:creationId xmlns:a16="http://schemas.microsoft.com/office/drawing/2014/main" id="{3E922C0C-ABB8-4B25-8B75-A22816007ED8}"/>
               </a:ext>
             </a:extLst>
           </p:cNvPr>
@@ -3893,7 +4634,7 @@
           <p:cNvPr id="2" name="top-accent">
             <a:extLst xmlns:a="http://schemas.openxmlformats.org/drawingml/2006/main">
               <a:ext uri="{FF2B5EF4-FFF2-40B4-BE49-F238E27FC236}">
-                <a16:creationId xmlns:a16="http://schemas.microsoft.com/office/drawing/2014/main" id="{F961FBD9-A3D3-4B4D-8148-6A8EA0582EC5}"/>
+                <a16:creationId xmlns:a16="http://schemas.microsoft.com/office/drawing/2014/main" id="{7EE8CE78-6CCA-4896-BD8F-45BAF9436A93}"/>
               </a:ext>
             </a:extLst>
           </p:cNvPr>
@@ -3924,7 +4665,7 @@
           <p:cNvPr id="3" name="slide-title">
             <a:extLst xmlns:a="http://schemas.openxmlformats.org/drawingml/2006/main">
               <a:ext uri="{FF2B5EF4-FFF2-40B4-BE49-F238E27FC236}">
-                <a16:creationId xmlns:a16="http://schemas.microsoft.com/office/drawing/2014/main" id="{611B50FA-2F33-49D5-92A3-2006E35CA51B}"/>
+                <a16:creationId xmlns:a16="http://schemas.microsoft.com/office/drawing/2014/main" id="{C62500AA-CE4D-4C73-B451-CD3F2446F462}"/>
               </a:ext>
             </a:extLst>
           </p:cNvPr>
@@ -3971,7 +4712,7 @@
                 <a:ea typeface="Calibri"/>
                 <a:cs typeface="Calibri"/>
               </a:rPr>
-              <a:t>Базовый сценарий и серия сохранены в Jupyter</a:t>
+              <a:t>BorgMOEA одновременно снижает две цели</a:t>
             </a:r>
           </a:p>
         </p:txBody>
@@ -3981,7 +4722,7 @@
           <p:cNvPr id="4" name="footer-rule">
             <a:extLst xmlns:a="http://schemas.openxmlformats.org/drawingml/2006/main">
               <a:ext uri="{FF2B5EF4-FFF2-40B4-BE49-F238E27FC236}">
-                <a16:creationId xmlns:a16="http://schemas.microsoft.com/office/drawing/2014/main" id="{A624C76B-A866-4FC3-BD4F-676A5F42372C}"/>
+                <a16:creationId xmlns:a16="http://schemas.microsoft.com/office/drawing/2014/main" id="{9E879AF2-EE9B-4B99-8FB6-38FBBBE23734}"/>
               </a:ext>
             </a:extLst>
           </p:cNvPr>
@@ -4016,7 +4757,7 @@
           <p:nvPr/>
         </p:nvPicPr>
         <p:blipFill>
-          <a:blip xmlns:r="http://schemas.openxmlformats.org/officeDocument/2006/relationships" xmlns:a="http://schemas.openxmlformats.org/drawingml/2006/main" r:embed="R7473ea8d2b304bf7"/>
+          <a:blip xmlns:r="http://schemas.openxmlformats.org/officeDocument/2006/relationships" xmlns:a="http://schemas.openxmlformats.org/drawingml/2006/main" r:embed="Re433ac1b655a4942"/>
           <a:stretch xmlns:a="http://schemas.openxmlformats.org/drawingml/2006/main"/>
         </p:blipFill>
         <p:spPr>
@@ -4034,7 +4775,7 @@
           <p:cNvPr id="6" name="footer">
             <a:extLst xmlns:a="http://schemas.openxmlformats.org/drawingml/2006/main">
               <a:ext uri="{FF2B5EF4-FFF2-40B4-BE49-F238E27FC236}">
-                <a16:creationId xmlns:a16="http://schemas.microsoft.com/office/drawing/2014/main" id="{8F359995-F295-4F48-BFC9-5FDCEDF7972C}"/>
+                <a16:creationId xmlns:a16="http://schemas.microsoft.com/office/drawing/2014/main" id="{A40E70F6-15AE-4FE5-833C-900EFC805D21}"/>
               </a:ext>
             </a:extLst>
           </p:cNvPr>
@@ -4091,7 +4832,7 @@
           <p:cNvPr id="7" name="page-number">
             <a:extLst xmlns:a="http://schemas.openxmlformats.org/drawingml/2006/main">
               <a:ext uri="{FF2B5EF4-FFF2-40B4-BE49-F238E27FC236}">
-                <a16:creationId xmlns:a16="http://schemas.microsoft.com/office/drawing/2014/main" id="{018B0D7C-16CB-40EC-970C-B3565A5F931F}"/>
+                <a16:creationId xmlns:a16="http://schemas.microsoft.com/office/drawing/2014/main" id="{3DA4FA70-3A89-465E-95C3-6070F9DE63B8}"/>
               </a:ext>
             </a:extLst>
           </p:cNvPr>
@@ -4115,7 +4856,7 @@
           </a:ln>
         </p:spPr>
         <p:txBody>
-          <a:bodyPr xmlns:a="http://schemas.openxmlformats.org/drawingml/2006/main" anchor="ctr"/>
+          <a:bodyPr xmlns:a="http://schemas.openxmlformats.org/drawingml/2006/main" lIns="91440" tIns="45720" rIns="91440" bIns="45720" anchor="ctr"/>
           <a:lstStyle xmlns:a="http://schemas.openxmlformats.org/drawingml/2006/main"/>
           <a:p xmlns:a="http://schemas.openxmlformats.org/drawingml/2006/main">
             <a:pPr algn="ctr">
@@ -4124,6 +4865,9 @@
                 <a:solidFill>
                   <a:srgbClr val="0B4778"/>
                 </a:solidFill>
+                <a:latin typeface="Calibri"/>
+                <a:ea typeface="Calibri"/>
+                <a:cs typeface="Calibri"/>
               </a:defRPr>
             </a:pPr>
             <a:r>
@@ -4131,6 +4875,9 @@
                 <a:solidFill>
                   <a:srgbClr val="0B4778"/>
                 </a:solidFill>
+                <a:latin typeface="Calibri"/>
+                <a:ea typeface="Calibri"/>
+                <a:cs typeface="Calibri"/>
               </a:rPr>
               <a:t>12</a:t>
             </a:r>
@@ -4139,20 +4886,20 @@
       </p:sp>
       <p:pic>
         <p:nvPicPr>
-          <p:cNvPr id="23" name=""/>
+          <p:cNvPr id="23" name="04-plot.png" descr="04-plot.png"/>
           <p:cNvPicPr>
             <a:picLocks xmlns:a="http://schemas.openxmlformats.org/drawingml/2006/main" noChangeAspect="1"/>
           </p:cNvPicPr>
           <p:nvPr/>
         </p:nvPicPr>
         <p:blipFill>
-          <a:blip xmlns:r="http://schemas.openxmlformats.org/officeDocument/2006/relationships" xmlns:a="http://schemas.openxmlformats.org/drawingml/2006/main" r:embed="R0ae9016c1e494f33"/>
+          <a:blip xmlns:r="http://schemas.openxmlformats.org/officeDocument/2006/relationships" xmlns:a="http://schemas.openxmlformats.org/drawingml/2006/main" r:embed="Lab4Slide12Picture1"/>
           <a:stretch xmlns:a="http://schemas.openxmlformats.org/drawingml/2006/main"/>
         </p:blipFill>
         <p:spPr>
           <a:xfrm xmlns:a="http://schemas.openxmlformats.org/drawingml/2006/main">
-            <a:off x="495300" y="1640086"/>
-            <a:ext cx="5429250" cy="3053953"/>
+            <a:off x="495300" y="1467326"/>
+            <a:ext cx="5391150" cy="3504248"/>
           </a:xfrm>
           <a:prstGeom xmlns:a="http://schemas.openxmlformats.org/drawingml/2006/main" prst="rect">
             <a:avLst/>
@@ -4161,20 +4908,20 @@
       </p:pic>
       <p:pic>
         <p:nvPicPr>
-          <p:cNvPr id="24" name=""/>
+          <p:cNvPr id="24" name="09-plot.png" descr="09-plot.png"/>
           <p:cNvPicPr>
             <a:picLocks xmlns:a="http://schemas.openxmlformats.org/drawingml/2006/main" noChangeAspect="1"/>
           </p:cNvPicPr>
           <p:nvPr/>
         </p:nvPicPr>
         <p:blipFill>
-          <a:blip xmlns:r="http://schemas.openxmlformats.org/officeDocument/2006/relationships" xmlns:a="http://schemas.openxmlformats.org/drawingml/2006/main" r:embed="R924e6a5dac1b48e0"/>
+          <a:blip xmlns:r="http://schemas.openxmlformats.org/officeDocument/2006/relationships" xmlns:a="http://schemas.openxmlformats.org/drawingml/2006/main" r:embed="Lab4Slide12Picture2"/>
           <a:stretch xmlns:a="http://schemas.openxmlformats.org/drawingml/2006/main"/>
         </p:blipFill>
         <p:spPr>
           <a:xfrm xmlns:a="http://schemas.openxmlformats.org/drawingml/2006/main">
-            <a:off x="6267450" y="1640086"/>
-            <a:ext cx="5429250" cy="3053953"/>
+            <a:off x="6410911" y="1548194"/>
+            <a:ext cx="5142328" cy="3342513"/>
           </a:xfrm>
           <a:prstGeom xmlns:a="http://schemas.openxmlformats.org/drawingml/2006/main" prst="rect">
             <a:avLst/>
@@ -4183,22 +4930,22 @@
       </p:pic>
       <p:sp>
         <p:nvSpPr>
-          <p:cNvPr id="10" name="sir-label">
-            <a:extLst xmlns:a="http://schemas.openxmlformats.org/drawingml/2006/main">
-              <a:ext uri="{FF2B5EF4-FFF2-40B4-BE49-F238E27FC236}">
-                <a16:creationId xmlns:a16="http://schemas.microsoft.com/office/drawing/2014/main" id="{2E8BCE43-1A01-4261-B5EA-2E52C7151B22}"/>
-              </a:ext>
-            </a:extLst>
-          </p:cNvPr>
-          <p:cNvSpPr>
-            <a:spLocks xmlns:a="http://schemas.openxmlformats.org/drawingml/2006/main" noGrp="1"/>
-          </p:cNvSpPr>
-          <p:nvPr/>
-        </p:nvSpPr>
-        <p:spPr>
-          <a:xfrm xmlns:a="http://schemas.openxmlformats.org/drawingml/2006/main">
-            <a:off x="1809750" y="5410200"/>
-            <a:ext cx="2762250" cy="400050"/>
+          <p:cNvPr id="10" name="phase-caption">
+            <a:extLst xmlns:a="http://schemas.openxmlformats.org/drawingml/2006/main">
+              <a:ext uri="{FF2B5EF4-FFF2-40B4-BE49-F238E27FC236}">
+                <a16:creationId xmlns:a16="http://schemas.microsoft.com/office/drawing/2014/main" id="{2D71CC65-DF69-40A8-BF29-AE487CD77F23}"/>
+              </a:ext>
+            </a:extLst>
+          </p:cNvPr>
+          <p:cNvSpPr>
+            <a:spLocks xmlns:a="http://schemas.openxmlformats.org/drawingml/2006/main" noGrp="1"/>
+          </p:cNvSpPr>
+          <p:nvPr/>
+        </p:nvSpPr>
+        <p:spPr>
+          <a:xfrm xmlns:a="http://schemas.openxmlformats.org/drawingml/2006/main">
+            <a:off x="838200" y="5619750"/>
+            <a:ext cx="4667250" cy="438150"/>
           </a:xfrm>
           <a:prstGeom xmlns:a="http://schemas.openxmlformats.org/drawingml/2006/main" prst="rect">
             <a:avLst/>
@@ -4215,7 +4962,7 @@
           <a:p xmlns:a="http://schemas.openxmlformats.org/drawingml/2006/main">
             <a:pPr algn="ctr">
               <a:buNone/>
-              <a:defRPr sz="1575" b="1">
+              <a:defRPr sz="1500" b="1">
                 <a:solidFill>
                   <a:srgbClr val="0B4778"/>
                 </a:solidFill>
@@ -4225,7 +4972,7 @@
               </a:defRPr>
             </a:pPr>
             <a:r>
-              <a:rPr sz="1575" b="1">
+              <a:rPr sz="1500" b="1">
                 <a:solidFill>
                   <a:srgbClr val="0B4778"/>
                 </a:solidFill>
@@ -4233,29 +4980,29 @@
                 <a:ea typeface="Calibri"/>
                 <a:cs typeface="Calibri"/>
               </a:rPr>
-              <a:t>25 потоков, seed 202604</a:t>
-            </a:r>
-          </a:p>
-        </p:txBody>
-      </p:sp>
-      <p:sp>
-        <p:nvSpPr>
-          <p:cNvPr id="11" name="lv-label">
-            <a:extLst xmlns:a="http://schemas.openxmlformats.org/drawingml/2006/main">
-              <a:ext uri="{FF2B5EF4-FFF2-40B4-BE49-F238E27FC236}">
-                <a16:creationId xmlns:a16="http://schemas.microsoft.com/office/drawing/2014/main" id="{9A8A30A9-3164-4FDB-BCBF-1144A37924B6}"/>
-              </a:ext>
-            </a:extLst>
-          </p:cNvPr>
-          <p:cNvSpPr>
-            <a:spLocks xmlns:a="http://schemas.openxmlformats.org/drawingml/2006/main" noGrp="1"/>
-          </p:cNvSpPr>
-          <p:nvPr/>
-        </p:nvSpPr>
-        <p:spPr>
-          <a:xfrm xmlns:a="http://schemas.openxmlformats.org/drawingml/2006/main">
-            <a:off x="7477125" y="5410200"/>
-            <a:ext cx="3048000" cy="400050"/>
+              <a:t>Пик и смертность: seed 43–47</a:t>
+            </a:r>
+          </a:p>
+        </p:txBody>
+      </p:sp>
+      <p:sp>
+        <p:nvSpPr>
+          <p:cNvPr id="11" name="inv-caption">
+            <a:extLst xmlns:a="http://schemas.openxmlformats.org/drawingml/2006/main">
+              <a:ext uri="{FF2B5EF4-FFF2-40B4-BE49-F238E27FC236}">
+                <a16:creationId xmlns:a16="http://schemas.microsoft.com/office/drawing/2014/main" id="{D6659F4D-F984-4216-9789-5FB1AF7A9034}"/>
+              </a:ext>
+            </a:extLst>
+          </p:cNvPr>
+          <p:cNvSpPr>
+            <a:spLocks xmlns:a="http://schemas.openxmlformats.org/drawingml/2006/main" noGrp="1"/>
+          </p:cNvSpPr>
+          <p:nvPr/>
+        </p:nvSpPr>
+        <p:spPr>
+          <a:xfrm xmlns:a="http://schemas.openxmlformats.org/drawingml/2006/main">
+            <a:off x="6667500" y="5619750"/>
+            <a:ext cx="4629150" cy="438150"/>
           </a:xfrm>
           <a:prstGeom xmlns:a="http://schemas.openxmlformats.org/drawingml/2006/main" prst="rect">
             <a:avLst/>
@@ -4272,7 +5019,7 @@
           <a:p xmlns:a="http://schemas.openxmlformats.org/drawingml/2006/main">
             <a:pPr algn="ctr">
               <a:buNone/>
-              <a:defRPr sz="1575" b="1">
+              <a:defRPr sz="1500" b="1">
                 <a:solidFill>
                   <a:srgbClr val="0B4778"/>
                 </a:solidFill>
@@ -4282,7 +5029,7 @@
               </a:defRPr>
             </a:pPr>
             <a:r>
-              <a:rPr sz="1575" b="1">
+              <a:rPr sz="1500" b="1">
                 <a:solidFill>
                   <a:srgbClr val="0B4778"/>
                 </a:solidFill>
@@ -4290,7 +5037,7 @@
                 <a:ea typeface="Calibri"/>
                 <a:cs typeface="Calibri"/>
               </a:rPr>
-              <a:t>5–40 потоков, отдельные seed</a:t>
+              <a:t>Повторный поиск: seed 143–147</a:t>
             </a:r>
           </a:p>
         </p:txBody>
@@ -4298,7 +5045,7 @@
     </p:spTree>
     <p:extLst>
       <p:ext uri="{BB962C8B-B14F-4D97-AF65-F5344CB8AC3E}">
-        <p14:creationId xmlns:p14="http://schemas.microsoft.com/office/powerpoint/2010/main" val="413898477"/>
+        <p14:creationId xmlns:p14="http://schemas.microsoft.com/office/powerpoint/2010/main" val="824566167"/>
       </p:ext>
     </p:extLst>
   </p:cSld>
@@ -4329,7 +5076,7 @@
           <p:cNvPr id="10" name="top-band">
             <a:extLst xmlns:a="http://schemas.openxmlformats.org/drawingml/2006/main">
               <a:ext uri="{FF2B5EF4-FFF2-40B4-BE49-F238E27FC236}">
-                <a16:creationId xmlns:a16="http://schemas.microsoft.com/office/drawing/2014/main" id="{6D573241-9EE9-4DF9-8086-F9A4F38D199C}"/>
+                <a16:creationId xmlns:a16="http://schemas.microsoft.com/office/drawing/2014/main" id="{4B4A040E-4FA4-4C92-9639-20B50A1DA80E}"/>
               </a:ext>
             </a:extLst>
           </p:cNvPr>
@@ -4360,7 +5107,7 @@
           <p:cNvPr id="2" name="top-accent">
             <a:extLst xmlns:a="http://schemas.openxmlformats.org/drawingml/2006/main">
               <a:ext uri="{FF2B5EF4-FFF2-40B4-BE49-F238E27FC236}">
-                <a16:creationId xmlns:a16="http://schemas.microsoft.com/office/drawing/2014/main" id="{FF6378DF-5E8F-4722-97E0-1107CA5B62BB}"/>
+                <a16:creationId xmlns:a16="http://schemas.microsoft.com/office/drawing/2014/main" id="{0E2760E0-2BFB-41A3-B4B9-FC44F2B820FF}"/>
               </a:ext>
             </a:extLst>
           </p:cNvPr>
@@ -4391,7 +5138,7 @@
           <p:cNvPr id="3" name="slide-title">
             <a:extLst xmlns:a="http://schemas.openxmlformats.org/drawingml/2006/main">
               <a:ext uri="{FF2B5EF4-FFF2-40B4-BE49-F238E27FC236}">
-                <a16:creationId xmlns:a16="http://schemas.microsoft.com/office/drawing/2014/main" id="{6DD81CC7-CBD2-4703-970A-156532EFA1E9}"/>
+                <a16:creationId xmlns:a16="http://schemas.microsoft.com/office/drawing/2014/main" id="{BD12DDF8-2FD0-4D82-98E2-44AD868D120D}"/>
               </a:ext>
             </a:extLst>
           </p:cNvPr>
@@ -4438,7 +5185,7 @@
                 <a:ea typeface="Calibri"/>
                 <a:cs typeface="Calibri"/>
               </a:rPr>
-              <a:t>Десять тестов проверяют ограничения реализации</a:t>
+              <a:t>Отдельный сценарий анализирует готовые CSV</a:t>
             </a:r>
           </a:p>
         </p:txBody>
@@ -4448,7 +5195,7 @@
           <p:cNvPr id="4" name="footer-rule">
             <a:extLst xmlns:a="http://schemas.openxmlformats.org/drawingml/2006/main">
               <a:ext uri="{FF2B5EF4-FFF2-40B4-BE49-F238E27FC236}">
-                <a16:creationId xmlns:a16="http://schemas.microsoft.com/office/drawing/2014/main" id="{F606674E-824A-4C30-AC07-9394E7D209DA}"/>
+                <a16:creationId xmlns:a16="http://schemas.microsoft.com/office/drawing/2014/main" id="{75E0F864-667E-4385-A6F2-CC1F5D66DDEE}"/>
               </a:ext>
             </a:extLst>
           </p:cNvPr>
@@ -4483,7 +5230,7 @@
           <p:nvPr/>
         </p:nvPicPr>
         <p:blipFill>
-          <a:blip xmlns:r="http://schemas.openxmlformats.org/officeDocument/2006/relationships" xmlns:a="http://schemas.openxmlformats.org/drawingml/2006/main" r:embed="R02356cced2b74e1e"/>
+          <a:blip xmlns:r="http://schemas.openxmlformats.org/officeDocument/2006/relationships" xmlns:a="http://schemas.openxmlformats.org/drawingml/2006/main" r:embed="R0d8b7c92c70b46c3"/>
           <a:stretch xmlns:a="http://schemas.openxmlformats.org/drawingml/2006/main"/>
         </p:blipFill>
         <p:spPr>
@@ -4501,7 +5248,7 @@
           <p:cNvPr id="6" name="footer">
             <a:extLst xmlns:a="http://schemas.openxmlformats.org/drawingml/2006/main">
               <a:ext uri="{FF2B5EF4-FFF2-40B4-BE49-F238E27FC236}">
-                <a16:creationId xmlns:a16="http://schemas.microsoft.com/office/drawing/2014/main" id="{5B26CBF1-396E-4033-AAF9-489271389BCC}"/>
+                <a16:creationId xmlns:a16="http://schemas.microsoft.com/office/drawing/2014/main" id="{E83CD01B-7F94-4DBC-84F5-40CECFAF3CBC}"/>
               </a:ext>
             </a:extLst>
           </p:cNvPr>
@@ -4558,7 +5305,7 @@
           <p:cNvPr id="7" name="page-number">
             <a:extLst xmlns:a="http://schemas.openxmlformats.org/drawingml/2006/main">
               <a:ext uri="{FF2B5EF4-FFF2-40B4-BE49-F238E27FC236}">
-                <a16:creationId xmlns:a16="http://schemas.microsoft.com/office/drawing/2014/main" id="{A5627C61-6ADF-48E9-A24A-976D6E940B6B}"/>
+                <a16:creationId xmlns:a16="http://schemas.microsoft.com/office/drawing/2014/main" id="{C3C7CEEC-053D-4D70-931C-82E3AD18B7D3}"/>
               </a:ext>
             </a:extLst>
           </p:cNvPr>
@@ -4582,7 +5329,7 @@
           </a:ln>
         </p:spPr>
         <p:txBody>
-          <a:bodyPr xmlns:a="http://schemas.openxmlformats.org/drawingml/2006/main" anchor="ctr"/>
+          <a:bodyPr xmlns:a="http://schemas.openxmlformats.org/drawingml/2006/main" lIns="91440" tIns="45720" rIns="91440" bIns="45720" anchor="ctr"/>
           <a:lstStyle xmlns:a="http://schemas.openxmlformats.org/drawingml/2006/main"/>
           <a:p xmlns:a="http://schemas.openxmlformats.org/drawingml/2006/main">
             <a:pPr algn="ctr">
@@ -4591,6 +5338,9 @@
                 <a:solidFill>
                   <a:srgbClr val="0B4778"/>
                 </a:solidFill>
+                <a:latin typeface="Calibri"/>
+                <a:ea typeface="Calibri"/>
+                <a:cs typeface="Calibri"/>
               </a:defRPr>
             </a:pPr>
             <a:r>
@@ -4598,6 +5348,9 @@
                 <a:solidFill>
                   <a:srgbClr val="0B4778"/>
                 </a:solidFill>
+                <a:latin typeface="Calibri"/>
+                <a:ea typeface="Calibri"/>
+                <a:cs typeface="Calibri"/>
               </a:rPr>
               <a:t>13</a:t>
             </a:r>
@@ -4606,20 +5359,20 @@
       </p:sp>
       <p:pic>
         <p:nvPicPr>
-          <p:cNvPr id="20" name=""/>
+          <p:cNvPr id="20" name="05-plot.png" descr="05-plot.png"/>
           <p:cNvPicPr>
             <a:picLocks xmlns:a="http://schemas.openxmlformats.org/drawingml/2006/main" noChangeAspect="1"/>
           </p:cNvPicPr>
           <p:nvPr/>
         </p:nvPicPr>
         <p:blipFill>
-          <a:blip xmlns:r="http://schemas.openxmlformats.org/officeDocument/2006/relationships" xmlns:a="http://schemas.openxmlformats.org/drawingml/2006/main" r:embed="Rc046a797ef2b4120"/>
+          <a:blip xmlns:r="http://schemas.openxmlformats.org/officeDocument/2006/relationships" xmlns:a="http://schemas.openxmlformats.org/drawingml/2006/main" r:embed="Lab4Slide13Picture1"/>
           <a:stretch xmlns:a="http://schemas.openxmlformats.org/drawingml/2006/main"/>
         </p:blipFill>
         <p:spPr>
           <a:xfrm xmlns:a="http://schemas.openxmlformats.org/drawingml/2006/main">
-            <a:off x="514350" y="1241822"/>
-            <a:ext cx="7200900" cy="4050506"/>
+            <a:off x="1959746" y="895350"/>
+            <a:ext cx="4843508" cy="5095875"/>
           </a:xfrm>
           <a:prstGeom xmlns:a="http://schemas.openxmlformats.org/drawingml/2006/main" prst="rect">
             <a:avLst/>
@@ -4628,22 +5381,22 @@
       </p:pic>
       <p:sp>
         <p:nvSpPr>
-          <p:cNvPr id="9" name="test-list">
-            <a:extLst xmlns:a="http://schemas.openxmlformats.org/drawingml/2006/main">
-              <a:ext uri="{FF2B5EF4-FFF2-40B4-BE49-F238E27FC236}">
-                <a16:creationId xmlns:a16="http://schemas.microsoft.com/office/drawing/2014/main" id="{C4D7CFCF-E677-40A4-ABD8-F9C618B52751}"/>
-              </a:ext>
-            </a:extLst>
-          </p:cNvPr>
-          <p:cNvSpPr>
-            <a:spLocks xmlns:a="http://schemas.openxmlformats.org/drawingml/2006/main" noGrp="1"/>
-          </p:cNvSpPr>
-          <p:nvPr/>
-        </p:nvSpPr>
-        <p:spPr>
-          <a:xfrm xmlns:a="http://schemas.openxmlformats.org/drawingml/2006/main">
-            <a:off x="8096250" y="1257300"/>
-            <a:ext cx="3219450" cy="3676650"/>
+          <p:cNvPr id="9" name="states">
+            <a:extLst xmlns:a="http://schemas.openxmlformats.org/drawingml/2006/main">
+              <a:ext uri="{FF2B5EF4-FFF2-40B4-BE49-F238E27FC236}">
+                <a16:creationId xmlns:a16="http://schemas.microsoft.com/office/drawing/2014/main" id="{14E3F9B0-44C3-4EC1-8902-2CA766BD760E}"/>
+              </a:ext>
+            </a:extLst>
+          </p:cNvPr>
+          <p:cNvSpPr>
+            <a:spLocks xmlns:a="http://schemas.openxmlformats.org/drawingml/2006/main" noGrp="1"/>
+          </p:cNvSpPr>
+          <p:nvPr/>
+        </p:nvSpPr>
+        <p:spPr>
+          <a:xfrm xmlns:a="http://schemas.openxmlformats.org/drawingml/2006/main">
+            <a:off x="8572500" y="1219200"/>
+            <a:ext cx="2552700" cy="3657600"/>
           </a:xfrm>
           <a:prstGeom xmlns:a="http://schemas.openxmlformats.org/drawingml/2006/main" prst="rect">
             <a:avLst/>
@@ -4678,7 +5431,12 @@
                 <a:ea typeface="Calibri"/>
                 <a:cs typeface="Calibri"/>
               </a:rPr>
-              <a:t>3 проверки RED</a:t>
+              <a:t>sir_visualize_dynamics</a:t>
+            </a:r>
+          </a:p>
+          <a:p xmlns:a="http://schemas.openxmlformats.org/drawingml/2006/main">
+            <a:r>
+              <a:t/>
             </a:r>
           </a:p>
           <a:p xmlns:a="http://schemas.openxmlformats.org/drawingml/2006/main">
@@ -4702,24 +5460,105 @@
                 <a:ea typeface="Calibri"/>
                 <a:cs typeface="Calibri"/>
               </a:rPr>
-              <a:t>7 проверок симуляции</a:t>
-            </a:r>
-          </a:p>
-          <a:p xmlns:a="http://schemas.openxmlformats.org/drawingml/2006/main">
-            <a:r>
+              <a:t>• пик и конечная I</a:t>
+            </a:r>
+          </a:p>
+          <a:p xmlns:a="http://schemas.openxmlformats.org/drawingml/2006/main">
+            <a:pPr algn="l">
+              <a:buNone/>
+              <a:defRPr sz="1650" b="0">
+                <a:solidFill>
+                  <a:srgbClr val="17232D"/>
+                </a:solidFill>
+                <a:latin typeface="Calibri"/>
+                <a:ea typeface="Calibri"/>
+                <a:cs typeface="Calibri"/>
+              </a:defRPr>
+            </a:pPr>
+            <a:r>
+              <a:rPr sz="1650" b="0">
+                <a:solidFill>
+                  <a:srgbClr val="17232D"/>
+                </a:solidFill>
+                <a:latin typeface="Calibri"/>
+                <a:ea typeface="Calibri"/>
+                <a:cs typeface="Calibri"/>
+              </a:rPr>
+              <a:t>• число умерших</a:t>
+            </a:r>
+          </a:p>
+          <a:p xmlns:a="http://schemas.openxmlformats.org/drawingml/2006/main">
+            <a:pPr algn="l">
+              <a:buNone/>
+              <a:defRPr sz="1650" b="0">
+                <a:solidFill>
+                  <a:srgbClr val="17232D"/>
+                </a:solidFill>
+                <a:latin typeface="Calibri"/>
+                <a:ea typeface="Calibri"/>
+                <a:cs typeface="Calibri"/>
+              </a:defRPr>
+            </a:pPr>
+            <a:r>
+              <a:rPr sz="1650" b="0">
+                <a:solidFill>
+                  <a:srgbClr val="17232D"/>
+                </a:solidFill>
+                <a:latin typeface="Calibri"/>
+                <a:ea typeface="Calibri"/>
+                <a:cs typeface="Calibri"/>
+              </a:rPr>
+              <a:t>• доля выздоровевших</a:t>
+            </a:r>
+          </a:p>
+          <a:p xmlns:a="http://schemas.openxmlformats.org/drawingml/2006/main">
+            <a:pPr algn="l">
+              <a:buNone/>
+              <a:defRPr sz="1650" b="0">
+                <a:solidFill>
+                  <a:srgbClr val="17232D"/>
+                </a:solidFill>
+              </a:defRPr>
+            </a:pPr>
+            <a:r>
+              <a:rPr sz="1650" b="0">
+                <a:solidFill>
+                  <a:srgbClr val="17232D"/>
+                </a:solidFill>
+              </a:rPr>
               <a:t/>
             </a:r>
           </a:p>
           <a:p xmlns:a="http://schemas.openxmlformats.org/drawingml/2006/main">
             <a:pPr algn="l">
+              <a:defRPr sz="1650">
+                <a:solidFill>
+                  <a:srgbClr val="17232D"/>
+                </a:solidFill>
+                <a:latin typeface="Calibri"/>
+                <a:ea typeface="Calibri"/>
+                <a:cs typeface="Calibri"/>
+              </a:defRPr>
+            </a:pPr>
+            <a:r>
+              <a:rPr sz="1650">
+                <a:solidFill>
+                  <a:srgbClr val="17232D"/>
+                </a:solidFill>
+                <a:latin typeface="Calibri"/>
+                <a:ea typeface="Calibri"/>
+                <a:cs typeface="Calibri"/>
+              </a:rPr>
+              <a:t>CSV сканирования β читается с диска.</a:t>
+            </a:r>
+          </a:p>
+          <a:p xmlns:a="http://schemas.openxmlformats.org/drawingml/2006/main">
+            <a:pPr algn="l">
               <a:buNone/>
               <a:defRPr sz="1650" b="0">
                 <a:solidFill>
                   <a:srgbClr val="17232D"/>
                 </a:solidFill>
-                <a:latin typeface="Calibri"/>
-                <a:ea typeface="Calibri"/>
-                <a:cs typeface="Calibri"/>
               </a:defRPr>
             </a:pPr>
             <a:r>
@@ -4727,11 +5566,8 @@
                 <a:solidFill>
                   <a:srgbClr val="17232D"/>
                 </a:solidFill>
-                <a:latin typeface="Calibri"/>
-                <a:ea typeface="Calibri"/>
-                <a:cs typeface="Calibri"/>
-              </a:rPr>
-              <a:t>✓ вероятность в границах</a:t>
+              </a:rPr>
+              <a:t/>
             </a:r>
           </a:p>
           <a:p xmlns:a="http://schemas.openxmlformats.org/drawingml/2006/main">
@@ -4755,84 +5591,7 @@
                 <a:ea typeface="Calibri"/>
                 <a:cs typeface="Calibri"/>
               </a:rPr>
-              <a:t>✓ очередь ≤ лимита</a:t>
-            </a:r>
-          </a:p>
-          <a:p xmlns:a="http://schemas.openxmlformats.org/drawingml/2006/main">
-            <a:pPr algn="l">
-              <a:buNone/>
-              <a:defRPr sz="1650" b="0">
-                <a:solidFill>
-                  <a:srgbClr val="17232D"/>
-                </a:solidFill>
-                <a:latin typeface="Calibri"/>
-                <a:ea typeface="Calibri"/>
-                <a:cs typeface="Calibri"/>
-              </a:defRPr>
-            </a:pPr>
-            <a:r>
-              <a:rPr sz="1650" b="0">
-                <a:solidFill>
-                  <a:srgbClr val="17232D"/>
-                </a:solidFill>
-                <a:latin typeface="Calibri"/>
-                <a:ea typeface="Calibri"/>
-                <a:cs typeface="Calibri"/>
-              </a:rPr>
-              <a:t>✓ окно не меньше 1</a:t>
-            </a:r>
-          </a:p>
-          <a:p xmlns:a="http://schemas.openxmlformats.org/drawingml/2006/main">
-            <a:pPr algn="l">
-              <a:buNone/>
-              <a:defRPr sz="1650" b="0">
-                <a:solidFill>
-                  <a:srgbClr val="17232D"/>
-                </a:solidFill>
-                <a:latin typeface="Calibri"/>
-                <a:ea typeface="Calibri"/>
-                <a:cs typeface="Calibri"/>
-              </a:defRPr>
-            </a:pPr>
-            <a:r>
-              <a:rPr sz="1650" b="0">
-                <a:solidFill>
-                  <a:srgbClr val="17232D"/>
-                </a:solidFill>
-                <a:latin typeface="Calibri"/>
-                <a:ea typeface="Calibri"/>
-                <a:cs typeface="Calibri"/>
-              </a:rPr>
-              <a:t>✓ throughput ≤ 20 Мбит/с</a:t>
-            </a:r>
-          </a:p>
-          <a:p xmlns:a="http://schemas.openxmlformats.org/drawingml/2006/main">
-            <a:r>
-              <a:t/>
-            </a:r>
-          </a:p>
-          <a:p xmlns:a="http://schemas.openxmlformats.org/drawingml/2006/main">
-            <a:pPr algn="l">
-              <a:buNone/>
-              <a:defRPr sz="1650" b="0">
-                <a:solidFill>
-                  <a:srgbClr val="17232D"/>
-                </a:solidFill>
-                <a:latin typeface="Calibri"/>
-                <a:ea typeface="Calibri"/>
-                <a:cs typeface="Calibri"/>
-              </a:defRPr>
-            </a:pPr>
-            <a:r>
-              <a:rPr sz="1650" b="0">
-                <a:solidFill>
-                  <a:srgbClr val="17232D"/>
-                </a:solidFill>
-                <a:latin typeface="Calibri"/>
-                <a:ea typeface="Calibri"/>
-                <a:cs typeface="Calibri"/>
-              </a:rPr>
-              <a:t>Тестовый seed — 42.</a:t>
+              <a:t>Новой симуляции нет.</a:t>
             </a:r>
           </a:p>
         </p:txBody>
@@ -4840,7 +5599,7 @@
     </p:spTree>
     <p:extLst>
       <p:ext uri="{BB962C8B-B14F-4D97-AF65-F5344CB8AC3E}">
-        <p14:creationId xmlns:p14="http://schemas.microsoft.com/office/powerpoint/2010/main" val="60678283"/>
+        <p14:creationId xmlns:p14="http://schemas.microsoft.com/office/powerpoint/2010/main" val="1586191248"/>
       </p:ext>
     </p:extLst>
   </p:cSld>
@@ -4871,7 +5630,7 @@
           <p:cNvPr id="11" name="top-band">
             <a:extLst xmlns:a="http://schemas.openxmlformats.org/drawingml/2006/main">
               <a:ext uri="{FF2B5EF4-FFF2-40B4-BE49-F238E27FC236}">
-                <a16:creationId xmlns:a16="http://schemas.microsoft.com/office/drawing/2014/main" id="{49734C38-27F5-41E9-AE40-B2280B0BA592}"/>
+                <a16:creationId xmlns:a16="http://schemas.microsoft.com/office/drawing/2014/main" id="{97E662BC-85D8-46EB-A645-0207A7B6B035}"/>
               </a:ext>
             </a:extLst>
           </p:cNvPr>
@@ -4902,7 +5661,7 @@
           <p:cNvPr id="2" name="top-accent">
             <a:extLst xmlns:a="http://schemas.openxmlformats.org/drawingml/2006/main">
               <a:ext uri="{FF2B5EF4-FFF2-40B4-BE49-F238E27FC236}">
-                <a16:creationId xmlns:a16="http://schemas.microsoft.com/office/drawing/2014/main" id="{AC85DC4D-DCA4-478D-8970-A99DD113D623}"/>
+                <a16:creationId xmlns:a16="http://schemas.microsoft.com/office/drawing/2014/main" id="{AECACF40-E972-4C5C-9D82-E920C434C7DD}"/>
               </a:ext>
             </a:extLst>
           </p:cNvPr>
@@ -4933,7 +5692,7 @@
           <p:cNvPr id="3" name="slide-title">
             <a:extLst xmlns:a="http://schemas.openxmlformats.org/drawingml/2006/main">
               <a:ext uri="{FF2B5EF4-FFF2-40B4-BE49-F238E27FC236}">
-                <a16:creationId xmlns:a16="http://schemas.microsoft.com/office/drawing/2014/main" id="{183DF33A-E339-44DE-836A-AA0421DD2CA8}"/>
+                <a16:creationId xmlns:a16="http://schemas.microsoft.com/office/drawing/2014/main" id="{EEA0F080-7270-4A74-97C7-3BCD4C006A67}"/>
               </a:ext>
             </a:extLst>
           </p:cNvPr>
@@ -4980,7 +5739,7 @@
                 <a:ea typeface="Calibri"/>
                 <a:cs typeface="Calibri"/>
               </a:rPr>
-              <a:t>Расчёты и документы собираются из своих каталогов</a:t>
+              <a:t>Порог агентной модели отличается от ОДУ</a:t>
             </a:r>
           </a:p>
         </p:txBody>
@@ -4990,7 +5749,7 @@
           <p:cNvPr id="4" name="footer-rule">
             <a:extLst xmlns:a="http://schemas.openxmlformats.org/drawingml/2006/main">
               <a:ext uri="{FF2B5EF4-FFF2-40B4-BE49-F238E27FC236}">
-                <a16:creationId xmlns:a16="http://schemas.microsoft.com/office/drawing/2014/main" id="{A263D394-B9E4-46CD-B043-C08BCA04F5D3}"/>
+                <a16:creationId xmlns:a16="http://schemas.microsoft.com/office/drawing/2014/main" id="{29DCE7D4-1781-4F89-BA7A-98A6C8680BBB}"/>
               </a:ext>
             </a:extLst>
           </p:cNvPr>
@@ -5018,14 +5777,14 @@
       </p:sp>
       <p:pic>
         <p:nvPicPr>
-          <p:cNvPr id="17" name=""/>
+          <p:cNvPr id="18" name=""/>
           <p:cNvPicPr>
             <a:picLocks xmlns:a="http://schemas.openxmlformats.org/drawingml/2006/main" noChangeAspect="1"/>
           </p:cNvPicPr>
           <p:nvPr/>
         </p:nvPicPr>
         <p:blipFill>
-          <a:blip xmlns:r="http://schemas.openxmlformats.org/officeDocument/2006/relationships" xmlns:a="http://schemas.openxmlformats.org/drawingml/2006/main" r:embed="R86f859ee648b4b61"/>
+          <a:blip xmlns:r="http://schemas.openxmlformats.org/officeDocument/2006/relationships" xmlns:a="http://schemas.openxmlformats.org/drawingml/2006/main" r:embed="Rccbae7d748154ca3"/>
           <a:stretch xmlns:a="http://schemas.openxmlformats.org/drawingml/2006/main"/>
         </p:blipFill>
         <p:spPr>
@@ -5043,7 +5802,7 @@
           <p:cNvPr id="6" name="footer">
             <a:extLst xmlns:a="http://schemas.openxmlformats.org/drawingml/2006/main">
               <a:ext uri="{FF2B5EF4-FFF2-40B4-BE49-F238E27FC236}">
-                <a16:creationId xmlns:a16="http://schemas.microsoft.com/office/drawing/2014/main" id="{5A96F062-4599-4561-8DB8-BFB6CD2D2F02}"/>
+                <a16:creationId xmlns:a16="http://schemas.microsoft.com/office/drawing/2014/main" id="{B481C67C-2B86-4F50-BF31-D7FC4B3C2FA4}"/>
               </a:ext>
             </a:extLst>
           </p:cNvPr>
@@ -5100,7 +5859,7 @@
           <p:cNvPr id="7" name="page-number">
             <a:extLst xmlns:a="http://schemas.openxmlformats.org/drawingml/2006/main">
               <a:ext uri="{FF2B5EF4-FFF2-40B4-BE49-F238E27FC236}">
-                <a16:creationId xmlns:a16="http://schemas.microsoft.com/office/drawing/2014/main" id="{BB35FBE1-4001-4D2A-A44F-90B33D244D8A}"/>
+                <a16:creationId xmlns:a16="http://schemas.microsoft.com/office/drawing/2014/main" id="{43A6D7F7-B636-4BA1-A9D4-58AD51F83617}"/>
               </a:ext>
             </a:extLst>
           </p:cNvPr>
@@ -5124,7 +5883,7 @@
           </a:ln>
         </p:spPr>
         <p:txBody>
-          <a:bodyPr xmlns:a="http://schemas.openxmlformats.org/drawingml/2006/main" anchor="ctr"/>
+          <a:bodyPr xmlns:a="http://schemas.openxmlformats.org/drawingml/2006/main" lIns="91440" tIns="45720" rIns="91440" bIns="45720" anchor="ctr"/>
           <a:lstStyle xmlns:a="http://schemas.openxmlformats.org/drawingml/2006/main"/>
           <a:p xmlns:a="http://schemas.openxmlformats.org/drawingml/2006/main">
             <a:pPr algn="ctr">
@@ -5133,6 +5892,9 @@
                 <a:solidFill>
                   <a:srgbClr val="0B4778"/>
                 </a:solidFill>
+                <a:latin typeface="Calibri"/>
+                <a:ea typeface="Calibri"/>
+                <a:cs typeface="Calibri"/>
               </a:defRPr>
             </a:pPr>
             <a:r>
@@ -5140,63 +5902,55 @@
                 <a:solidFill>
                   <a:srgbClr val="0B4778"/>
                 </a:solidFill>
+                <a:latin typeface="Calibri"/>
+                <a:ea typeface="Calibri"/>
+                <a:cs typeface="Calibri"/>
               </a:rPr>
               <a:t>14</a:t>
             </a:r>
           </a:p>
         </p:txBody>
       </p:sp>
-      <p:sp>
-        <p:nvSpPr>
-          <p:cNvPr id="8" name="command-bg">
-            <a:extLst xmlns:a="http://schemas.openxmlformats.org/drawingml/2006/main">
-              <a:ext uri="{FF2B5EF4-FFF2-40B4-BE49-F238E27FC236}">
-                <a16:creationId xmlns:a16="http://schemas.microsoft.com/office/drawing/2014/main" id="{FB589B73-FEBA-46DB-9E20-5C028F93720C}"/>
-              </a:ext>
-            </a:extLst>
-          </p:cNvPr>
-          <p:cNvSpPr>
-            <a:spLocks xmlns:a="http://schemas.openxmlformats.org/drawingml/2006/main" noGrp="1"/>
-          </p:cNvSpPr>
-          <p:nvPr/>
-        </p:nvSpPr>
-        <p:spPr>
-          <a:xfrm xmlns:a="http://schemas.openxmlformats.org/drawingml/2006/main">
-            <a:off x="704850" y="1066800"/>
-            <a:ext cx="4762500" cy="3905250"/>
-          </a:xfrm>
-          <a:prstGeom xmlns:a="http://schemas.openxmlformats.org/drawingml/2006/main" prst="rect">
-            <a:avLst/>
-          </a:prstGeom>
-          <a:solidFill xmlns:a="http://schemas.openxmlformats.org/drawingml/2006/main">
-            <a:srgbClr val="0D1117"/>
-          </a:solidFill>
-          <a:ln xmlns:a="http://schemas.openxmlformats.org/drawingml/2006/main" w="9525">
-            <a:solidFill>
-              <a:srgbClr val="263442"/>
-            </a:solidFill>
-            <a:prstDash val="solid"/>
-          </a:ln>
-        </p:spPr>
-      </p:sp>
-      <p:sp>
-        <p:nvSpPr>
-          <p:cNvPr id="9" name="commands">
-            <a:extLst xmlns:a="http://schemas.openxmlformats.org/drawingml/2006/main">
-              <a:ext uri="{FF2B5EF4-FFF2-40B4-BE49-F238E27FC236}">
-                <a16:creationId xmlns:a16="http://schemas.microsoft.com/office/drawing/2014/main" id="{9E3F3B85-21F1-4785-B94A-290C8777790F}"/>
-              </a:ext>
-            </a:extLst>
-          </p:cNvPr>
-          <p:cNvSpPr>
-            <a:spLocks xmlns:a="http://schemas.openxmlformats.org/drawingml/2006/main" noGrp="1"/>
-          </p:cNvSpPr>
-          <p:nvPr/>
-        </p:nvSpPr>
-        <p:spPr>
-          <a:xfrm xmlns:a="http://schemas.openxmlformats.org/drawingml/2006/main">
-            <a:off x="1104900" y="1333500"/>
-            <a:ext cx="3905250" cy="3333750"/>
+      <p:pic>
+        <p:nvPicPr>
+          <p:cNvPr id="21" name="10-plot.png" descr="10-plot.png"/>
+          <p:cNvPicPr>
+            <a:picLocks xmlns:a="http://schemas.openxmlformats.org/drawingml/2006/main" noChangeAspect="1"/>
+          </p:cNvPicPr>
+          <p:nvPr/>
+        </p:nvPicPr>
+        <p:blipFill>
+          <a:blip xmlns:r="http://schemas.openxmlformats.org/officeDocument/2006/relationships" xmlns:a="http://schemas.openxmlformats.org/drawingml/2006/main" r:embed="Lab4Slide14Picture1"/>
+          <a:stretch xmlns:a="http://schemas.openxmlformats.org/drawingml/2006/main"/>
+        </p:blipFill>
+        <p:spPr>
+          <a:xfrm xmlns:a="http://schemas.openxmlformats.org/drawingml/2006/main">
+            <a:off x="634805" y="1062228"/>
+            <a:ext cx="7340991" cy="4771644"/>
+          </a:xfrm>
+          <a:prstGeom xmlns:a="http://schemas.openxmlformats.org/drawingml/2006/main" prst="rect">
+            <a:avLst/>
+          </a:prstGeom>
+        </p:spPr>
+      </p:pic>
+      <p:sp>
+        <p:nvSpPr>
+          <p:cNvPr id="9" name="lv-metrics">
+            <a:extLst xmlns:a="http://schemas.openxmlformats.org/drawingml/2006/main">
+              <a:ext uri="{FF2B5EF4-FFF2-40B4-BE49-F238E27FC236}">
+                <a16:creationId xmlns:a16="http://schemas.microsoft.com/office/drawing/2014/main" id="{8F200868-6BF2-4C9D-9209-E1DB3409FFD8}"/>
+              </a:ext>
+            </a:extLst>
+          </p:cNvPr>
+          <p:cNvSpPr>
+            <a:spLocks xmlns:a="http://schemas.openxmlformats.org/drawingml/2006/main" noGrp="1"/>
+          </p:cNvSpPr>
+          <p:nvPr/>
+        </p:nvSpPr>
+        <p:spPr>
+          <a:xfrm xmlns:a="http://schemas.openxmlformats.org/drawingml/2006/main">
+            <a:off x="8458200" y="1447800"/>
+            <a:ext cx="2609850" cy="2571750"/>
           </a:xfrm>
           <a:prstGeom xmlns:a="http://schemas.openxmlformats.org/drawingml/2006/main" prst="rect">
             <a:avLst/>
@@ -5208,24 +5962,30 @@
           </a:ln>
         </p:spPr>
         <p:txBody>
-          <a:bodyPr xmlns:a="http://schemas.openxmlformats.org/drawingml/2006/main" anchor="ctr"/>
-          <a:lstStyle xmlns:a="http://schemas.openxmlformats.org/drawingml/2006/main"/>
-          <a:p xmlns:a="http://schemas.openxmlformats.org/drawingml/2006/main">
-            <a:pPr algn="l">
-              <a:buNone/>
-              <a:defRPr sz="2025" b="1">
-                <a:solidFill>
-                  <a:srgbClr val="D8DEE9"/>
-                </a:solidFill>
-              </a:defRPr>
-            </a:pPr>
-            <a:r>
-              <a:rPr sz="2025" b="1">
-                <a:solidFill>
-                  <a:srgbClr val="D8DEE9"/>
-                </a:solidFill>
-              </a:rPr>
-              <a:t>$ make tangle</a:t>
+          <a:bodyPr xmlns:a="http://schemas.openxmlformats.org/drawingml/2006/main" lIns="91440" tIns="45720" rIns="91440" bIns="45720" anchor="ctr"/>
+          <a:lstStyle xmlns:a="http://schemas.openxmlformats.org/drawingml/2006/main"/>
+          <a:p xmlns:a="http://schemas.openxmlformats.org/drawingml/2006/main">
+            <a:pPr algn="l">
+              <a:buNone/>
+              <a:defRPr sz="1725" b="0">
+                <a:solidFill>
+                  <a:srgbClr val="17232D"/>
+                </a:solidFill>
+                <a:latin typeface="Calibri"/>
+                <a:ea typeface="Calibri"/>
+                <a:cs typeface="Calibri"/>
+              </a:defRPr>
+            </a:pPr>
+            <a:r>
+              <a:rPr sz="1725" b="0">
+                <a:solidFill>
+                  <a:srgbClr val="17232D"/>
+                </a:solidFill>
+                <a:latin typeface="Calibri"/>
+                <a:ea typeface="Calibri"/>
+                <a:cs typeface="Calibri"/>
+              </a:rPr>
+              <a:t>Ориентир R₀ = 7</a:t>
             </a:r>
           </a:p>
           <a:p xmlns:a="http://schemas.openxmlformats.org/drawingml/2006/main">
@@ -5236,19 +5996,25 @@
           <a:p xmlns:a="http://schemas.openxmlformats.org/drawingml/2006/main">
             <a:pPr algn="l">
               <a:buNone/>
-              <a:defRPr sz="2025" b="1">
-                <a:solidFill>
-                  <a:srgbClr val="D8DEE9"/>
-                </a:solidFill>
-              </a:defRPr>
-            </a:pPr>
-            <a:r>
-              <a:rPr sz="2025" b="1">
-                <a:solidFill>
-                  <a:srgbClr val="D8DEE9"/>
-                </a:solidFill>
-              </a:rPr>
-              <a:t>$ make run</a:t>
+              <a:defRPr sz="1725" b="0">
+                <a:solidFill>
+                  <a:srgbClr val="17232D"/>
+                </a:solidFill>
+                <a:latin typeface="Calibri"/>
+                <a:ea typeface="Calibri"/>
+                <a:cs typeface="Calibri"/>
+              </a:defRPr>
+            </a:pPr>
+            <a:r>
+              <a:rPr sz="1725" b="0">
+                <a:solidFill>
+                  <a:srgbClr val="17232D"/>
+                </a:solidFill>
+                <a:latin typeface="Calibri"/>
+                <a:ea typeface="Calibri"/>
+                <a:cs typeface="Calibri"/>
+              </a:rPr>
+              <a:t>ОДУ: 1/14 ≈ 0,0714</a:t>
             </a:r>
           </a:p>
           <a:p xmlns:a="http://schemas.openxmlformats.org/drawingml/2006/main">
@@ -5259,19 +6025,25 @@
           <a:p xmlns:a="http://schemas.openxmlformats.org/drawingml/2006/main">
             <a:pPr algn="l">
               <a:buNone/>
-              <a:defRPr sz="2025" b="1">
-                <a:solidFill>
-                  <a:srgbClr val="D8DEE9"/>
-                </a:solidFill>
-              </a:defRPr>
-            </a:pPr>
-            <a:r>
-              <a:rPr sz="2025" b="1">
-                <a:solidFill>
-                  <a:srgbClr val="D8DEE9"/>
-                </a:solidFill>
-              </a:rPr>
-              <a:t>$ make notebooks</a:t>
+              <a:defRPr sz="1725" b="0">
+                <a:solidFill>
+                  <a:srgbClr val="17232D"/>
+                </a:solidFill>
+                <a:latin typeface="Calibri"/>
+                <a:ea typeface="Calibri"/>
+                <a:cs typeface="Calibri"/>
+              </a:defRPr>
+            </a:pPr>
+            <a:r>
+              <a:rPr sz="1725" b="0">
+                <a:solidFill>
+                  <a:srgbClr val="17232D"/>
+                </a:solidFill>
+                <a:latin typeface="Calibri"/>
+                <a:ea typeface="Calibri"/>
+                <a:cs typeface="Calibri"/>
+              </a:rPr>
+              <a:t>Сетка: β = 0,18</a:t>
             </a:r>
           </a:p>
           <a:p xmlns:a="http://schemas.openxmlformats.org/drawingml/2006/main">
@@ -5282,64 +6054,47 @@
           <a:p xmlns:a="http://schemas.openxmlformats.org/drawingml/2006/main">
             <a:pPr algn="l">
               <a:buNone/>
-              <a:defRPr sz="2025" b="1">
-                <a:solidFill>
-                  <a:srgbClr val="D8DEE9"/>
-                </a:solidFill>
-              </a:defRPr>
-            </a:pPr>
-            <a:r>
-              <a:rPr sz="2025" b="1">
-                <a:solidFill>
-                  <a:srgbClr val="D8DEE9"/>
-                </a:solidFill>
-              </a:rPr>
-              <a:t>$ make docs</a:t>
-            </a:r>
-          </a:p>
-          <a:p xmlns:a="http://schemas.openxmlformats.org/drawingml/2006/main">
-            <a:r>
-              <a:t/>
-            </a:r>
-          </a:p>
-          <a:p xmlns:a="http://schemas.openxmlformats.org/drawingml/2006/main">
-            <a:pPr algn="l">
-              <a:buNone/>
-              <a:defRPr sz="2025" b="1">
-                <a:solidFill>
-                  <a:srgbClr val="D8DEE9"/>
-                </a:solidFill>
-              </a:defRPr>
-            </a:pPr>
-            <a:r>
-              <a:rPr sz="2025" b="1">
-                <a:solidFill>
-                  <a:srgbClr val="D8DEE9"/>
-                </a:solidFill>
-              </a:rPr>
-              <a:t>$ make test</a:t>
-            </a:r>
-          </a:p>
-        </p:txBody>
-      </p:sp>
-      <p:sp>
-        <p:nvSpPr>
-          <p:cNvPr id="10" name="outputs">
-            <a:extLst xmlns:a="http://schemas.openxmlformats.org/drawingml/2006/main">
-              <a:ext uri="{FF2B5EF4-FFF2-40B4-BE49-F238E27FC236}">
-                <a16:creationId xmlns:a16="http://schemas.microsoft.com/office/drawing/2014/main" id="{5A56D3BE-9E70-48FC-9478-9913FE81F037}"/>
-              </a:ext>
-            </a:extLst>
-          </p:cNvPr>
-          <p:cNvSpPr>
-            <a:spLocks xmlns:a="http://schemas.openxmlformats.org/drawingml/2006/main" noGrp="1"/>
-          </p:cNvSpPr>
-          <p:nvPr/>
-        </p:nvSpPr>
-        <p:spPr>
-          <a:xfrm xmlns:a="http://schemas.openxmlformats.org/drawingml/2006/main">
-            <a:off x="6362700" y="1066800"/>
-            <a:ext cx="4476750" cy="4095750"/>
+              <a:defRPr sz="1725" b="0">
+                <a:solidFill>
+                  <a:srgbClr val="17232D"/>
+                </a:solidFill>
+                <a:latin typeface="Calibri"/>
+                <a:ea typeface="Calibri"/>
+                <a:cs typeface="Calibri"/>
+              </a:defRPr>
+            </a:pPr>
+            <a:r>
+              <a:rPr sz="1725" b="0">
+                <a:solidFill>
+                  <a:srgbClr val="17232D"/>
+                </a:solidFill>
+                <a:latin typeface="Calibri"/>
+                <a:ea typeface="Calibri"/>
+                <a:cs typeface="Calibri"/>
+              </a:rPr>
+              <a:t>Критерий: пик &gt; 5%</a:t>
+            </a:r>
+          </a:p>
+        </p:txBody>
+      </p:sp>
+      <p:sp>
+        <p:nvSpPr>
+          <p:cNvPr id="10" name="lv-takeaway">
+            <a:extLst xmlns:a="http://schemas.openxmlformats.org/drawingml/2006/main">
+              <a:ext uri="{FF2B5EF4-FFF2-40B4-BE49-F238E27FC236}">
+                <a16:creationId xmlns:a16="http://schemas.microsoft.com/office/drawing/2014/main" id="{9DB94CF0-4DC2-4C75-A4FE-51097031DEE2}"/>
+              </a:ext>
+            </a:extLst>
+          </p:cNvPr>
+          <p:cNvSpPr>
+            <a:spLocks xmlns:a="http://schemas.openxmlformats.org/drawingml/2006/main" noGrp="1"/>
+          </p:cNvSpPr>
+          <p:nvPr/>
+        </p:nvSpPr>
+        <p:spPr>
+          <a:xfrm xmlns:a="http://schemas.openxmlformats.org/drawingml/2006/main">
+            <a:off x="8210550" y="4305300"/>
+            <a:ext cx="3086100" cy="1066800"/>
           </a:xfrm>
           <a:prstGeom xmlns:a="http://schemas.openxmlformats.org/drawingml/2006/main" prst="rect">
             <a:avLst/>
@@ -5354,218 +6109,27 @@
           <a:bodyPr xmlns:a="http://schemas.openxmlformats.org/drawingml/2006/main" lIns="91440" tIns="45720" rIns="91440" bIns="45720" anchor="ctr"/>
           <a:lstStyle xmlns:a="http://schemas.openxmlformats.org/drawingml/2006/main"/>
           <a:p xmlns:a="http://schemas.openxmlformats.org/drawingml/2006/main">
-            <a:pPr algn="l">
-              <a:buNone/>
-              <a:defRPr sz="1800" b="0">
-                <a:solidFill>
-                  <a:srgbClr val="17232D"/>
-                </a:solidFill>
-                <a:latin typeface="Calibri"/>
-                <a:ea typeface="Calibri"/>
-                <a:cs typeface="Calibri"/>
-              </a:defRPr>
-            </a:pPr>
-            <a:r>
-              <a:rPr sz="1800" b="0">
-                <a:solidFill>
-                  <a:srgbClr val="17232D"/>
-                </a:solidFill>
-                <a:latin typeface="Calibri"/>
-                <a:ea typeface="Calibri"/>
-                <a:cs typeface="Calibri"/>
-              </a:rPr>
-              <a:t>В project:</a:t>
-            </a:r>
-          </a:p>
-          <a:p xmlns:a="http://schemas.openxmlformats.org/drawingml/2006/main">
-            <a:r>
-              <a:t/>
-            </a:r>
-          </a:p>
-          <a:p xmlns:a="http://schemas.openxmlformats.org/drawingml/2006/main">
-            <a:pPr algn="l">
-              <a:buNone/>
-              <a:defRPr sz="1800" b="0">
-                <a:solidFill>
-                  <a:srgbClr val="17232D"/>
-                </a:solidFill>
-                <a:latin typeface="Calibri"/>
-                <a:ea typeface="Calibri"/>
-                <a:cs typeface="Calibri"/>
-              </a:defRPr>
-            </a:pPr>
-            <a:r>
-              <a:rPr sz="1800" b="0">
-                <a:solidFill>
-                  <a:srgbClr val="17232D"/>
-                </a:solidFill>
-                <a:latin typeface="Calibri"/>
-                <a:ea typeface="Calibri"/>
-                <a:cs typeface="Calibri"/>
-              </a:rPr>
-              <a:t>• сценарии Julia;</a:t>
-            </a:r>
-          </a:p>
-          <a:p xmlns:a="http://schemas.openxmlformats.org/drawingml/2006/main">
-            <a:pPr algn="l">
-              <a:buNone/>
-              <a:defRPr sz="1800" b="0">
-                <a:solidFill>
-                  <a:srgbClr val="17232D"/>
-                </a:solidFill>
-                <a:latin typeface="Calibri"/>
-                <a:ea typeface="Calibri"/>
-                <a:cs typeface="Calibri"/>
-              </a:defRPr>
-            </a:pPr>
-            <a:r>
-              <a:rPr sz="1800" b="0">
-                <a:solidFill>
-                  <a:srgbClr val="17232D"/>
-                </a:solidFill>
-                <a:latin typeface="Calibri"/>
-                <a:ea typeface="Calibri"/>
-                <a:cs typeface="Calibri"/>
-              </a:rPr>
-              <a:t>• CSV и графики;</a:t>
-            </a:r>
-          </a:p>
-          <a:p xmlns:a="http://schemas.openxmlformats.org/drawingml/2006/main">
-            <a:pPr algn="l">
-              <a:buNone/>
-              <a:defRPr sz="1800" b="0">
-                <a:solidFill>
-                  <a:srgbClr val="17232D"/>
-                </a:solidFill>
-                <a:latin typeface="Calibri"/>
-                <a:ea typeface="Calibri"/>
-                <a:cs typeface="Calibri"/>
-              </a:defRPr>
-            </a:pPr>
-            <a:r>
-              <a:rPr sz="1800" b="0">
-                <a:solidFill>
-                  <a:srgbClr val="17232D"/>
-                </a:solidFill>
-                <a:latin typeface="Calibri"/>
-                <a:ea typeface="Calibri"/>
-                <a:cs typeface="Calibri"/>
-              </a:rPr>
-              <a:t>• выполненные IPYNB;</a:t>
-            </a:r>
-          </a:p>
-          <a:p xmlns:a="http://schemas.openxmlformats.org/drawingml/2006/main">
-            <a:pPr algn="l">
-              <a:buNone/>
-              <a:defRPr sz="1800" b="0">
-                <a:solidFill>
-                  <a:srgbClr val="17232D"/>
-                </a:solidFill>
-                <a:latin typeface="Calibri"/>
-                <a:ea typeface="Calibri"/>
-                <a:cs typeface="Calibri"/>
-              </a:defRPr>
-            </a:pPr>
-            <a:r>
-              <a:rPr sz="1800" b="0">
-                <a:solidFill>
-                  <a:srgbClr val="17232D"/>
-                </a:solidFill>
-                <a:latin typeface="Calibri"/>
-                <a:ea typeface="Calibri"/>
-                <a:cs typeface="Calibri"/>
-              </a:rPr>
-              <a:t>• HTML расчётов.</a:t>
-            </a:r>
-          </a:p>
-          <a:p xmlns:a="http://schemas.openxmlformats.org/drawingml/2006/main">
-            <a:pPr algn="l">
-              <a:buNone/>
-              <a:defRPr sz="1800" b="0">
-                <a:solidFill>
-                  <a:srgbClr val="17232D"/>
-                </a:solidFill>
-              </a:defRPr>
-            </a:pPr>
-            <a:r>
-              <a:rPr sz="1800" b="0">
-                <a:solidFill>
-                  <a:srgbClr val="17232D"/>
-                </a:solidFill>
-              </a:rPr>
-              <a:t/>
-            </a:r>
-          </a:p>
-          <a:p xmlns:a="http://schemas.openxmlformats.org/drawingml/2006/main">
-            <a:pPr algn="l">
-              <a:buNone/>
-              <a:defRPr sz="1800" b="0">
-                <a:solidFill>
-                  <a:srgbClr val="17232D"/>
-                </a:solidFill>
-                <a:latin typeface="Calibri"/>
-                <a:ea typeface="Calibri"/>
-                <a:cs typeface="Calibri"/>
-              </a:defRPr>
-            </a:pPr>
-            <a:r>
-              <a:rPr sz="1800" b="0">
-                <a:solidFill>
-                  <a:srgbClr val="17232D"/>
-                </a:solidFill>
-                <a:latin typeface="Calibri"/>
-                <a:ea typeface="Calibri"/>
-                <a:cs typeface="Calibri"/>
-              </a:rPr>
-              <a:t>В report: make all → DOCX/PDF.</a:t>
-            </a:r>
-          </a:p>
-          <a:p xmlns:a="http://schemas.openxmlformats.org/drawingml/2006/main">
-            <a:pPr algn="l">
-              <a:buNone/>
-              <a:defRPr sz="1800" b="0">
-                <a:solidFill>
-                  <a:srgbClr val="17232D"/>
-                </a:solidFill>
-                <a:latin typeface="Calibri"/>
-                <a:ea typeface="Calibri"/>
-                <a:cs typeface="Calibri"/>
-              </a:defRPr>
-            </a:pPr>
-            <a:r>
-              <a:rPr sz="1800" b="0">
-                <a:solidFill>
-                  <a:srgbClr val="17232D"/>
-                </a:solidFill>
-                <a:latin typeface="Calibri"/>
-                <a:ea typeface="Calibri"/>
-                <a:cs typeface="Calibri"/>
-              </a:rPr>
-              <a:t>В presentation: make all → HTML.</a:t>
-            </a:r>
-          </a:p>
-          <a:p xmlns:a="http://schemas.openxmlformats.org/drawingml/2006/main">
-            <a:pPr algn="l">
-              <a:buNone/>
-              <a:defRPr sz="1800" b="0">
-                <a:solidFill>
-                  <a:srgbClr val="17232D"/>
-                </a:solidFill>
-                <a:latin typeface="Calibri"/>
-                <a:ea typeface="Calibri"/>
-                <a:cs typeface="Calibri"/>
-              </a:defRPr>
-            </a:pPr>
-            <a:r>
-              <a:rPr sz="1800" b="0">
-                <a:solidFill>
-                  <a:srgbClr val="17232D"/>
-                </a:solidFill>
-                <a:latin typeface="Calibri"/>
-                <a:ea typeface="Calibri"/>
-                <a:cs typeface="Calibri"/>
-              </a:rPr>
-              <a:t>PPTX редактируется отдельно.</a:t>
+            <a:pPr algn="ctr">
+              <a:buNone/>
+              <a:defRPr sz="1575" b="1">
+                <a:solidFill>
+                  <a:srgbClr val="0B4778"/>
+                </a:solidFill>
+                <a:latin typeface="Calibri"/>
+                <a:ea typeface="Calibri"/>
+                <a:cs typeface="Calibri"/>
+              </a:defRPr>
+            </a:pPr>
+            <a:r>
+              <a:rPr sz="1575" b="1">
+                <a:solidFill>
+                  <a:srgbClr val="0B4778"/>
+                </a:solidFill>
+                <a:latin typeface="Calibri"/>
+                <a:ea typeface="Calibri"/>
+                <a:cs typeface="Calibri"/>
+              </a:rPr>
+              <a:t>Это первый порог сетки по среднему пику, а не точная аналитическая граница.</a:t>
             </a:r>
           </a:p>
         </p:txBody>
@@ -5573,7 +6137,7 @@
     </p:spTree>
     <p:extLst>
       <p:ext uri="{BB962C8B-B14F-4D97-AF65-F5344CB8AC3E}">
-        <p14:creationId xmlns:p14="http://schemas.microsoft.com/office/powerpoint/2010/main" val="1552567694"/>
+        <p14:creationId xmlns:p14="http://schemas.microsoft.com/office/powerpoint/2010/main" val="657116236"/>
       </p:ext>
     </p:extLst>
   </p:cSld>
@@ -5586,7 +6150,7 @@
     <p:bg>
       <p:bgPr>
         <a:solidFill xmlns:a="http://schemas.openxmlformats.org/drawingml/2006/main">
-          <a:srgbClr val="0B4778"/>
+          <a:srgbClr val="FFFFFF"/>
         </a:solidFill>
       </p:bgPr>
     </p:bg>
@@ -5601,10 +6165,10 @@
       </p:grpSpPr>
       <p:sp>
         <p:nvSpPr>
-          <p:cNvPr id="7" name="accent">
-            <a:extLst xmlns:a="http://schemas.openxmlformats.org/drawingml/2006/main">
-              <a:ext uri="{FF2B5EF4-FFF2-40B4-BE49-F238E27FC236}">
-                <a16:creationId xmlns:a16="http://schemas.microsoft.com/office/drawing/2014/main" id="{7EDC123F-A2A1-4A23-B400-58E76A7A62D7}"/>
+          <p:cNvPr id="12" name="top-band">
+            <a:extLst xmlns:a="http://schemas.openxmlformats.org/drawingml/2006/main">
+              <a:ext uri="{FF2B5EF4-FFF2-40B4-BE49-F238E27FC236}">
+                <a16:creationId xmlns:a16="http://schemas.microsoft.com/office/drawing/2014/main" id="{3E922C0C-ABB8-4B25-8B75-A22816007ED8}"/>
               </a:ext>
             </a:extLst>
           </p:cNvPr>
@@ -5616,7 +6180,38 @@
         <p:spPr>
           <a:xfrm xmlns:a="http://schemas.openxmlformats.org/drawingml/2006/main">
             <a:off x="0" y="0"/>
-            <a:ext cx="133350" cy="6858000"/>
+            <a:ext cx="12192000" cy="628650"/>
+          </a:xfrm>
+          <a:prstGeom xmlns:a="http://schemas.openxmlformats.org/drawingml/2006/main" prst="rect">
+            <a:avLst/>
+          </a:prstGeom>
+          <a:solidFill xmlns:a="http://schemas.openxmlformats.org/drawingml/2006/main">
+            <a:srgbClr val="0B4778"/>
+          </a:solidFill>
+          <a:ln xmlns:a="http://schemas.openxmlformats.org/drawingml/2006/main" w="0">
+            <a:noFill/>
+            <a:prstDash val="solid"/>
+          </a:ln>
+        </p:spPr>
+      </p:sp>
+      <p:sp>
+        <p:nvSpPr>
+          <p:cNvPr id="2" name="top-accent">
+            <a:extLst xmlns:a="http://schemas.openxmlformats.org/drawingml/2006/main">
+              <a:ext uri="{FF2B5EF4-FFF2-40B4-BE49-F238E27FC236}">
+                <a16:creationId xmlns:a16="http://schemas.microsoft.com/office/drawing/2014/main" id="{7EE8CE78-6CCA-4896-BD8F-45BAF9436A93}"/>
+              </a:ext>
+            </a:extLst>
+          </p:cNvPr>
+          <p:cNvSpPr>
+            <a:spLocks xmlns:a="http://schemas.openxmlformats.org/drawingml/2006/main" noGrp="1"/>
+          </p:cNvSpPr>
+          <p:nvPr/>
+        </p:nvSpPr>
+        <p:spPr>
+          <a:xfrm xmlns:a="http://schemas.openxmlformats.org/drawingml/2006/main">
+            <a:off x="0" y="628650"/>
+            <a:ext cx="12192000" cy="47625"/>
           </a:xfrm>
           <a:prstGeom xmlns:a="http://schemas.openxmlformats.org/drawingml/2006/main" prst="rect">
             <a:avLst/>
@@ -5630,22 +6225,110 @@
           </a:ln>
         </p:spPr>
       </p:sp>
+      <p:sp>
+        <p:nvSpPr>
+          <p:cNvPr id="3" name="slide-title">
+            <a:extLst xmlns:a="http://schemas.openxmlformats.org/drawingml/2006/main">
+              <a:ext uri="{FF2B5EF4-FFF2-40B4-BE49-F238E27FC236}">
+                <a16:creationId xmlns:a16="http://schemas.microsoft.com/office/drawing/2014/main" id="{C62500AA-CE4D-4C73-B451-CD3F2446F462}"/>
+              </a:ext>
+            </a:extLst>
+          </p:cNvPr>
+          <p:cNvSpPr>
+            <a:spLocks xmlns:a="http://schemas.openxmlformats.org/drawingml/2006/main" noGrp="1"/>
+          </p:cNvSpPr>
+          <p:nvPr/>
+        </p:nvSpPr>
+        <p:spPr>
+          <a:xfrm xmlns:a="http://schemas.openxmlformats.org/drawingml/2006/main">
+            <a:off x="609600" y="57150"/>
+            <a:ext cx="10763250" cy="523875"/>
+          </a:xfrm>
+          <a:prstGeom xmlns:a="http://schemas.openxmlformats.org/drawingml/2006/main" prst="rect">
+            <a:avLst/>
+          </a:prstGeom>
+          <a:noFill xmlns:a="http://schemas.openxmlformats.org/drawingml/2006/main"/>
+          <a:ln xmlns:a="http://schemas.openxmlformats.org/drawingml/2006/main" w="0">
+            <a:noFill/>
+            <a:prstDash val="solid"/>
+          </a:ln>
+        </p:spPr>
+        <p:txBody>
+          <a:bodyPr xmlns:a="http://schemas.openxmlformats.org/drawingml/2006/main" lIns="91440" tIns="45720" rIns="91440" bIns="45720" anchor="ctr"/>
+          <a:lstStyle xmlns:a="http://schemas.openxmlformats.org/drawingml/2006/main"/>
+          <a:p xmlns:a="http://schemas.openxmlformats.org/drawingml/2006/main">
+            <a:pPr algn="l">
+              <a:buNone/>
+              <a:defRPr sz="2250" b="1">
+                <a:solidFill>
+                  <a:srgbClr val="FFFFFF"/>
+                </a:solidFill>
+                <a:latin typeface="Calibri"/>
+                <a:ea typeface="Calibri"/>
+                <a:cs typeface="Calibri"/>
+              </a:defRPr>
+            </a:pPr>
+            <a:r>
+              <a:rPr sz="2250" b="1">
+                <a:solidFill>
+                  <a:srgbClr val="FFFFFF"/>
+                </a:solidFill>
+                <a:latin typeface="Calibri"/>
+                <a:ea typeface="Calibri"/>
+                <a:cs typeface="Calibri"/>
+              </a:rPr>
+              <a:t>Неоднородные города связаны перемещениями</a:t>
+            </a:r>
+          </a:p>
+        </p:txBody>
+      </p:sp>
+      <p:sp>
+        <p:nvSpPr>
+          <p:cNvPr id="4" name="footer-rule">
+            <a:extLst xmlns:a="http://schemas.openxmlformats.org/drawingml/2006/main">
+              <a:ext uri="{FF2B5EF4-FFF2-40B4-BE49-F238E27FC236}">
+                <a16:creationId xmlns:a16="http://schemas.microsoft.com/office/drawing/2014/main" id="{9E879AF2-EE9B-4B99-8FB6-38FBBBE23734}"/>
+              </a:ext>
+            </a:extLst>
+          </p:cNvPr>
+          <p:cNvSpPr>
+            <a:spLocks xmlns:a="http://schemas.openxmlformats.org/drawingml/2006/main" noGrp="1"/>
+          </p:cNvSpPr>
+          <p:nvPr/>
+        </p:nvSpPr>
+        <p:spPr>
+          <a:xfrm xmlns:a="http://schemas.openxmlformats.org/drawingml/2006/main">
+            <a:off x="514350" y="6419850"/>
+            <a:ext cx="11163300" cy="19050"/>
+          </a:xfrm>
+          <a:prstGeom xmlns:a="http://schemas.openxmlformats.org/drawingml/2006/main" prst="rect">
+            <a:avLst/>
+          </a:prstGeom>
+          <a:solidFill xmlns:a="http://schemas.openxmlformats.org/drawingml/2006/main">
+            <a:srgbClr val="B9D9E8"/>
+          </a:solidFill>
+          <a:ln xmlns:a="http://schemas.openxmlformats.org/drawingml/2006/main" w="0">
+            <a:noFill/>
+            <a:prstDash val="solid"/>
+          </a:ln>
+        </p:spPr>
+      </p:sp>
       <p:pic>
         <p:nvPicPr>
-          <p:cNvPr id="10" name=""/>
+          <p:cNvPr id="20" name=""/>
           <p:cNvPicPr>
             <a:picLocks xmlns:a="http://schemas.openxmlformats.org/drawingml/2006/main" noChangeAspect="1"/>
           </p:cNvPicPr>
           <p:nvPr/>
         </p:nvPicPr>
         <p:blipFill>
-          <a:blip xmlns:r="http://schemas.openxmlformats.org/officeDocument/2006/relationships" xmlns:a="http://schemas.openxmlformats.org/drawingml/2006/main" r:embed="R83e53895e82f4cb3"/>
+          <a:blip xmlns:r="http://schemas.openxmlformats.org/officeDocument/2006/relationships" xmlns:a="http://schemas.openxmlformats.org/drawingml/2006/main" r:embed="R62daedb82e3d4f37"/>
           <a:stretch xmlns:a="http://schemas.openxmlformats.org/drawingml/2006/main"/>
         </p:blipFill>
         <p:spPr>
           <a:xfrm xmlns:a="http://schemas.openxmlformats.org/drawingml/2006/main">
-            <a:off x="742950" y="716689"/>
-            <a:ext cx="781050" cy="662123"/>
+            <a:off x="552450" y="6495443"/>
+            <a:ext cx="304800" cy="258389"/>
           </a:xfrm>
           <a:prstGeom xmlns:a="http://schemas.openxmlformats.org/drawingml/2006/main" prst="rect">
             <a:avLst/>
@@ -5654,22 +6337,22 @@
       </p:pic>
       <p:sp>
         <p:nvSpPr>
-          <p:cNvPr id="3" name="conclusion-title">
-            <a:extLst xmlns:a="http://schemas.openxmlformats.org/drawingml/2006/main">
-              <a:ext uri="{FF2B5EF4-FFF2-40B4-BE49-F238E27FC236}">
-                <a16:creationId xmlns:a16="http://schemas.microsoft.com/office/drawing/2014/main" id="{05B54D60-5BA6-4B1C-AA38-11674D76AE8D}"/>
-              </a:ext>
-            </a:extLst>
-          </p:cNvPr>
-          <p:cNvSpPr>
-            <a:spLocks xmlns:a="http://schemas.openxmlformats.org/drawingml/2006/main" noGrp="1"/>
-          </p:cNvSpPr>
-          <p:nvPr/>
-        </p:nvSpPr>
-        <p:spPr>
-          <a:xfrm xmlns:a="http://schemas.openxmlformats.org/drawingml/2006/main">
-            <a:off x="1943100" y="723900"/>
-            <a:ext cx="8858250" cy="1257300"/>
+          <p:cNvPr id="6" name="footer">
+            <a:extLst xmlns:a="http://schemas.openxmlformats.org/drawingml/2006/main">
+              <a:ext uri="{FF2B5EF4-FFF2-40B4-BE49-F238E27FC236}">
+                <a16:creationId xmlns:a16="http://schemas.microsoft.com/office/drawing/2014/main" id="{A40E70F6-15AE-4FE5-833C-900EFC805D21}"/>
+              </a:ext>
+            </a:extLst>
+          </p:cNvPr>
+          <p:cNvSpPr>
+            <a:spLocks xmlns:a="http://schemas.openxmlformats.org/drawingml/2006/main" noGrp="1"/>
+          </p:cNvSpPr>
+          <p:nvPr/>
+        </p:nvSpPr>
+        <p:spPr>
+          <a:xfrm xmlns:a="http://schemas.openxmlformats.org/drawingml/2006/main">
+            <a:off x="971550" y="6486525"/>
+            <a:ext cx="7334250" cy="257175"/>
           </a:xfrm>
           <a:prstGeom xmlns:a="http://schemas.openxmlformats.org/drawingml/2006/main" prst="rect">
             <a:avLst/>
@@ -5686,71 +6369,322 @@
           <a:p xmlns:a="http://schemas.openxmlformats.org/drawingml/2006/main">
             <a:pPr algn="l">
               <a:buNone/>
-              <a:defRPr sz="3150" b="1">
-                <a:solidFill>
-                  <a:srgbClr val="FFFFFF"/>
-                </a:solidFill>
-                <a:latin typeface="Calibri"/>
-                <a:ea typeface="Calibri"/>
-                <a:cs typeface="Calibri"/>
-              </a:defRPr>
-            </a:pPr>
-            <a:r>
-              <a:rPr sz="3150" b="1">
-                <a:solidFill>
-                  <a:srgbClr val="FFFFFF"/>
-                </a:solidFill>
-                <a:latin typeface="Calibri"/>
-                <a:ea typeface="Calibri"/>
-                <a:cs typeface="Calibri"/>
-              </a:rPr>
-              <a:t>Учебная модель воспроизводит</a:t>
-            </a:r>
-          </a:p>
-          <a:p xmlns:a="http://schemas.openxmlformats.org/drawingml/2006/main">
-            <a:pPr algn="l">
-              <a:buNone/>
-              <a:defRPr sz="3150" b="1">
-                <a:solidFill>
-                  <a:srgbClr val="FFFFFF"/>
-                </a:solidFill>
-                <a:latin typeface="Calibri"/>
-                <a:ea typeface="Calibri"/>
-                <a:cs typeface="Calibri"/>
-              </a:defRPr>
-            </a:pPr>
-            <a:r>
-              <a:rPr sz="3150" b="1">
-                <a:solidFill>
-                  <a:srgbClr val="FFFFFF"/>
-                </a:solidFill>
-                <a:latin typeface="Calibri"/>
-                <a:ea typeface="Calibri"/>
-                <a:cs typeface="Calibri"/>
-              </a:rPr>
-              <a:t>обратную связь окон и очереди</a:t>
-            </a:r>
-          </a:p>
-        </p:txBody>
-      </p:sp>
-      <p:sp>
-        <p:nvSpPr>
-          <p:cNvPr id="4" name="conclusion-rule">
-            <a:extLst xmlns:a="http://schemas.openxmlformats.org/drawingml/2006/main">
-              <a:ext uri="{FF2B5EF4-FFF2-40B4-BE49-F238E27FC236}">
-                <a16:creationId xmlns:a16="http://schemas.microsoft.com/office/drawing/2014/main" id="{A6F50DB3-5845-402B-875A-F3D971960FB8}"/>
-              </a:ext>
-            </a:extLst>
-          </p:cNvPr>
-          <p:cNvSpPr>
-            <a:spLocks xmlns:a="http://schemas.openxmlformats.org/drawingml/2006/main" noGrp="1"/>
-          </p:cNvSpPr>
-          <p:nvPr/>
-        </p:nvSpPr>
-        <p:spPr>
-          <a:xfrm xmlns:a="http://schemas.openxmlformats.org/drawingml/2006/main">
-            <a:off x="1943100" y="2133600"/>
-            <a:ext cx="6286500" cy="38100"/>
+              <a:defRPr sz="900" b="0">
+                <a:solidFill>
+                  <a:srgbClr val="526675"/>
+                </a:solidFill>
+                <a:latin typeface="Calibri"/>
+                <a:ea typeface="Calibri"/>
+                <a:cs typeface="Calibri"/>
+              </a:defRPr>
+            </a:pPr>
+            <a:r>
+              <a:rPr sz="900" b="0">
+                <a:solidFill>
+                  <a:srgbClr val="526675"/>
+                </a:solidFill>
+                <a:latin typeface="Calibri"/>
+                <a:ea typeface="Calibri"/>
+                <a:cs typeface="Calibri"/>
+              </a:rPr>
+              <a:t>Имитационное моделирование · лабораторная работа № 4</a:t>
+            </a:r>
+          </a:p>
+        </p:txBody>
+      </p:sp>
+      <p:sp>
+        <p:nvSpPr>
+          <p:cNvPr id="7" name="page-number">
+            <a:extLst xmlns:a="http://schemas.openxmlformats.org/drawingml/2006/main">
+              <a:ext uri="{FF2B5EF4-FFF2-40B4-BE49-F238E27FC236}">
+                <a16:creationId xmlns:a16="http://schemas.microsoft.com/office/drawing/2014/main" id="{3DA4FA70-3A89-465E-95C3-6070F9DE63B8}"/>
+              </a:ext>
+            </a:extLst>
+          </p:cNvPr>
+          <p:cNvSpPr>
+            <a:spLocks xmlns:a="http://schemas.openxmlformats.org/drawingml/2006/main" noGrp="1"/>
+          </p:cNvSpPr>
+          <p:nvPr/>
+        </p:nvSpPr>
+        <p:spPr>
+          <a:xfrm xmlns:a="http://schemas.openxmlformats.org/drawingml/2006/main">
+            <a:off x="10820400" y="6486525"/>
+            <a:ext cx="800100" cy="257175"/>
+          </a:xfrm>
+          <a:prstGeom xmlns:a="http://schemas.openxmlformats.org/drawingml/2006/main" prst="rect">
+            <a:avLst/>
+          </a:prstGeom>
+          <a:noFill xmlns:a="http://schemas.openxmlformats.org/drawingml/2006/main"/>
+          <a:ln xmlns:a="http://schemas.openxmlformats.org/drawingml/2006/main" w="0">
+            <a:noFill/>
+            <a:prstDash val="solid"/>
+          </a:ln>
+        </p:spPr>
+        <p:txBody>
+          <a:bodyPr xmlns:a="http://schemas.openxmlformats.org/drawingml/2006/main" lIns="91440" tIns="45720" rIns="91440" bIns="45720" anchor="ctr"/>
+          <a:lstStyle xmlns:a="http://schemas.openxmlformats.org/drawingml/2006/main"/>
+          <a:p xmlns:a="http://schemas.openxmlformats.org/drawingml/2006/main">
+            <a:pPr algn="ctr">
+              <a:buNone/>
+              <a:defRPr sz="975" b="1">
+                <a:solidFill>
+                  <a:srgbClr val="0B4778"/>
+                </a:solidFill>
+                <a:latin typeface="Calibri"/>
+                <a:ea typeface="Calibri"/>
+                <a:cs typeface="Calibri"/>
+              </a:defRPr>
+            </a:pPr>
+            <a:r>
+              <a:rPr sz="975" b="1">
+                <a:solidFill>
+                  <a:srgbClr val="0B4778"/>
+                </a:solidFill>
+                <a:latin typeface="Calibri"/>
+                <a:ea typeface="Calibri"/>
+                <a:cs typeface="Calibri"/>
+              </a:rPr>
+              <a:t>15</a:t>
+            </a:r>
+          </a:p>
+        </p:txBody>
+      </p:sp>
+      <p:pic>
+        <p:nvPicPr>
+          <p:cNvPr id="23" name="11-plot.png" descr="11-plot.png"/>
+          <p:cNvPicPr>
+            <a:picLocks xmlns:a="http://schemas.openxmlformats.org/drawingml/2006/main" noChangeAspect="1"/>
+          </p:cNvPicPr>
+          <p:nvPr/>
+        </p:nvPicPr>
+        <p:blipFill>
+          <a:blip xmlns:r="http://schemas.openxmlformats.org/officeDocument/2006/relationships" xmlns:a="http://schemas.openxmlformats.org/drawingml/2006/main" r:embed="Lab4Slide15Picture1"/>
+          <a:stretch xmlns:a="http://schemas.openxmlformats.org/drawingml/2006/main"/>
+        </p:blipFill>
+        <p:spPr>
+          <a:xfrm xmlns:a="http://schemas.openxmlformats.org/drawingml/2006/main">
+            <a:off x="1230457" y="1062990"/>
+            <a:ext cx="3920836" cy="4312920"/>
+          </a:xfrm>
+          <a:prstGeom xmlns:a="http://schemas.openxmlformats.org/drawingml/2006/main" prst="rect">
+            <a:avLst/>
+          </a:prstGeom>
+        </p:spPr>
+      </p:pic>
+      <p:pic>
+        <p:nvPicPr>
+          <p:cNvPr id="24" name="12-plot.png" descr="12-plot.png"/>
+          <p:cNvPicPr>
+            <a:picLocks xmlns:a="http://schemas.openxmlformats.org/drawingml/2006/main" noChangeAspect="1"/>
+          </p:cNvPicPr>
+          <p:nvPr/>
+        </p:nvPicPr>
+        <p:blipFill>
+          <a:blip xmlns:r="http://schemas.openxmlformats.org/officeDocument/2006/relationships" xmlns:a="http://schemas.openxmlformats.org/drawingml/2006/main" r:embed="Lab4Slide15Picture2"/>
+          <a:stretch xmlns:a="http://schemas.openxmlformats.org/drawingml/2006/main"/>
+        </p:blipFill>
+        <p:spPr>
+          <a:xfrm xmlns:a="http://schemas.openxmlformats.org/drawingml/2006/main">
+            <a:off x="6410911" y="1548194"/>
+            <a:ext cx="5142328" cy="3342513"/>
+          </a:xfrm>
+          <a:prstGeom xmlns:a="http://schemas.openxmlformats.org/drawingml/2006/main" prst="rect">
+            <a:avLst/>
+          </a:prstGeom>
+        </p:spPr>
+      </p:pic>
+      <p:sp>
+        <p:nvSpPr>
+          <p:cNvPr id="10" name="phase-caption">
+            <a:extLst xmlns:a="http://schemas.openxmlformats.org/drawingml/2006/main">
+              <a:ext uri="{FF2B5EF4-FFF2-40B4-BE49-F238E27FC236}">
+                <a16:creationId xmlns:a16="http://schemas.microsoft.com/office/drawing/2014/main" id="{2D71CC65-DF69-40A8-BF29-AE487CD77F23}"/>
+              </a:ext>
+            </a:extLst>
+          </p:cNvPr>
+          <p:cNvSpPr>
+            <a:spLocks xmlns:a="http://schemas.openxmlformats.org/drawingml/2006/main" noGrp="1"/>
+          </p:cNvSpPr>
+          <p:nvPr/>
+        </p:nvSpPr>
+        <p:spPr>
+          <a:xfrm xmlns:a="http://schemas.openxmlformats.org/drawingml/2006/main">
+            <a:off x="838200" y="5619750"/>
+            <a:ext cx="4667250" cy="438150"/>
+          </a:xfrm>
+          <a:prstGeom xmlns:a="http://schemas.openxmlformats.org/drawingml/2006/main" prst="rect">
+            <a:avLst/>
+          </a:prstGeom>
+          <a:noFill xmlns:a="http://schemas.openxmlformats.org/drawingml/2006/main"/>
+          <a:ln xmlns:a="http://schemas.openxmlformats.org/drawingml/2006/main" w="0">
+            <a:noFill/>
+            <a:prstDash val="solid"/>
+          </a:ln>
+        </p:spPr>
+        <p:txBody>
+          <a:bodyPr xmlns:a="http://schemas.openxmlformats.org/drawingml/2006/main" lIns="91440" tIns="45720" rIns="91440" bIns="45720" anchor="ctr"/>
+          <a:lstStyle xmlns:a="http://schemas.openxmlformats.org/drawingml/2006/main"/>
+          <a:p xmlns:a="http://schemas.openxmlformats.org/drawingml/2006/main">
+            <a:pPr algn="ctr">
+              <a:buNone/>
+              <a:defRPr sz="1500" b="1">
+                <a:solidFill>
+                  <a:srgbClr val="0B4778"/>
+                </a:solidFill>
+                <a:latin typeface="Calibri"/>
+                <a:ea typeface="Calibri"/>
+                <a:cs typeface="Calibri"/>
+              </a:defRPr>
+            </a:pPr>
+            <a:r>
+              <a:rPr sz="1500" b="1">
+                <a:solidFill>
+                  <a:srgbClr val="0B4778"/>
+                </a:solidFill>
+                <a:latin typeface="Calibri"/>
+                <a:ea typeface="Calibri"/>
+                <a:cs typeface="Calibri"/>
+              </a:rPr>
+              <a:t>β городов: 0,2 / 0,5 / 0,8</a:t>
+            </a:r>
+          </a:p>
+        </p:txBody>
+      </p:sp>
+      <p:sp>
+        <p:nvSpPr>
+          <p:cNvPr id="11" name="inv-caption">
+            <a:extLst xmlns:a="http://schemas.openxmlformats.org/drawingml/2006/main">
+              <a:ext uri="{FF2B5EF4-FFF2-40B4-BE49-F238E27FC236}">
+                <a16:creationId xmlns:a16="http://schemas.microsoft.com/office/drawing/2014/main" id="{D6659F4D-F984-4216-9789-5FB1AF7A9034}"/>
+              </a:ext>
+            </a:extLst>
+          </p:cNvPr>
+          <p:cNvSpPr>
+            <a:spLocks xmlns:a="http://schemas.openxmlformats.org/drawingml/2006/main" noGrp="1"/>
+          </p:cNvSpPr>
+          <p:nvPr/>
+        </p:nvSpPr>
+        <p:spPr>
+          <a:xfrm xmlns:a="http://schemas.openxmlformats.org/drawingml/2006/main">
+            <a:off x="6667500" y="5619750"/>
+            <a:ext cx="4629150" cy="438150"/>
+          </a:xfrm>
+          <a:prstGeom xmlns:a="http://schemas.openxmlformats.org/drawingml/2006/main" prst="rect">
+            <a:avLst/>
+          </a:prstGeom>
+          <a:noFill xmlns:a="http://schemas.openxmlformats.org/drawingml/2006/main"/>
+          <a:ln xmlns:a="http://schemas.openxmlformats.org/drawingml/2006/main" w="0">
+            <a:noFill/>
+            <a:prstDash val="solid"/>
+          </a:ln>
+        </p:spPr>
+        <p:txBody>
+          <a:bodyPr xmlns:a="http://schemas.openxmlformats.org/drawingml/2006/main" lIns="91440" tIns="45720" rIns="91440" bIns="45720" anchor="ctr"/>
+          <a:lstStyle xmlns:a="http://schemas.openxmlformats.org/drawingml/2006/main"/>
+          <a:p xmlns:a="http://schemas.openxmlformats.org/drawingml/2006/main">
+            <a:pPr algn="ctr">
+              <a:buNone/>
+              <a:defRPr sz="1500" b="1">
+                <a:solidFill>
+                  <a:srgbClr val="0B4778"/>
+                </a:solidFill>
+                <a:latin typeface="Calibri"/>
+                <a:ea typeface="Calibri"/>
+                <a:cs typeface="Calibri"/>
+              </a:defRPr>
+            </a:pPr>
+            <a:r>
+              <a:rPr sz="1500" b="1">
+                <a:solidFill>
+                  <a:srgbClr val="0B4778"/>
+                </a:solidFill>
+                <a:latin typeface="Calibri"/>
+                <a:ea typeface="Calibri"/>
+                <a:cs typeface="Calibri"/>
+              </a:rPr>
+              <a:t>Число заражённых: одинаковые и разные β</a:t>
+            </a:r>
+          </a:p>
+        </p:txBody>
+      </p:sp>
+    </p:spTree>
+    <p:extLst>
+      <p:ext uri="{BB962C8B-B14F-4D97-AF65-F5344CB8AC3E}">
+        <p14:creationId xmlns:p14="http://schemas.microsoft.com/office/powerpoint/2010/main" val="824566167"/>
+      </p:ext>
+    </p:extLst>
+  </p:cSld>
+</p:sld>
+</file>
+
+<file path=ppt/slides/slide16.xml><?xml version="1.0" encoding="utf-8"?>
+<p:sld xmlns:p="http://schemas.openxmlformats.org/presentationml/2006/main">
+  <p:cSld>
+    <p:bg>
+      <p:bgPr>
+        <a:solidFill xmlns:a="http://schemas.openxmlformats.org/drawingml/2006/main">
+          <a:srgbClr val="FFFFFF"/>
+        </a:solidFill>
+      </p:bgPr>
+    </p:bg>
+    <p:spTree>
+      <p:nvGrpSpPr>
+        <p:cNvPr id="1" name=""/>
+        <p:cNvGrpSpPr/>
+        <p:nvPr/>
+      </p:nvGrpSpPr>
+      <p:grpSpPr>
+        <a:xfrm xmlns:a="http://schemas.openxmlformats.org/drawingml/2006/main"/>
+      </p:grpSpPr>
+      <p:sp>
+        <p:nvSpPr>
+          <p:cNvPr id="11" name="top-band">
+            <a:extLst xmlns:a="http://schemas.openxmlformats.org/drawingml/2006/main">
+              <a:ext uri="{FF2B5EF4-FFF2-40B4-BE49-F238E27FC236}">
+                <a16:creationId xmlns:a16="http://schemas.microsoft.com/office/drawing/2014/main" id="{97E662BC-85D8-46EB-A645-0207A7B6B035}"/>
+              </a:ext>
+            </a:extLst>
+          </p:cNvPr>
+          <p:cNvSpPr>
+            <a:spLocks xmlns:a="http://schemas.openxmlformats.org/drawingml/2006/main" noGrp="1"/>
+          </p:cNvSpPr>
+          <p:nvPr/>
+        </p:nvSpPr>
+        <p:spPr>
+          <a:xfrm xmlns:a="http://schemas.openxmlformats.org/drawingml/2006/main">
+            <a:off x="0" y="0"/>
+            <a:ext cx="12192000" cy="628650"/>
+          </a:xfrm>
+          <a:prstGeom xmlns:a="http://schemas.openxmlformats.org/drawingml/2006/main" prst="rect">
+            <a:avLst/>
+          </a:prstGeom>
+          <a:solidFill xmlns:a="http://schemas.openxmlformats.org/drawingml/2006/main">
+            <a:srgbClr val="0B4778"/>
+          </a:solidFill>
+          <a:ln xmlns:a="http://schemas.openxmlformats.org/drawingml/2006/main" w="0">
+            <a:noFill/>
+            <a:prstDash val="solid"/>
+          </a:ln>
+        </p:spPr>
+      </p:sp>
+      <p:sp>
+        <p:nvSpPr>
+          <p:cNvPr id="2" name="top-accent">
+            <a:extLst xmlns:a="http://schemas.openxmlformats.org/drawingml/2006/main">
+              <a:ext uri="{FF2B5EF4-FFF2-40B4-BE49-F238E27FC236}">
+                <a16:creationId xmlns:a16="http://schemas.microsoft.com/office/drawing/2014/main" id="{AECACF40-E972-4C5C-9D82-E920C434C7DD}"/>
+              </a:ext>
+            </a:extLst>
+          </p:cNvPr>
+          <p:cNvSpPr>
+            <a:spLocks xmlns:a="http://schemas.openxmlformats.org/drawingml/2006/main" noGrp="1"/>
+          </p:cNvSpPr>
+          <p:nvPr/>
+        </p:nvSpPr>
+        <p:spPr>
+          <a:xfrm xmlns:a="http://schemas.openxmlformats.org/drawingml/2006/main">
+            <a:off x="0" y="628650"/>
+            <a:ext cx="12192000" cy="47625"/>
           </a:xfrm>
           <a:prstGeom xmlns:a="http://schemas.openxmlformats.org/drawingml/2006/main" prst="rect">
             <a:avLst/>
@@ -5766,22 +6700,22 @@
       </p:sp>
       <p:sp>
         <p:nvSpPr>
-          <p:cNvPr id="5" name="conclusions">
-            <a:extLst xmlns:a="http://schemas.openxmlformats.org/drawingml/2006/main">
-              <a:ext uri="{FF2B5EF4-FFF2-40B4-BE49-F238E27FC236}">
-                <a16:creationId xmlns:a16="http://schemas.microsoft.com/office/drawing/2014/main" id="{80C76B1D-E492-4AF8-A98B-ACC10B47E441}"/>
-              </a:ext>
-            </a:extLst>
-          </p:cNvPr>
-          <p:cNvSpPr>
-            <a:spLocks xmlns:a="http://schemas.openxmlformats.org/drawingml/2006/main" noGrp="1"/>
-          </p:cNvSpPr>
-          <p:nvPr/>
-        </p:nvSpPr>
-        <p:spPr>
-          <a:xfrm xmlns:a="http://schemas.openxmlformats.org/drawingml/2006/main">
-            <a:off x="1943100" y="2552700"/>
-            <a:ext cx="8953500" cy="3219450"/>
+          <p:cNvPr id="3" name="slide-title">
+            <a:extLst xmlns:a="http://schemas.openxmlformats.org/drawingml/2006/main">
+              <a:ext uri="{FF2B5EF4-FFF2-40B4-BE49-F238E27FC236}">
+                <a16:creationId xmlns:a16="http://schemas.microsoft.com/office/drawing/2014/main" id="{EEA0F080-7270-4A74-97C7-3BCD4C006A67}"/>
+              </a:ext>
+            </a:extLst>
+          </p:cNvPr>
+          <p:cNvSpPr>
+            <a:spLocks xmlns:a="http://schemas.openxmlformats.org/drawingml/2006/main" noGrp="1"/>
+          </p:cNvSpPr>
+          <p:nvPr/>
+        </p:nvSpPr>
+        <p:spPr>
+          <a:xfrm xmlns:a="http://schemas.openxmlformats.org/drawingml/2006/main">
+            <a:off x="609600" y="57150"/>
+            <a:ext cx="10763250" cy="523875"/>
           </a:xfrm>
           <a:prstGeom xmlns:a="http://schemas.openxmlformats.org/drawingml/2006/main" prst="rect">
             <a:avLst/>
@@ -5798,7 +6732,7 @@
           <a:p xmlns:a="http://schemas.openxmlformats.org/drawingml/2006/main">
             <a:pPr algn="l">
               <a:buNone/>
-              <a:defRPr sz="1875" b="0">
+              <a:defRPr sz="2250" b="1">
                 <a:solidFill>
                   <a:srgbClr val="FFFFFF"/>
                 </a:solidFill>
@@ -5808,7 +6742,7 @@
               </a:defRPr>
             </a:pPr>
             <a:r>
-              <a:rPr sz="1875" b="0">
+              <a:rPr sz="2250" b="1">
                 <a:solidFill>
                   <a:srgbClr val="FFFFFF"/>
                 </a:solidFill>
@@ -5816,7 +6750,253 @@
                 <a:ea typeface="Calibri"/>
                 <a:cs typeface="Calibri"/>
               </a:rPr>
-              <a:t>• При 25 потоках получено 18,77 Мбит/с после разогрева.</a:t>
+              <a:t>Заданный карантин не уменьшил высоту пика</a:t>
+            </a:r>
+          </a:p>
+        </p:txBody>
+      </p:sp>
+      <p:sp>
+        <p:nvSpPr>
+          <p:cNvPr id="4" name="footer-rule">
+            <a:extLst xmlns:a="http://schemas.openxmlformats.org/drawingml/2006/main">
+              <a:ext uri="{FF2B5EF4-FFF2-40B4-BE49-F238E27FC236}">
+                <a16:creationId xmlns:a16="http://schemas.microsoft.com/office/drawing/2014/main" id="{29DCE7D4-1781-4F89-BA7A-98A6C8680BBB}"/>
+              </a:ext>
+            </a:extLst>
+          </p:cNvPr>
+          <p:cNvSpPr>
+            <a:spLocks xmlns:a="http://schemas.openxmlformats.org/drawingml/2006/main" noGrp="1"/>
+          </p:cNvSpPr>
+          <p:nvPr/>
+        </p:nvSpPr>
+        <p:spPr>
+          <a:xfrm xmlns:a="http://schemas.openxmlformats.org/drawingml/2006/main">
+            <a:off x="514350" y="6419850"/>
+            <a:ext cx="11163300" cy="19050"/>
+          </a:xfrm>
+          <a:prstGeom xmlns:a="http://schemas.openxmlformats.org/drawingml/2006/main" prst="rect">
+            <a:avLst/>
+          </a:prstGeom>
+          <a:solidFill xmlns:a="http://schemas.openxmlformats.org/drawingml/2006/main">
+            <a:srgbClr val="B9D9E8"/>
+          </a:solidFill>
+          <a:ln xmlns:a="http://schemas.openxmlformats.org/drawingml/2006/main" w="0">
+            <a:noFill/>
+            <a:prstDash val="solid"/>
+          </a:ln>
+        </p:spPr>
+      </p:sp>
+      <p:pic>
+        <p:nvPicPr>
+          <p:cNvPr id="18" name=""/>
+          <p:cNvPicPr>
+            <a:picLocks xmlns:a="http://schemas.openxmlformats.org/drawingml/2006/main" noChangeAspect="1"/>
+          </p:cNvPicPr>
+          <p:nvPr/>
+        </p:nvPicPr>
+        <p:blipFill>
+          <a:blip xmlns:r="http://schemas.openxmlformats.org/officeDocument/2006/relationships" xmlns:a="http://schemas.openxmlformats.org/drawingml/2006/main" r:embed="Rf1fd441215d04318"/>
+          <a:stretch xmlns:a="http://schemas.openxmlformats.org/drawingml/2006/main"/>
+        </p:blipFill>
+        <p:spPr>
+          <a:xfrm xmlns:a="http://schemas.openxmlformats.org/drawingml/2006/main">
+            <a:off x="552450" y="6495443"/>
+            <a:ext cx="304800" cy="258389"/>
+          </a:xfrm>
+          <a:prstGeom xmlns:a="http://schemas.openxmlformats.org/drawingml/2006/main" prst="rect">
+            <a:avLst/>
+          </a:prstGeom>
+        </p:spPr>
+      </p:pic>
+      <p:sp>
+        <p:nvSpPr>
+          <p:cNvPr id="6" name="footer">
+            <a:extLst xmlns:a="http://schemas.openxmlformats.org/drawingml/2006/main">
+              <a:ext uri="{FF2B5EF4-FFF2-40B4-BE49-F238E27FC236}">
+                <a16:creationId xmlns:a16="http://schemas.microsoft.com/office/drawing/2014/main" id="{B481C67C-2B86-4F50-BF31-D7FC4B3C2FA4}"/>
+              </a:ext>
+            </a:extLst>
+          </p:cNvPr>
+          <p:cNvSpPr>
+            <a:spLocks xmlns:a="http://schemas.openxmlformats.org/drawingml/2006/main" noGrp="1"/>
+          </p:cNvSpPr>
+          <p:nvPr/>
+        </p:nvSpPr>
+        <p:spPr>
+          <a:xfrm xmlns:a="http://schemas.openxmlformats.org/drawingml/2006/main">
+            <a:off x="971550" y="6486525"/>
+            <a:ext cx="7334250" cy="257175"/>
+          </a:xfrm>
+          <a:prstGeom xmlns:a="http://schemas.openxmlformats.org/drawingml/2006/main" prst="rect">
+            <a:avLst/>
+          </a:prstGeom>
+          <a:noFill xmlns:a="http://schemas.openxmlformats.org/drawingml/2006/main"/>
+          <a:ln xmlns:a="http://schemas.openxmlformats.org/drawingml/2006/main" w="0">
+            <a:noFill/>
+            <a:prstDash val="solid"/>
+          </a:ln>
+        </p:spPr>
+        <p:txBody>
+          <a:bodyPr xmlns:a="http://schemas.openxmlformats.org/drawingml/2006/main" lIns="91440" tIns="45720" rIns="91440" bIns="45720" anchor="ctr"/>
+          <a:lstStyle xmlns:a="http://schemas.openxmlformats.org/drawingml/2006/main"/>
+          <a:p xmlns:a="http://schemas.openxmlformats.org/drawingml/2006/main">
+            <a:pPr algn="l">
+              <a:buNone/>
+              <a:defRPr sz="900" b="0">
+                <a:solidFill>
+                  <a:srgbClr val="526675"/>
+                </a:solidFill>
+                <a:latin typeface="Calibri"/>
+                <a:ea typeface="Calibri"/>
+                <a:cs typeface="Calibri"/>
+              </a:defRPr>
+            </a:pPr>
+            <a:r>
+              <a:rPr sz="900" b="0">
+                <a:solidFill>
+                  <a:srgbClr val="526675"/>
+                </a:solidFill>
+                <a:latin typeface="Calibri"/>
+                <a:ea typeface="Calibri"/>
+                <a:cs typeface="Calibri"/>
+              </a:rPr>
+              <a:t>Имитационное моделирование · лабораторная работа № 4</a:t>
+            </a:r>
+          </a:p>
+        </p:txBody>
+      </p:sp>
+      <p:sp>
+        <p:nvSpPr>
+          <p:cNvPr id="7" name="page-number">
+            <a:extLst xmlns:a="http://schemas.openxmlformats.org/drawingml/2006/main">
+              <a:ext uri="{FF2B5EF4-FFF2-40B4-BE49-F238E27FC236}">
+                <a16:creationId xmlns:a16="http://schemas.microsoft.com/office/drawing/2014/main" id="{43A6D7F7-B636-4BA1-A9D4-58AD51F83617}"/>
+              </a:ext>
+            </a:extLst>
+          </p:cNvPr>
+          <p:cNvSpPr>
+            <a:spLocks xmlns:a="http://schemas.openxmlformats.org/drawingml/2006/main" noGrp="1"/>
+          </p:cNvSpPr>
+          <p:nvPr/>
+        </p:nvSpPr>
+        <p:spPr>
+          <a:xfrm xmlns:a="http://schemas.openxmlformats.org/drawingml/2006/main">
+            <a:off x="10820400" y="6486525"/>
+            <a:ext cx="800100" cy="257175"/>
+          </a:xfrm>
+          <a:prstGeom xmlns:a="http://schemas.openxmlformats.org/drawingml/2006/main" prst="rect">
+            <a:avLst/>
+          </a:prstGeom>
+          <a:noFill xmlns:a="http://schemas.openxmlformats.org/drawingml/2006/main"/>
+          <a:ln xmlns:a="http://schemas.openxmlformats.org/drawingml/2006/main" w="0">
+            <a:noFill/>
+            <a:prstDash val="solid"/>
+          </a:ln>
+        </p:spPr>
+        <p:txBody>
+          <a:bodyPr xmlns:a="http://schemas.openxmlformats.org/drawingml/2006/main" lIns="91440" tIns="45720" rIns="91440" bIns="45720" anchor="ctr"/>
+          <a:lstStyle xmlns:a="http://schemas.openxmlformats.org/drawingml/2006/main"/>
+          <a:p xmlns:a="http://schemas.openxmlformats.org/drawingml/2006/main">
+            <a:pPr algn="ctr">
+              <a:buNone/>
+              <a:defRPr sz="975" b="1">
+                <a:solidFill>
+                  <a:srgbClr val="0B4778"/>
+                </a:solidFill>
+                <a:latin typeface="Calibri"/>
+                <a:ea typeface="Calibri"/>
+                <a:cs typeface="Calibri"/>
+              </a:defRPr>
+            </a:pPr>
+            <a:r>
+              <a:rPr sz="975" b="1">
+                <a:solidFill>
+                  <a:srgbClr val="0B4778"/>
+                </a:solidFill>
+                <a:latin typeface="Calibri"/>
+                <a:ea typeface="Calibri"/>
+                <a:cs typeface="Calibri"/>
+              </a:rPr>
+              <a:t>16</a:t>
+            </a:r>
+          </a:p>
+        </p:txBody>
+      </p:sp>
+      <p:pic>
+        <p:nvPicPr>
+          <p:cNvPr id="21" name="13-plot.png" descr="13-plot.png"/>
+          <p:cNvPicPr>
+            <a:picLocks xmlns:a="http://schemas.openxmlformats.org/drawingml/2006/main" noChangeAspect="1"/>
+          </p:cNvPicPr>
+          <p:nvPr/>
+        </p:nvPicPr>
+        <p:blipFill>
+          <a:blip xmlns:r="http://schemas.openxmlformats.org/officeDocument/2006/relationships" xmlns:a="http://schemas.openxmlformats.org/drawingml/2006/main" r:embed="Lab4Slide16Picture1"/>
+          <a:stretch xmlns:a="http://schemas.openxmlformats.org/drawingml/2006/main"/>
+        </p:blipFill>
+        <p:spPr>
+          <a:xfrm xmlns:a="http://schemas.openxmlformats.org/drawingml/2006/main">
+            <a:off x="1654387" y="1062228"/>
+            <a:ext cx="5301827" cy="4771644"/>
+          </a:xfrm>
+          <a:prstGeom xmlns:a="http://schemas.openxmlformats.org/drawingml/2006/main" prst="rect">
+            <a:avLst/>
+          </a:prstGeom>
+        </p:spPr>
+      </p:pic>
+      <p:sp>
+        <p:nvSpPr>
+          <p:cNvPr id="9" name="lv-metrics">
+            <a:extLst xmlns:a="http://schemas.openxmlformats.org/drawingml/2006/main">
+              <a:ext uri="{FF2B5EF4-FFF2-40B4-BE49-F238E27FC236}">
+                <a16:creationId xmlns:a16="http://schemas.microsoft.com/office/drawing/2014/main" id="{8F200868-6BF2-4C9D-9209-E1DB3409FFD8}"/>
+              </a:ext>
+            </a:extLst>
+          </p:cNvPr>
+          <p:cNvSpPr>
+            <a:spLocks xmlns:a="http://schemas.openxmlformats.org/drawingml/2006/main" noGrp="1"/>
+          </p:cNvSpPr>
+          <p:nvPr/>
+        </p:nvSpPr>
+        <p:spPr>
+          <a:xfrm xmlns:a="http://schemas.openxmlformats.org/drawingml/2006/main">
+            <a:off x="8458200" y="1447800"/>
+            <a:ext cx="2609850" cy="2571750"/>
+          </a:xfrm>
+          <a:prstGeom xmlns:a="http://schemas.openxmlformats.org/drawingml/2006/main" prst="rect">
+            <a:avLst/>
+          </a:prstGeom>
+          <a:noFill xmlns:a="http://schemas.openxmlformats.org/drawingml/2006/main"/>
+          <a:ln xmlns:a="http://schemas.openxmlformats.org/drawingml/2006/main" w="0">
+            <a:noFill/>
+            <a:prstDash val="solid"/>
+          </a:ln>
+        </p:spPr>
+        <p:txBody>
+          <a:bodyPr xmlns:a="http://schemas.openxmlformats.org/drawingml/2006/main" lIns="91440" tIns="45720" rIns="91440" bIns="45720" anchor="ctr"/>
+          <a:lstStyle xmlns:a="http://schemas.openxmlformats.org/drawingml/2006/main"/>
+          <a:p xmlns:a="http://schemas.openxmlformats.org/drawingml/2006/main">
+            <a:pPr algn="l">
+              <a:buNone/>
+              <a:defRPr sz="1725" b="0">
+                <a:solidFill>
+                  <a:srgbClr val="17232D"/>
+                </a:solidFill>
+                <a:latin typeface="Calibri"/>
+                <a:ea typeface="Calibri"/>
+                <a:cs typeface="Calibri"/>
+              </a:defRPr>
+            </a:pPr>
+            <a:r>
+              <a:rPr sz="1725" b="0">
+                <a:solidFill>
+                  <a:srgbClr val="17232D"/>
+                </a:solidFill>
+                <a:latin typeface="Calibri"/>
+                <a:ea typeface="Calibri"/>
+                <a:cs typeface="Calibri"/>
+              </a:rPr>
+              <a:t>Порог закрытия: 10%</a:t>
             </a:r>
           </a:p>
           <a:p xmlns:a="http://schemas.openxmlformats.org/drawingml/2006/main">
@@ -5827,25 +7007,25 @@
           <a:p xmlns:a="http://schemas.openxmlformats.org/drawingml/2006/main">
             <a:pPr algn="l">
               <a:buNone/>
-              <a:defRPr sz="1875" b="0">
-                <a:solidFill>
-                  <a:srgbClr val="FFFFFF"/>
-                </a:solidFill>
-                <a:latin typeface="Calibri"/>
-                <a:ea typeface="Calibri"/>
-                <a:cs typeface="Calibri"/>
-              </a:defRPr>
-            </a:pPr>
-            <a:r>
-              <a:rPr sz="1875" b="0">
-                <a:solidFill>
-                  <a:srgbClr val="FFFFFF"/>
-                </a:solidFill>
-                <a:latin typeface="Calibri"/>
-                <a:ea typeface="Calibri"/>
-                <a:cs typeface="Calibri"/>
-              </a:rPr>
-              <a:t>• В серии 5–40 потоков канал используется на 92–99%.</a:t>
+              <a:defRPr sz="1725" b="0">
+                <a:solidFill>
+                  <a:srgbClr val="17232D"/>
+                </a:solidFill>
+                <a:latin typeface="Calibri"/>
+                <a:ea typeface="Calibri"/>
+                <a:cs typeface="Calibri"/>
+              </a:defRPr>
+            </a:pPr>
+            <a:r>
+              <a:rPr sz="1725" b="0">
+                <a:solidFill>
+                  <a:srgbClr val="17232D"/>
+                </a:solidFill>
+                <a:latin typeface="Calibri"/>
+                <a:ea typeface="Calibri"/>
+                <a:cs typeface="Calibri"/>
+              </a:rPr>
+              <a:t>Закрыт только выезд</a:t>
             </a:r>
           </a:p>
           <a:p xmlns:a="http://schemas.openxmlformats.org/drawingml/2006/main">
@@ -5856,25 +7036,25 @@
           <a:p xmlns:a="http://schemas.openxmlformats.org/drawingml/2006/main">
             <a:pPr algn="l">
               <a:buNone/>
-              <a:defRPr sz="1875" b="0">
-                <a:solidFill>
-                  <a:srgbClr val="FFFFFF"/>
-                </a:solidFill>
-                <a:latin typeface="Calibri"/>
-                <a:ea typeface="Calibri"/>
-                <a:cs typeface="Calibri"/>
-              </a:defRPr>
-            </a:pPr>
-            <a:r>
-              <a:rPr sz="1875" b="0">
-                <a:solidFill>
-                  <a:srgbClr val="FFFFFF"/>
-                </a:solidFill>
-                <a:latin typeface="Calibri"/>
-                <a:ea typeface="Calibri"/>
-                <a:cs typeface="Calibri"/>
-              </a:rPr>
-              <a:t>• С ростом конкуренции среднее окно уменьшается.</a:t>
+              <a:defRPr sz="1725" b="0">
+                <a:solidFill>
+                  <a:srgbClr val="17232D"/>
+                </a:solidFill>
+                <a:latin typeface="Calibri"/>
+                <a:ea typeface="Calibri"/>
+                <a:cs typeface="Calibri"/>
+              </a:defRPr>
+            </a:pPr>
+            <a:r>
+              <a:rPr sz="1725" b="0">
+                <a:solidFill>
+                  <a:srgbClr val="17232D"/>
+                </a:solidFill>
+                <a:latin typeface="Calibri"/>
+                <a:ea typeface="Calibri"/>
+                <a:cs typeface="Calibri"/>
+              </a:rPr>
+              <a:t>Снижение пика: 0</a:t>
             </a:r>
           </a:p>
           <a:p xmlns:a="http://schemas.openxmlformats.org/drawingml/2006/main">
@@ -5885,76 +7065,47 @@
           <a:p xmlns:a="http://schemas.openxmlformats.org/drawingml/2006/main">
             <a:pPr algn="l">
               <a:buNone/>
-              <a:defRPr sz="1875" b="0">
-                <a:solidFill>
-                  <a:srgbClr val="FFFFFF"/>
-                </a:solidFill>
-                <a:latin typeface="Calibri"/>
-                <a:ea typeface="Calibri"/>
-                <a:cs typeface="Calibri"/>
-              </a:defRPr>
-            </a:pPr>
-            <a:r>
-              <a:rPr sz="1875" b="0">
-                <a:solidFill>
-                  <a:srgbClr val="FFFFFF"/>
-                </a:solidFill>
-                <a:latin typeface="Calibri"/>
-                <a:ea typeface="Calibri"/>
-                <a:cs typeface="Calibri"/>
-              </a:rPr>
-              <a:t>• Сигналы потери подсчитаны отдельно от средних величин.</a:t>
-            </a:r>
-          </a:p>
-          <a:p xmlns:a="http://schemas.openxmlformats.org/drawingml/2006/main">
-            <a:r>
-              <a:t/>
-            </a:r>
-          </a:p>
-          <a:p xmlns:a="http://schemas.openxmlformats.org/drawingml/2006/main">
-            <a:pPr algn="l">
-              <a:buNone/>
-              <a:defRPr sz="1875" b="0">
-                <a:solidFill>
-                  <a:srgbClr val="FFFFFF"/>
-                </a:solidFill>
-                <a:latin typeface="Calibri"/>
-                <a:ea typeface="Calibri"/>
-                <a:cs typeface="Calibri"/>
-              </a:defRPr>
-            </a:pPr>
-            <a:r>
-              <a:rPr sz="1875" b="0">
-                <a:solidFill>
-                  <a:srgbClr val="FFFFFF"/>
-                </a:solidFill>
-                <a:latin typeface="Calibri"/>
-                <a:ea typeface="Calibri"/>
-                <a:cs typeface="Calibri"/>
-              </a:rPr>
-              <a:t>• Выводы ограничены агрегированной моделью и её допущениями.</a:t>
-            </a:r>
-          </a:p>
-        </p:txBody>
-      </p:sp>
-      <p:sp>
-        <p:nvSpPr>
-          <p:cNvPr id="6" name="final">
-            <a:extLst xmlns:a="http://schemas.openxmlformats.org/drawingml/2006/main">
-              <a:ext uri="{FF2B5EF4-FFF2-40B4-BE49-F238E27FC236}">
-                <a16:creationId xmlns:a16="http://schemas.microsoft.com/office/drawing/2014/main" id="{FCC7524D-04B4-4E2B-BB4A-218A72DF3564}"/>
-              </a:ext>
-            </a:extLst>
-          </p:cNvPr>
-          <p:cNvSpPr>
-            <a:spLocks xmlns:a="http://schemas.openxmlformats.org/drawingml/2006/main" noGrp="1"/>
-          </p:cNvSpPr>
-          <p:nvPr/>
-        </p:nvSpPr>
-        <p:spPr>
-          <a:xfrm xmlns:a="http://schemas.openxmlformats.org/drawingml/2006/main">
-            <a:off x="1943100" y="5924550"/>
-            <a:ext cx="5715000" cy="495300"/>
+              <a:defRPr sz="1725" b="0">
+                <a:solidFill>
+                  <a:srgbClr val="17232D"/>
+                </a:solidFill>
+                <a:latin typeface="Calibri"/>
+                <a:ea typeface="Calibri"/>
+                <a:cs typeface="Calibri"/>
+              </a:defRPr>
+            </a:pPr>
+            <a:r>
+              <a:rPr sz="1725" b="0">
+                <a:solidFill>
+                  <a:srgbClr val="17232D"/>
+                </a:solidFill>
+                <a:latin typeface="Calibri"/>
+                <a:ea typeface="Calibri"/>
+                <a:cs typeface="Calibri"/>
+              </a:rPr>
+              <a:t>Задержка: 0…0,33 дня</a:t>
+            </a:r>
+          </a:p>
+        </p:txBody>
+      </p:sp>
+      <p:sp>
+        <p:nvSpPr>
+          <p:cNvPr id="10" name="lv-takeaway">
+            <a:extLst xmlns:a="http://schemas.openxmlformats.org/drawingml/2006/main">
+              <a:ext uri="{FF2B5EF4-FFF2-40B4-BE49-F238E27FC236}">
+                <a16:creationId xmlns:a16="http://schemas.microsoft.com/office/drawing/2014/main" id="{9DB94CF0-4DC2-4C75-A4FE-51097031DEE2}"/>
+              </a:ext>
+            </a:extLst>
+          </p:cNvPr>
+          <p:cNvSpPr>
+            <a:spLocks xmlns:a="http://schemas.openxmlformats.org/drawingml/2006/main" noGrp="1"/>
+          </p:cNvSpPr>
+          <p:nvPr/>
+        </p:nvSpPr>
+        <p:spPr>
+          <a:xfrm xmlns:a="http://schemas.openxmlformats.org/drawingml/2006/main">
+            <a:off x="8210550" y="4305300"/>
+            <a:ext cx="3086100" cy="1066800"/>
           </a:xfrm>
           <a:prstGeom xmlns:a="http://schemas.openxmlformats.org/drawingml/2006/main" prst="rect">
             <a:avLst/>
@@ -5969,27 +7120,27 @@
           <a:bodyPr xmlns:a="http://schemas.openxmlformats.org/drawingml/2006/main" lIns="91440" tIns="45720" rIns="91440" bIns="45720" anchor="ctr"/>
           <a:lstStyle xmlns:a="http://schemas.openxmlformats.org/drawingml/2006/main"/>
           <a:p xmlns:a="http://schemas.openxmlformats.org/drawingml/2006/main">
-            <a:pPr algn="l">
-              <a:buNone/>
-              <a:defRPr sz="1650" b="1">
-                <a:solidFill>
-                  <a:srgbClr val="35A9D3"/>
-                </a:solidFill>
-                <a:latin typeface="Calibri"/>
-                <a:ea typeface="Calibri"/>
-                <a:cs typeface="Calibri"/>
-              </a:defRPr>
-            </a:pPr>
-            <a:r>
-              <a:rPr sz="1650" b="1">
-                <a:solidFill>
-                  <a:srgbClr val="35A9D3"/>
-                </a:solidFill>
-                <a:latin typeface="Calibri"/>
-                <a:ea typeface="Calibri"/>
-                <a:cs typeface="Calibri"/>
-              </a:rPr>
-              <a:t>Лабораторная работа № 4</a:t>
+            <a:pPr algn="ctr">
+              <a:buNone/>
+              <a:defRPr sz="1575" b="1">
+                <a:solidFill>
+                  <a:srgbClr val="0B4778"/>
+                </a:solidFill>
+                <a:latin typeface="Calibri"/>
+                <a:ea typeface="Calibri"/>
+                <a:cs typeface="Calibri"/>
+              </a:defRPr>
+            </a:pPr>
+            <a:r>
+              <a:rPr sz="1575" b="1">
+                <a:solidFill>
+                  <a:srgbClr val="0B4778"/>
+                </a:solidFill>
+                <a:latin typeface="Calibri"/>
+                <a:ea typeface="Calibri"/>
+                <a:cs typeface="Calibri"/>
+              </a:rPr>
+              <a:t>К моменту закрытия инфекция может уже находиться в других городах.</a:t>
             </a:r>
           </a:p>
         </p:txBody>
@@ -5997,7 +7148,2025 @@
     </p:spTree>
     <p:extLst>
       <p:ext uri="{BB962C8B-B14F-4D97-AF65-F5344CB8AC3E}">
-        <p14:creationId xmlns:p14="http://schemas.microsoft.com/office/powerpoint/2010/main" val="509539714"/>
+        <p14:creationId xmlns:p14="http://schemas.microsoft.com/office/powerpoint/2010/main" val="657116236"/>
+      </p:ext>
+    </p:extLst>
+  </p:cSld>
+</p:sld>
+</file>
+
+<file path=ppt/slides/slide17.xml><?xml version="1.0" encoding="utf-8"?>
+<p:sld xmlns:p="http://schemas.openxmlformats.org/presentationml/2006/main">
+  <p:cSld>
+    <p:bg>
+      <p:bgPr>
+        <a:solidFill xmlns:a="http://schemas.openxmlformats.org/drawingml/2006/main">
+          <a:srgbClr val="FFFFFF"/>
+        </a:solidFill>
+      </p:bgPr>
+    </p:bg>
+    <p:spTree>
+      <p:nvGrpSpPr>
+        <p:cNvPr id="1" name=""/>
+        <p:cNvGrpSpPr/>
+        <p:nvPr/>
+      </p:nvGrpSpPr>
+      <p:grpSpPr>
+        <a:xfrm xmlns:a="http://schemas.openxmlformats.org/drawingml/2006/main"/>
+      </p:grpSpPr>
+      <p:sp>
+        <p:nvSpPr>
+          <p:cNvPr id="19" name="top-band">
+            <a:extLst xmlns:a="http://schemas.openxmlformats.org/drawingml/2006/main">
+              <a:ext uri="{FF2B5EF4-FFF2-40B4-BE49-F238E27FC236}">
+                <a16:creationId xmlns:a16="http://schemas.microsoft.com/office/drawing/2014/main" id="{F74FD5CC-8C38-411D-852B-0B3866494BE6}"/>
+              </a:ext>
+            </a:extLst>
+          </p:cNvPr>
+          <p:cNvSpPr>
+            <a:spLocks xmlns:a="http://schemas.openxmlformats.org/drawingml/2006/main" noGrp="1"/>
+          </p:cNvSpPr>
+          <p:nvPr/>
+        </p:nvSpPr>
+        <p:spPr>
+          <a:xfrm xmlns:a="http://schemas.openxmlformats.org/drawingml/2006/main">
+            <a:off x="0" y="0"/>
+            <a:ext cx="12192000" cy="628650"/>
+          </a:xfrm>
+          <a:prstGeom xmlns:a="http://schemas.openxmlformats.org/drawingml/2006/main" prst="rect">
+            <a:avLst/>
+          </a:prstGeom>
+          <a:solidFill xmlns:a="http://schemas.openxmlformats.org/drawingml/2006/main">
+            <a:srgbClr val="0B4778"/>
+          </a:solidFill>
+          <a:ln xmlns:a="http://schemas.openxmlformats.org/drawingml/2006/main" w="0">
+            <a:noFill/>
+            <a:prstDash val="solid"/>
+          </a:ln>
+        </p:spPr>
+      </p:sp>
+      <p:sp>
+        <p:nvSpPr>
+          <p:cNvPr id="2" name="top-accent">
+            <a:extLst xmlns:a="http://schemas.openxmlformats.org/drawingml/2006/main">
+              <a:ext uri="{FF2B5EF4-FFF2-40B4-BE49-F238E27FC236}">
+                <a16:creationId xmlns:a16="http://schemas.microsoft.com/office/drawing/2014/main" id="{F04E7823-61B5-47C3-B669-C35B88727EBD}"/>
+              </a:ext>
+            </a:extLst>
+          </p:cNvPr>
+          <p:cNvSpPr>
+            <a:spLocks xmlns:a="http://schemas.openxmlformats.org/drawingml/2006/main" noGrp="1"/>
+          </p:cNvSpPr>
+          <p:nvPr/>
+        </p:nvSpPr>
+        <p:spPr>
+          <a:xfrm xmlns:a="http://schemas.openxmlformats.org/drawingml/2006/main">
+            <a:off x="0" y="628650"/>
+            <a:ext cx="12192000" cy="47625"/>
+          </a:xfrm>
+          <a:prstGeom xmlns:a="http://schemas.openxmlformats.org/drawingml/2006/main" prst="rect">
+            <a:avLst/>
+          </a:prstGeom>
+          <a:solidFill xmlns:a="http://schemas.openxmlformats.org/drawingml/2006/main">
+            <a:srgbClr val="35A9D3"/>
+          </a:solidFill>
+          <a:ln xmlns:a="http://schemas.openxmlformats.org/drawingml/2006/main" w="0">
+            <a:noFill/>
+            <a:prstDash val="solid"/>
+          </a:ln>
+        </p:spPr>
+      </p:sp>
+      <p:sp>
+        <p:nvSpPr>
+          <p:cNvPr id="3" name="slide-title">
+            <a:extLst xmlns:a="http://schemas.openxmlformats.org/drawingml/2006/main">
+              <a:ext uri="{FF2B5EF4-FFF2-40B4-BE49-F238E27FC236}">
+                <a16:creationId xmlns:a16="http://schemas.microsoft.com/office/drawing/2014/main" id="{68DD099D-979B-4597-9650-C67ED0273AE2}"/>
+              </a:ext>
+            </a:extLst>
+          </p:cNvPr>
+          <p:cNvSpPr>
+            <a:spLocks xmlns:a="http://schemas.openxmlformats.org/drawingml/2006/main" noGrp="1"/>
+          </p:cNvSpPr>
+          <p:nvPr/>
+        </p:nvSpPr>
+        <p:spPr>
+          <a:xfrm xmlns:a="http://schemas.openxmlformats.org/drawingml/2006/main">
+            <a:off x="609600" y="57150"/>
+            <a:ext cx="10763250" cy="523875"/>
+          </a:xfrm>
+          <a:prstGeom xmlns:a="http://schemas.openxmlformats.org/drawingml/2006/main" prst="rect">
+            <a:avLst/>
+          </a:prstGeom>
+          <a:noFill xmlns:a="http://schemas.openxmlformats.org/drawingml/2006/main"/>
+          <a:ln xmlns:a="http://schemas.openxmlformats.org/drawingml/2006/main" w="0">
+            <a:noFill/>
+            <a:prstDash val="solid"/>
+          </a:ln>
+        </p:spPr>
+        <p:txBody>
+          <a:bodyPr xmlns:a="http://schemas.openxmlformats.org/drawingml/2006/main" lIns="91440" tIns="45720" rIns="91440" bIns="45720" anchor="ctr"/>
+          <a:lstStyle xmlns:a="http://schemas.openxmlformats.org/drawingml/2006/main"/>
+          <a:p xmlns:a="http://schemas.openxmlformats.org/drawingml/2006/main">
+            <a:pPr algn="l">
+              <a:buNone/>
+              <a:defRPr sz="2250" b="1">
+                <a:solidFill>
+                  <a:srgbClr val="FFFFFF"/>
+                </a:solidFill>
+                <a:latin typeface="Calibri"/>
+                <a:ea typeface="Calibri"/>
+                <a:cs typeface="Calibri"/>
+              </a:defRPr>
+            </a:pPr>
+            <a:r>
+              <a:rPr sz="2250" b="1">
+                <a:solidFill>
+                  <a:srgbClr val="FFFFFF"/>
+                </a:solidFill>
+                <a:latin typeface="Calibri"/>
+                <a:ea typeface="Calibri"/>
+                <a:cs typeface="Calibri"/>
+              </a:rPr>
+              <a:t>Ограниченный поиск проверен на 20 новых seed</a:t>
+            </a:r>
+          </a:p>
+        </p:txBody>
+      </p:sp>
+      <p:sp>
+        <p:nvSpPr>
+          <p:cNvPr id="4" name="footer-rule">
+            <a:extLst xmlns:a="http://schemas.openxmlformats.org/drawingml/2006/main">
+              <a:ext uri="{FF2B5EF4-FFF2-40B4-BE49-F238E27FC236}">
+                <a16:creationId xmlns:a16="http://schemas.microsoft.com/office/drawing/2014/main" id="{9DF46DE4-DC52-45DC-98B8-BF3E30BED09B}"/>
+              </a:ext>
+            </a:extLst>
+          </p:cNvPr>
+          <p:cNvSpPr>
+            <a:spLocks xmlns:a="http://schemas.openxmlformats.org/drawingml/2006/main" noGrp="1"/>
+          </p:cNvSpPr>
+          <p:nvPr/>
+        </p:nvSpPr>
+        <p:spPr>
+          <a:xfrm xmlns:a="http://schemas.openxmlformats.org/drawingml/2006/main">
+            <a:off x="514350" y="6419850"/>
+            <a:ext cx="11163300" cy="19050"/>
+          </a:xfrm>
+          <a:prstGeom xmlns:a="http://schemas.openxmlformats.org/drawingml/2006/main" prst="rect">
+            <a:avLst/>
+          </a:prstGeom>
+          <a:solidFill xmlns:a="http://schemas.openxmlformats.org/drawingml/2006/main">
+            <a:srgbClr val="B9D9E8"/>
+          </a:solidFill>
+          <a:ln xmlns:a="http://schemas.openxmlformats.org/drawingml/2006/main" w="0">
+            <a:noFill/>
+            <a:prstDash val="solid"/>
+          </a:ln>
+        </p:spPr>
+      </p:sp>
+      <p:pic>
+        <p:nvPicPr>
+          <p:cNvPr id="26" name=""/>
+          <p:cNvPicPr>
+            <a:picLocks xmlns:a="http://schemas.openxmlformats.org/drawingml/2006/main" noChangeAspect="1"/>
+          </p:cNvPicPr>
+          <p:nvPr/>
+        </p:nvPicPr>
+        <p:blipFill>
+          <a:blip xmlns:r="http://schemas.openxmlformats.org/officeDocument/2006/relationships" xmlns:a="http://schemas.openxmlformats.org/drawingml/2006/main" r:embed="Rc3faf87c986d4760"/>
+          <a:stretch xmlns:a="http://schemas.openxmlformats.org/drawingml/2006/main"/>
+        </p:blipFill>
+        <p:spPr>
+          <a:xfrm xmlns:a="http://schemas.openxmlformats.org/drawingml/2006/main">
+            <a:off x="552450" y="6495443"/>
+            <a:ext cx="304800" cy="258389"/>
+          </a:xfrm>
+          <a:prstGeom xmlns:a="http://schemas.openxmlformats.org/drawingml/2006/main" prst="rect">
+            <a:avLst/>
+          </a:prstGeom>
+        </p:spPr>
+      </p:pic>
+      <p:sp>
+        <p:nvSpPr>
+          <p:cNvPr id="6" name="footer">
+            <a:extLst xmlns:a="http://schemas.openxmlformats.org/drawingml/2006/main">
+              <a:ext uri="{FF2B5EF4-FFF2-40B4-BE49-F238E27FC236}">
+                <a16:creationId xmlns:a16="http://schemas.microsoft.com/office/drawing/2014/main" id="{3CA48063-C26A-4267-AF5D-F662627DB538}"/>
+              </a:ext>
+            </a:extLst>
+          </p:cNvPr>
+          <p:cNvSpPr>
+            <a:spLocks xmlns:a="http://schemas.openxmlformats.org/drawingml/2006/main" noGrp="1"/>
+          </p:cNvSpPr>
+          <p:nvPr/>
+        </p:nvSpPr>
+        <p:spPr>
+          <a:xfrm xmlns:a="http://schemas.openxmlformats.org/drawingml/2006/main">
+            <a:off x="971550" y="6486525"/>
+            <a:ext cx="7334250" cy="257175"/>
+          </a:xfrm>
+          <a:prstGeom xmlns:a="http://schemas.openxmlformats.org/drawingml/2006/main" prst="rect">
+            <a:avLst/>
+          </a:prstGeom>
+          <a:noFill xmlns:a="http://schemas.openxmlformats.org/drawingml/2006/main"/>
+          <a:ln xmlns:a="http://schemas.openxmlformats.org/drawingml/2006/main" w="0">
+            <a:noFill/>
+            <a:prstDash val="solid"/>
+          </a:ln>
+        </p:spPr>
+        <p:txBody>
+          <a:bodyPr xmlns:a="http://schemas.openxmlformats.org/drawingml/2006/main" lIns="91440" tIns="45720" rIns="91440" bIns="45720" anchor="ctr"/>
+          <a:lstStyle xmlns:a="http://schemas.openxmlformats.org/drawingml/2006/main"/>
+          <a:p xmlns:a="http://schemas.openxmlformats.org/drawingml/2006/main">
+            <a:pPr algn="l">
+              <a:buNone/>
+              <a:defRPr sz="900" b="0">
+                <a:solidFill>
+                  <a:srgbClr val="526675"/>
+                </a:solidFill>
+                <a:latin typeface="Calibri"/>
+                <a:ea typeface="Calibri"/>
+                <a:cs typeface="Calibri"/>
+              </a:defRPr>
+            </a:pPr>
+            <a:r>
+              <a:rPr sz="900" b="0">
+                <a:solidFill>
+                  <a:srgbClr val="526675"/>
+                </a:solidFill>
+                <a:latin typeface="Calibri"/>
+                <a:ea typeface="Calibri"/>
+                <a:cs typeface="Calibri"/>
+              </a:rPr>
+              <a:t>Имитационное моделирование · лабораторная работа № 4</a:t>
+            </a:r>
+          </a:p>
+        </p:txBody>
+      </p:sp>
+      <p:sp>
+        <p:nvSpPr>
+          <p:cNvPr id="7" name="page-number">
+            <a:extLst xmlns:a="http://schemas.openxmlformats.org/drawingml/2006/main">
+              <a:ext uri="{FF2B5EF4-FFF2-40B4-BE49-F238E27FC236}">
+                <a16:creationId xmlns:a16="http://schemas.microsoft.com/office/drawing/2014/main" id="{DB3554BD-DC5A-4F9E-A33E-16ACB139B7E1}"/>
+              </a:ext>
+            </a:extLst>
+          </p:cNvPr>
+          <p:cNvSpPr>
+            <a:spLocks xmlns:a="http://schemas.openxmlformats.org/drawingml/2006/main" noGrp="1"/>
+          </p:cNvSpPr>
+          <p:nvPr/>
+        </p:nvSpPr>
+        <p:spPr>
+          <a:xfrm xmlns:a="http://schemas.openxmlformats.org/drawingml/2006/main">
+            <a:off x="10820400" y="6486525"/>
+            <a:ext cx="800100" cy="257175"/>
+          </a:xfrm>
+          <a:prstGeom xmlns:a="http://schemas.openxmlformats.org/drawingml/2006/main" prst="rect">
+            <a:avLst/>
+          </a:prstGeom>
+          <a:noFill xmlns:a="http://schemas.openxmlformats.org/drawingml/2006/main"/>
+          <a:ln xmlns:a="http://schemas.openxmlformats.org/drawingml/2006/main" w="0">
+            <a:noFill/>
+            <a:prstDash val="solid"/>
+          </a:ln>
+        </p:spPr>
+        <p:txBody>
+          <a:bodyPr xmlns:a="http://schemas.openxmlformats.org/drawingml/2006/main" lIns="91440" tIns="45720" rIns="91440" bIns="45720" anchor="ctr"/>
+          <a:lstStyle xmlns:a="http://schemas.openxmlformats.org/drawingml/2006/main"/>
+          <a:p xmlns:a="http://schemas.openxmlformats.org/drawingml/2006/main">
+            <a:pPr algn="ctr">
+              <a:buNone/>
+              <a:defRPr sz="975" b="1">
+                <a:solidFill>
+                  <a:srgbClr val="0B4778"/>
+                </a:solidFill>
+                <a:latin typeface="Calibri"/>
+                <a:ea typeface="Calibri"/>
+                <a:cs typeface="Calibri"/>
+              </a:defRPr>
+            </a:pPr>
+            <a:r>
+              <a:rPr sz="975" b="1">
+                <a:solidFill>
+                  <a:srgbClr val="0B4778"/>
+                </a:solidFill>
+                <a:latin typeface="Calibri"/>
+                <a:ea typeface="Calibri"/>
+                <a:cs typeface="Calibri"/>
+              </a:rPr>
+              <a:t>17</a:t>
+            </a:r>
+          </a:p>
+        </p:txBody>
+      </p:sp>
+      <p:pic>
+        <p:nvPicPr>
+          <p:cNvPr id="29" name="14-plot.png" descr="14-plot.png"/>
+          <p:cNvPicPr>
+            <a:picLocks xmlns:a="http://schemas.openxmlformats.org/drawingml/2006/main" noChangeAspect="1"/>
+          </p:cNvPicPr>
+          <p:nvPr/>
+        </p:nvPicPr>
+        <p:blipFill>
+          <a:blip xmlns:r="http://schemas.openxmlformats.org/officeDocument/2006/relationships" xmlns:a="http://schemas.openxmlformats.org/drawingml/2006/main" r:embed="Lab4Slide17Picture1"/>
+          <a:stretch xmlns:a="http://schemas.openxmlformats.org/drawingml/2006/main"/>
+        </p:blipFill>
+        <p:spPr>
+          <a:xfrm xmlns:a="http://schemas.openxmlformats.org/drawingml/2006/main">
+            <a:off x="668948" y="1105853"/>
+            <a:ext cx="7177454" cy="4665345"/>
+          </a:xfrm>
+          <a:prstGeom xmlns:a="http://schemas.openxmlformats.org/drawingml/2006/main" prst="rect">
+            <a:avLst/>
+          </a:prstGeom>
+        </p:spPr>
+      </p:pic>
+      <p:sp>
+        <p:nvSpPr>
+          <p:cNvPr id="9" name="imax-bg">
+            <a:extLst xmlns:a="http://schemas.openxmlformats.org/drawingml/2006/main">
+              <a:ext uri="{FF2B5EF4-FFF2-40B4-BE49-F238E27FC236}">
+                <a16:creationId xmlns:a16="http://schemas.microsoft.com/office/drawing/2014/main" id="{23FB6D0B-5E2B-4B1C-B750-E19EAA8376F0}"/>
+              </a:ext>
+            </a:extLst>
+          </p:cNvPr>
+          <p:cNvSpPr>
+            <a:spLocks xmlns:a="http://schemas.openxmlformats.org/drawingml/2006/main" noGrp="1"/>
+          </p:cNvSpPr>
+          <p:nvPr/>
+        </p:nvSpPr>
+        <p:spPr>
+          <a:xfrm xmlns:a="http://schemas.openxmlformats.org/drawingml/2006/main">
+            <a:off x="8286750" y="1104900"/>
+            <a:ext cx="2952750" cy="971550"/>
+          </a:xfrm>
+          <a:prstGeom xmlns:a="http://schemas.openxmlformats.org/drawingml/2006/main" prst="rect">
+            <a:avLst/>
+          </a:prstGeom>
+          <a:solidFill xmlns:a="http://schemas.openxmlformats.org/drawingml/2006/main">
+            <a:srgbClr val="EAF5FA"/>
+          </a:solidFill>
+          <a:ln xmlns:a="http://schemas.openxmlformats.org/drawingml/2006/main" w="9525">
+            <a:solidFill>
+              <a:srgbClr val="B9D9E8"/>
+            </a:solidFill>
+            <a:prstDash val="solid"/>
+          </a:ln>
+        </p:spPr>
+      </p:sp>
+      <p:sp>
+        <p:nvSpPr>
+          <p:cNvPr id="10" name="imax-value">
+            <a:extLst xmlns:a="http://schemas.openxmlformats.org/drawingml/2006/main">
+              <a:ext uri="{FF2B5EF4-FFF2-40B4-BE49-F238E27FC236}">
+                <a16:creationId xmlns:a16="http://schemas.microsoft.com/office/drawing/2014/main" id="{B29A502F-6BBC-4C15-80AF-7B56141FD7D9}"/>
+              </a:ext>
+            </a:extLst>
+          </p:cNvPr>
+          <p:cNvSpPr>
+            <a:spLocks xmlns:a="http://schemas.openxmlformats.org/drawingml/2006/main" noGrp="1"/>
+          </p:cNvSpPr>
+          <p:nvPr/>
+        </p:nvSpPr>
+        <p:spPr>
+          <a:xfrm xmlns:a="http://schemas.openxmlformats.org/drawingml/2006/main">
+            <a:off x="8458200" y="1200150"/>
+            <a:ext cx="2609850" cy="457200"/>
+          </a:xfrm>
+          <a:prstGeom xmlns:a="http://schemas.openxmlformats.org/drawingml/2006/main" prst="rect">
+            <a:avLst/>
+          </a:prstGeom>
+          <a:noFill xmlns:a="http://schemas.openxmlformats.org/drawingml/2006/main"/>
+          <a:ln xmlns:a="http://schemas.openxmlformats.org/drawingml/2006/main" w="0">
+            <a:noFill/>
+            <a:prstDash val="solid"/>
+          </a:ln>
+        </p:spPr>
+        <p:txBody>
+          <a:bodyPr xmlns:a="http://schemas.openxmlformats.org/drawingml/2006/main" lIns="91440" tIns="45720" rIns="91440" bIns="45720" anchor="ctr"/>
+          <a:lstStyle xmlns:a="http://schemas.openxmlformats.org/drawingml/2006/main"/>
+          <a:p xmlns:a="http://schemas.openxmlformats.org/drawingml/2006/main">
+            <a:pPr algn="l">
+              <a:buNone/>
+              <a:defRPr sz="2250" b="1">
+                <a:solidFill>
+                  <a:srgbClr val="C83B45"/>
+                </a:solidFill>
+                <a:latin typeface="Calibri"/>
+                <a:ea typeface="Calibri"/>
+                <a:cs typeface="Calibri"/>
+              </a:defRPr>
+            </a:pPr>
+            <a:r>
+              <a:rPr sz="2250" b="1">
+                <a:solidFill>
+                  <a:srgbClr val="C83B45"/>
+                </a:solidFill>
+                <a:latin typeface="Calibri"/>
+                <a:ea typeface="Calibri"/>
+                <a:cs typeface="Calibri"/>
+              </a:rPr>
+              <a:t>0,133%</a:t>
+            </a:r>
+          </a:p>
+        </p:txBody>
+      </p:sp>
+      <p:sp>
+        <p:nvSpPr>
+          <p:cNvPr id="11" name="imax-caption">
+            <a:extLst xmlns:a="http://schemas.openxmlformats.org/drawingml/2006/main">
+              <a:ext uri="{FF2B5EF4-FFF2-40B4-BE49-F238E27FC236}">
+                <a16:creationId xmlns:a16="http://schemas.microsoft.com/office/drawing/2014/main" id="{EAFCEBFD-3EED-4A83-91F8-2D01A6C5C884}"/>
+              </a:ext>
+            </a:extLst>
+          </p:cNvPr>
+          <p:cNvSpPr>
+            <a:spLocks xmlns:a="http://schemas.openxmlformats.org/drawingml/2006/main" noGrp="1"/>
+          </p:cNvSpPr>
+          <p:nvPr/>
+        </p:nvSpPr>
+        <p:spPr>
+          <a:xfrm xmlns:a="http://schemas.openxmlformats.org/drawingml/2006/main">
+            <a:off x="8458200" y="1638300"/>
+            <a:ext cx="2609850" cy="323850"/>
+          </a:xfrm>
+          <a:prstGeom xmlns:a="http://schemas.openxmlformats.org/drawingml/2006/main" prst="rect">
+            <a:avLst/>
+          </a:prstGeom>
+          <a:noFill xmlns:a="http://schemas.openxmlformats.org/drawingml/2006/main"/>
+          <a:ln xmlns:a="http://schemas.openxmlformats.org/drawingml/2006/main" w="0">
+            <a:noFill/>
+            <a:prstDash val="solid"/>
+          </a:ln>
+        </p:spPr>
+        <p:txBody>
+          <a:bodyPr xmlns:a="http://schemas.openxmlformats.org/drawingml/2006/main" lIns="91440" tIns="45720" rIns="91440" bIns="45720" anchor="ctr"/>
+          <a:lstStyle xmlns:a="http://schemas.openxmlformats.org/drawingml/2006/main"/>
+          <a:p xmlns:a="http://schemas.openxmlformats.org/drawingml/2006/main">
+            <a:pPr algn="l">
+              <a:buNone/>
+              <a:defRPr sz="1125" b="0">
+                <a:solidFill>
+                  <a:srgbClr val="526675"/>
+                </a:solidFill>
+                <a:latin typeface="Calibri"/>
+                <a:ea typeface="Calibri"/>
+                <a:cs typeface="Calibri"/>
+              </a:defRPr>
+            </a:pPr>
+            <a:r>
+              <a:rPr sz="1125" b="0">
+                <a:solidFill>
+                  <a:srgbClr val="526675"/>
+                </a:solidFill>
+                <a:latin typeface="Calibri"/>
+                <a:ea typeface="Calibri"/>
+                <a:cs typeface="Calibri"/>
+              </a:rPr>
+              <a:t>наибольший пик проверки</a:t>
+            </a:r>
+          </a:p>
+        </p:txBody>
+      </p:sp>
+      <p:sp>
+        <p:nvSpPr>
+          <p:cNvPr id="12" name="tpeak-bg">
+            <a:extLst xmlns:a="http://schemas.openxmlformats.org/drawingml/2006/main">
+              <a:ext uri="{FF2B5EF4-FFF2-40B4-BE49-F238E27FC236}">
+                <a16:creationId xmlns:a16="http://schemas.microsoft.com/office/drawing/2014/main" id="{CB68471B-DC2C-40D6-8738-71969ACC7934}"/>
+              </a:ext>
+            </a:extLst>
+          </p:cNvPr>
+          <p:cNvSpPr>
+            <a:spLocks xmlns:a="http://schemas.openxmlformats.org/drawingml/2006/main" noGrp="1"/>
+          </p:cNvSpPr>
+          <p:nvPr/>
+        </p:nvSpPr>
+        <p:spPr>
+          <a:xfrm xmlns:a="http://schemas.openxmlformats.org/drawingml/2006/main">
+            <a:off x="8286750" y="2266950"/>
+            <a:ext cx="2952750" cy="971550"/>
+          </a:xfrm>
+          <a:prstGeom xmlns:a="http://schemas.openxmlformats.org/drawingml/2006/main" prst="rect">
+            <a:avLst/>
+          </a:prstGeom>
+          <a:solidFill xmlns:a="http://schemas.openxmlformats.org/drawingml/2006/main">
+            <a:srgbClr val="EAF5FA"/>
+          </a:solidFill>
+          <a:ln xmlns:a="http://schemas.openxmlformats.org/drawingml/2006/main" w="9525">
+            <a:solidFill>
+              <a:srgbClr val="B9D9E8"/>
+            </a:solidFill>
+            <a:prstDash val="solid"/>
+          </a:ln>
+        </p:spPr>
+      </p:sp>
+      <p:sp>
+        <p:nvSpPr>
+          <p:cNvPr id="13" name="tpeak-value">
+            <a:extLst xmlns:a="http://schemas.openxmlformats.org/drawingml/2006/main">
+              <a:ext uri="{FF2B5EF4-FFF2-40B4-BE49-F238E27FC236}">
+                <a16:creationId xmlns:a16="http://schemas.microsoft.com/office/drawing/2014/main" id="{C9732CBD-5B35-4487-81E3-94F91DA2B26F}"/>
+              </a:ext>
+            </a:extLst>
+          </p:cNvPr>
+          <p:cNvSpPr>
+            <a:spLocks xmlns:a="http://schemas.openxmlformats.org/drawingml/2006/main" noGrp="1"/>
+          </p:cNvSpPr>
+          <p:nvPr/>
+        </p:nvSpPr>
+        <p:spPr>
+          <a:xfrm xmlns:a="http://schemas.openxmlformats.org/drawingml/2006/main">
+            <a:off x="8458200" y="2362200"/>
+            <a:ext cx="2609850" cy="457200"/>
+          </a:xfrm>
+          <a:prstGeom xmlns:a="http://schemas.openxmlformats.org/drawingml/2006/main" prst="rect">
+            <a:avLst/>
+          </a:prstGeom>
+          <a:noFill xmlns:a="http://schemas.openxmlformats.org/drawingml/2006/main"/>
+          <a:ln xmlns:a="http://schemas.openxmlformats.org/drawingml/2006/main" w="0">
+            <a:noFill/>
+            <a:prstDash val="solid"/>
+          </a:ln>
+        </p:spPr>
+        <p:txBody>
+          <a:bodyPr xmlns:a="http://schemas.openxmlformats.org/drawingml/2006/main" lIns="91440" tIns="45720" rIns="91440" bIns="45720" anchor="ctr"/>
+          <a:lstStyle xmlns:a="http://schemas.openxmlformats.org/drawingml/2006/main"/>
+          <a:p xmlns:a="http://schemas.openxmlformats.org/drawingml/2006/main">
+            <a:pPr algn="l">
+              <a:buNone/>
+              <a:defRPr sz="2250" b="1">
+                <a:solidFill>
+                  <a:srgbClr val="0B4778"/>
+                </a:solidFill>
+                <a:latin typeface="Calibri"/>
+                <a:ea typeface="Calibri"/>
+                <a:cs typeface="Calibri"/>
+              </a:defRPr>
+            </a:pPr>
+            <a:r>
+              <a:rPr sz="2250" b="1">
+                <a:solidFill>
+                  <a:srgbClr val="0B4778"/>
+                </a:solidFill>
+                <a:latin typeface="Calibri"/>
+                <a:ea typeface="Calibri"/>
+                <a:cs typeface="Calibri"/>
+              </a:rPr>
+              <a:t>20 из 20</a:t>
+            </a:r>
+          </a:p>
+        </p:txBody>
+      </p:sp>
+      <p:sp>
+        <p:nvSpPr>
+          <p:cNvPr id="14" name="tpeak-caption">
+            <a:extLst xmlns:a="http://schemas.openxmlformats.org/drawingml/2006/main">
+              <a:ext uri="{FF2B5EF4-FFF2-40B4-BE49-F238E27FC236}">
+                <a16:creationId xmlns:a16="http://schemas.microsoft.com/office/drawing/2014/main" id="{6422106B-D159-415D-9E44-6C792AC71DF2}"/>
+              </a:ext>
+            </a:extLst>
+          </p:cNvPr>
+          <p:cNvSpPr>
+            <a:spLocks xmlns:a="http://schemas.openxmlformats.org/drawingml/2006/main" noGrp="1"/>
+          </p:cNvSpPr>
+          <p:nvPr/>
+        </p:nvSpPr>
+        <p:spPr>
+          <a:xfrm xmlns:a="http://schemas.openxmlformats.org/drawingml/2006/main">
+            <a:off x="8458200" y="2800350"/>
+            <a:ext cx="2609850" cy="323850"/>
+          </a:xfrm>
+          <a:prstGeom xmlns:a="http://schemas.openxmlformats.org/drawingml/2006/main" prst="rect">
+            <a:avLst/>
+          </a:prstGeom>
+          <a:noFill xmlns:a="http://schemas.openxmlformats.org/drawingml/2006/main"/>
+          <a:ln xmlns:a="http://schemas.openxmlformats.org/drawingml/2006/main" w="0">
+            <a:noFill/>
+            <a:prstDash val="solid"/>
+          </a:ln>
+        </p:spPr>
+        <p:txBody>
+          <a:bodyPr xmlns:a="http://schemas.openxmlformats.org/drawingml/2006/main" lIns="91440" tIns="45720" rIns="91440" bIns="45720" anchor="ctr"/>
+          <a:lstStyle xmlns:a="http://schemas.openxmlformats.org/drawingml/2006/main"/>
+          <a:p xmlns:a="http://schemas.openxmlformats.org/drawingml/2006/main">
+            <a:pPr algn="l">
+              <a:buNone/>
+              <a:defRPr sz="1125" b="0">
+                <a:solidFill>
+                  <a:srgbClr val="526675"/>
+                </a:solidFill>
+                <a:latin typeface="Calibri"/>
+                <a:ea typeface="Calibri"/>
+                <a:cs typeface="Calibri"/>
+              </a:defRPr>
+            </a:pPr>
+            <a:r>
+              <a:rPr sz="1125" b="0">
+                <a:solidFill>
+                  <a:srgbClr val="526675"/>
+                </a:solidFill>
+                <a:latin typeface="Calibri"/>
+                <a:ea typeface="Calibri"/>
+                <a:cs typeface="Calibri"/>
+              </a:rPr>
+              <a:t>пик ниже 30%</a:t>
+            </a:r>
+          </a:p>
+        </p:txBody>
+      </p:sp>
+      <p:sp>
+        <p:nvSpPr>
+          <p:cNvPr id="15" name="rend-bg">
+            <a:extLst xmlns:a="http://schemas.openxmlformats.org/drawingml/2006/main">
+              <a:ext uri="{FF2B5EF4-FFF2-40B4-BE49-F238E27FC236}">
+                <a16:creationId xmlns:a16="http://schemas.microsoft.com/office/drawing/2014/main" id="{04381D42-5BF5-4983-B4EB-47C62156FC42}"/>
+              </a:ext>
+            </a:extLst>
+          </p:cNvPr>
+          <p:cNvSpPr>
+            <a:spLocks xmlns:a="http://schemas.openxmlformats.org/drawingml/2006/main" noGrp="1"/>
+          </p:cNvSpPr>
+          <p:nvPr/>
+        </p:nvSpPr>
+        <p:spPr>
+          <a:xfrm xmlns:a="http://schemas.openxmlformats.org/drawingml/2006/main">
+            <a:off x="8286750" y="3429000"/>
+            <a:ext cx="2952750" cy="971550"/>
+          </a:xfrm>
+          <a:prstGeom xmlns:a="http://schemas.openxmlformats.org/drawingml/2006/main" prst="rect">
+            <a:avLst/>
+          </a:prstGeom>
+          <a:solidFill xmlns:a="http://schemas.openxmlformats.org/drawingml/2006/main">
+            <a:srgbClr val="EAF5FA"/>
+          </a:solidFill>
+          <a:ln xmlns:a="http://schemas.openxmlformats.org/drawingml/2006/main" w="9525">
+            <a:solidFill>
+              <a:srgbClr val="B9D9E8"/>
+            </a:solidFill>
+            <a:prstDash val="solid"/>
+          </a:ln>
+        </p:spPr>
+      </p:sp>
+      <p:sp>
+        <p:nvSpPr>
+          <p:cNvPr id="16" name="rend-value">
+            <a:extLst xmlns:a="http://schemas.openxmlformats.org/drawingml/2006/main">
+              <a:ext uri="{FF2B5EF4-FFF2-40B4-BE49-F238E27FC236}">
+                <a16:creationId xmlns:a16="http://schemas.microsoft.com/office/drawing/2014/main" id="{EC23F540-774E-44A3-BED8-2FFF4B9457C0}"/>
+              </a:ext>
+            </a:extLst>
+          </p:cNvPr>
+          <p:cNvSpPr>
+            <a:spLocks xmlns:a="http://schemas.openxmlformats.org/drawingml/2006/main" noGrp="1"/>
+          </p:cNvSpPr>
+          <p:nvPr/>
+        </p:nvSpPr>
+        <p:spPr>
+          <a:xfrm xmlns:a="http://schemas.openxmlformats.org/drawingml/2006/main">
+            <a:off x="8458200" y="3524250"/>
+            <a:ext cx="2609850" cy="457200"/>
+          </a:xfrm>
+          <a:prstGeom xmlns:a="http://schemas.openxmlformats.org/drawingml/2006/main" prst="rect">
+            <a:avLst/>
+          </a:prstGeom>
+          <a:noFill xmlns:a="http://schemas.openxmlformats.org/drawingml/2006/main"/>
+          <a:ln xmlns:a="http://schemas.openxmlformats.org/drawingml/2006/main" w="0">
+            <a:noFill/>
+            <a:prstDash val="solid"/>
+          </a:ln>
+        </p:spPr>
+        <p:txBody>
+          <a:bodyPr xmlns:a="http://schemas.openxmlformats.org/drawingml/2006/main" lIns="91440" tIns="45720" rIns="91440" bIns="45720" anchor="ctr"/>
+          <a:lstStyle xmlns:a="http://schemas.openxmlformats.org/drawingml/2006/main"/>
+          <a:p xmlns:a="http://schemas.openxmlformats.org/drawingml/2006/main">
+            <a:pPr algn="l">
+              <a:buNone/>
+              <a:defRPr sz="2250" b="1">
+                <a:solidFill>
+                  <a:srgbClr val="1D8A5B"/>
+                </a:solidFill>
+                <a:latin typeface="Calibri"/>
+                <a:ea typeface="Calibri"/>
+                <a:cs typeface="Calibri"/>
+              </a:defRPr>
+            </a:pPr>
+            <a:r>
+              <a:rPr sz="2250" b="1">
+                <a:solidFill>
+                  <a:srgbClr val="1D8A5B"/>
+                </a:solidFill>
+                <a:latin typeface="Calibri"/>
+                <a:ea typeface="Calibri"/>
+                <a:cs typeface="Calibri"/>
+              </a:rPr>
+              <a:t>0</a:t>
+            </a:r>
+          </a:p>
+        </p:txBody>
+      </p:sp>
+      <p:sp>
+        <p:nvSpPr>
+          <p:cNvPr id="17" name="rend-caption">
+            <a:extLst xmlns:a="http://schemas.openxmlformats.org/drawingml/2006/main">
+              <a:ext uri="{FF2B5EF4-FFF2-40B4-BE49-F238E27FC236}">
+                <a16:creationId xmlns:a16="http://schemas.microsoft.com/office/drawing/2014/main" id="{BA2CD5D3-B265-4D73-B512-FE1B1471FDE5}"/>
+              </a:ext>
+            </a:extLst>
+          </p:cNvPr>
+          <p:cNvSpPr>
+            <a:spLocks xmlns:a="http://schemas.openxmlformats.org/drawingml/2006/main" noGrp="1"/>
+          </p:cNvSpPr>
+          <p:nvPr/>
+        </p:nvSpPr>
+        <p:spPr>
+          <a:xfrm xmlns:a="http://schemas.openxmlformats.org/drawingml/2006/main">
+            <a:off x="8458200" y="3962400"/>
+            <a:ext cx="2609850" cy="323850"/>
+          </a:xfrm>
+          <a:prstGeom xmlns:a="http://schemas.openxmlformats.org/drawingml/2006/main" prst="rect">
+            <a:avLst/>
+          </a:prstGeom>
+          <a:noFill xmlns:a="http://schemas.openxmlformats.org/drawingml/2006/main"/>
+          <a:ln xmlns:a="http://schemas.openxmlformats.org/drawingml/2006/main" w="0">
+            <a:noFill/>
+            <a:prstDash val="solid"/>
+          </a:ln>
+        </p:spPr>
+        <p:txBody>
+          <a:bodyPr xmlns:a="http://schemas.openxmlformats.org/drawingml/2006/main" lIns="91440" tIns="45720" rIns="91440" bIns="45720" anchor="ctr"/>
+          <a:lstStyle xmlns:a="http://schemas.openxmlformats.org/drawingml/2006/main"/>
+          <a:p xmlns:a="http://schemas.openxmlformats.org/drawingml/2006/main">
+            <a:pPr algn="l">
+              <a:buNone/>
+              <a:defRPr sz="1125" b="0">
+                <a:solidFill>
+                  <a:srgbClr val="526675"/>
+                </a:solidFill>
+                <a:latin typeface="Calibri"/>
+                <a:ea typeface="Calibri"/>
+                <a:cs typeface="Calibri"/>
+              </a:defRPr>
+            </a:pPr>
+            <a:r>
+              <a:rPr sz="1125" b="0">
+                <a:solidFill>
+                  <a:srgbClr val="526675"/>
+                </a:solidFill>
+                <a:latin typeface="Calibri"/>
+                <a:ea typeface="Calibri"/>
+                <a:cs typeface="Calibri"/>
+              </a:rPr>
+              <a:t>умерших в проверке</a:t>
+            </a:r>
+          </a:p>
+        </p:txBody>
+      </p:sp>
+      <p:sp>
+        <p:nvSpPr>
+          <p:cNvPr id="18" name="drift">
+            <a:extLst xmlns:a="http://schemas.openxmlformats.org/drawingml/2006/main">
+              <a:ext uri="{FF2B5EF4-FFF2-40B4-BE49-F238E27FC236}">
+                <a16:creationId xmlns:a16="http://schemas.microsoft.com/office/drawing/2014/main" id="{5C0C9BC5-8FBE-41DE-AA12-9933C1D6C4F7}"/>
+              </a:ext>
+            </a:extLst>
+          </p:cNvPr>
+          <p:cNvSpPr>
+            <a:spLocks xmlns:a="http://schemas.openxmlformats.org/drawingml/2006/main" noGrp="1"/>
+          </p:cNvSpPr>
+          <p:nvPr/>
+        </p:nvSpPr>
+        <p:spPr>
+          <a:xfrm xmlns:a="http://schemas.openxmlformats.org/drawingml/2006/main">
+            <a:off x="8286750" y="4800600"/>
+            <a:ext cx="2952750" cy="552450"/>
+          </a:xfrm>
+          <a:prstGeom xmlns:a="http://schemas.openxmlformats.org/drawingml/2006/main" prst="rect">
+            <a:avLst/>
+          </a:prstGeom>
+          <a:noFill xmlns:a="http://schemas.openxmlformats.org/drawingml/2006/main"/>
+          <a:ln xmlns:a="http://schemas.openxmlformats.org/drawingml/2006/main" w="0">
+            <a:noFill/>
+            <a:prstDash val="solid"/>
+          </a:ln>
+        </p:spPr>
+        <p:txBody>
+          <a:bodyPr xmlns:a="http://schemas.openxmlformats.org/drawingml/2006/main" lIns="91440" tIns="45720" rIns="91440" bIns="45720" anchor="ctr"/>
+          <a:lstStyle xmlns:a="http://schemas.openxmlformats.org/drawingml/2006/main"/>
+          <a:p xmlns:a="http://schemas.openxmlformats.org/drawingml/2006/main">
+            <a:pPr algn="ctr">
+              <a:buNone/>
+              <a:defRPr sz="1500" b="1">
+                <a:solidFill>
+                  <a:srgbClr val="0B4778"/>
+                </a:solidFill>
+                <a:latin typeface="Calibri"/>
+                <a:ea typeface="Calibri"/>
+                <a:cs typeface="Calibri"/>
+              </a:defRPr>
+            </a:pPr>
+            <a:r>
+              <a:rPr sz="1500" b="1">
+                <a:solidFill>
+                  <a:srgbClr val="0B4778"/>
+                </a:solidFill>
+                <a:latin typeface="Calibri"/>
+                <a:ea typeface="Calibri"/>
+                <a:cs typeface="Calibri"/>
+              </a:rPr>
+              <a:t>β = 0,1; выявление: 3 дн.; вероятность смерти 0,01.</a:t>
+            </a:r>
+          </a:p>
+        </p:txBody>
+      </p:sp>
+    </p:spTree>
+    <p:extLst>
+      <p:ext uri="{BB962C8B-B14F-4D97-AF65-F5344CB8AC3E}">
+        <p14:creationId xmlns:p14="http://schemas.microsoft.com/office/powerpoint/2010/main" val="1548019977"/>
+      </p:ext>
+    </p:extLst>
+  </p:cSld>
+</p:sld>
+</file>
+
+<file path=ppt/slides/slide18.xml><?xml version="1.0" encoding="utf-8"?>
+<p:sld xmlns:p="http://schemas.openxmlformats.org/presentationml/2006/main">
+  <p:cSld>
+    <p:bg>
+      <p:bgPr>
+        <a:solidFill xmlns:a="http://schemas.openxmlformats.org/drawingml/2006/main">
+          <a:srgbClr val="FFFFFF"/>
+        </a:solidFill>
+      </p:bgPr>
+    </p:bg>
+    <p:spTree>
+      <p:nvGrpSpPr>
+        <p:cNvPr id="1" name=""/>
+        <p:cNvGrpSpPr/>
+        <p:nvPr/>
+      </p:nvGrpSpPr>
+      <p:grpSpPr>
+        <a:xfrm xmlns:a="http://schemas.openxmlformats.org/drawingml/2006/main"/>
+      </p:grpSpPr>
+      <p:sp>
+        <p:nvSpPr>
+          <p:cNvPr id="11" name="top-band">
+            <a:extLst xmlns:a="http://schemas.openxmlformats.org/drawingml/2006/main">
+              <a:ext uri="{FF2B5EF4-FFF2-40B4-BE49-F238E27FC236}">
+                <a16:creationId xmlns:a16="http://schemas.microsoft.com/office/drawing/2014/main" id="{48421A46-F9BD-480F-B275-C23896D5EE31}"/>
+              </a:ext>
+            </a:extLst>
+          </p:cNvPr>
+          <p:cNvSpPr>
+            <a:spLocks xmlns:a="http://schemas.openxmlformats.org/drawingml/2006/main" noGrp="1"/>
+          </p:cNvSpPr>
+          <p:nvPr/>
+        </p:nvSpPr>
+        <p:spPr>
+          <a:xfrm xmlns:a="http://schemas.openxmlformats.org/drawingml/2006/main">
+            <a:off x="0" y="0"/>
+            <a:ext cx="12192000" cy="628650"/>
+          </a:xfrm>
+          <a:prstGeom xmlns:a="http://schemas.openxmlformats.org/drawingml/2006/main" prst="rect">
+            <a:avLst/>
+          </a:prstGeom>
+          <a:solidFill xmlns:a="http://schemas.openxmlformats.org/drawingml/2006/main">
+            <a:srgbClr val="0B4778"/>
+          </a:solidFill>
+          <a:ln xmlns:a="http://schemas.openxmlformats.org/drawingml/2006/main" w="0">
+            <a:noFill/>
+            <a:prstDash val="solid"/>
+          </a:ln>
+        </p:spPr>
+      </p:sp>
+      <p:sp>
+        <p:nvSpPr>
+          <p:cNvPr id="2" name="top-accent">
+            <a:extLst xmlns:a="http://schemas.openxmlformats.org/drawingml/2006/main">
+              <a:ext uri="{FF2B5EF4-FFF2-40B4-BE49-F238E27FC236}">
+                <a16:creationId xmlns:a16="http://schemas.microsoft.com/office/drawing/2014/main" id="{90627352-F663-4A2E-9B7B-12B403F6F495}"/>
+              </a:ext>
+            </a:extLst>
+          </p:cNvPr>
+          <p:cNvSpPr>
+            <a:spLocks xmlns:a="http://schemas.openxmlformats.org/drawingml/2006/main" noGrp="1"/>
+          </p:cNvSpPr>
+          <p:nvPr/>
+        </p:nvSpPr>
+        <p:spPr>
+          <a:xfrm xmlns:a="http://schemas.openxmlformats.org/drawingml/2006/main">
+            <a:off x="0" y="628650"/>
+            <a:ext cx="12192000" cy="47625"/>
+          </a:xfrm>
+          <a:prstGeom xmlns:a="http://schemas.openxmlformats.org/drawingml/2006/main" prst="rect">
+            <a:avLst/>
+          </a:prstGeom>
+          <a:solidFill xmlns:a="http://schemas.openxmlformats.org/drawingml/2006/main">
+            <a:srgbClr val="35A9D3"/>
+          </a:solidFill>
+          <a:ln xmlns:a="http://schemas.openxmlformats.org/drawingml/2006/main" w="0">
+            <a:noFill/>
+            <a:prstDash val="solid"/>
+          </a:ln>
+        </p:spPr>
+      </p:sp>
+      <p:sp>
+        <p:nvSpPr>
+          <p:cNvPr id="3" name="slide-title">
+            <a:extLst xmlns:a="http://schemas.openxmlformats.org/drawingml/2006/main">
+              <a:ext uri="{FF2B5EF4-FFF2-40B4-BE49-F238E27FC236}">
+                <a16:creationId xmlns:a16="http://schemas.microsoft.com/office/drawing/2014/main" id="{518DEB88-7101-47B0-B748-A400397B559B}"/>
+              </a:ext>
+            </a:extLst>
+          </p:cNvPr>
+          <p:cNvSpPr>
+            <a:spLocks xmlns:a="http://schemas.openxmlformats.org/drawingml/2006/main" noGrp="1"/>
+          </p:cNvSpPr>
+          <p:nvPr/>
+        </p:nvSpPr>
+        <p:spPr>
+          <a:xfrm xmlns:a="http://schemas.openxmlformats.org/drawingml/2006/main">
+            <a:off x="609600" y="57150"/>
+            <a:ext cx="10763250" cy="523875"/>
+          </a:xfrm>
+          <a:prstGeom xmlns:a="http://schemas.openxmlformats.org/drawingml/2006/main" prst="rect">
+            <a:avLst/>
+          </a:prstGeom>
+          <a:noFill xmlns:a="http://schemas.openxmlformats.org/drawingml/2006/main"/>
+          <a:ln xmlns:a="http://schemas.openxmlformats.org/drawingml/2006/main" w="0">
+            <a:noFill/>
+            <a:prstDash val="solid"/>
+          </a:ln>
+        </p:spPr>
+        <p:txBody>
+          <a:bodyPr xmlns:a="http://schemas.openxmlformats.org/drawingml/2006/main" lIns="91440" tIns="45720" rIns="91440" bIns="45720" anchor="ctr"/>
+          <a:lstStyle xmlns:a="http://schemas.openxmlformats.org/drawingml/2006/main"/>
+          <a:p xmlns:a="http://schemas.openxmlformats.org/drawingml/2006/main">
+            <a:pPr algn="l">
+              <a:buNone/>
+              <a:defRPr sz="2250" b="1">
+                <a:solidFill>
+                  <a:srgbClr val="FFFFFF"/>
+                </a:solidFill>
+                <a:latin typeface="Calibri"/>
+                <a:ea typeface="Calibri"/>
+                <a:cs typeface="Calibri"/>
+              </a:defRPr>
+            </a:pPr>
+            <a:r>
+              <a:rPr sz="2250" b="1">
+                <a:solidFill>
+                  <a:srgbClr val="FFFFFF"/>
+                </a:solidFill>
+                <a:latin typeface="Calibri"/>
+                <a:ea typeface="Calibri"/>
+                <a:cs typeface="Calibri"/>
+              </a:rPr>
+              <a:t>Конечная проверка не даёт гарантии для всех траекторий</a:t>
+            </a:r>
+          </a:p>
+        </p:txBody>
+      </p:sp>
+      <p:sp>
+        <p:nvSpPr>
+          <p:cNvPr id="4" name="footer-rule">
+            <a:extLst xmlns:a="http://schemas.openxmlformats.org/drawingml/2006/main">
+              <a:ext uri="{FF2B5EF4-FFF2-40B4-BE49-F238E27FC236}">
+                <a16:creationId xmlns:a16="http://schemas.microsoft.com/office/drawing/2014/main" id="{9CDEA9B6-8955-4F09-B9FA-546DA393B4F9}"/>
+              </a:ext>
+            </a:extLst>
+          </p:cNvPr>
+          <p:cNvSpPr>
+            <a:spLocks xmlns:a="http://schemas.openxmlformats.org/drawingml/2006/main" noGrp="1"/>
+          </p:cNvSpPr>
+          <p:nvPr/>
+        </p:nvSpPr>
+        <p:spPr>
+          <a:xfrm xmlns:a="http://schemas.openxmlformats.org/drawingml/2006/main">
+            <a:off x="514350" y="6419850"/>
+            <a:ext cx="11163300" cy="19050"/>
+          </a:xfrm>
+          <a:prstGeom xmlns:a="http://schemas.openxmlformats.org/drawingml/2006/main" prst="rect">
+            <a:avLst/>
+          </a:prstGeom>
+          <a:solidFill xmlns:a="http://schemas.openxmlformats.org/drawingml/2006/main">
+            <a:srgbClr val="B9D9E8"/>
+          </a:solidFill>
+          <a:ln xmlns:a="http://schemas.openxmlformats.org/drawingml/2006/main" w="0">
+            <a:noFill/>
+            <a:prstDash val="solid"/>
+          </a:ln>
+        </p:spPr>
+      </p:sp>
+      <p:pic>
+        <p:nvPicPr>
+          <p:cNvPr id="17" name=""/>
+          <p:cNvPicPr>
+            <a:picLocks xmlns:a="http://schemas.openxmlformats.org/drawingml/2006/main" noChangeAspect="1"/>
+          </p:cNvPicPr>
+          <p:nvPr/>
+        </p:nvPicPr>
+        <p:blipFill>
+          <a:blip xmlns:r="http://schemas.openxmlformats.org/officeDocument/2006/relationships" xmlns:a="http://schemas.openxmlformats.org/drawingml/2006/main" r:embed="R6588b9762e454500"/>
+          <a:stretch xmlns:a="http://schemas.openxmlformats.org/drawingml/2006/main"/>
+        </p:blipFill>
+        <p:spPr>
+          <a:xfrm xmlns:a="http://schemas.openxmlformats.org/drawingml/2006/main">
+            <a:off x="552450" y="6495443"/>
+            <a:ext cx="304800" cy="258389"/>
+          </a:xfrm>
+          <a:prstGeom xmlns:a="http://schemas.openxmlformats.org/drawingml/2006/main" prst="rect">
+            <a:avLst/>
+          </a:prstGeom>
+        </p:spPr>
+      </p:pic>
+      <p:sp>
+        <p:nvSpPr>
+          <p:cNvPr id="6" name="footer">
+            <a:extLst xmlns:a="http://schemas.openxmlformats.org/drawingml/2006/main">
+              <a:ext uri="{FF2B5EF4-FFF2-40B4-BE49-F238E27FC236}">
+                <a16:creationId xmlns:a16="http://schemas.microsoft.com/office/drawing/2014/main" id="{B41B547B-6312-422F-97B9-B812308FCE3A}"/>
+              </a:ext>
+            </a:extLst>
+          </p:cNvPr>
+          <p:cNvSpPr>
+            <a:spLocks xmlns:a="http://schemas.openxmlformats.org/drawingml/2006/main" noGrp="1"/>
+          </p:cNvSpPr>
+          <p:nvPr/>
+        </p:nvSpPr>
+        <p:spPr>
+          <a:xfrm xmlns:a="http://schemas.openxmlformats.org/drawingml/2006/main">
+            <a:off x="971550" y="6486525"/>
+            <a:ext cx="7334250" cy="257175"/>
+          </a:xfrm>
+          <a:prstGeom xmlns:a="http://schemas.openxmlformats.org/drawingml/2006/main" prst="rect">
+            <a:avLst/>
+          </a:prstGeom>
+          <a:noFill xmlns:a="http://schemas.openxmlformats.org/drawingml/2006/main"/>
+          <a:ln xmlns:a="http://schemas.openxmlformats.org/drawingml/2006/main" w="0">
+            <a:noFill/>
+            <a:prstDash val="solid"/>
+          </a:ln>
+        </p:spPr>
+        <p:txBody>
+          <a:bodyPr xmlns:a="http://schemas.openxmlformats.org/drawingml/2006/main" lIns="91440" tIns="45720" rIns="91440" bIns="45720" anchor="ctr"/>
+          <a:lstStyle xmlns:a="http://schemas.openxmlformats.org/drawingml/2006/main"/>
+          <a:p xmlns:a="http://schemas.openxmlformats.org/drawingml/2006/main">
+            <a:pPr algn="l">
+              <a:buNone/>
+              <a:defRPr sz="900" b="0">
+                <a:solidFill>
+                  <a:srgbClr val="526675"/>
+                </a:solidFill>
+                <a:latin typeface="Calibri"/>
+                <a:ea typeface="Calibri"/>
+                <a:cs typeface="Calibri"/>
+              </a:defRPr>
+            </a:pPr>
+            <a:r>
+              <a:rPr sz="900" b="0">
+                <a:solidFill>
+                  <a:srgbClr val="526675"/>
+                </a:solidFill>
+                <a:latin typeface="Calibri"/>
+                <a:ea typeface="Calibri"/>
+                <a:cs typeface="Calibri"/>
+              </a:rPr>
+              <a:t>Имитационное моделирование · лабораторная работа № 4</a:t>
+            </a:r>
+          </a:p>
+        </p:txBody>
+      </p:sp>
+      <p:sp>
+        <p:nvSpPr>
+          <p:cNvPr id="7" name="page-number">
+            <a:extLst xmlns:a="http://schemas.openxmlformats.org/drawingml/2006/main">
+              <a:ext uri="{FF2B5EF4-FFF2-40B4-BE49-F238E27FC236}">
+                <a16:creationId xmlns:a16="http://schemas.microsoft.com/office/drawing/2014/main" id="{C5D149F8-2B2A-45C2-ACB2-B531EF4A60FF}"/>
+              </a:ext>
+            </a:extLst>
+          </p:cNvPr>
+          <p:cNvSpPr>
+            <a:spLocks xmlns:a="http://schemas.openxmlformats.org/drawingml/2006/main" noGrp="1"/>
+          </p:cNvSpPr>
+          <p:nvPr/>
+        </p:nvSpPr>
+        <p:spPr>
+          <a:xfrm xmlns:a="http://schemas.openxmlformats.org/drawingml/2006/main">
+            <a:off x="10820400" y="6486525"/>
+            <a:ext cx="800100" cy="257175"/>
+          </a:xfrm>
+          <a:prstGeom xmlns:a="http://schemas.openxmlformats.org/drawingml/2006/main" prst="rect">
+            <a:avLst/>
+          </a:prstGeom>
+          <a:noFill xmlns:a="http://schemas.openxmlformats.org/drawingml/2006/main"/>
+          <a:ln xmlns:a="http://schemas.openxmlformats.org/drawingml/2006/main" w="0">
+            <a:noFill/>
+            <a:prstDash val="solid"/>
+          </a:ln>
+        </p:spPr>
+        <p:txBody>
+          <a:bodyPr xmlns:a="http://schemas.openxmlformats.org/drawingml/2006/main" lIns="91440" tIns="45720" rIns="91440" bIns="45720" anchor="ctr"/>
+          <a:lstStyle xmlns:a="http://schemas.openxmlformats.org/drawingml/2006/main"/>
+          <a:p xmlns:a="http://schemas.openxmlformats.org/drawingml/2006/main">
+            <a:pPr algn="ctr">
+              <a:buNone/>
+              <a:defRPr sz="975" b="1">
+                <a:solidFill>
+                  <a:srgbClr val="0B4778"/>
+                </a:solidFill>
+                <a:latin typeface="Calibri"/>
+                <a:ea typeface="Calibri"/>
+                <a:cs typeface="Calibri"/>
+              </a:defRPr>
+            </a:pPr>
+            <a:r>
+              <a:rPr sz="975" b="1">
+                <a:solidFill>
+                  <a:srgbClr val="0B4778"/>
+                </a:solidFill>
+                <a:latin typeface="Calibri"/>
+                <a:ea typeface="Calibri"/>
+                <a:cs typeface="Calibri"/>
+              </a:rPr>
+              <a:t>18</a:t>
+            </a:r>
+          </a:p>
+        </p:txBody>
+      </p:sp>
+      <p:sp>
+        <p:nvSpPr>
+          <p:cNvPr id="8" name="goal">
+            <a:extLst xmlns:a="http://schemas.openxmlformats.org/drawingml/2006/main">
+              <a:ext uri="{FF2B5EF4-FFF2-40B4-BE49-F238E27FC236}">
+                <a16:creationId xmlns:a16="http://schemas.microsoft.com/office/drawing/2014/main" id="{867F2279-946D-4402-B6C9-E80BAE1B4A47}"/>
+              </a:ext>
+            </a:extLst>
+          </p:cNvPr>
+          <p:cNvSpPr>
+            <a:spLocks xmlns:a="http://schemas.openxmlformats.org/drawingml/2006/main" noGrp="1"/>
+          </p:cNvSpPr>
+          <p:nvPr/>
+        </p:nvSpPr>
+        <p:spPr>
+          <a:xfrm xmlns:a="http://schemas.openxmlformats.org/drawingml/2006/main">
+            <a:off x="704850" y="933450"/>
+            <a:ext cx="10668000" cy="762000"/>
+          </a:xfrm>
+          <a:prstGeom xmlns:a="http://schemas.openxmlformats.org/drawingml/2006/main" prst="rect">
+            <a:avLst/>
+          </a:prstGeom>
+          <a:noFill xmlns:a="http://schemas.openxmlformats.org/drawingml/2006/main"/>
+          <a:ln xmlns:a="http://schemas.openxmlformats.org/drawingml/2006/main" w="0">
+            <a:noFill/>
+            <a:prstDash val="solid"/>
+          </a:ln>
+        </p:spPr>
+        <p:txBody>
+          <a:bodyPr xmlns:a="http://schemas.openxmlformats.org/drawingml/2006/main" lIns="91440" tIns="45720" rIns="91440" bIns="45720" anchor="ctr"/>
+          <a:lstStyle xmlns:a="http://schemas.openxmlformats.org/drawingml/2006/main"/>
+          <a:p xmlns:a="http://schemas.openxmlformats.org/drawingml/2006/main">
+            <a:pPr algn="l">
+              <a:buNone/>
+              <a:defRPr sz="1800" b="1">
+                <a:solidFill>
+                  <a:srgbClr val="0B4778"/>
+                </a:solidFill>
+                <a:latin typeface="Calibri"/>
+                <a:ea typeface="Calibri"/>
+                <a:cs typeface="Calibri"/>
+              </a:defRPr>
+            </a:pPr>
+            <a:r>
+              <a:rPr sz="1800" b="1">
+                <a:solidFill>
+                  <a:srgbClr val="0B4778"/>
+                </a:solidFill>
+                <a:latin typeface="Calibri"/>
+                <a:ea typeface="Calibri"/>
+                <a:cs typeface="Calibri"/>
+              </a:rPr>
+              <a:t>Выводы относятся к учебной агентной модели и конечному набору случайных прогонов, а не к реальной инфекции.</a:t>
+            </a:r>
+          </a:p>
+        </p:txBody>
+      </p:sp>
+      <p:sp>
+        <p:nvSpPr>
+          <p:cNvPr id="9" name="left-rule">
+            <a:extLst xmlns:a="http://schemas.openxmlformats.org/drawingml/2006/main">
+              <a:ext uri="{FF2B5EF4-FFF2-40B4-BE49-F238E27FC236}">
+                <a16:creationId xmlns:a16="http://schemas.microsoft.com/office/drawing/2014/main" id="{0B205D5C-F4E6-46EE-8BE3-E1E85CA2FB3F}"/>
+              </a:ext>
+            </a:extLst>
+          </p:cNvPr>
+          <p:cNvSpPr>
+            <a:spLocks xmlns:a="http://schemas.openxmlformats.org/drawingml/2006/main" noGrp="1"/>
+          </p:cNvSpPr>
+          <p:nvPr/>
+        </p:nvSpPr>
+        <p:spPr>
+          <a:xfrm xmlns:a="http://schemas.openxmlformats.org/drawingml/2006/main">
+            <a:off x="704850" y="1952625"/>
+            <a:ext cx="57150" cy="3409950"/>
+          </a:xfrm>
+          <a:prstGeom xmlns:a="http://schemas.openxmlformats.org/drawingml/2006/main" prst="rect">
+            <a:avLst/>
+          </a:prstGeom>
+          <a:solidFill xmlns:a="http://schemas.openxmlformats.org/drawingml/2006/main">
+            <a:srgbClr val="35A9D3"/>
+          </a:solidFill>
+          <a:ln xmlns:a="http://schemas.openxmlformats.org/drawingml/2006/main" w="0">
+            <a:noFill/>
+            <a:prstDash val="solid"/>
+          </a:ln>
+        </p:spPr>
+      </p:sp>
+      <p:sp>
+        <p:nvSpPr>
+          <p:cNvPr id="10" name="tasks">
+            <a:extLst xmlns:a="http://schemas.openxmlformats.org/drawingml/2006/main">
+              <a:ext uri="{FF2B5EF4-FFF2-40B4-BE49-F238E27FC236}">
+                <a16:creationId xmlns:a16="http://schemas.microsoft.com/office/drawing/2014/main" id="{D0B8600E-8057-4E67-AFD8-8FFEDC555D89}"/>
+              </a:ext>
+            </a:extLst>
+          </p:cNvPr>
+          <p:cNvSpPr>
+            <a:spLocks xmlns:a="http://schemas.openxmlformats.org/drawingml/2006/main" noGrp="1"/>
+          </p:cNvSpPr>
+          <p:nvPr/>
+        </p:nvSpPr>
+        <p:spPr>
+          <a:xfrm xmlns:a="http://schemas.openxmlformats.org/drawingml/2006/main">
+            <a:off x="1009650" y="1847850"/>
+            <a:ext cx="9620250" cy="3714750"/>
+          </a:xfrm>
+          <a:prstGeom xmlns:a="http://schemas.openxmlformats.org/drawingml/2006/main" prst="rect">
+            <a:avLst/>
+          </a:prstGeom>
+          <a:noFill xmlns:a="http://schemas.openxmlformats.org/drawingml/2006/main"/>
+          <a:ln xmlns:a="http://schemas.openxmlformats.org/drawingml/2006/main" w="0">
+            <a:noFill/>
+            <a:prstDash val="solid"/>
+          </a:ln>
+        </p:spPr>
+        <p:txBody>
+          <a:bodyPr xmlns:a="http://schemas.openxmlformats.org/drawingml/2006/main" lIns="91440" tIns="45720" rIns="91440" bIns="45720" anchor="ctr"/>
+          <a:lstStyle xmlns:a="http://schemas.openxmlformats.org/drawingml/2006/main"/>
+          <a:p xmlns:a="http://schemas.openxmlformats.org/drawingml/2006/main">
+            <a:pPr algn="l">
+              <a:buNone/>
+              <a:defRPr sz="1725" b="0">
+                <a:solidFill>
+                  <a:srgbClr val="17232D"/>
+                </a:solidFill>
+                <a:latin typeface="Calibri"/>
+                <a:ea typeface="Calibri"/>
+                <a:cs typeface="Calibri"/>
+              </a:defRPr>
+            </a:pPr>
+            <a:r>
+              <a:rPr sz="1725" b="0">
+                <a:solidFill>
+                  <a:srgbClr val="17232D"/>
+                </a:solidFill>
+                <a:latin typeface="Calibri"/>
+                <a:ea typeface="Calibri"/>
+                <a:cs typeface="Calibri"/>
+              </a:rPr>
+              <a:t>• оптимизация использует пять обучающих seed;</a:t>
+            </a:r>
+          </a:p>
+          <a:p xmlns:a="http://schemas.openxmlformats.org/drawingml/2006/main">
+            <a:r>
+              <a:t/>
+            </a:r>
+          </a:p>
+          <a:p xmlns:a="http://schemas.openxmlformats.org/drawingml/2006/main">
+            <a:pPr algn="l">
+              <a:buNone/>
+              <a:defRPr sz="1725" b="0">
+                <a:solidFill>
+                  <a:srgbClr val="17232D"/>
+                </a:solidFill>
+                <a:latin typeface="Calibri"/>
+                <a:ea typeface="Calibri"/>
+                <a:cs typeface="Calibri"/>
+              </a:defRPr>
+            </a:pPr>
+            <a:r>
+              <a:rPr sz="1725" b="0">
+                <a:solidFill>
+                  <a:srgbClr val="17232D"/>
+                </a:solidFill>
+                <a:latin typeface="Calibri"/>
+                <a:ea typeface="Calibri"/>
+                <a:cs typeface="Calibri"/>
+              </a:rPr>
+              <a:t>• проверка использует независимые seed 1001–1020;</a:t>
+            </a:r>
+          </a:p>
+          <a:p xmlns:a="http://schemas.openxmlformats.org/drawingml/2006/main">
+            <a:r>
+              <a:t/>
+            </a:r>
+          </a:p>
+          <a:p xmlns:a="http://schemas.openxmlformats.org/drawingml/2006/main">
+            <a:pPr algn="l">
+              <a:buNone/>
+              <a:defRPr sz="1725" b="0">
+                <a:solidFill>
+                  <a:srgbClr val="17232D"/>
+                </a:solidFill>
+                <a:latin typeface="Calibri"/>
+                <a:ea typeface="Calibri"/>
+                <a:cs typeface="Calibri"/>
+              </a:defRPr>
+            </a:pPr>
+            <a:r>
+              <a:rPr sz="1725" b="0">
+                <a:solidFill>
+                  <a:srgbClr val="17232D"/>
+                </a:solidFill>
+                <a:latin typeface="Calibri"/>
+                <a:ea typeface="Calibri"/>
+                <a:cs typeface="Calibri"/>
+              </a:rPr>
+              <a:t>• раннее затухание даёт мало событий заражения;</a:t>
+            </a:r>
+          </a:p>
+          <a:p xmlns:a="http://schemas.openxmlformats.org/drawingml/2006/main">
+            <a:r>
+              <a:t/>
+            </a:r>
+          </a:p>
+          <a:p xmlns:a="http://schemas.openxmlformats.org/drawingml/2006/main">
+            <a:pPr algn="l">
+              <a:buNone/>
+              <a:defRPr sz="1725" b="0">
+                <a:solidFill>
+                  <a:srgbClr val="17232D"/>
+                </a:solidFill>
+                <a:latin typeface="Calibri"/>
+                <a:ea typeface="Calibri"/>
+                <a:cs typeface="Calibri"/>
+              </a:defRPr>
+            </a:pPr>
+            <a:r>
+              <a:rPr sz="1725" b="0">
+                <a:solidFill>
+                  <a:srgbClr val="17232D"/>
+                </a:solidFill>
+                <a:latin typeface="Calibri"/>
+                <a:ea typeface="Calibri"/>
+                <a:cs typeface="Calibri"/>
+              </a:rPr>
+              <a:t>• решения возле границ диапазонов не уникальны;</a:t>
+            </a:r>
+          </a:p>
+          <a:p xmlns:a="http://schemas.openxmlformats.org/drawingml/2006/main">
+            <a:r>
+              <a:t/>
+            </a:r>
+          </a:p>
+          <a:p xmlns:a="http://schemas.openxmlformats.org/drawingml/2006/main">
+            <a:pPr algn="l">
+              <a:buNone/>
+              <a:defRPr sz="1725" b="0">
+                <a:solidFill>
+                  <a:srgbClr val="17232D"/>
+                </a:solidFill>
+                <a:latin typeface="Calibri"/>
+                <a:ea typeface="Calibri"/>
+                <a:cs typeface="Calibri"/>
+              </a:defRPr>
+            </a:pPr>
+            <a:r>
+              <a:rPr sz="1725" b="0">
+                <a:solidFill>
+                  <a:srgbClr val="17232D"/>
+                </a:solidFill>
+                <a:latin typeface="Calibri"/>
+                <a:ea typeface="Calibri"/>
+                <a:cs typeface="Calibri"/>
+              </a:rPr>
+              <a:t>• конечный поиск не доказывает глобальный оптимум;</a:t>
+            </a:r>
+          </a:p>
+          <a:p xmlns:a="http://schemas.openxmlformats.org/drawingml/2006/main">
+            <a:r>
+              <a:t/>
+            </a:r>
+          </a:p>
+          <a:p xmlns:a="http://schemas.openxmlformats.org/drawingml/2006/main">
+            <a:pPr algn="l">
+              <a:buNone/>
+              <a:defRPr sz="1725" b="0">
+                <a:solidFill>
+                  <a:srgbClr val="17232D"/>
+                </a:solidFill>
+                <a:latin typeface="Calibri"/>
+                <a:ea typeface="Calibri"/>
+                <a:cs typeface="Calibri"/>
+              </a:defRPr>
+            </a:pPr>
+            <a:r>
+              <a:rPr sz="1725" b="0">
+                <a:solidFill>
+                  <a:srgbClr val="17232D"/>
+                </a:solidFill>
+                <a:latin typeface="Calibri"/>
+                <a:ea typeface="Calibri"/>
+                <a:cs typeface="Calibri"/>
+              </a:rPr>
+              <a:t>• эпидемиологическая калибровка не выполнялась.</a:t>
+            </a:r>
+          </a:p>
+        </p:txBody>
+      </p:sp>
+    </p:spTree>
+    <p:extLst>
+      <p:ext uri="{BB962C8B-B14F-4D97-AF65-F5344CB8AC3E}">
+        <p14:creationId xmlns:p14="http://schemas.microsoft.com/office/powerpoint/2010/main" val="1899172888"/>
+      </p:ext>
+    </p:extLst>
+  </p:cSld>
+</p:sld>
+</file>
+
+<file path=ppt/slides/slide19.xml><?xml version="1.0" encoding="utf-8"?>
+<p:sld xmlns:p="http://schemas.openxmlformats.org/presentationml/2006/main">
+  <p:cSld>
+    <p:bg>
+      <p:bgPr>
+        <a:solidFill xmlns:a="http://schemas.openxmlformats.org/drawingml/2006/main">
+          <a:srgbClr val="FFFFFF"/>
+        </a:solidFill>
+      </p:bgPr>
+    </p:bg>
+    <p:spTree>
+      <p:nvGrpSpPr>
+        <p:cNvPr id="1" name=""/>
+        <p:cNvGrpSpPr/>
+        <p:nvPr/>
+      </p:nvGrpSpPr>
+      <p:grpSpPr>
+        <a:xfrm xmlns:a="http://schemas.openxmlformats.org/drawingml/2006/main"/>
+      </p:grpSpPr>
+      <p:sp>
+        <p:nvSpPr>
+          <p:cNvPr id="10" name="top-band">
+            <a:extLst xmlns:a="http://schemas.openxmlformats.org/drawingml/2006/main">
+              <a:ext uri="{FF2B5EF4-FFF2-40B4-BE49-F238E27FC236}">
+                <a16:creationId xmlns:a16="http://schemas.microsoft.com/office/drawing/2014/main" id="{6D573241-9EE9-4DF9-8086-F9A4F38D199C}"/>
+              </a:ext>
+            </a:extLst>
+          </p:cNvPr>
+          <p:cNvSpPr>
+            <a:spLocks xmlns:a="http://schemas.openxmlformats.org/drawingml/2006/main" noGrp="1"/>
+          </p:cNvSpPr>
+          <p:nvPr/>
+        </p:nvSpPr>
+        <p:spPr>
+          <a:xfrm xmlns:a="http://schemas.openxmlformats.org/drawingml/2006/main">
+            <a:off x="0" y="0"/>
+            <a:ext cx="12192000" cy="628650"/>
+          </a:xfrm>
+          <a:prstGeom xmlns:a="http://schemas.openxmlformats.org/drawingml/2006/main" prst="rect">
+            <a:avLst/>
+          </a:prstGeom>
+          <a:solidFill xmlns:a="http://schemas.openxmlformats.org/drawingml/2006/main">
+            <a:srgbClr val="0B4778"/>
+          </a:solidFill>
+          <a:ln xmlns:a="http://schemas.openxmlformats.org/drawingml/2006/main" w="0">
+            <a:noFill/>
+            <a:prstDash val="solid"/>
+          </a:ln>
+        </p:spPr>
+      </p:sp>
+      <p:sp>
+        <p:nvSpPr>
+          <p:cNvPr id="2" name="top-accent">
+            <a:extLst xmlns:a="http://schemas.openxmlformats.org/drawingml/2006/main">
+              <a:ext uri="{FF2B5EF4-FFF2-40B4-BE49-F238E27FC236}">
+                <a16:creationId xmlns:a16="http://schemas.microsoft.com/office/drawing/2014/main" id="{FF6378DF-5E8F-4722-97E0-1107CA5B62BB}"/>
+              </a:ext>
+            </a:extLst>
+          </p:cNvPr>
+          <p:cNvSpPr>
+            <a:spLocks xmlns:a="http://schemas.openxmlformats.org/drawingml/2006/main" noGrp="1"/>
+          </p:cNvSpPr>
+          <p:nvPr/>
+        </p:nvSpPr>
+        <p:spPr>
+          <a:xfrm xmlns:a="http://schemas.openxmlformats.org/drawingml/2006/main">
+            <a:off x="0" y="628650"/>
+            <a:ext cx="12192000" cy="47625"/>
+          </a:xfrm>
+          <a:prstGeom xmlns:a="http://schemas.openxmlformats.org/drawingml/2006/main" prst="rect">
+            <a:avLst/>
+          </a:prstGeom>
+          <a:solidFill xmlns:a="http://schemas.openxmlformats.org/drawingml/2006/main">
+            <a:srgbClr val="35A9D3"/>
+          </a:solidFill>
+          <a:ln xmlns:a="http://schemas.openxmlformats.org/drawingml/2006/main" w="0">
+            <a:noFill/>
+            <a:prstDash val="solid"/>
+          </a:ln>
+        </p:spPr>
+      </p:sp>
+      <p:sp>
+        <p:nvSpPr>
+          <p:cNvPr id="3" name="slide-title">
+            <a:extLst xmlns:a="http://schemas.openxmlformats.org/drawingml/2006/main">
+              <a:ext uri="{FF2B5EF4-FFF2-40B4-BE49-F238E27FC236}">
+                <a16:creationId xmlns:a16="http://schemas.microsoft.com/office/drawing/2014/main" id="{6DD81CC7-CBD2-4703-970A-156532EFA1E9}"/>
+              </a:ext>
+            </a:extLst>
+          </p:cNvPr>
+          <p:cNvSpPr>
+            <a:spLocks xmlns:a="http://schemas.openxmlformats.org/drawingml/2006/main" noGrp="1"/>
+          </p:cNvSpPr>
+          <p:nvPr/>
+        </p:nvSpPr>
+        <p:spPr>
+          <a:xfrm xmlns:a="http://schemas.openxmlformats.org/drawingml/2006/main">
+            <a:off x="609600" y="57150"/>
+            <a:ext cx="10763250" cy="523875"/>
+          </a:xfrm>
+          <a:prstGeom xmlns:a="http://schemas.openxmlformats.org/drawingml/2006/main" prst="rect">
+            <a:avLst/>
+          </a:prstGeom>
+          <a:noFill xmlns:a="http://schemas.openxmlformats.org/drawingml/2006/main"/>
+          <a:ln xmlns:a="http://schemas.openxmlformats.org/drawingml/2006/main" w="0">
+            <a:noFill/>
+            <a:prstDash val="solid"/>
+          </a:ln>
+        </p:spPr>
+        <p:txBody>
+          <a:bodyPr xmlns:a="http://schemas.openxmlformats.org/drawingml/2006/main" lIns="91440" tIns="45720" rIns="91440" bIns="45720" anchor="ctr"/>
+          <a:lstStyle xmlns:a="http://schemas.openxmlformats.org/drawingml/2006/main"/>
+          <a:p xmlns:a="http://schemas.openxmlformats.org/drawingml/2006/main">
+            <a:pPr algn="l">
+              <a:buNone/>
+              <a:defRPr sz="2250" b="1">
+                <a:solidFill>
+                  <a:srgbClr val="FFFFFF"/>
+                </a:solidFill>
+                <a:latin typeface="Calibri"/>
+                <a:ea typeface="Calibri"/>
+                <a:cs typeface="Calibri"/>
+              </a:defRPr>
+            </a:pPr>
+            <a:r>
+              <a:rPr sz="2250" b="1">
+                <a:solidFill>
+                  <a:srgbClr val="FFFFFF"/>
+                </a:solidFill>
+                <a:latin typeface="Calibri"/>
+                <a:ea typeface="Calibri"/>
+                <a:cs typeface="Calibri"/>
+              </a:rPr>
+              <a:t>103 теста проверяют учёт и правила агентов</a:t>
+            </a:r>
+          </a:p>
+        </p:txBody>
+      </p:sp>
+      <p:sp>
+        <p:nvSpPr>
+          <p:cNvPr id="4" name="footer-rule">
+            <a:extLst xmlns:a="http://schemas.openxmlformats.org/drawingml/2006/main">
+              <a:ext uri="{FF2B5EF4-FFF2-40B4-BE49-F238E27FC236}">
+                <a16:creationId xmlns:a16="http://schemas.microsoft.com/office/drawing/2014/main" id="{F606674E-824A-4C30-AC07-9394E7D209DA}"/>
+              </a:ext>
+            </a:extLst>
+          </p:cNvPr>
+          <p:cNvSpPr>
+            <a:spLocks xmlns:a="http://schemas.openxmlformats.org/drawingml/2006/main" noGrp="1"/>
+          </p:cNvSpPr>
+          <p:nvPr/>
+        </p:nvSpPr>
+        <p:spPr>
+          <a:xfrm xmlns:a="http://schemas.openxmlformats.org/drawingml/2006/main">
+            <a:off x="514350" y="6419850"/>
+            <a:ext cx="11163300" cy="19050"/>
+          </a:xfrm>
+          <a:prstGeom xmlns:a="http://schemas.openxmlformats.org/drawingml/2006/main" prst="rect">
+            <a:avLst/>
+          </a:prstGeom>
+          <a:solidFill xmlns:a="http://schemas.openxmlformats.org/drawingml/2006/main">
+            <a:srgbClr val="B9D9E8"/>
+          </a:solidFill>
+          <a:ln xmlns:a="http://schemas.openxmlformats.org/drawingml/2006/main" w="0">
+            <a:noFill/>
+            <a:prstDash val="solid"/>
+          </a:ln>
+        </p:spPr>
+      </p:sp>
+      <p:pic>
+        <p:nvPicPr>
+          <p:cNvPr id="17" name=""/>
+          <p:cNvPicPr>
+            <a:picLocks xmlns:a="http://schemas.openxmlformats.org/drawingml/2006/main" noChangeAspect="1"/>
+          </p:cNvPicPr>
+          <p:nvPr/>
+        </p:nvPicPr>
+        <p:blipFill>
+          <a:blip xmlns:r="http://schemas.openxmlformats.org/officeDocument/2006/relationships" xmlns:a="http://schemas.openxmlformats.org/drawingml/2006/main" r:embed="Raf508ebc80cc45aa"/>
+          <a:stretch xmlns:a="http://schemas.openxmlformats.org/drawingml/2006/main"/>
+        </p:blipFill>
+        <p:spPr>
+          <a:xfrm xmlns:a="http://schemas.openxmlformats.org/drawingml/2006/main">
+            <a:off x="552450" y="6495443"/>
+            <a:ext cx="304800" cy="258389"/>
+          </a:xfrm>
+          <a:prstGeom xmlns:a="http://schemas.openxmlformats.org/drawingml/2006/main" prst="rect">
+            <a:avLst/>
+          </a:prstGeom>
+        </p:spPr>
+      </p:pic>
+      <p:sp>
+        <p:nvSpPr>
+          <p:cNvPr id="6" name="footer">
+            <a:extLst xmlns:a="http://schemas.openxmlformats.org/drawingml/2006/main">
+              <a:ext uri="{FF2B5EF4-FFF2-40B4-BE49-F238E27FC236}">
+                <a16:creationId xmlns:a16="http://schemas.microsoft.com/office/drawing/2014/main" id="{5B26CBF1-396E-4033-AAF9-489271389BCC}"/>
+              </a:ext>
+            </a:extLst>
+          </p:cNvPr>
+          <p:cNvSpPr>
+            <a:spLocks xmlns:a="http://schemas.openxmlformats.org/drawingml/2006/main" noGrp="1"/>
+          </p:cNvSpPr>
+          <p:nvPr/>
+        </p:nvSpPr>
+        <p:spPr>
+          <a:xfrm xmlns:a="http://schemas.openxmlformats.org/drawingml/2006/main">
+            <a:off x="971550" y="6486525"/>
+            <a:ext cx="7334250" cy="257175"/>
+          </a:xfrm>
+          <a:prstGeom xmlns:a="http://schemas.openxmlformats.org/drawingml/2006/main" prst="rect">
+            <a:avLst/>
+          </a:prstGeom>
+          <a:noFill xmlns:a="http://schemas.openxmlformats.org/drawingml/2006/main"/>
+          <a:ln xmlns:a="http://schemas.openxmlformats.org/drawingml/2006/main" w="0">
+            <a:noFill/>
+            <a:prstDash val="solid"/>
+          </a:ln>
+        </p:spPr>
+        <p:txBody>
+          <a:bodyPr xmlns:a="http://schemas.openxmlformats.org/drawingml/2006/main" lIns="91440" tIns="45720" rIns="91440" bIns="45720" anchor="ctr"/>
+          <a:lstStyle xmlns:a="http://schemas.openxmlformats.org/drawingml/2006/main"/>
+          <a:p xmlns:a="http://schemas.openxmlformats.org/drawingml/2006/main">
+            <a:pPr algn="l">
+              <a:buNone/>
+              <a:defRPr sz="900" b="0">
+                <a:solidFill>
+                  <a:srgbClr val="526675"/>
+                </a:solidFill>
+                <a:latin typeface="Calibri"/>
+                <a:ea typeface="Calibri"/>
+                <a:cs typeface="Calibri"/>
+              </a:defRPr>
+            </a:pPr>
+            <a:r>
+              <a:rPr sz="900" b="0">
+                <a:solidFill>
+                  <a:srgbClr val="526675"/>
+                </a:solidFill>
+                <a:latin typeface="Calibri"/>
+                <a:ea typeface="Calibri"/>
+                <a:cs typeface="Calibri"/>
+              </a:rPr>
+              <a:t>Имитационное моделирование · лабораторная работа № 4</a:t>
+            </a:r>
+          </a:p>
+        </p:txBody>
+      </p:sp>
+      <p:sp>
+        <p:nvSpPr>
+          <p:cNvPr id="7" name="page-number">
+            <a:extLst xmlns:a="http://schemas.openxmlformats.org/drawingml/2006/main">
+              <a:ext uri="{FF2B5EF4-FFF2-40B4-BE49-F238E27FC236}">
+                <a16:creationId xmlns:a16="http://schemas.microsoft.com/office/drawing/2014/main" id="{A5627C61-6ADF-48E9-A24A-976D6E940B6B}"/>
+              </a:ext>
+            </a:extLst>
+          </p:cNvPr>
+          <p:cNvSpPr>
+            <a:spLocks xmlns:a="http://schemas.openxmlformats.org/drawingml/2006/main" noGrp="1"/>
+          </p:cNvSpPr>
+          <p:nvPr/>
+        </p:nvSpPr>
+        <p:spPr>
+          <a:xfrm xmlns:a="http://schemas.openxmlformats.org/drawingml/2006/main">
+            <a:off x="10820400" y="6486525"/>
+            <a:ext cx="800100" cy="257175"/>
+          </a:xfrm>
+          <a:prstGeom xmlns:a="http://schemas.openxmlformats.org/drawingml/2006/main" prst="rect">
+            <a:avLst/>
+          </a:prstGeom>
+          <a:noFill xmlns:a="http://schemas.openxmlformats.org/drawingml/2006/main"/>
+          <a:ln xmlns:a="http://schemas.openxmlformats.org/drawingml/2006/main" w="0">
+            <a:noFill/>
+            <a:prstDash val="solid"/>
+          </a:ln>
+        </p:spPr>
+        <p:txBody>
+          <a:bodyPr xmlns:a="http://schemas.openxmlformats.org/drawingml/2006/main" lIns="91440" tIns="45720" rIns="91440" bIns="45720" anchor="ctr"/>
+          <a:lstStyle xmlns:a="http://schemas.openxmlformats.org/drawingml/2006/main"/>
+          <a:p xmlns:a="http://schemas.openxmlformats.org/drawingml/2006/main">
+            <a:pPr algn="ctr">
+              <a:buNone/>
+              <a:defRPr sz="975" b="1">
+                <a:solidFill>
+                  <a:srgbClr val="0B4778"/>
+                </a:solidFill>
+                <a:latin typeface="Calibri"/>
+                <a:ea typeface="Calibri"/>
+                <a:cs typeface="Calibri"/>
+              </a:defRPr>
+            </a:pPr>
+            <a:r>
+              <a:rPr sz="975" b="1">
+                <a:solidFill>
+                  <a:srgbClr val="0B4778"/>
+                </a:solidFill>
+                <a:latin typeface="Calibri"/>
+                <a:ea typeface="Calibri"/>
+                <a:cs typeface="Calibri"/>
+              </a:rPr>
+              <a:t>19</a:t>
+            </a:r>
+          </a:p>
+        </p:txBody>
+      </p:sp>
+      <p:pic>
+        <p:nvPicPr>
+          <p:cNvPr id="20" name="03-terminal.png" descr="03-terminal.png"/>
+          <p:cNvPicPr>
+            <a:picLocks xmlns:a="http://schemas.openxmlformats.org/drawingml/2006/main" noChangeAspect="1"/>
+          </p:cNvPicPr>
+          <p:nvPr/>
+        </p:nvPicPr>
+        <p:blipFill>
+          <a:blip xmlns:r="http://schemas.openxmlformats.org/officeDocument/2006/relationships" xmlns:a="http://schemas.openxmlformats.org/drawingml/2006/main" r:embed="Lab4Slide19Picture1"/>
+          <a:stretch xmlns:a="http://schemas.openxmlformats.org/drawingml/2006/main"/>
+        </p:blipFill>
+        <p:spPr>
+          <a:xfrm xmlns:a="http://schemas.openxmlformats.org/drawingml/2006/main">
+            <a:off x="514350" y="1241822"/>
+            <a:ext cx="7200900" cy="4050506"/>
+          </a:xfrm>
+          <a:prstGeom xmlns:a="http://schemas.openxmlformats.org/drawingml/2006/main" prst="rect">
+            <a:avLst/>
+          </a:prstGeom>
+        </p:spPr>
+      </p:pic>
+      <p:sp>
+        <p:nvSpPr>
+          <p:cNvPr id="9" name="test-list">
+            <a:extLst xmlns:a="http://schemas.openxmlformats.org/drawingml/2006/main">
+              <a:ext uri="{FF2B5EF4-FFF2-40B4-BE49-F238E27FC236}">
+                <a16:creationId xmlns:a16="http://schemas.microsoft.com/office/drawing/2014/main" id="{C4D7CFCF-E677-40A4-ABD8-F9C618B52751}"/>
+              </a:ext>
+            </a:extLst>
+          </p:cNvPr>
+          <p:cNvSpPr>
+            <a:spLocks xmlns:a="http://schemas.openxmlformats.org/drawingml/2006/main" noGrp="1"/>
+          </p:cNvSpPr>
+          <p:nvPr/>
+        </p:nvSpPr>
+        <p:spPr>
+          <a:xfrm xmlns:a="http://schemas.openxmlformats.org/drawingml/2006/main">
+            <a:off x="8096250" y="1257300"/>
+            <a:ext cx="3219450" cy="3676650"/>
+          </a:xfrm>
+          <a:prstGeom xmlns:a="http://schemas.openxmlformats.org/drawingml/2006/main" prst="rect">
+            <a:avLst/>
+          </a:prstGeom>
+          <a:noFill xmlns:a="http://schemas.openxmlformats.org/drawingml/2006/main"/>
+          <a:ln xmlns:a="http://schemas.openxmlformats.org/drawingml/2006/main" w="0">
+            <a:noFill/>
+            <a:prstDash val="solid"/>
+          </a:ln>
+        </p:spPr>
+        <p:txBody>
+          <a:bodyPr xmlns:a="http://schemas.openxmlformats.org/drawingml/2006/main" lIns="91440" tIns="45720" rIns="91440" bIns="45720" anchor="ctr"/>
+          <a:lstStyle xmlns:a="http://schemas.openxmlformats.org/drawingml/2006/main"/>
+          <a:p xmlns:a="http://schemas.openxmlformats.org/drawingml/2006/main">
+            <a:pPr algn="l">
+              <a:buNone/>
+              <a:defRPr sz="1650" b="0">
+                <a:solidFill>
+                  <a:srgbClr val="17232D"/>
+                </a:solidFill>
+                <a:latin typeface="Calibri"/>
+                <a:ea typeface="Calibri"/>
+                <a:cs typeface="Calibri"/>
+              </a:defRPr>
+            </a:pPr>
+            <a:r>
+              <a:rPr sz="1650" b="0">
+                <a:solidFill>
+                  <a:srgbClr val="17232D"/>
+                </a:solidFill>
+                <a:latin typeface="Calibri"/>
+                <a:ea typeface="Calibri"/>
+                <a:cs typeface="Calibri"/>
+              </a:rPr>
+              <a:t>10 — инициализация</a:t>
+            </a:r>
+          </a:p>
+          <a:p xmlns:a="http://schemas.openxmlformats.org/drawingml/2006/main">
+            <a:pPr algn="l">
+              <a:buNone/>
+              <a:defRPr sz="1650" b="0">
+                <a:solidFill>
+                  <a:srgbClr val="17232D"/>
+                </a:solidFill>
+                <a:latin typeface="Calibri"/>
+                <a:ea typeface="Calibri"/>
+                <a:cs typeface="Calibri"/>
+              </a:defRPr>
+            </a:pPr>
+            <a:r>
+              <a:rPr sz="1650" b="0">
+                <a:solidFill>
+                  <a:srgbClr val="17232D"/>
+                </a:solidFill>
+                <a:latin typeface="Calibri"/>
+                <a:ea typeface="Calibri"/>
+                <a:cs typeface="Calibri"/>
+              </a:rPr>
+              <a:t>80 — учёт и seed</a:t>
+            </a:r>
+          </a:p>
+          <a:p xmlns:a="http://schemas.openxmlformats.org/drawingml/2006/main">
+            <a:pPr algn="l">
+              <a:defRPr sz="1650">
+                <a:solidFill>
+                  <a:srgbClr val="17232D"/>
+                </a:solidFill>
+                <a:latin typeface="Calibri"/>
+                <a:ea typeface="Calibri"/>
+                <a:cs typeface="Calibri"/>
+              </a:defRPr>
+            </a:pPr>
+            <a:r>
+              <a:rPr sz="1650">
+                <a:solidFill>
+                  <a:srgbClr val="17232D"/>
+                </a:solidFill>
+                <a:latin typeface="Calibri"/>
+                <a:ea typeface="Calibri"/>
+                <a:cs typeface="Calibri"/>
+              </a:rPr>
+              <a:t>6 — предельные случаи</a:t>
+            </a:r>
+          </a:p>
+          <a:p xmlns:a="http://schemas.openxmlformats.org/drawingml/2006/main">
+            <a:pPr algn="l">
+              <a:buNone/>
+              <a:defRPr sz="1650" b="0">
+                <a:solidFill>
+                  <a:srgbClr val="17232D"/>
+                </a:solidFill>
+                <a:latin typeface="Calibri"/>
+                <a:ea typeface="Calibri"/>
+                <a:cs typeface="Calibri"/>
+              </a:defRPr>
+            </a:pPr>
+            <a:r>
+              <a:rPr sz="1650" b="0">
+                <a:solidFill>
+                  <a:srgbClr val="17232D"/>
+                </a:solidFill>
+                <a:latin typeface="Calibri"/>
+                <a:ea typeface="Calibri"/>
+                <a:cs typeface="Calibri"/>
+              </a:rPr>
+              <a:t>7 — карантин и повторы</a:t>
+            </a:r>
+          </a:p>
+          <a:p xmlns:a="http://schemas.openxmlformats.org/drawingml/2006/main">
+            <a:pPr algn="l">
+              <a:buNone/>
+              <a:defRPr sz="1650" b="0">
+                <a:solidFill>
+                  <a:srgbClr val="17232D"/>
+                </a:solidFill>
+              </a:defRPr>
+            </a:pPr>
+            <a:r>
+              <a:rPr sz="1650" b="0">
+                <a:solidFill>
+                  <a:srgbClr val="17232D"/>
+                </a:solidFill>
+              </a:rPr>
+              <a:t/>
+            </a:r>
+          </a:p>
+          <a:p xmlns:a="http://schemas.openxmlformats.org/drawingml/2006/main">
+            <a:pPr algn="l">
+              <a:buNone/>
+              <a:defRPr sz="1650" b="0">
+                <a:solidFill>
+                  <a:srgbClr val="17232D"/>
+                </a:solidFill>
+                <a:latin typeface="Calibri"/>
+                <a:ea typeface="Calibri"/>
+                <a:cs typeface="Calibri"/>
+              </a:defRPr>
+            </a:pPr>
+            <a:r>
+              <a:rPr sz="1650" b="0">
+                <a:solidFill>
+                  <a:srgbClr val="17232D"/>
+                </a:solidFill>
+                <a:latin typeface="Calibri"/>
+                <a:ea typeface="Calibri"/>
+                <a:cs typeface="Calibri"/>
+              </a:rPr>
+              <a:t>✓ живые + умершие = N₀</a:t>
+            </a:r>
+          </a:p>
+          <a:p xmlns:a="http://schemas.openxmlformats.org/drawingml/2006/main">
+            <a:pPr algn="l">
+              <a:buNone/>
+              <a:defRPr sz="1650" b="0">
+                <a:solidFill>
+                  <a:srgbClr val="17232D"/>
+                </a:solidFill>
+                <a:latin typeface="Calibri"/>
+                <a:ea typeface="Calibri"/>
+                <a:cs typeface="Calibri"/>
+              </a:defRPr>
+            </a:pPr>
+            <a:r>
+              <a:rPr sz="1650" b="0">
+                <a:solidFill>
+                  <a:srgbClr val="17232D"/>
+                </a:solidFill>
+                <a:latin typeface="Calibri"/>
+                <a:ea typeface="Calibri"/>
+                <a:cs typeface="Calibri"/>
+              </a:rPr>
+              <a:t>✓ вероятности миграции</a:t>
+            </a:r>
+          </a:p>
+          <a:p xmlns:a="http://schemas.openxmlformats.org/drawingml/2006/main">
+            <a:pPr algn="l">
+              <a:defRPr sz="1650">
+                <a:solidFill>
+                  <a:srgbClr val="17232D"/>
+                </a:solidFill>
+                <a:latin typeface="Calibri"/>
+                <a:ea typeface="Calibri"/>
+                <a:cs typeface="Calibri"/>
+              </a:defRPr>
+            </a:pPr>
+            <a:r>
+              <a:rPr sz="1650">
+                <a:solidFill>
+                  <a:srgbClr val="17232D"/>
+                </a:solidFill>
+                <a:latin typeface="Calibri"/>
+                <a:ea typeface="Calibri"/>
+                <a:cs typeface="Calibri"/>
+              </a:rPr>
+              <a:t>✓ независимые оценки</a:t>
+            </a:r>
+          </a:p>
+          <a:p xmlns:a="http://schemas.openxmlformats.org/drawingml/2006/main">
+            <a:pPr algn="l">
+              <a:buNone/>
+              <a:defRPr sz="1650" b="0">
+                <a:solidFill>
+                  <a:srgbClr val="17232D"/>
+                </a:solidFill>
+                <a:latin typeface="Calibri"/>
+                <a:ea typeface="Calibri"/>
+                <a:cs typeface="Calibri"/>
+              </a:defRPr>
+            </a:pPr>
+            <a:r>
+              <a:rPr sz="1650" b="0">
+                <a:solidFill>
+                  <a:srgbClr val="17232D"/>
+                </a:solidFill>
+                <a:latin typeface="Calibri"/>
+                <a:ea typeface="Calibri"/>
+                <a:cs typeface="Calibri"/>
+              </a:rPr>
+              <a:t>✓ нулевая передача</a:t>
+            </a:r>
+          </a:p>
+        </p:txBody>
+      </p:sp>
+    </p:spTree>
+    <p:extLst>
+      <p:ext uri="{BB962C8B-B14F-4D97-AF65-F5344CB8AC3E}">
+        <p14:creationId xmlns:p14="http://schemas.microsoft.com/office/powerpoint/2010/main" val="60678283"/>
       </p:ext>
     </p:extLst>
   </p:cSld>
@@ -6137,7 +9306,7 @@
                 <a:ea typeface="Calibri"/>
                 <a:cs typeface="Calibri"/>
               </a:rPr>
-              <a:t>Окна потоков и очередь связаны обратной связью</a:t>
+              <a:t>Агентная модель связывает три города</a:t>
             </a:r>
           </a:p>
         </p:txBody>
@@ -6182,7 +9351,7 @@
           <p:nvPr/>
         </p:nvPicPr>
         <p:blipFill>
-          <a:blip xmlns:r="http://schemas.openxmlformats.org/officeDocument/2006/relationships" xmlns:a="http://schemas.openxmlformats.org/drawingml/2006/main" r:embed="Rd28a75bd0e974cfe"/>
+          <a:blip xmlns:r="http://schemas.openxmlformats.org/officeDocument/2006/relationships" xmlns:a="http://schemas.openxmlformats.org/drawingml/2006/main" r:embed="Rfb61508d0555466f"/>
           <a:stretch xmlns:a="http://schemas.openxmlformats.org/drawingml/2006/main"/>
         </p:blipFill>
         <p:spPr>
@@ -6281,7 +9450,7 @@
           </a:ln>
         </p:spPr>
         <p:txBody>
-          <a:bodyPr xmlns:a="http://schemas.openxmlformats.org/drawingml/2006/main" anchor="ctr"/>
+          <a:bodyPr xmlns:a="http://schemas.openxmlformats.org/drawingml/2006/main" lIns="91440" tIns="45720" rIns="91440" bIns="45720" anchor="ctr"/>
           <a:lstStyle xmlns:a="http://schemas.openxmlformats.org/drawingml/2006/main"/>
           <a:p xmlns:a="http://schemas.openxmlformats.org/drawingml/2006/main">
             <a:pPr algn="ctr">
@@ -6290,6 +9459,9 @@
                 <a:solidFill>
                   <a:srgbClr val="0B4778"/>
                 </a:solidFill>
+                <a:latin typeface="Calibri"/>
+                <a:ea typeface="Calibri"/>
+                <a:cs typeface="Calibri"/>
               </a:defRPr>
             </a:pPr>
             <a:r>
@@ -6297,6 +9469,9 @@
                 <a:solidFill>
                   <a:srgbClr val="0B4778"/>
                 </a:solidFill>
+                <a:latin typeface="Calibri"/>
+                <a:ea typeface="Calibri"/>
+                <a:cs typeface="Calibri"/>
               </a:rPr>
               <a:t>2</a:t>
             </a:r>
@@ -6355,7 +9530,7 @@
                 <a:ea typeface="Calibri"/>
                 <a:cs typeface="Calibri"/>
               </a:rPr>
-              <a:t>Цель — исследовать реакцию TCP-потоков на сигналы перегрузки общей очереди в учебной модели.</a:t>
+              <a:t>Цель — исследовать заражения, перемещения и выявление инфекции на уровне отдельных людей.</a:t>
             </a:r>
           </a:p>
         </p:txBody>
@@ -6443,7 +9618,7 @@
                 <a:ea typeface="Calibri"/>
                 <a:cs typeface="Calibri"/>
               </a:rPr>
-              <a:t>• задать узкое место 20 Мбит/с и базовый RTT;</a:t>
+              <a:t>• выполнить пять основных сценариев;</a:t>
             </a:r>
           </a:p>
           <a:p xmlns:a="http://schemas.openxmlformats.org/drawingml/2006/main">
@@ -6472,7 +9647,7 @@
                 <a:ea typeface="Calibri"/>
                 <a:cs typeface="Calibri"/>
               </a:rPr>
-              <a:t>• реализовать рост и уменьшение окна TCP;</a:t>
+              <a:t>• сравнить четыре параметрических расширения;</a:t>
             </a:r>
           </a:p>
           <a:p xmlns:a="http://schemas.openxmlformats.org/drawingml/2006/main">
@@ -6501,7 +9676,7 @@
                 <a:ea typeface="Calibri"/>
                 <a:cs typeface="Calibri"/>
               </a:rPr>
-              <a:t>• сглаживать очередь и разыгрывать сигнал RED;</a:t>
+              <a:t>• решить шесть дополнительных заданий;</a:t>
             </a:r>
           </a:p>
           <a:p xmlns:a="http://schemas.openxmlformats.org/drawingml/2006/main">
@@ -6530,7 +9705,7 @@
                 <a:ea typeface="Calibri"/>
                 <a:cs typeface="Calibri"/>
               </a:rPr>
-              <a:t>• сравнить режимы с 5–40 потоками;</a:t>
+              <a:t>• оптимизировать пик и смертность методом BorgMOEA;</a:t>
             </a:r>
           </a:p>
           <a:p xmlns:a="http://schemas.openxmlformats.org/drawingml/2006/main">
@@ -6559,7 +9734,7 @@
                 <a:ea typeface="Calibri"/>
                 <a:cs typeface="Calibri"/>
               </a:rPr>
-              <a:t>• сохранить траектории, сводки и графики;</a:t>
+              <a:t>• проверить ограничение пика на новых seed;</a:t>
             </a:r>
           </a:p>
           <a:p xmlns:a="http://schemas.openxmlformats.org/drawingml/2006/main">
@@ -6588,7 +9763,7 @@
                 <a:ea typeface="Calibri"/>
                 <a:cs typeface="Calibri"/>
               </a:rPr>
-              <a:t>• проверить ограничения модели автоматическими тестами.</a:t>
+              <a:t>• включить все 12 сценариев в выполненные блокноты.</a:t>
             </a:r>
           </a:p>
         </p:txBody>
@@ -6597,6 +9772,1151 @@
     <p:extLst>
       <p:ext uri="{BB962C8B-B14F-4D97-AF65-F5344CB8AC3E}">
         <p14:creationId xmlns:p14="http://schemas.microsoft.com/office/powerpoint/2010/main" val="1899172888"/>
+      </p:ext>
+    </p:extLst>
+  </p:cSld>
+</p:sld>
+</file>
+
+<file path=ppt/slides/slide20.xml><?xml version="1.0" encoding="utf-8"?>
+<p:sld xmlns:p="http://schemas.openxmlformats.org/presentationml/2006/main">
+  <p:cSld>
+    <p:bg>
+      <p:bgPr>
+        <a:solidFill xmlns:a="http://schemas.openxmlformats.org/drawingml/2006/main">
+          <a:srgbClr val="FFFFFF"/>
+        </a:solidFill>
+      </p:bgPr>
+    </p:bg>
+    <p:spTree>
+      <p:nvGrpSpPr>
+        <p:cNvPr id="1" name=""/>
+        <p:cNvGrpSpPr/>
+        <p:nvPr/>
+      </p:nvGrpSpPr>
+      <p:grpSpPr>
+        <a:xfrm xmlns:a="http://schemas.openxmlformats.org/drawingml/2006/main"/>
+      </p:grpSpPr>
+      <p:sp>
+        <p:nvSpPr>
+          <p:cNvPr id="11" name="top-band">
+            <a:extLst xmlns:a="http://schemas.openxmlformats.org/drawingml/2006/main">
+              <a:ext uri="{FF2B5EF4-FFF2-40B4-BE49-F238E27FC236}">
+                <a16:creationId xmlns:a16="http://schemas.microsoft.com/office/drawing/2014/main" id="{49734C38-27F5-41E9-AE40-B2280B0BA592}"/>
+              </a:ext>
+            </a:extLst>
+          </p:cNvPr>
+          <p:cNvSpPr>
+            <a:spLocks xmlns:a="http://schemas.openxmlformats.org/drawingml/2006/main" noGrp="1"/>
+          </p:cNvSpPr>
+          <p:nvPr/>
+        </p:nvSpPr>
+        <p:spPr>
+          <a:xfrm xmlns:a="http://schemas.openxmlformats.org/drawingml/2006/main">
+            <a:off x="0" y="0"/>
+            <a:ext cx="12192000" cy="628650"/>
+          </a:xfrm>
+          <a:prstGeom xmlns:a="http://schemas.openxmlformats.org/drawingml/2006/main" prst="rect">
+            <a:avLst/>
+          </a:prstGeom>
+          <a:solidFill xmlns:a="http://schemas.openxmlformats.org/drawingml/2006/main">
+            <a:srgbClr val="0B4778"/>
+          </a:solidFill>
+          <a:ln xmlns:a="http://schemas.openxmlformats.org/drawingml/2006/main" w="0">
+            <a:noFill/>
+            <a:prstDash val="solid"/>
+          </a:ln>
+        </p:spPr>
+      </p:sp>
+      <p:sp>
+        <p:nvSpPr>
+          <p:cNvPr id="2" name="top-accent">
+            <a:extLst xmlns:a="http://schemas.openxmlformats.org/drawingml/2006/main">
+              <a:ext uri="{FF2B5EF4-FFF2-40B4-BE49-F238E27FC236}">
+                <a16:creationId xmlns:a16="http://schemas.microsoft.com/office/drawing/2014/main" id="{AC85DC4D-DCA4-478D-8970-A99DD113D623}"/>
+              </a:ext>
+            </a:extLst>
+          </p:cNvPr>
+          <p:cNvSpPr>
+            <a:spLocks xmlns:a="http://schemas.openxmlformats.org/drawingml/2006/main" noGrp="1"/>
+          </p:cNvSpPr>
+          <p:nvPr/>
+        </p:nvSpPr>
+        <p:spPr>
+          <a:xfrm xmlns:a="http://schemas.openxmlformats.org/drawingml/2006/main">
+            <a:off x="0" y="628650"/>
+            <a:ext cx="12192000" cy="47625"/>
+          </a:xfrm>
+          <a:prstGeom xmlns:a="http://schemas.openxmlformats.org/drawingml/2006/main" prst="rect">
+            <a:avLst/>
+          </a:prstGeom>
+          <a:solidFill xmlns:a="http://schemas.openxmlformats.org/drawingml/2006/main">
+            <a:srgbClr val="35A9D3"/>
+          </a:solidFill>
+          <a:ln xmlns:a="http://schemas.openxmlformats.org/drawingml/2006/main" w="0">
+            <a:noFill/>
+            <a:prstDash val="solid"/>
+          </a:ln>
+        </p:spPr>
+      </p:sp>
+      <p:sp>
+        <p:nvSpPr>
+          <p:cNvPr id="3" name="slide-title">
+            <a:extLst xmlns:a="http://schemas.openxmlformats.org/drawingml/2006/main">
+              <a:ext uri="{FF2B5EF4-FFF2-40B4-BE49-F238E27FC236}">
+                <a16:creationId xmlns:a16="http://schemas.microsoft.com/office/drawing/2014/main" id="{183DF33A-E339-44DE-836A-AA0421DD2CA8}"/>
+              </a:ext>
+            </a:extLst>
+          </p:cNvPr>
+          <p:cNvSpPr>
+            <a:spLocks xmlns:a="http://schemas.openxmlformats.org/drawingml/2006/main" noGrp="1"/>
+          </p:cNvSpPr>
+          <p:nvPr/>
+        </p:nvSpPr>
+        <p:spPr>
+          <a:xfrm xmlns:a="http://schemas.openxmlformats.org/drawingml/2006/main">
+            <a:off x="609600" y="57150"/>
+            <a:ext cx="10763250" cy="523875"/>
+          </a:xfrm>
+          <a:prstGeom xmlns:a="http://schemas.openxmlformats.org/drawingml/2006/main" prst="rect">
+            <a:avLst/>
+          </a:prstGeom>
+          <a:noFill xmlns:a="http://schemas.openxmlformats.org/drawingml/2006/main"/>
+          <a:ln xmlns:a="http://schemas.openxmlformats.org/drawingml/2006/main" w="0">
+            <a:noFill/>
+            <a:prstDash val="solid"/>
+          </a:ln>
+        </p:spPr>
+        <p:txBody>
+          <a:bodyPr xmlns:a="http://schemas.openxmlformats.org/drawingml/2006/main" lIns="91440" tIns="45720" rIns="91440" bIns="45720" anchor="ctr"/>
+          <a:lstStyle xmlns:a="http://schemas.openxmlformats.org/drawingml/2006/main"/>
+          <a:p xmlns:a="http://schemas.openxmlformats.org/drawingml/2006/main">
+            <a:pPr algn="l">
+              <a:buNone/>
+              <a:defRPr sz="2250" b="1">
+                <a:solidFill>
+                  <a:srgbClr val="FFFFFF"/>
+                </a:solidFill>
+                <a:latin typeface="Calibri"/>
+                <a:ea typeface="Calibri"/>
+                <a:cs typeface="Calibri"/>
+              </a:defRPr>
+            </a:pPr>
+            <a:r>
+              <a:rPr sz="2250" b="1">
+                <a:solidFill>
+                  <a:srgbClr val="FFFFFF"/>
+                </a:solidFill>
+                <a:latin typeface="Calibri"/>
+                <a:ea typeface="Calibri"/>
+                <a:cs typeface="Calibri"/>
+              </a:rPr>
+              <a:t>Все сценарии имеют производные форматы</a:t>
+            </a:r>
+          </a:p>
+        </p:txBody>
+      </p:sp>
+      <p:sp>
+        <p:nvSpPr>
+          <p:cNvPr id="4" name="footer-rule">
+            <a:extLst xmlns:a="http://schemas.openxmlformats.org/drawingml/2006/main">
+              <a:ext uri="{FF2B5EF4-FFF2-40B4-BE49-F238E27FC236}">
+                <a16:creationId xmlns:a16="http://schemas.microsoft.com/office/drawing/2014/main" id="{A263D394-B9E4-46CD-B043-C08BCA04F5D3}"/>
+              </a:ext>
+            </a:extLst>
+          </p:cNvPr>
+          <p:cNvSpPr>
+            <a:spLocks xmlns:a="http://schemas.openxmlformats.org/drawingml/2006/main" noGrp="1"/>
+          </p:cNvSpPr>
+          <p:nvPr/>
+        </p:nvSpPr>
+        <p:spPr>
+          <a:xfrm xmlns:a="http://schemas.openxmlformats.org/drawingml/2006/main">
+            <a:off x="514350" y="6419850"/>
+            <a:ext cx="11163300" cy="19050"/>
+          </a:xfrm>
+          <a:prstGeom xmlns:a="http://schemas.openxmlformats.org/drawingml/2006/main" prst="rect">
+            <a:avLst/>
+          </a:prstGeom>
+          <a:solidFill xmlns:a="http://schemas.openxmlformats.org/drawingml/2006/main">
+            <a:srgbClr val="B9D9E8"/>
+          </a:solidFill>
+          <a:ln xmlns:a="http://schemas.openxmlformats.org/drawingml/2006/main" w="0">
+            <a:noFill/>
+            <a:prstDash val="solid"/>
+          </a:ln>
+        </p:spPr>
+      </p:sp>
+      <p:pic>
+        <p:nvPicPr>
+          <p:cNvPr id="17" name=""/>
+          <p:cNvPicPr>
+            <a:picLocks xmlns:a="http://schemas.openxmlformats.org/drawingml/2006/main" noChangeAspect="1"/>
+          </p:cNvPicPr>
+          <p:nvPr/>
+        </p:nvPicPr>
+        <p:blipFill>
+          <a:blip xmlns:r="http://schemas.openxmlformats.org/officeDocument/2006/relationships" xmlns:a="http://schemas.openxmlformats.org/drawingml/2006/main" r:embed="R73eba8ecf7c141b4"/>
+          <a:stretch xmlns:a="http://schemas.openxmlformats.org/drawingml/2006/main"/>
+        </p:blipFill>
+        <p:spPr>
+          <a:xfrm xmlns:a="http://schemas.openxmlformats.org/drawingml/2006/main">
+            <a:off x="552450" y="6495443"/>
+            <a:ext cx="304800" cy="258389"/>
+          </a:xfrm>
+          <a:prstGeom xmlns:a="http://schemas.openxmlformats.org/drawingml/2006/main" prst="rect">
+            <a:avLst/>
+          </a:prstGeom>
+        </p:spPr>
+      </p:pic>
+      <p:sp>
+        <p:nvSpPr>
+          <p:cNvPr id="6" name="footer">
+            <a:extLst xmlns:a="http://schemas.openxmlformats.org/drawingml/2006/main">
+              <a:ext uri="{FF2B5EF4-FFF2-40B4-BE49-F238E27FC236}">
+                <a16:creationId xmlns:a16="http://schemas.microsoft.com/office/drawing/2014/main" id="{5A96F062-4599-4561-8DB8-BFB6CD2D2F02}"/>
+              </a:ext>
+            </a:extLst>
+          </p:cNvPr>
+          <p:cNvSpPr>
+            <a:spLocks xmlns:a="http://schemas.openxmlformats.org/drawingml/2006/main" noGrp="1"/>
+          </p:cNvSpPr>
+          <p:nvPr/>
+        </p:nvSpPr>
+        <p:spPr>
+          <a:xfrm xmlns:a="http://schemas.openxmlformats.org/drawingml/2006/main">
+            <a:off x="971550" y="6486525"/>
+            <a:ext cx="7334250" cy="257175"/>
+          </a:xfrm>
+          <a:prstGeom xmlns:a="http://schemas.openxmlformats.org/drawingml/2006/main" prst="rect">
+            <a:avLst/>
+          </a:prstGeom>
+          <a:noFill xmlns:a="http://schemas.openxmlformats.org/drawingml/2006/main"/>
+          <a:ln xmlns:a="http://schemas.openxmlformats.org/drawingml/2006/main" w="0">
+            <a:noFill/>
+            <a:prstDash val="solid"/>
+          </a:ln>
+        </p:spPr>
+        <p:txBody>
+          <a:bodyPr xmlns:a="http://schemas.openxmlformats.org/drawingml/2006/main" lIns="91440" tIns="45720" rIns="91440" bIns="45720" anchor="ctr"/>
+          <a:lstStyle xmlns:a="http://schemas.openxmlformats.org/drawingml/2006/main"/>
+          <a:p xmlns:a="http://schemas.openxmlformats.org/drawingml/2006/main">
+            <a:pPr algn="l">
+              <a:buNone/>
+              <a:defRPr sz="900" b="0">
+                <a:solidFill>
+                  <a:srgbClr val="526675"/>
+                </a:solidFill>
+                <a:latin typeface="Calibri"/>
+                <a:ea typeface="Calibri"/>
+                <a:cs typeface="Calibri"/>
+              </a:defRPr>
+            </a:pPr>
+            <a:r>
+              <a:rPr sz="900" b="0">
+                <a:solidFill>
+                  <a:srgbClr val="526675"/>
+                </a:solidFill>
+                <a:latin typeface="Calibri"/>
+                <a:ea typeface="Calibri"/>
+                <a:cs typeface="Calibri"/>
+              </a:rPr>
+              <a:t>Имитационное моделирование · лабораторная работа № 4</a:t>
+            </a:r>
+          </a:p>
+        </p:txBody>
+      </p:sp>
+      <p:sp>
+        <p:nvSpPr>
+          <p:cNvPr id="7" name="page-number">
+            <a:extLst xmlns:a="http://schemas.openxmlformats.org/drawingml/2006/main">
+              <a:ext uri="{FF2B5EF4-FFF2-40B4-BE49-F238E27FC236}">
+                <a16:creationId xmlns:a16="http://schemas.microsoft.com/office/drawing/2014/main" id="{BB35FBE1-4001-4D2A-A44F-90B33D244D8A}"/>
+              </a:ext>
+            </a:extLst>
+          </p:cNvPr>
+          <p:cNvSpPr>
+            <a:spLocks xmlns:a="http://schemas.openxmlformats.org/drawingml/2006/main" noGrp="1"/>
+          </p:cNvSpPr>
+          <p:nvPr/>
+        </p:nvSpPr>
+        <p:spPr>
+          <a:xfrm xmlns:a="http://schemas.openxmlformats.org/drawingml/2006/main">
+            <a:off x="10820400" y="6486525"/>
+            <a:ext cx="800100" cy="257175"/>
+          </a:xfrm>
+          <a:prstGeom xmlns:a="http://schemas.openxmlformats.org/drawingml/2006/main" prst="rect">
+            <a:avLst/>
+          </a:prstGeom>
+          <a:noFill xmlns:a="http://schemas.openxmlformats.org/drawingml/2006/main"/>
+          <a:ln xmlns:a="http://schemas.openxmlformats.org/drawingml/2006/main" w="0">
+            <a:noFill/>
+            <a:prstDash val="solid"/>
+          </a:ln>
+        </p:spPr>
+        <p:txBody>
+          <a:bodyPr xmlns:a="http://schemas.openxmlformats.org/drawingml/2006/main" lIns="91440" tIns="45720" rIns="91440" bIns="45720" anchor="ctr"/>
+          <a:lstStyle xmlns:a="http://schemas.openxmlformats.org/drawingml/2006/main"/>
+          <a:p xmlns:a="http://schemas.openxmlformats.org/drawingml/2006/main">
+            <a:pPr algn="ctr">
+              <a:buNone/>
+              <a:defRPr sz="975" b="1">
+                <a:solidFill>
+                  <a:srgbClr val="0B4778"/>
+                </a:solidFill>
+                <a:latin typeface="Calibri"/>
+                <a:ea typeface="Calibri"/>
+                <a:cs typeface="Calibri"/>
+              </a:defRPr>
+            </a:pPr>
+            <a:r>
+              <a:rPr sz="975" b="1">
+                <a:solidFill>
+                  <a:srgbClr val="0B4778"/>
+                </a:solidFill>
+                <a:latin typeface="Calibri"/>
+                <a:ea typeface="Calibri"/>
+                <a:cs typeface="Calibri"/>
+              </a:rPr>
+              <a:t>20</a:t>
+            </a:r>
+          </a:p>
+        </p:txBody>
+      </p:sp>
+      <p:sp>
+        <p:nvSpPr>
+          <p:cNvPr id="8" name="command-bg">
+            <a:extLst xmlns:a="http://schemas.openxmlformats.org/drawingml/2006/main">
+              <a:ext uri="{FF2B5EF4-FFF2-40B4-BE49-F238E27FC236}">
+                <a16:creationId xmlns:a16="http://schemas.microsoft.com/office/drawing/2014/main" id="{FB589B73-FEBA-46DB-9E20-5C028F93720C}"/>
+              </a:ext>
+            </a:extLst>
+          </p:cNvPr>
+          <p:cNvSpPr>
+            <a:spLocks xmlns:a="http://schemas.openxmlformats.org/drawingml/2006/main" noGrp="1"/>
+          </p:cNvSpPr>
+          <p:nvPr/>
+        </p:nvSpPr>
+        <p:spPr>
+          <a:xfrm xmlns:a="http://schemas.openxmlformats.org/drawingml/2006/main">
+            <a:off x="704850" y="1066800"/>
+            <a:ext cx="4762500" cy="3905250"/>
+          </a:xfrm>
+          <a:prstGeom xmlns:a="http://schemas.openxmlformats.org/drawingml/2006/main" prst="rect">
+            <a:avLst/>
+          </a:prstGeom>
+          <a:solidFill xmlns:a="http://schemas.openxmlformats.org/drawingml/2006/main">
+            <a:srgbClr val="0D1117"/>
+          </a:solidFill>
+          <a:ln xmlns:a="http://schemas.openxmlformats.org/drawingml/2006/main" w="9525">
+            <a:solidFill>
+              <a:srgbClr val="263442"/>
+            </a:solidFill>
+            <a:prstDash val="solid"/>
+          </a:ln>
+        </p:spPr>
+      </p:sp>
+      <p:sp>
+        <p:nvSpPr>
+          <p:cNvPr id="9" name="commands">
+            <a:extLst xmlns:a="http://schemas.openxmlformats.org/drawingml/2006/main">
+              <a:ext uri="{FF2B5EF4-FFF2-40B4-BE49-F238E27FC236}">
+                <a16:creationId xmlns:a16="http://schemas.microsoft.com/office/drawing/2014/main" id="{9E3F3B85-21F1-4785-B94A-290C8777790F}"/>
+              </a:ext>
+            </a:extLst>
+          </p:cNvPr>
+          <p:cNvSpPr>
+            <a:spLocks xmlns:a="http://schemas.openxmlformats.org/drawingml/2006/main" noGrp="1"/>
+          </p:cNvSpPr>
+          <p:nvPr/>
+        </p:nvSpPr>
+        <p:spPr>
+          <a:xfrm xmlns:a="http://schemas.openxmlformats.org/drawingml/2006/main">
+            <a:off x="1104900" y="1333500"/>
+            <a:ext cx="3905250" cy="3333750"/>
+          </a:xfrm>
+          <a:prstGeom xmlns:a="http://schemas.openxmlformats.org/drawingml/2006/main" prst="rect">
+            <a:avLst/>
+          </a:prstGeom>
+          <a:noFill xmlns:a="http://schemas.openxmlformats.org/drawingml/2006/main"/>
+          <a:ln xmlns:a="http://schemas.openxmlformats.org/drawingml/2006/main" w="0">
+            <a:noFill/>
+            <a:prstDash val="solid"/>
+          </a:ln>
+        </p:spPr>
+        <p:txBody>
+          <a:bodyPr xmlns:a="http://schemas.openxmlformats.org/drawingml/2006/main" anchor="ctr"/>
+          <a:lstStyle xmlns:a="http://schemas.openxmlformats.org/drawingml/2006/main"/>
+          <a:p xmlns:a="http://schemas.openxmlformats.org/drawingml/2006/main">
+            <a:pPr algn="l">
+              <a:buNone/>
+              <a:defRPr sz="2025" b="1">
+                <a:solidFill>
+                  <a:srgbClr val="D8DEE9"/>
+                </a:solidFill>
+              </a:defRPr>
+            </a:pPr>
+            <a:r>
+              <a:rPr sz="2025" b="1">
+                <a:solidFill>
+                  <a:srgbClr val="D8DEE9"/>
+                </a:solidFill>
+              </a:rPr>
+              <a:t>$ make tangle</a:t>
+            </a:r>
+          </a:p>
+          <a:p xmlns:a="http://schemas.openxmlformats.org/drawingml/2006/main">
+            <a:r>
+              <a:t/>
+            </a:r>
+          </a:p>
+          <a:p xmlns:a="http://schemas.openxmlformats.org/drawingml/2006/main">
+            <a:pPr algn="l">
+              <a:buNone/>
+              <a:defRPr sz="2025" b="1">
+                <a:solidFill>
+                  <a:srgbClr val="D8DEE9"/>
+                </a:solidFill>
+              </a:defRPr>
+            </a:pPr>
+            <a:r>
+              <a:rPr sz="2025" b="1">
+                <a:solidFill>
+                  <a:srgbClr val="D8DEE9"/>
+                </a:solidFill>
+              </a:rPr>
+              <a:t>$ make run</a:t>
+            </a:r>
+          </a:p>
+          <a:p xmlns:a="http://schemas.openxmlformats.org/drawingml/2006/main">
+            <a:r>
+              <a:t/>
+            </a:r>
+          </a:p>
+          <a:p xmlns:a="http://schemas.openxmlformats.org/drawingml/2006/main">
+            <a:pPr algn="l">
+              <a:buNone/>
+              <a:defRPr sz="2025" b="1">
+                <a:solidFill>
+                  <a:srgbClr val="D8DEE9"/>
+                </a:solidFill>
+              </a:defRPr>
+            </a:pPr>
+            <a:r>
+              <a:rPr sz="2025" b="1">
+                <a:solidFill>
+                  <a:srgbClr val="D8DEE9"/>
+                </a:solidFill>
+              </a:rPr>
+              <a:t>$ make notebooks</a:t>
+            </a:r>
+          </a:p>
+          <a:p xmlns:a="http://schemas.openxmlformats.org/drawingml/2006/main">
+            <a:r>
+              <a:t/>
+            </a:r>
+          </a:p>
+          <a:p xmlns:a="http://schemas.openxmlformats.org/drawingml/2006/main">
+            <a:pPr algn="l">
+              <a:buNone/>
+              <a:defRPr sz="2025" b="1">
+                <a:solidFill>
+                  <a:srgbClr val="D8DEE9"/>
+                </a:solidFill>
+              </a:defRPr>
+            </a:pPr>
+            <a:r>
+              <a:rPr sz="2025" b="1">
+                <a:solidFill>
+                  <a:srgbClr val="D8DEE9"/>
+                </a:solidFill>
+              </a:rPr>
+              <a:t>$ make docs</a:t>
+            </a:r>
+          </a:p>
+          <a:p xmlns:a="http://schemas.openxmlformats.org/drawingml/2006/main">
+            <a:r>
+              <a:t/>
+            </a:r>
+          </a:p>
+          <a:p xmlns:a="http://schemas.openxmlformats.org/drawingml/2006/main">
+            <a:pPr algn="l">
+              <a:buNone/>
+              <a:defRPr sz="2025" b="1">
+                <a:solidFill>
+                  <a:srgbClr val="D8DEE9"/>
+                </a:solidFill>
+              </a:defRPr>
+            </a:pPr>
+            <a:r>
+              <a:rPr sz="2025" b="1">
+                <a:solidFill>
+                  <a:srgbClr val="D8DEE9"/>
+                </a:solidFill>
+              </a:rPr>
+              <a:t>$ make test</a:t>
+            </a:r>
+          </a:p>
+        </p:txBody>
+      </p:sp>
+      <p:sp>
+        <p:nvSpPr>
+          <p:cNvPr id="10" name="outputs">
+            <a:extLst xmlns:a="http://schemas.openxmlformats.org/drawingml/2006/main">
+              <a:ext uri="{FF2B5EF4-FFF2-40B4-BE49-F238E27FC236}">
+                <a16:creationId xmlns:a16="http://schemas.microsoft.com/office/drawing/2014/main" id="{5A56D3BE-9E70-48FC-9478-9913FE81F037}"/>
+              </a:ext>
+            </a:extLst>
+          </p:cNvPr>
+          <p:cNvSpPr>
+            <a:spLocks xmlns:a="http://schemas.openxmlformats.org/drawingml/2006/main" noGrp="1"/>
+          </p:cNvSpPr>
+          <p:nvPr/>
+        </p:nvSpPr>
+        <p:spPr>
+          <a:xfrm xmlns:a="http://schemas.openxmlformats.org/drawingml/2006/main">
+            <a:off x="6362700" y="1066800"/>
+            <a:ext cx="4476750" cy="4095750"/>
+          </a:xfrm>
+          <a:prstGeom xmlns:a="http://schemas.openxmlformats.org/drawingml/2006/main" prst="rect">
+            <a:avLst/>
+          </a:prstGeom>
+          <a:noFill xmlns:a="http://schemas.openxmlformats.org/drawingml/2006/main"/>
+          <a:ln xmlns:a="http://schemas.openxmlformats.org/drawingml/2006/main" w="0">
+            <a:noFill/>
+            <a:prstDash val="solid"/>
+          </a:ln>
+        </p:spPr>
+        <p:txBody>
+          <a:bodyPr xmlns:a="http://schemas.openxmlformats.org/drawingml/2006/main" lIns="91440" tIns="45720" rIns="91440" bIns="45720" anchor="ctr"/>
+          <a:lstStyle xmlns:a="http://schemas.openxmlformats.org/drawingml/2006/main"/>
+          <a:p xmlns:a="http://schemas.openxmlformats.org/drawingml/2006/main">
+            <a:pPr algn="l">
+              <a:buNone/>
+              <a:defRPr sz="1800" b="0">
+                <a:solidFill>
+                  <a:srgbClr val="17232D"/>
+                </a:solidFill>
+                <a:latin typeface="Calibri"/>
+                <a:ea typeface="Calibri"/>
+                <a:cs typeface="Calibri"/>
+              </a:defRPr>
+            </a:pPr>
+            <a:r>
+              <a:rPr sz="1800" b="0">
+                <a:solidFill>
+                  <a:srgbClr val="17232D"/>
+                </a:solidFill>
+                <a:latin typeface="Calibri"/>
+                <a:ea typeface="Calibri"/>
+                <a:cs typeface="Calibri"/>
+              </a:rPr>
+              <a:t>12 литературных исходников</a:t>
+            </a:r>
+          </a:p>
+          <a:p xmlns:a="http://schemas.openxmlformats.org/drawingml/2006/main">
+            <a:r>
+              <a:t/>
+            </a:r>
+          </a:p>
+          <a:p xmlns:a="http://schemas.openxmlformats.org/drawingml/2006/main">
+            <a:pPr algn="l">
+              <a:buNone/>
+              <a:defRPr sz="1800" b="0">
+                <a:solidFill>
+                  <a:srgbClr val="17232D"/>
+                </a:solidFill>
+                <a:latin typeface="Calibri"/>
+                <a:ea typeface="Calibri"/>
+                <a:cs typeface="Calibri"/>
+              </a:defRPr>
+            </a:pPr>
+            <a:r>
+              <a:rPr sz="1800" b="0">
+                <a:solidFill>
+                  <a:srgbClr val="17232D"/>
+                </a:solidFill>
+                <a:latin typeface="Calibri"/>
+                <a:ea typeface="Calibri"/>
+                <a:cs typeface="Calibri"/>
+              </a:rPr>
+              <a:t>• чистый Julia-код;</a:t>
+            </a:r>
+          </a:p>
+          <a:p xmlns:a="http://schemas.openxmlformats.org/drawingml/2006/main">
+            <a:pPr algn="l">
+              <a:buNone/>
+              <a:defRPr sz="1800" b="0">
+                <a:solidFill>
+                  <a:srgbClr val="17232D"/>
+                </a:solidFill>
+                <a:latin typeface="Calibri"/>
+                <a:ea typeface="Calibri"/>
+                <a:cs typeface="Calibri"/>
+              </a:defRPr>
+            </a:pPr>
+            <a:r>
+              <a:rPr sz="1800" b="0">
+                <a:solidFill>
+                  <a:srgbClr val="17232D"/>
+                </a:solidFill>
+                <a:latin typeface="Calibri"/>
+                <a:ea typeface="Calibri"/>
+                <a:cs typeface="Calibri"/>
+              </a:rPr>
+              <a:t>• 12 выполненных IPYNB;</a:t>
+            </a:r>
+          </a:p>
+          <a:p xmlns:a="http://schemas.openxmlformats.org/drawingml/2006/main">
+            <a:pPr algn="l">
+              <a:buNone/>
+              <a:defRPr sz="1800" b="0">
+                <a:solidFill>
+                  <a:srgbClr val="17232D"/>
+                </a:solidFill>
+                <a:latin typeface="Calibri"/>
+                <a:ea typeface="Calibri"/>
+                <a:cs typeface="Calibri"/>
+              </a:defRPr>
+            </a:pPr>
+            <a:r>
+              <a:rPr sz="1800" b="0">
+                <a:solidFill>
+                  <a:srgbClr val="17232D"/>
+                </a:solidFill>
+                <a:latin typeface="Calibri"/>
+                <a:ea typeface="Calibri"/>
+                <a:cs typeface="Calibri"/>
+              </a:rPr>
+              <a:t>• QMD и HTML-документация;</a:t>
+            </a:r>
+          </a:p>
+          <a:p xmlns:a="http://schemas.openxmlformats.org/drawingml/2006/main">
+            <a:pPr algn="l">
+              <a:buNone/>
+              <a:defRPr sz="1800" b="0">
+                <a:solidFill>
+                  <a:srgbClr val="17232D"/>
+                </a:solidFill>
+                <a:latin typeface="Calibri"/>
+                <a:ea typeface="Calibri"/>
+                <a:cs typeface="Calibri"/>
+              </a:defRPr>
+            </a:pPr>
+            <a:r>
+              <a:rPr sz="1800" b="0">
+                <a:solidFill>
+                  <a:srgbClr val="17232D"/>
+                </a:solidFill>
+                <a:latin typeface="Calibri"/>
+                <a:ea typeface="Calibri"/>
+                <a:cs typeface="Calibri"/>
+              </a:rPr>
+              <a:t>• 14 научных рисунков;</a:t>
+            </a:r>
+          </a:p>
+          <a:p xmlns:a="http://schemas.openxmlformats.org/drawingml/2006/main">
+            <a:pPr algn="l">
+              <a:buNone/>
+              <a:defRPr sz="1800" b="0">
+                <a:solidFill>
+                  <a:srgbClr val="17232D"/>
+                </a:solidFill>
+                <a:latin typeface="Calibri"/>
+                <a:ea typeface="Calibri"/>
+                <a:cs typeface="Calibri"/>
+              </a:defRPr>
+            </a:pPr>
+            <a:r>
+              <a:rPr sz="1800" b="0">
+                <a:solidFill>
+                  <a:srgbClr val="17232D"/>
+                </a:solidFill>
+                <a:latin typeface="Calibri"/>
+                <a:ea typeface="Calibri"/>
+                <a:cs typeface="Calibri"/>
+              </a:rPr>
+              <a:t>• CSV, JLD2 и оценки поиска;</a:t>
+            </a:r>
+          </a:p>
+          <a:p xmlns:a="http://schemas.openxmlformats.org/drawingml/2006/main">
+            <a:pPr algn="l">
+              <a:buNone/>
+              <a:defRPr sz="1800" b="0">
+                <a:solidFill>
+                  <a:srgbClr val="17232D"/>
+                </a:solidFill>
+                <a:latin typeface="Calibri"/>
+                <a:ea typeface="Calibri"/>
+                <a:cs typeface="Calibri"/>
+              </a:defRPr>
+            </a:pPr>
+            <a:r>
+              <a:rPr sz="1800" b="0">
+                <a:solidFill>
+                  <a:srgbClr val="17232D"/>
+                </a:solidFill>
+                <a:latin typeface="Calibri"/>
+                <a:ea typeface="Calibri"/>
+                <a:cs typeface="Calibri"/>
+              </a:rPr>
+              <a:t>• отчёт DOCX и PDF;</a:t>
+            </a:r>
+          </a:p>
+          <a:p xmlns:a="http://schemas.openxmlformats.org/drawingml/2006/main">
+            <a:pPr algn="l">
+              <a:buNone/>
+              <a:defRPr sz="1800" b="0">
+                <a:solidFill>
+                  <a:srgbClr val="17232D"/>
+                </a:solidFill>
+                <a:latin typeface="Calibri"/>
+                <a:ea typeface="Calibri"/>
+                <a:cs typeface="Calibri"/>
+              </a:defRPr>
+            </a:pPr>
+            <a:r>
+              <a:rPr sz="1800" b="0">
+                <a:solidFill>
+                  <a:srgbClr val="17232D"/>
+                </a:solidFill>
+                <a:latin typeface="Calibri"/>
+                <a:ea typeface="Calibri"/>
+                <a:cs typeface="Calibri"/>
+              </a:rPr>
+              <a:t>• презентация HTML и PPTX.</a:t>
+            </a:r>
+          </a:p>
+        </p:txBody>
+      </p:sp>
+    </p:spTree>
+    <p:extLst>
+      <p:ext uri="{BB962C8B-B14F-4D97-AF65-F5344CB8AC3E}">
+        <p14:creationId xmlns:p14="http://schemas.microsoft.com/office/powerpoint/2010/main" val="1552567694"/>
+      </p:ext>
+    </p:extLst>
+  </p:cSld>
+</p:sld>
+</file>
+
+<file path=ppt/slides/slide21.xml><?xml version="1.0" encoding="utf-8"?>
+<p:sld xmlns:p="http://schemas.openxmlformats.org/presentationml/2006/main">
+  <p:cSld>
+    <p:bg>
+      <p:bgPr>
+        <a:solidFill xmlns:a="http://schemas.openxmlformats.org/drawingml/2006/main">
+          <a:srgbClr val="0B4778"/>
+        </a:solidFill>
+      </p:bgPr>
+    </p:bg>
+    <p:spTree>
+      <p:nvGrpSpPr>
+        <p:cNvPr id="1" name=""/>
+        <p:cNvGrpSpPr/>
+        <p:nvPr/>
+      </p:nvGrpSpPr>
+      <p:grpSpPr>
+        <a:xfrm xmlns:a="http://schemas.openxmlformats.org/drawingml/2006/main"/>
+      </p:grpSpPr>
+      <p:sp>
+        <p:nvSpPr>
+          <p:cNvPr id="7" name="accent">
+            <a:extLst xmlns:a="http://schemas.openxmlformats.org/drawingml/2006/main">
+              <a:ext uri="{FF2B5EF4-FFF2-40B4-BE49-F238E27FC236}">
+                <a16:creationId xmlns:a16="http://schemas.microsoft.com/office/drawing/2014/main" id="{7EDC123F-A2A1-4A23-B400-58E76A7A62D7}"/>
+              </a:ext>
+            </a:extLst>
+          </p:cNvPr>
+          <p:cNvSpPr>
+            <a:spLocks xmlns:a="http://schemas.openxmlformats.org/drawingml/2006/main" noGrp="1"/>
+          </p:cNvSpPr>
+          <p:nvPr/>
+        </p:nvSpPr>
+        <p:spPr>
+          <a:xfrm xmlns:a="http://schemas.openxmlformats.org/drawingml/2006/main">
+            <a:off x="0" y="0"/>
+            <a:ext cx="133350" cy="6858000"/>
+          </a:xfrm>
+          <a:prstGeom xmlns:a="http://schemas.openxmlformats.org/drawingml/2006/main" prst="rect">
+            <a:avLst/>
+          </a:prstGeom>
+          <a:solidFill xmlns:a="http://schemas.openxmlformats.org/drawingml/2006/main">
+            <a:srgbClr val="35A9D3"/>
+          </a:solidFill>
+          <a:ln xmlns:a="http://schemas.openxmlformats.org/drawingml/2006/main" w="0">
+            <a:noFill/>
+            <a:prstDash val="solid"/>
+          </a:ln>
+        </p:spPr>
+      </p:sp>
+      <p:pic>
+        <p:nvPicPr>
+          <p:cNvPr id="10" name=""/>
+          <p:cNvPicPr>
+            <a:picLocks xmlns:a="http://schemas.openxmlformats.org/drawingml/2006/main" noChangeAspect="1"/>
+          </p:cNvPicPr>
+          <p:nvPr/>
+        </p:nvPicPr>
+        <p:blipFill>
+          <a:blip xmlns:r="http://schemas.openxmlformats.org/officeDocument/2006/relationships" xmlns:a="http://schemas.openxmlformats.org/drawingml/2006/main" r:embed="R2c7aae08bd814d57"/>
+          <a:stretch xmlns:a="http://schemas.openxmlformats.org/drawingml/2006/main"/>
+        </p:blipFill>
+        <p:spPr>
+          <a:xfrm xmlns:a="http://schemas.openxmlformats.org/drawingml/2006/main">
+            <a:off x="742950" y="716689"/>
+            <a:ext cx="781050" cy="662123"/>
+          </a:xfrm>
+          <a:prstGeom xmlns:a="http://schemas.openxmlformats.org/drawingml/2006/main" prst="rect">
+            <a:avLst/>
+          </a:prstGeom>
+        </p:spPr>
+      </p:pic>
+      <p:sp>
+        <p:nvSpPr>
+          <p:cNvPr id="3" name="conclusion-title">
+            <a:extLst xmlns:a="http://schemas.openxmlformats.org/drawingml/2006/main">
+              <a:ext uri="{FF2B5EF4-FFF2-40B4-BE49-F238E27FC236}">
+                <a16:creationId xmlns:a16="http://schemas.microsoft.com/office/drawing/2014/main" id="{05B54D60-5BA6-4B1C-AA38-11674D76AE8D}"/>
+              </a:ext>
+            </a:extLst>
+          </p:cNvPr>
+          <p:cNvSpPr>
+            <a:spLocks xmlns:a="http://schemas.openxmlformats.org/drawingml/2006/main" noGrp="1"/>
+          </p:cNvSpPr>
+          <p:nvPr/>
+        </p:nvSpPr>
+        <p:spPr>
+          <a:xfrm xmlns:a="http://schemas.openxmlformats.org/drawingml/2006/main">
+            <a:off x="1943100" y="723900"/>
+            <a:ext cx="8858250" cy="1257300"/>
+          </a:xfrm>
+          <a:prstGeom xmlns:a="http://schemas.openxmlformats.org/drawingml/2006/main" prst="rect">
+            <a:avLst/>
+          </a:prstGeom>
+          <a:noFill xmlns:a="http://schemas.openxmlformats.org/drawingml/2006/main"/>
+          <a:ln xmlns:a="http://schemas.openxmlformats.org/drawingml/2006/main" w="0">
+            <a:noFill/>
+            <a:prstDash val="solid"/>
+          </a:ln>
+        </p:spPr>
+        <p:txBody>
+          <a:bodyPr xmlns:a="http://schemas.openxmlformats.org/drawingml/2006/main" lIns="91440" tIns="45720" rIns="91440" bIns="45720" anchor="ctr"/>
+          <a:lstStyle xmlns:a="http://schemas.openxmlformats.org/drawingml/2006/main"/>
+          <a:p xmlns:a="http://schemas.openxmlformats.org/drawingml/2006/main">
+            <a:pPr algn="l">
+              <a:buNone/>
+              <a:defRPr sz="3150" b="1">
+                <a:solidFill>
+                  <a:srgbClr val="FFFFFF"/>
+                </a:solidFill>
+                <a:latin typeface="Calibri"/>
+                <a:ea typeface="Calibri"/>
+                <a:cs typeface="Calibri"/>
+              </a:defRPr>
+            </a:pPr>
+            <a:r>
+              <a:rPr sz="3150" b="1">
+                <a:solidFill>
+                  <a:srgbClr val="FFFFFF"/>
+                </a:solidFill>
+                <a:latin typeface="Calibri"/>
+                <a:ea typeface="Calibri"/>
+                <a:cs typeface="Calibri"/>
+              </a:rPr>
+              <a:t>Миграция и выявление</a:t>
+            </a:r>
+          </a:p>
+          <a:p xmlns:a="http://schemas.openxmlformats.org/drawingml/2006/main">
+            <a:pPr algn="l">
+              <a:buNone/>
+              <a:defRPr sz="3150" b="1">
+                <a:solidFill>
+                  <a:srgbClr val="FFFFFF"/>
+                </a:solidFill>
+                <a:latin typeface="Calibri"/>
+                <a:ea typeface="Calibri"/>
+                <a:cs typeface="Calibri"/>
+              </a:defRPr>
+            </a:pPr>
+            <a:r>
+              <a:rPr sz="3150" b="1">
+                <a:solidFill>
+                  <a:srgbClr val="FFFFFF"/>
+                </a:solidFill>
+                <a:latin typeface="Calibri"/>
+                <a:ea typeface="Calibri"/>
+                <a:cs typeface="Calibri"/>
+              </a:rPr>
+              <a:t>меняют ход эпидемии</a:t>
+            </a:r>
+          </a:p>
+        </p:txBody>
+      </p:sp>
+      <p:sp>
+        <p:nvSpPr>
+          <p:cNvPr id="4" name="conclusion-rule">
+            <a:extLst xmlns:a="http://schemas.openxmlformats.org/drawingml/2006/main">
+              <a:ext uri="{FF2B5EF4-FFF2-40B4-BE49-F238E27FC236}">
+                <a16:creationId xmlns:a16="http://schemas.microsoft.com/office/drawing/2014/main" id="{A6F50DB3-5845-402B-875A-F3D971960FB8}"/>
+              </a:ext>
+            </a:extLst>
+          </p:cNvPr>
+          <p:cNvSpPr>
+            <a:spLocks xmlns:a="http://schemas.openxmlformats.org/drawingml/2006/main" noGrp="1"/>
+          </p:cNvSpPr>
+          <p:nvPr/>
+        </p:nvSpPr>
+        <p:spPr>
+          <a:xfrm xmlns:a="http://schemas.openxmlformats.org/drawingml/2006/main">
+            <a:off x="1943100" y="2133600"/>
+            <a:ext cx="6286500" cy="38100"/>
+          </a:xfrm>
+          <a:prstGeom xmlns:a="http://schemas.openxmlformats.org/drawingml/2006/main" prst="rect">
+            <a:avLst/>
+          </a:prstGeom>
+          <a:solidFill xmlns:a="http://schemas.openxmlformats.org/drawingml/2006/main">
+            <a:srgbClr val="35A9D3"/>
+          </a:solidFill>
+          <a:ln xmlns:a="http://schemas.openxmlformats.org/drawingml/2006/main" w="0">
+            <a:noFill/>
+            <a:prstDash val="solid"/>
+          </a:ln>
+        </p:spPr>
+      </p:sp>
+      <p:sp>
+        <p:nvSpPr>
+          <p:cNvPr id="5" name="conclusions">
+            <a:extLst xmlns:a="http://schemas.openxmlformats.org/drawingml/2006/main">
+              <a:ext uri="{FF2B5EF4-FFF2-40B4-BE49-F238E27FC236}">
+                <a16:creationId xmlns:a16="http://schemas.microsoft.com/office/drawing/2014/main" id="{80C76B1D-E492-4AF8-A98B-ACC10B47E441}"/>
+              </a:ext>
+            </a:extLst>
+          </p:cNvPr>
+          <p:cNvSpPr>
+            <a:spLocks xmlns:a="http://schemas.openxmlformats.org/drawingml/2006/main" noGrp="1"/>
+          </p:cNvSpPr>
+          <p:nvPr/>
+        </p:nvSpPr>
+        <p:spPr>
+          <a:xfrm xmlns:a="http://schemas.openxmlformats.org/drawingml/2006/main">
+            <a:off x="1943100" y="2552700"/>
+            <a:ext cx="8953500" cy="3219450"/>
+          </a:xfrm>
+          <a:prstGeom xmlns:a="http://schemas.openxmlformats.org/drawingml/2006/main" prst="rect">
+            <a:avLst/>
+          </a:prstGeom>
+          <a:noFill xmlns:a="http://schemas.openxmlformats.org/drawingml/2006/main"/>
+          <a:ln xmlns:a="http://schemas.openxmlformats.org/drawingml/2006/main" w="0">
+            <a:noFill/>
+            <a:prstDash val="solid"/>
+          </a:ln>
+        </p:spPr>
+        <p:txBody>
+          <a:bodyPr xmlns:a="http://schemas.openxmlformats.org/drawingml/2006/main" lIns="91440" tIns="45720" rIns="91440" bIns="45720" anchor="ctr"/>
+          <a:lstStyle xmlns:a="http://schemas.openxmlformats.org/drawingml/2006/main"/>
+          <a:p xmlns:a="http://schemas.openxmlformats.org/drawingml/2006/main">
+            <a:pPr algn="l">
+              <a:buNone/>
+              <a:defRPr sz="1875" b="0">
+                <a:solidFill>
+                  <a:srgbClr val="FFFFFF"/>
+                </a:solidFill>
+                <a:latin typeface="Calibri"/>
+                <a:ea typeface="Calibri"/>
+                <a:cs typeface="Calibri"/>
+              </a:defRPr>
+            </a:pPr>
+            <a:r>
+              <a:rPr sz="1875" b="0">
+                <a:solidFill>
+                  <a:srgbClr val="FFFFFF"/>
+                </a:solidFill>
+                <a:latin typeface="Calibri"/>
+                <a:ea typeface="Calibri"/>
+                <a:cs typeface="Calibri"/>
+              </a:rPr>
+              <a:t>• Реализованы все основные и дополнительные задания главы 4.</a:t>
+            </a:r>
+          </a:p>
+          <a:p xmlns:a="http://schemas.openxmlformats.org/drawingml/2006/main">
+            <a:r>
+              <a:t/>
+            </a:r>
+          </a:p>
+          <a:p xmlns:a="http://schemas.openxmlformats.org/drawingml/2006/main">
+            <a:pPr algn="l">
+              <a:buNone/>
+              <a:defRPr sz="1875" b="0">
+                <a:solidFill>
+                  <a:srgbClr val="FFFFFF"/>
+                </a:solidFill>
+                <a:latin typeface="Calibri"/>
+                <a:ea typeface="Calibri"/>
+                <a:cs typeface="Calibri"/>
+              </a:defRPr>
+            </a:pPr>
+            <a:r>
+              <a:rPr sz="1875" b="0">
+                <a:solidFill>
+                  <a:srgbClr val="FFFFFF"/>
+                </a:solidFill>
+                <a:latin typeface="Calibri"/>
+                <a:ea typeface="Calibri"/>
+                <a:cs typeface="Calibri"/>
+              </a:rPr>
+              <a:t>• Последовательное обновление допускает быстрые каскады.</a:t>
+            </a:r>
+          </a:p>
+          <a:p xmlns:a="http://schemas.openxmlformats.org/drawingml/2006/main">
+            <a:r>
+              <a:t/>
+            </a:r>
+          </a:p>
+          <a:p xmlns:a="http://schemas.openxmlformats.org/drawingml/2006/main">
+            <a:pPr algn="l">
+              <a:buNone/>
+              <a:defRPr sz="1875" b="0">
+                <a:solidFill>
+                  <a:srgbClr val="FFFFFF"/>
+                </a:solidFill>
+                <a:latin typeface="Calibri"/>
+                <a:ea typeface="Calibri"/>
+                <a:cs typeface="Calibri"/>
+              </a:defRPr>
+            </a:pPr>
+            <a:r>
+              <a:rPr sz="1875" b="0">
+                <a:solidFill>
+                  <a:srgbClr val="FFFFFF"/>
+                </a:solidFill>
+                <a:latin typeface="Calibri"/>
+                <a:ea typeface="Calibri"/>
+                <a:cs typeface="Calibri"/>
+              </a:rPr>
+              <a:t>• Заданный карантин не уменьшил пик в выполненной серии.</a:t>
+            </a:r>
+          </a:p>
+          <a:p xmlns:a="http://schemas.openxmlformats.org/drawingml/2006/main">
+            <a:r>
+              <a:t/>
+            </a:r>
+          </a:p>
+          <a:p xmlns:a="http://schemas.openxmlformats.org/drawingml/2006/main">
+            <a:pPr algn="l">
+              <a:buNone/>
+              <a:defRPr sz="1875" b="0">
+                <a:solidFill>
+                  <a:srgbClr val="FFFFFF"/>
+                </a:solidFill>
+                <a:latin typeface="Calibri"/>
+                <a:ea typeface="Calibri"/>
+                <a:cs typeface="Calibri"/>
+              </a:defRPr>
+            </a:pPr>
+            <a:r>
+              <a:rPr sz="1875" b="0">
+                <a:solidFill>
+                  <a:srgbClr val="FFFFFF"/>
+                </a:solidFill>
+                <a:latin typeface="Calibri"/>
+                <a:ea typeface="Calibri"/>
+                <a:cs typeface="Calibri"/>
+              </a:rPr>
+              <a:t>• Ограничение 30% выполнено во всех 20 проверочных прогонах.</a:t>
+            </a:r>
+          </a:p>
+          <a:p xmlns:a="http://schemas.openxmlformats.org/drawingml/2006/main">
+            <a:r>
+              <a:t/>
+            </a:r>
+          </a:p>
+          <a:p xmlns:a="http://schemas.openxmlformats.org/drawingml/2006/main">
+            <a:pPr algn="l">
+              <a:buNone/>
+              <a:defRPr sz="1875" b="0">
+                <a:solidFill>
+                  <a:srgbClr val="FFFFFF"/>
+                </a:solidFill>
+                <a:latin typeface="Calibri"/>
+                <a:ea typeface="Calibri"/>
+                <a:cs typeface="Calibri"/>
+              </a:defRPr>
+            </a:pPr>
+            <a:r>
+              <a:rPr sz="1875" b="0">
+                <a:solidFill>
+                  <a:srgbClr val="FFFFFF"/>
+                </a:solidFill>
+                <a:latin typeface="Calibri"/>
+                <a:ea typeface="Calibri"/>
+                <a:cs typeface="Calibri"/>
+              </a:rPr>
+              <a:t>• Результаты не являются прогнозом реальной эпидемии.</a:t>
+            </a:r>
+          </a:p>
+        </p:txBody>
+      </p:sp>
+      <p:sp>
+        <p:nvSpPr>
+          <p:cNvPr id="6" name="final">
+            <a:extLst xmlns:a="http://schemas.openxmlformats.org/drawingml/2006/main">
+              <a:ext uri="{FF2B5EF4-FFF2-40B4-BE49-F238E27FC236}">
+                <a16:creationId xmlns:a16="http://schemas.microsoft.com/office/drawing/2014/main" id="{FCC7524D-04B4-4E2B-BB4A-218A72DF3564}"/>
+              </a:ext>
+            </a:extLst>
+          </p:cNvPr>
+          <p:cNvSpPr>
+            <a:spLocks xmlns:a="http://schemas.openxmlformats.org/drawingml/2006/main" noGrp="1"/>
+          </p:cNvSpPr>
+          <p:nvPr/>
+        </p:nvSpPr>
+        <p:spPr>
+          <a:xfrm xmlns:a="http://schemas.openxmlformats.org/drawingml/2006/main">
+            <a:off x="1943100" y="5924550"/>
+            <a:ext cx="5715000" cy="495300"/>
+          </a:xfrm>
+          <a:prstGeom xmlns:a="http://schemas.openxmlformats.org/drawingml/2006/main" prst="rect">
+            <a:avLst/>
+          </a:prstGeom>
+          <a:noFill xmlns:a="http://schemas.openxmlformats.org/drawingml/2006/main"/>
+          <a:ln xmlns:a="http://schemas.openxmlformats.org/drawingml/2006/main" w="0">
+            <a:noFill/>
+            <a:prstDash val="solid"/>
+          </a:ln>
+        </p:spPr>
+        <p:txBody>
+          <a:bodyPr xmlns:a="http://schemas.openxmlformats.org/drawingml/2006/main" lIns="91440" tIns="45720" rIns="91440" bIns="45720" anchor="ctr"/>
+          <a:lstStyle xmlns:a="http://schemas.openxmlformats.org/drawingml/2006/main"/>
+          <a:p xmlns:a="http://schemas.openxmlformats.org/drawingml/2006/main">
+            <a:pPr algn="l">
+              <a:buNone/>
+              <a:defRPr sz="1650" b="1">
+                <a:solidFill>
+                  <a:srgbClr val="35A9D3"/>
+                </a:solidFill>
+                <a:latin typeface="Calibri"/>
+                <a:ea typeface="Calibri"/>
+                <a:cs typeface="Calibri"/>
+              </a:defRPr>
+            </a:pPr>
+            <a:r>
+              <a:rPr sz="1650" b="1">
+                <a:solidFill>
+                  <a:srgbClr val="35A9D3"/>
+                </a:solidFill>
+                <a:latin typeface="Calibri"/>
+                <a:ea typeface="Calibri"/>
+                <a:cs typeface="Calibri"/>
+              </a:rPr>
+              <a:t>Лабораторная работа № 4</a:t>
+            </a:r>
+          </a:p>
+        </p:txBody>
+      </p:sp>
+    </p:spTree>
+    <p:extLst>
+      <p:ext uri="{BB962C8B-B14F-4D97-AF65-F5344CB8AC3E}">
+        <p14:creationId xmlns:p14="http://schemas.microsoft.com/office/powerpoint/2010/main" val="509539714"/>
       </p:ext>
     </p:extLst>
   </p:cSld>
@@ -6736,7 +11056,7 @@
                 <a:ea typeface="Calibri"/>
                 <a:cs typeface="Calibri"/>
               </a:rPr>
-              <a:t>Общая очередь изменяет RTT и скорость отправки</a:t>
+              <a:t>Один шаг включает миграцию и передачу инфекции</a:t>
             </a:r>
           </a:p>
         </p:txBody>
@@ -6781,7 +11101,7 @@
           <p:nvPr/>
         </p:nvPicPr>
         <p:blipFill>
-          <a:blip xmlns:r="http://schemas.openxmlformats.org/officeDocument/2006/relationships" xmlns:a="http://schemas.openxmlformats.org/drawingml/2006/main" r:embed="R52df88544a32485e"/>
+          <a:blip xmlns:r="http://schemas.openxmlformats.org/officeDocument/2006/relationships" xmlns:a="http://schemas.openxmlformats.org/drawingml/2006/main" r:embed="R7ac25f0e6a48425d"/>
           <a:stretch xmlns:a="http://schemas.openxmlformats.org/drawingml/2006/main"/>
         </p:blipFill>
         <p:spPr>
@@ -6880,7 +11200,7 @@
           </a:ln>
         </p:spPr>
         <p:txBody>
-          <a:bodyPr xmlns:a="http://schemas.openxmlformats.org/drawingml/2006/main" anchor="ctr"/>
+          <a:bodyPr xmlns:a="http://schemas.openxmlformats.org/drawingml/2006/main" lIns="91440" tIns="45720" rIns="91440" bIns="45720" anchor="ctr"/>
           <a:lstStyle xmlns:a="http://schemas.openxmlformats.org/drawingml/2006/main"/>
           <a:p xmlns:a="http://schemas.openxmlformats.org/drawingml/2006/main">
             <a:pPr algn="ctr">
@@ -6889,6 +11209,9 @@
                 <a:solidFill>
                   <a:srgbClr val="0B4778"/>
                 </a:solidFill>
+                <a:latin typeface="Calibri"/>
+                <a:ea typeface="Calibri"/>
+                <a:cs typeface="Calibri"/>
               </a:defRPr>
             </a:pPr>
             <a:r>
@@ -6896,6 +11219,9 @@
                 <a:solidFill>
                   <a:srgbClr val="0B4778"/>
                 </a:solidFill>
+                <a:latin typeface="Calibri"/>
+                <a:ea typeface="Calibri"/>
+                <a:cs typeface="Calibri"/>
               </a:rPr>
               <a:t>3</a:t>
             </a:r>
@@ -6987,7 +11313,7 @@
                 <a:ea typeface="Calibri"/>
                 <a:cs typeface="Calibri"/>
               </a:rPr>
-              <a:t>RTT = RTT₀ + q/C</a:t>
+              <a:t>S → I → R</a:t>
             </a:r>
           </a:p>
           <a:p xmlns:a="http://schemas.openxmlformats.org/drawingml/2006/main">
@@ -7016,7 +11342,7 @@
                 <a:ea typeface="Calibri"/>
                 <a:cs typeface="Calibri"/>
               </a:rPr>
-              <a:t>sent = cwnd · Δt/RTT</a:t>
+              <a:t>R → I с вероятностью 0,1</a:t>
             </a:r>
           </a:p>
           <a:p xmlns:a="http://schemas.openxmlformats.org/drawingml/2006/main">
@@ -7045,7 +11371,7 @@
                 <a:ea typeface="Calibri"/>
                 <a:cs typeface="Calibri"/>
               </a:rPr>
-              <a:t>C = 20·10⁶/(8·500)</a:t>
+              <a:t>После болезни: R или смерть</a:t>
             </a:r>
           </a:p>
           <a:p xmlns:a="http://schemas.openxmlformats.org/drawingml/2006/main">
@@ -7074,7 +11400,36 @@
                 <a:ea typeface="Calibri"/>
                 <a:cs typeface="Calibri"/>
               </a:rPr>
-              <a:t>C = 5000 пакетов/с</a:t>
+              <a:t>Контакты: Poisson(β)</a:t>
+            </a:r>
+          </a:p>
+          <a:p xmlns:a="http://schemas.openxmlformats.org/drawingml/2006/main">
+            <a:r>
+              <a:t/>
+            </a:r>
+          </a:p>
+          <a:p xmlns:a="http://schemas.openxmlformats.org/drawingml/2006/main">
+            <a:pPr algn="ctr">
+              <a:buNone/>
+              <a:defRPr sz="2175" b="1">
+                <a:solidFill>
+                  <a:srgbClr val="0B4778"/>
+                </a:solidFill>
+                <a:latin typeface="Calibri"/>
+                <a:ea typeface="Calibri"/>
+                <a:cs typeface="Calibri"/>
+              </a:defRPr>
+            </a:pPr>
+            <a:r>
+              <a:rPr sz="2175" b="1">
+                <a:solidFill>
+                  <a:srgbClr val="0B4778"/>
+                </a:solidFill>
+                <a:latin typeface="Calibri"/>
+                <a:ea typeface="Calibri"/>
+                <a:cs typeface="Calibri"/>
+              </a:rPr>
+              <a:t>Обновление последовательное</a:t>
             </a:r>
           </a:p>
         </p:txBody>
@@ -7131,7 +11486,7 @@
                 <a:ea typeface="Calibri"/>
                 <a:cs typeface="Calibri"/>
               </a:rPr>
-              <a:t>25 потоков делят одно узкое место.</a:t>
+              <a:t>Агенты посещают города, заражают доступных соседей и стареют по болезни.</a:t>
             </a:r>
           </a:p>
           <a:p xmlns:a="http://schemas.openxmlformats.org/drawingml/2006/main">
@@ -7160,36 +11515,7 @@
                 <a:ea typeface="Calibri"/>
                 <a:cs typeface="Calibri"/>
               </a:rPr>
-              <a:t>RTT₀ = 118 мс, Δt = 2 мс.</a:t>
-            </a:r>
-          </a:p>
-          <a:p xmlns:a="http://schemas.openxmlformats.org/drawingml/2006/main">
-            <a:r>
-              <a:t/>
-            </a:r>
-          </a:p>
-          <a:p xmlns:a="http://schemas.openxmlformats.org/drawingml/2006/main">
-            <a:pPr algn="l">
-              <a:buNone/>
-              <a:defRPr sz="1875" b="0">
-                <a:solidFill>
-                  <a:srgbClr val="17232D"/>
-                </a:solidFill>
-                <a:latin typeface="Calibri"/>
-                <a:ea typeface="Calibri"/>
-                <a:cs typeface="Calibri"/>
-              </a:defRPr>
-            </a:pPr>
-            <a:r>
-              <a:rPr sz="1875" b="0">
-                <a:solidFill>
-                  <a:srgbClr val="17232D"/>
-                </a:solidFill>
-                <a:latin typeface="Calibri"/>
-                <a:ea typeface="Calibri"/>
-                <a:cs typeface="Calibri"/>
-              </a:rPr>
-              <a:t>Модель агрегированная: отдельные ACK и таймеры TCP не учитываются.</a:t>
+              <a:t>Poisson задаёт цель успешных заражений, а не фиксированное число попыток.</a:t>
             </a:r>
           </a:p>
         </p:txBody>
@@ -7279,7 +11605,7 @@
                 <a:ea typeface="Calibri"/>
                 <a:cs typeface="Calibri"/>
               </a:rPr>
-              <a:t>20 Мбит/с</a:t>
+              <a:t>3000</a:t>
             </a:r>
           </a:p>
         </p:txBody>
@@ -7336,7 +11662,7 @@
                 <a:ea typeface="Calibri"/>
                 <a:cs typeface="Calibri"/>
               </a:rPr>
-              <a:t>ёмкость канала</a:t>
+              <a:t>людей в начале</a:t>
             </a:r>
           </a:p>
         </p:txBody>
@@ -7426,7 +11752,7 @@
                 <a:ea typeface="Calibri"/>
                 <a:cs typeface="Calibri"/>
               </a:rPr>
-              <a:t>300</a:t>
+              <a:t>14 дней</a:t>
             </a:r>
           </a:p>
         </p:txBody>
@@ -7483,7 +11809,7 @@
                 <a:ea typeface="Calibri"/>
                 <a:cs typeface="Calibri"/>
               </a:rPr>
-              <a:t>пакетов в буфере</a:t>
+              <a:t>период инфекции</a:t>
             </a:r>
           </a:p>
         </p:txBody>
@@ -7631,7 +11957,7 @@
                 <a:ea typeface="Calibri"/>
                 <a:cs typeface="Calibri"/>
               </a:rPr>
-              <a:t>RED использует сглаженную оценку очереди</a:t>
+              <a:t>Миграция соединяет локальные эпидемии</a:t>
             </a:r>
           </a:p>
         </p:txBody>
@@ -7676,7 +12002,7 @@
           <p:nvPr/>
         </p:nvPicPr>
         <p:blipFill>
-          <a:blip xmlns:r="http://schemas.openxmlformats.org/officeDocument/2006/relationships" xmlns:a="http://schemas.openxmlformats.org/drawingml/2006/main" r:embed="R8beed365996b465d"/>
+          <a:blip xmlns:r="http://schemas.openxmlformats.org/officeDocument/2006/relationships" xmlns:a="http://schemas.openxmlformats.org/drawingml/2006/main" r:embed="R366be01a82c54449"/>
           <a:stretch xmlns:a="http://schemas.openxmlformats.org/drawingml/2006/main"/>
         </p:blipFill>
         <p:spPr>
@@ -7775,7 +12101,7 @@
           </a:ln>
         </p:spPr>
         <p:txBody>
-          <a:bodyPr xmlns:a="http://schemas.openxmlformats.org/drawingml/2006/main" anchor="ctr"/>
+          <a:bodyPr xmlns:a="http://schemas.openxmlformats.org/drawingml/2006/main" lIns="91440" tIns="45720" rIns="91440" bIns="45720" anchor="ctr"/>
           <a:lstStyle xmlns:a="http://schemas.openxmlformats.org/drawingml/2006/main"/>
           <a:p xmlns:a="http://schemas.openxmlformats.org/drawingml/2006/main">
             <a:pPr algn="ctr">
@@ -7784,6 +12110,9 @@
                 <a:solidFill>
                   <a:srgbClr val="0B4778"/>
                 </a:solidFill>
+                <a:latin typeface="Calibri"/>
+                <a:ea typeface="Calibri"/>
+                <a:cs typeface="Calibri"/>
               </a:defRPr>
             </a:pPr>
             <a:r>
@@ -7791,6 +12120,9 @@
                 <a:solidFill>
                   <a:srgbClr val="0B4778"/>
                 </a:solidFill>
+                <a:latin typeface="Calibri"/>
+                <a:ea typeface="Calibri"/>
+                <a:cs typeface="Calibri"/>
               </a:rPr>
               <a:t>4</a:t>
             </a:r>
@@ -7882,7 +12214,7 @@
                 <a:ea typeface="Calibri"/>
                 <a:cs typeface="Calibri"/>
               </a:rPr>
-              <a:t>q̄ ← (1 − w)q̄ + wq</a:t>
+              <a:t>Mij ∝ (Ni + Nj) / Ni</a:t>
             </a:r>
           </a:p>
           <a:p xmlns:a="http://schemas.openxmlformats.org/drawingml/2006/main">
@@ -7911,7 +12243,7 @@
                 <a:ea typeface="Calibri"/>
                 <a:cs typeface="Calibri"/>
               </a:rPr>
-              <a:t>w = 0,002</a:t>
+              <a:t>Сумма строки M равна 1</a:t>
             </a:r>
           </a:p>
           <a:p xmlns:a="http://schemas.openxmlformats.org/drawingml/2006/main">
@@ -7940,17 +12272,11 @@
                 <a:ea typeface="Calibri"/>
                 <a:cs typeface="Calibri"/>
               </a:rPr>
-              <a:t>qmin = 75, qmax = 150</a:t>
-            </a:r>
-          </a:p>
-          <a:p xmlns:a="http://schemas.openxmlformats.org/drawingml/2006/main">
-            <a:r>
-              <a:t/>
+              <a:t>Управляемый вариант:</a:t>
             </a:r>
           </a:p>
           <a:p xmlns:a="http://schemas.openxmlformats.org/drawingml/2006/main">
             <a:pPr algn="ctr">
-              <a:buNone/>
               <a:defRPr sz="2025" b="1">
                 <a:solidFill>
                   <a:srgbClr val="0B4778"/>
@@ -7969,7 +12295,31 @@
                 <a:ea typeface="Calibri"/>
                 <a:cs typeface="Calibri"/>
               </a:rPr>
-              <a:t>pmax = 0,1</a:t>
+              <a:t>Mii = 1 − m</a:t>
+            </a:r>
+          </a:p>
+          <a:p xmlns:a="http://schemas.openxmlformats.org/drawingml/2006/main">
+            <a:pPr algn="ctr">
+              <a:buNone/>
+              <a:defRPr sz="2025" b="1">
+                <a:solidFill>
+                  <a:srgbClr val="0B4778"/>
+                </a:solidFill>
+                <a:latin typeface="Calibri"/>
+                <a:ea typeface="Calibri"/>
+                <a:cs typeface="Calibri"/>
+              </a:defRPr>
+            </a:pPr>
+            <a:r>
+              <a:rPr sz="2025" b="1">
+                <a:solidFill>
+                  <a:srgbClr val="0B4778"/>
+                </a:solidFill>
+                <a:latin typeface="Calibri"/>
+                <a:ea typeface="Calibri"/>
+                <a:cs typeface="Calibri"/>
+              </a:rPr>
+              <a:t>Mij = m / (C − 1), i ≠ j</a:t>
             </a:r>
           </a:p>
         </p:txBody>
@@ -8026,7 +12376,7 @@
                 <a:ea typeface="Calibri"/>
                 <a:cs typeface="Calibri"/>
               </a:rPr>
-              <a:t>Ниже qmin вероятность равна 0.</a:t>
+              <a:t>Три равных города: в базовой матрице все вероятности равны 1/3.</a:t>
             </a:r>
           </a:p>
           <a:p xmlns:a="http://schemas.openxmlformats.org/drawingml/2006/main">
@@ -8055,7 +12405,7 @@
                 <a:ea typeface="Calibri"/>
                 <a:cs typeface="Calibri"/>
               </a:rPr>
-              <a:t>Между порогами она растёт линейно.</a:t>
+              <a:t>Сканирование m меняет вероятность покинуть город.</a:t>
             </a:r>
           </a:p>
           <a:p xmlns:a="http://schemas.openxmlformats.org/drawingml/2006/main">
@@ -8084,7 +12434,7 @@
                 <a:ea typeface="Calibri"/>
                 <a:cs typeface="Calibri"/>
               </a:rPr>
-              <a:t>Выше qmax остаётся pmax: это упрощение классического RED.</a:t>
+              <a:t>Горизонт серии — 150 дней.</a:t>
             </a:r>
           </a:p>
         </p:txBody>
@@ -8174,7 +12524,7 @@
                 <a:ea typeface="Calibri"/>
                 <a:cs typeface="Calibri"/>
               </a:rPr>
-              <a:t>AIMD</a:t>
+              <a:t>3</a:t>
             </a:r>
           </a:p>
         </p:txBody>
@@ -8231,7 +12581,7 @@
                 <a:ea typeface="Calibri"/>
                 <a:cs typeface="Calibri"/>
               </a:rPr>
-              <a:t>рост и уменьшение</a:t>
+              <a:t>города</a:t>
             </a:r>
           </a:p>
         </p:txBody>
@@ -8321,7 +12671,7 @@
                 <a:ea typeface="Calibri"/>
                 <a:cs typeface="Calibri"/>
               </a:rPr>
-              <a:t>cwnd/2</a:t>
+              <a:t>0…0,5</a:t>
             </a:r>
           </a:p>
         </p:txBody>
@@ -8378,7 +12728,7 @@
                 <a:ea typeface="Calibri"/>
                 <a:cs typeface="Calibri"/>
               </a:rPr>
-              <a:t>при сигнале потери</a:t>
+              <a:t>интенсивность m</a:t>
             </a:r>
           </a:p>
         </p:txBody>
@@ -8526,7 +12876,7 @@
                 <a:ea typeface="Calibri"/>
                 <a:cs typeface="Calibri"/>
               </a:rPr>
-              <a:t>Окружение и структура сохранены по образцу № 1</a:t>
+              <a:t>Двенадцать сценариев разделяют вычисления</a:t>
             </a:r>
           </a:p>
         </p:txBody>
@@ -8571,7 +12921,7 @@
           <p:nvPr/>
         </p:nvPicPr>
         <p:blipFill>
-          <a:blip xmlns:r="http://schemas.openxmlformats.org/officeDocument/2006/relationships" xmlns:a="http://schemas.openxmlformats.org/drawingml/2006/main" r:embed="R8e0e5bda1c0747ab"/>
+          <a:blip xmlns:r="http://schemas.openxmlformats.org/officeDocument/2006/relationships" xmlns:a="http://schemas.openxmlformats.org/drawingml/2006/main" r:embed="R8d9a328ba99e4513"/>
           <a:stretch xmlns:a="http://schemas.openxmlformats.org/drawingml/2006/main"/>
         </p:blipFill>
         <p:spPr>
@@ -8670,7 +13020,7 @@
           </a:ln>
         </p:spPr>
         <p:txBody>
-          <a:bodyPr xmlns:a="http://schemas.openxmlformats.org/drawingml/2006/main" anchor="ctr"/>
+          <a:bodyPr xmlns:a="http://schemas.openxmlformats.org/drawingml/2006/main" lIns="91440" tIns="45720" rIns="91440" bIns="45720" anchor="ctr"/>
           <a:lstStyle xmlns:a="http://schemas.openxmlformats.org/drawingml/2006/main"/>
           <a:p xmlns:a="http://schemas.openxmlformats.org/drawingml/2006/main">
             <a:pPr algn="ctr">
@@ -8679,6 +13029,9 @@
                 <a:solidFill>
                   <a:srgbClr val="0B4778"/>
                 </a:solidFill>
+                <a:latin typeface="Calibri"/>
+                <a:ea typeface="Calibri"/>
+                <a:cs typeface="Calibri"/>
               </a:defRPr>
             </a:pPr>
             <a:r>
@@ -8686,6 +13039,9 @@
                 <a:solidFill>
                   <a:srgbClr val="0B4778"/>
                 </a:solidFill>
+                <a:latin typeface="Calibri"/>
+                <a:ea typeface="Calibri"/>
+                <a:cs typeface="Calibri"/>
               </a:rPr>
               <a:t>5</a:t>
             </a:r>
@@ -8694,14 +13050,14 @@
       </p:sp>
       <p:pic>
         <p:nvPicPr>
-          <p:cNvPr id="21" name=""/>
+          <p:cNvPr id="21" name="01-terminal.png" descr="01-terminal.png"/>
           <p:cNvPicPr>
             <a:picLocks xmlns:a="http://schemas.openxmlformats.org/drawingml/2006/main" noChangeAspect="1"/>
           </p:cNvPicPr>
           <p:nvPr/>
         </p:nvPicPr>
         <p:blipFill>
-          <a:blip xmlns:r="http://schemas.openxmlformats.org/officeDocument/2006/relationships" xmlns:a="http://schemas.openxmlformats.org/drawingml/2006/main" r:embed="Rd8ac9b41bc69446a"/>
+          <a:blip xmlns:r="http://schemas.openxmlformats.org/officeDocument/2006/relationships" xmlns:a="http://schemas.openxmlformats.org/drawingml/2006/main" r:embed="Lab4Slide5Picture1"/>
           <a:stretch xmlns:a="http://schemas.openxmlformats.org/drawingml/2006/main"/>
         </p:blipFill>
         <p:spPr>
@@ -8846,7 +13202,7 @@
                 <a:ea typeface="Calibri"/>
                 <a:cs typeface="Calibri"/>
               </a:rPr>
-              <a:t>DrWatson.jl</a:t>
+              <a:t>Agents.jl и Graphs.jl</a:t>
             </a:r>
           </a:p>
           <a:p xmlns:a="http://schemas.openxmlformats.org/drawingml/2006/main">
@@ -8870,7 +13226,7 @@
                 <a:ea typeface="Calibri"/>
                 <a:cs typeface="Calibri"/>
               </a:rPr>
-              <a:t>CSV.jl и DataFrames.jl</a:t>
+              <a:t>BlackBoxOptim.jl</a:t>
             </a:r>
           </a:p>
           <a:p xmlns:a="http://schemas.openxmlformats.org/drawingml/2006/main">
@@ -8918,11 +13274,47 @@
                 <a:ea typeface="Calibri"/>
                 <a:cs typeface="Calibri"/>
               </a:rPr>
+              <a:t>CSV и JLD2</a:t>
+            </a:r>
+          </a:p>
+          <a:p xmlns:a="http://schemas.openxmlformats.org/drawingml/2006/main">
+            <a:pPr algn="l">
+              <a:defRPr sz="1650">
+                <a:solidFill>
+                  <a:srgbClr val="17232D"/>
+                </a:solidFill>
+                <a:latin typeface="Calibri"/>
+                <a:ea typeface="Calibri"/>
+                <a:cs typeface="Calibri"/>
+              </a:defRPr>
+            </a:pPr>
+            <a:r>
+              <a:rPr sz="1650">
+                <a:solidFill>
+                  <a:srgbClr val="17232D"/>
+                </a:solidFill>
+                <a:latin typeface="Calibri"/>
+                <a:ea typeface="Calibri"/>
+                <a:cs typeface="Calibri"/>
+              </a:rPr>
               <a:t>Literate.jl и IJulia</a:t>
             </a:r>
           </a:p>
           <a:p xmlns:a="http://schemas.openxmlformats.org/drawingml/2006/main">
-            <a:r>
+            <a:pPr algn="l">
+              <a:buNone/>
+              <a:defRPr sz="1650" b="0">
+                <a:solidFill>
+                  <a:srgbClr val="17232D"/>
+                </a:solidFill>
+              </a:defRPr>
+            </a:pPr>
+            <a:r>
+              <a:rPr sz="1650" b="0">
+                <a:solidFill>
+                  <a:srgbClr val="17232D"/>
+                </a:solidFill>
+              </a:rPr>
               <a:t/>
             </a:r>
           </a:p>
@@ -8947,7 +13339,7 @@
                 <a:ea typeface="Calibri"/>
                 <a:cs typeface="Calibri"/>
               </a:rPr>
-              <a:t>Версии — в Manifest.toml.</a:t>
+              <a:t>Версии в Manifest.toml.</a:t>
             </a:r>
           </a:p>
         </p:txBody>
@@ -9095,7 +13487,7 @@
                 <a:ea typeface="Calibri"/>
                 <a:cs typeface="Calibri"/>
               </a:rPr>
-              <a:t>Общий модуль описывает параметры и цикл модели</a:t>
+              <a:t>Модель отделена от опытов и анализа CSV</a:t>
             </a:r>
           </a:p>
         </p:txBody>
@@ -9140,7 +13532,7 @@
           <p:nvPr/>
         </p:nvPicPr>
         <p:blipFill>
-          <a:blip xmlns:r="http://schemas.openxmlformats.org/officeDocument/2006/relationships" xmlns:a="http://schemas.openxmlformats.org/drawingml/2006/main" r:embed="Recf36a4321fc4b2c"/>
+          <a:blip xmlns:r="http://schemas.openxmlformats.org/officeDocument/2006/relationships" xmlns:a="http://schemas.openxmlformats.org/drawingml/2006/main" r:embed="R9320647cf7814caa"/>
           <a:stretch xmlns:a="http://schemas.openxmlformats.org/drawingml/2006/main"/>
         </p:blipFill>
         <p:spPr>
@@ -9239,7 +13631,7 @@
           </a:ln>
         </p:spPr>
         <p:txBody>
-          <a:bodyPr xmlns:a="http://schemas.openxmlformats.org/drawingml/2006/main" anchor="ctr"/>
+          <a:bodyPr xmlns:a="http://schemas.openxmlformats.org/drawingml/2006/main" lIns="91440" tIns="45720" rIns="91440" bIns="45720" anchor="ctr"/>
           <a:lstStyle xmlns:a="http://schemas.openxmlformats.org/drawingml/2006/main"/>
           <a:p xmlns:a="http://schemas.openxmlformats.org/drawingml/2006/main">
             <a:pPr algn="ctr">
@@ -9248,6 +13640,9 @@
                 <a:solidFill>
                   <a:srgbClr val="0B4778"/>
                 </a:solidFill>
+                <a:latin typeface="Calibri"/>
+                <a:ea typeface="Calibri"/>
+                <a:cs typeface="Calibri"/>
               </a:defRPr>
             </a:pPr>
             <a:r>
@@ -9255,6 +13650,9 @@
                 <a:solidFill>
                   <a:srgbClr val="0B4778"/>
                 </a:solidFill>
+                <a:latin typeface="Calibri"/>
+                <a:ea typeface="Calibri"/>
+                <a:cs typeface="Calibri"/>
               </a:rPr>
               <a:t>6</a:t>
             </a:r>
@@ -9263,14 +13661,14 @@
       </p:sp>
       <p:pic>
         <p:nvPicPr>
-          <p:cNvPr id="20" name=""/>
+          <p:cNvPr id="20" name="02-terminal.png" descr="02-terminal.png"/>
           <p:cNvPicPr>
             <a:picLocks xmlns:a="http://schemas.openxmlformats.org/drawingml/2006/main" noChangeAspect="1"/>
           </p:cNvPicPr>
           <p:nvPr/>
         </p:nvPicPr>
         <p:blipFill>
-          <a:blip xmlns:r="http://schemas.openxmlformats.org/officeDocument/2006/relationships" xmlns:a="http://schemas.openxmlformats.org/drawingml/2006/main" r:embed="R57e74281daaa462b"/>
+          <a:blip xmlns:r="http://schemas.openxmlformats.org/officeDocument/2006/relationships" xmlns:a="http://schemas.openxmlformats.org/drawingml/2006/main" r:embed="Lab4Slide6Picture1"/>
           <a:stretch xmlns:a="http://schemas.openxmlformats.org/drawingml/2006/main"/>
         </p:blipFill>
         <p:spPr>
@@ -9335,7 +13733,7 @@
                 <a:ea typeface="Calibri"/>
                 <a:cs typeface="Calibri"/>
               </a:rPr>
-              <a:t>TCPRED</a:t>
+              <a:t>src/sir_model.jl</a:t>
             </a:r>
           </a:p>
           <a:p xmlns:a="http://schemas.openxmlformats.org/drawingml/2006/main">
@@ -9364,7 +13762,7 @@
                 <a:ea typeface="Calibri"/>
                 <a:cs typeface="Calibri"/>
               </a:rPr>
-              <a:t>• NetworkParameters</a:t>
+              <a:t>• состояния агента</a:t>
             </a:r>
           </a:p>
           <a:p xmlns:a="http://schemas.openxmlformats.org/drawingml/2006/main">
@@ -9388,7 +13786,7 @@
                 <a:ea typeface="Calibri"/>
                 <a:cs typeface="Calibri"/>
               </a:rPr>
-              <a:t>• REDParameters</a:t>
+              <a:t>• миграция</a:t>
             </a:r>
           </a:p>
           <a:p xmlns:a="http://schemas.openxmlformats.org/drawingml/2006/main">
@@ -9412,7 +13810,7 @@
                 <a:ea typeface="Calibri"/>
                 <a:cs typeface="Calibri"/>
               </a:rPr>
-              <a:t>• TCPREDResult</a:t>
+              <a:t>• заражение</a:t>
             </a:r>
           </a:p>
           <a:p xmlns:a="http://schemas.openxmlformats.org/drawingml/2006/main">
@@ -9436,7 +13834,7 @@
                 <a:ea typeface="Calibri"/>
                 <a:cs typeface="Calibri"/>
               </a:rPr>
-              <a:t>• red_probability</a:t>
+              <a:t>• выздоровление</a:t>
             </a:r>
           </a:p>
           <a:p xmlns:a="http://schemas.openxmlformats.org/drawingml/2006/main">
@@ -9460,11 +13858,47 @@
                 <a:ea typeface="Calibri"/>
                 <a:cs typeface="Calibri"/>
               </a:rPr>
-              <a:t>• simulate_tcp_red</a:t>
-            </a:r>
-          </a:p>
-          <a:p xmlns:a="http://schemas.openxmlformats.org/drawingml/2006/main">
-            <a:r>
+              <a:t>• карантин</a:t>
+            </a:r>
+          </a:p>
+          <a:p xmlns:a="http://schemas.openxmlformats.org/drawingml/2006/main">
+            <a:pPr algn="l">
+              <a:defRPr sz="1650">
+                <a:solidFill>
+                  <a:srgbClr val="17232D"/>
+                </a:solidFill>
+                <a:latin typeface="Calibri"/>
+                <a:ea typeface="Calibri"/>
+                <a:cs typeface="Calibri"/>
+              </a:defRPr>
+            </a:pPr>
+            <a:r>
+              <a:rPr sz="1650">
+                <a:solidFill>
+                  <a:srgbClr val="17232D"/>
+                </a:solidFill>
+                <a:latin typeface="Calibri"/>
+                <a:ea typeface="Calibri"/>
+                <a:cs typeface="Calibri"/>
+              </a:rPr>
+              <a:t>• целевые функции</a:t>
+            </a:r>
+          </a:p>
+          <a:p xmlns:a="http://schemas.openxmlformats.org/drawingml/2006/main">
+            <a:pPr algn="l">
+              <a:buNone/>
+              <a:defRPr sz="1650" b="0">
+                <a:solidFill>
+                  <a:srgbClr val="17232D"/>
+                </a:solidFill>
+              </a:defRPr>
+            </a:pPr>
+            <a:r>
+              <a:rPr sz="1650" b="0">
+                <a:solidFill>
+                  <a:srgbClr val="17232D"/>
+                </a:solidFill>
+              </a:rPr>
               <a:t/>
             </a:r>
           </a:p>
@@ -9489,7 +13923,31 @@
                 <a:ea typeface="Calibri"/>
                 <a:cs typeface="Calibri"/>
               </a:rPr>
-              <a:t>Сценарии используют один источник логики.</a:t>
+              <a:t>src/experiments.jl</a:t>
+            </a:r>
+          </a:p>
+          <a:p xmlns:a="http://schemas.openxmlformats.org/drawingml/2006/main">
+            <a:pPr algn="l">
+              <a:buNone/>
+              <a:defRPr sz="1650" b="0">
+                <a:solidFill>
+                  <a:srgbClr val="17232D"/>
+                </a:solidFill>
+                <a:latin typeface="Calibri"/>
+                <a:ea typeface="Calibri"/>
+                <a:cs typeface="Calibri"/>
+              </a:defRPr>
+            </a:pPr>
+            <a:r>
+              <a:rPr sz="1650" b="0">
+                <a:solidFill>
+                  <a:srgbClr val="17232D"/>
+                </a:solidFill>
+                <a:latin typeface="Calibri"/>
+                <a:ea typeface="Calibri"/>
+                <a:cs typeface="Calibri"/>
+              </a:rPr>
+              <a:t>сохраняет результаты.</a:t>
             </a:r>
           </a:p>
         </p:txBody>
@@ -9637,7 +14095,7 @@
                 <a:ea typeface="Calibri"/>
                 <a:cs typeface="Calibri"/>
               </a:rPr>
-              <a:t>Окно растёт и уменьшается при сигналах перегрузки</a:t>
+              <a:t>Базовый пик охватывает всю живую популяцию</a:t>
             </a:r>
           </a:p>
         </p:txBody>
@@ -9682,7 +14140,7 @@
           <p:nvPr/>
         </p:nvPicPr>
         <p:blipFill>
-          <a:blip xmlns:r="http://schemas.openxmlformats.org/officeDocument/2006/relationships" xmlns:a="http://schemas.openxmlformats.org/drawingml/2006/main" r:embed="Rfe120addabab48b2"/>
+          <a:blip xmlns:r="http://schemas.openxmlformats.org/officeDocument/2006/relationships" xmlns:a="http://schemas.openxmlformats.org/drawingml/2006/main" r:embed="R824c26fc9f3c432c"/>
           <a:stretch xmlns:a="http://schemas.openxmlformats.org/drawingml/2006/main"/>
         </p:blipFill>
         <p:spPr>
@@ -9781,7 +14239,7 @@
           </a:ln>
         </p:spPr>
         <p:txBody>
-          <a:bodyPr xmlns:a="http://schemas.openxmlformats.org/drawingml/2006/main" anchor="ctr"/>
+          <a:bodyPr xmlns:a="http://schemas.openxmlformats.org/drawingml/2006/main" lIns="91440" tIns="45720" rIns="91440" bIns="45720" anchor="ctr"/>
           <a:lstStyle xmlns:a="http://schemas.openxmlformats.org/drawingml/2006/main"/>
           <a:p xmlns:a="http://schemas.openxmlformats.org/drawingml/2006/main">
             <a:pPr algn="ctr">
@@ -9790,6 +14248,9 @@
                 <a:solidFill>
                   <a:srgbClr val="0B4778"/>
                 </a:solidFill>
+                <a:latin typeface="Calibri"/>
+                <a:ea typeface="Calibri"/>
+                <a:cs typeface="Calibri"/>
               </a:defRPr>
             </a:pPr>
             <a:r>
@@ -9797,6 +14258,9 @@
                 <a:solidFill>
                   <a:srgbClr val="0B4778"/>
                 </a:solidFill>
+                <a:latin typeface="Calibri"/>
+                <a:ea typeface="Calibri"/>
+                <a:cs typeface="Calibri"/>
               </a:rPr>
               <a:t>7</a:t>
             </a:r>
@@ -9805,20 +14269,20 @@
       </p:sp>
       <p:pic>
         <p:nvPicPr>
-          <p:cNvPr id="29" name=""/>
+          <p:cNvPr id="29" name="01-plot.png" descr="01-plot.png"/>
           <p:cNvPicPr>
             <a:picLocks xmlns:a="http://schemas.openxmlformats.org/drawingml/2006/main" noChangeAspect="1"/>
           </p:cNvPicPr>
           <p:nvPr/>
         </p:nvPicPr>
         <p:blipFill>
-          <a:blip xmlns:r="http://schemas.openxmlformats.org/officeDocument/2006/relationships" xmlns:a="http://schemas.openxmlformats.org/drawingml/2006/main" r:embed="R1a6e47dc8b804945"/>
+          <a:blip xmlns:r="http://schemas.openxmlformats.org/officeDocument/2006/relationships" xmlns:a="http://schemas.openxmlformats.org/drawingml/2006/main" r:embed="Lab4Slide7Picture1"/>
           <a:stretch xmlns:a="http://schemas.openxmlformats.org/drawingml/2006/main"/>
         </p:blipFill>
         <p:spPr>
           <a:xfrm xmlns:a="http://schemas.openxmlformats.org/drawingml/2006/main">
-            <a:off x="495300" y="1105853"/>
-            <a:ext cx="7524750" cy="4665345"/>
+            <a:off x="668948" y="1105853"/>
+            <a:ext cx="7177454" cy="4665345"/>
           </a:xfrm>
           <a:prstGeom xmlns:a="http://schemas.openxmlformats.org/drawingml/2006/main" prst="rect">
             <a:avLst/>
@@ -9910,7 +14374,7 @@
                 <a:ea typeface="Calibri"/>
                 <a:cs typeface="Calibri"/>
               </a:rPr>
-              <a:t>24,5234</a:t>
+              <a:t>100%</a:t>
             </a:r>
           </a:p>
         </p:txBody>
@@ -9967,7 +14431,7 @@
                 <a:ea typeface="Calibri"/>
                 <a:cs typeface="Calibri"/>
               </a:rPr>
-              <a:t>среднее окно, пакеты</a:t>
+              <a:t>максимум I / живые</a:t>
             </a:r>
           </a:p>
         </p:txBody>
@@ -10057,7 +14521,7 @@
                 <a:ea typeface="Calibri"/>
                 <a:cs typeface="Calibri"/>
               </a:rPr>
-              <a:t>25</a:t>
+              <a:t>15</a:t>
             </a:r>
           </a:p>
         </p:txBody>
@@ -10114,7 +14578,7 @@
                 <a:ea typeface="Calibri"/>
                 <a:cs typeface="Calibri"/>
               </a:rPr>
-              <a:t>конкурирующих потоков</a:t>
+              <a:t>день пика</a:t>
             </a:r>
           </a:p>
         </p:txBody>
@@ -10204,7 +14668,7 @@
                 <a:ea typeface="Calibri"/>
                 <a:cs typeface="Calibri"/>
               </a:rPr>
-              <a:t>446</a:t>
+              <a:t>335</a:t>
             </a:r>
           </a:p>
         </p:txBody>
@@ -10261,7 +14725,7 @@
                 <a:ea typeface="Calibri"/>
                 <a:cs typeface="Calibri"/>
               </a:rPr>
-              <a:t>сигналов за весь прогон</a:t>
+              <a:t>умерших к дню 100</a:t>
             </a:r>
           </a:p>
         </p:txBody>
@@ -10318,7 +14782,7 @@
                 <a:ea typeface="Calibri"/>
                 <a:cs typeface="Calibri"/>
               </a:rPr>
-              <a:t>Средние вычислены при t ≥ 10 с</a:t>
+              <a:t>Повторное заражение и каскады внутри дня.</a:t>
             </a:r>
           </a:p>
         </p:txBody>
@@ -10466,7 +14930,7 @@
                 <a:ea typeface="Calibri"/>
                 <a:cs typeface="Calibri"/>
               </a:rPr>
-              <a:t>Мгновенная очередь изменяется быстрее EWMA</a:t>
+              <a:t>При росте β эпидемия достигает всех городов</a:t>
             </a:r>
           </a:p>
         </p:txBody>
@@ -10511,7 +14975,7 @@
           <p:nvPr/>
         </p:nvPicPr>
         <p:blipFill>
-          <a:blip xmlns:r="http://schemas.openxmlformats.org/officeDocument/2006/relationships" xmlns:a="http://schemas.openxmlformats.org/drawingml/2006/main" r:embed="R69f2ff5696fc4f04"/>
+          <a:blip xmlns:r="http://schemas.openxmlformats.org/officeDocument/2006/relationships" xmlns:a="http://schemas.openxmlformats.org/drawingml/2006/main" r:embed="Rdc18d52c46dd4f6e"/>
           <a:stretch xmlns:a="http://schemas.openxmlformats.org/drawingml/2006/main"/>
         </p:blipFill>
         <p:spPr>
@@ -10610,7 +15074,7 @@
           </a:ln>
         </p:spPr>
         <p:txBody>
-          <a:bodyPr xmlns:a="http://schemas.openxmlformats.org/drawingml/2006/main" anchor="ctr"/>
+          <a:bodyPr xmlns:a="http://schemas.openxmlformats.org/drawingml/2006/main" lIns="91440" tIns="45720" rIns="91440" bIns="45720" anchor="ctr"/>
           <a:lstStyle xmlns:a="http://schemas.openxmlformats.org/drawingml/2006/main"/>
           <a:p xmlns:a="http://schemas.openxmlformats.org/drawingml/2006/main">
             <a:pPr algn="ctr">
@@ -10619,6 +15083,9 @@
                 <a:solidFill>
                   <a:srgbClr val="0B4778"/>
                 </a:solidFill>
+                <a:latin typeface="Calibri"/>
+                <a:ea typeface="Calibri"/>
+                <a:cs typeface="Calibri"/>
               </a:defRPr>
             </a:pPr>
             <a:r>
@@ -10626,6 +15093,9 @@
                 <a:solidFill>
                   <a:srgbClr val="0B4778"/>
                 </a:solidFill>
+                <a:latin typeface="Calibri"/>
+                <a:ea typeface="Calibri"/>
+                <a:cs typeface="Calibri"/>
               </a:rPr>
               <a:t>8</a:t>
             </a:r>
@@ -10634,20 +15104,20 @@
       </p:sp>
       <p:pic>
         <p:nvPicPr>
-          <p:cNvPr id="21" name=""/>
+          <p:cNvPr id="21" name="02-plot.png" descr="02-plot.png"/>
           <p:cNvPicPr>
             <a:picLocks xmlns:a="http://schemas.openxmlformats.org/drawingml/2006/main" noChangeAspect="1"/>
           </p:cNvPicPr>
           <p:nvPr/>
         </p:nvPicPr>
         <p:blipFill>
-          <a:blip xmlns:r="http://schemas.openxmlformats.org/officeDocument/2006/relationships" xmlns:a="http://schemas.openxmlformats.org/drawingml/2006/main" r:embed="R08e07f2bb66f41be"/>
+          <a:blip xmlns:r="http://schemas.openxmlformats.org/officeDocument/2006/relationships" xmlns:a="http://schemas.openxmlformats.org/drawingml/2006/main" r:embed="Lab4Slide8Picture1"/>
           <a:stretch xmlns:a="http://schemas.openxmlformats.org/drawingml/2006/main"/>
         </p:blipFill>
         <p:spPr>
           <a:xfrm xmlns:a="http://schemas.openxmlformats.org/drawingml/2006/main">
-            <a:off x="476250" y="1106329"/>
-            <a:ext cx="7477125" cy="4635818"/>
+            <a:off x="648799" y="1106329"/>
+            <a:ext cx="7132028" cy="4635818"/>
           </a:xfrm>
           <a:prstGeom xmlns:a="http://schemas.openxmlformats.org/drawingml/2006/main" prst="rect">
             <a:avLst/>
@@ -10706,7 +15176,7 @@
                 <a:ea typeface="Calibri"/>
                 <a:cs typeface="Calibri"/>
               </a:rPr>
-              <a:t>Показатель   Пакеты</a:t>
+              <a:t>β       Средний пик</a:t>
             </a:r>
           </a:p>
           <a:p xmlns:a="http://schemas.openxmlformats.org/drawingml/2006/main">
@@ -10730,7 +15200,7 @@
                 <a:ea typeface="Calibri"/>
                 <a:cs typeface="Calibri"/>
               </a:rPr>
-              <a:t>Среднее q       58,75</a:t>
+              <a:t>0,1        0,0009</a:t>
             </a:r>
           </a:p>
           <a:p xmlns:a="http://schemas.openxmlformats.org/drawingml/2006/main">
@@ -10754,7 +15224,7 @@
                 <a:ea typeface="Calibri"/>
                 <a:cs typeface="Calibri"/>
               </a:rPr>
-              <a:t>Среднее q̄       56,46</a:t>
+              <a:t>0,2        0,3322</a:t>
             </a:r>
           </a:p>
           <a:p xmlns:a="http://schemas.openxmlformats.org/drawingml/2006/main">
@@ -10778,7 +15248,7 @@
                 <a:ea typeface="Calibri"/>
                 <a:cs typeface="Calibri"/>
               </a:rPr>
-              <a:t>qmin                 75</a:t>
+              <a:t>0,3        0,6667</a:t>
             </a:r>
           </a:p>
           <a:p xmlns:a="http://schemas.openxmlformats.org/drawingml/2006/main">
@@ -10802,7 +15272,7 @@
                 <a:ea typeface="Calibri"/>
                 <a:cs typeface="Calibri"/>
               </a:rPr>
-              <a:t>qmax               150</a:t>
+              <a:t>0,4        0,6669</a:t>
             </a:r>
           </a:p>
           <a:p xmlns:a="http://schemas.openxmlformats.org/drawingml/2006/main">
@@ -10826,7 +15296,7 @@
                 <a:ea typeface="Calibri"/>
                 <a:cs typeface="Calibri"/>
               </a:rPr>
-              <a:t>Буфер              300</a:t>
+              <a:t>0,5        1,0000</a:t>
             </a:r>
           </a:p>
         </p:txBody>
@@ -10883,7 +15353,7 @@
                 <a:ea typeface="Calibri"/>
                 <a:cs typeface="Calibri"/>
               </a:rPr>
-              <a:t>Среднее ниже порога не исключает кратковременного включения RED.</a:t>
+              <a:t>По три seed на точку. Ступени отражают распространение между городами.</a:t>
             </a:r>
           </a:p>
         </p:txBody>
@@ -11031,7 +15501,7 @@
                 <a:ea typeface="Calibri"/>
                 <a:cs typeface="Calibri"/>
               </a:rPr>
-              <a:t>В базовом опыте канал используется на 93,83%</a:t>
+              <a:t>Время пика не убывает монотонно с миграцией</a:t>
             </a:r>
           </a:p>
         </p:txBody>
@@ -11076,7 +15546,7 @@
           <p:nvPr/>
         </p:nvPicPr>
         <p:blipFill>
-          <a:blip xmlns:r="http://schemas.openxmlformats.org/officeDocument/2006/relationships" xmlns:a="http://schemas.openxmlformats.org/drawingml/2006/main" r:embed="R747c85a8a92248f2"/>
+          <a:blip xmlns:r="http://schemas.openxmlformats.org/officeDocument/2006/relationships" xmlns:a="http://schemas.openxmlformats.org/drawingml/2006/main" r:embed="R961a0f5964a343ed"/>
           <a:stretch xmlns:a="http://schemas.openxmlformats.org/drawingml/2006/main"/>
         </p:blipFill>
         <p:spPr>
@@ -11175,7 +15645,7 @@
           </a:ln>
         </p:spPr>
         <p:txBody>
-          <a:bodyPr xmlns:a="http://schemas.openxmlformats.org/drawingml/2006/main" anchor="ctr"/>
+          <a:bodyPr xmlns:a="http://schemas.openxmlformats.org/drawingml/2006/main" lIns="91440" tIns="45720" rIns="91440" bIns="45720" anchor="ctr"/>
           <a:lstStyle xmlns:a="http://schemas.openxmlformats.org/drawingml/2006/main"/>
           <a:p xmlns:a="http://schemas.openxmlformats.org/drawingml/2006/main">
             <a:pPr algn="ctr">
@@ -11184,6 +15654,9 @@
                 <a:solidFill>
                   <a:srgbClr val="0B4778"/>
                 </a:solidFill>
+                <a:latin typeface="Calibri"/>
+                <a:ea typeface="Calibri"/>
+                <a:cs typeface="Calibri"/>
               </a:defRPr>
             </a:pPr>
             <a:r>
@@ -11191,6 +15664,9 @@
                 <a:solidFill>
                   <a:srgbClr val="0B4778"/>
                 </a:solidFill>
+                <a:latin typeface="Calibri"/>
+                <a:ea typeface="Calibri"/>
+                <a:cs typeface="Calibri"/>
               </a:rPr>
               <a:t>9</a:t>
             </a:r>
@@ -11199,20 +15675,20 @@
       </p:sp>
       <p:pic>
         <p:nvPicPr>
-          <p:cNvPr id="21" name=""/>
+          <p:cNvPr id="21" name="03-plot.png" descr="03-plot.png"/>
           <p:cNvPicPr>
             <a:picLocks xmlns:a="http://schemas.openxmlformats.org/drawingml/2006/main" noChangeAspect="1"/>
           </p:cNvPicPr>
           <p:nvPr/>
         </p:nvPicPr>
         <p:blipFill>
-          <a:blip xmlns:r="http://schemas.openxmlformats.org/officeDocument/2006/relationships" xmlns:a="http://schemas.openxmlformats.org/drawingml/2006/main" r:embed="R1106ba3268a14d19"/>
+          <a:blip xmlns:r="http://schemas.openxmlformats.org/officeDocument/2006/relationships" xmlns:a="http://schemas.openxmlformats.org/drawingml/2006/main" r:embed="Lab4Slide9Picture1"/>
           <a:stretch xmlns:a="http://schemas.openxmlformats.org/drawingml/2006/main"/>
         </p:blipFill>
         <p:spPr>
           <a:xfrm xmlns:a="http://schemas.openxmlformats.org/drawingml/2006/main">
-            <a:off x="457200" y="1062228"/>
-            <a:ext cx="7696200" cy="4771644"/>
+            <a:off x="1498451" y="1062228"/>
+            <a:ext cx="5613699" cy="4771644"/>
           </a:xfrm>
           <a:prstGeom xmlns:a="http://schemas.openxmlformats.org/drawingml/2006/main" prst="rect">
             <a:avLst/>
@@ -11271,7 +15747,7 @@
                 <a:ea typeface="Calibri"/>
                 <a:cs typeface="Calibri"/>
               </a:rPr>
-              <a:t>Throughput: 18,7654 Мбит/с</a:t>
+              <a:t>m = 0: 15 дней</a:t>
             </a:r>
           </a:p>
           <a:p xmlns:a="http://schemas.openxmlformats.org/drawingml/2006/main">
@@ -11300,7 +15776,7 @@
                 <a:ea typeface="Calibri"/>
                 <a:cs typeface="Calibri"/>
               </a:rPr>
-              <a:t>Ёмкость: 20 Мбит/с</a:t>
+              <a:t>m = 0,1: 22 дня</a:t>
             </a:r>
           </a:p>
           <a:p xmlns:a="http://schemas.openxmlformats.org/drawingml/2006/main">
@@ -11329,7 +15805,7 @@
                 <a:ea typeface="Calibri"/>
                 <a:cs typeface="Calibri"/>
               </a:rPr>
-              <a:t>Интервал: t ≥ 10 с</a:t>
+              <a:t>m = 0,2: 16 дней</a:t>
             </a:r>
           </a:p>
           <a:p xmlns:a="http://schemas.openxmlformats.org/drawingml/2006/main">
@@ -11358,7 +15834,7 @@
                 <a:ea typeface="Calibri"/>
                 <a:cs typeface="Calibri"/>
               </a:rPr>
-              <a:t>Длительность: 30 с</a:t>
+              <a:t>m = 0,5: 20 дней</a:t>
             </a:r>
           </a:p>
         </p:txBody>
@@ -11415,7 +15891,7 @@
                 <a:ea typeface="Calibri"/>
                 <a:cs typeface="Calibri"/>
               </a:rPr>
-              <a:t>Уменьшение окон после сигналов перегрузки создаёт провалы скорости.</a:t>
+              <a:t>Без миграции эпидемия локальна. Среди ненулевых m быстрее всего вариант 0,2.</a:t>
             </a:r>
           </a:p>
         </p:txBody>
